--- a/Prezentaciq.pptx
+++ b/Prezentaciq.pptx
@@ -5,11 +5,12 @@
     <p:sldMasterId id="2147483648" r:id="rId1"/>
   </p:sldMasterIdLst>
   <p:notesMasterIdLst>
-    <p:notesMasterId r:id="rId6"/>
+    <p:notesMasterId r:id="rId7"/>
   </p:notesMasterIdLst>
   <p:sldIdLst>
     <p:sldId id="256" r:id="rId4"/>
     <p:sldId id="257" r:id="rId5"/>
+    <p:sldId id="258" r:id="rId6"/>
   </p:sldIdLst>
   <p:sldSz cx="12192000" cy="6858000"/>
   <p:notesSz cx="6858000" cy="9144000"/>
@@ -135,7 +136,7 @@
       </p:grpSpPr>
       <p:sp>
         <p:nvSpPr>
-          <p:cNvPr id="1995646604" name="Header Placeholder 1"/>
+          <p:cNvPr id="111184141" name="Header Placeholder 1"/>
           <p:cNvSpPr>
             <a:spLocks noGrp="1"/>
           </p:cNvSpPr>
@@ -169,7 +170,7 @@
       </p:sp>
       <p:sp>
         <p:nvSpPr>
-          <p:cNvPr id="280467923" name="Date Placeholder 2"/>
+          <p:cNvPr id="424996992" name="Date Placeholder 2"/>
           <p:cNvSpPr>
             <a:spLocks noGrp="1"/>
           </p:cNvSpPr>
@@ -207,7 +208,7 @@
       </p:sp>
       <p:sp>
         <p:nvSpPr>
-          <p:cNvPr id="1890491167" name="Slide Image Placeholder 3"/>
+          <p:cNvPr id="1136400177" name="Slide Image Placeholder 3"/>
           <p:cNvSpPr>
             <a:spLocks noChangeAspect="1" noGrp="1" noRot="1"/>
           </p:cNvSpPr>
@@ -243,7 +244,7 @@
       </p:sp>
       <p:sp>
         <p:nvSpPr>
-          <p:cNvPr id="1313454087" name="Notes Placeholder 4"/>
+          <p:cNvPr id="256467042" name="Notes Placeholder 4"/>
           <p:cNvSpPr>
             <a:spLocks noGrp="1"/>
           </p:cNvSpPr>
@@ -317,7 +318,7 @@
       </p:sp>
       <p:sp>
         <p:nvSpPr>
-          <p:cNvPr id="502962620" name="Footer Placeholder 5"/>
+          <p:cNvPr id="1659420694" name="Footer Placeholder 5"/>
           <p:cNvSpPr>
             <a:spLocks noGrp="1"/>
           </p:cNvSpPr>
@@ -351,7 +352,7 @@
       </p:sp>
       <p:sp>
         <p:nvSpPr>
-          <p:cNvPr id="396950091" name="Slide Number Placeholder 6"/>
+          <p:cNvPr id="2073144657" name="Slide Number Placeholder 6"/>
           <p:cNvSpPr>
             <a:spLocks noGrp="1"/>
           </p:cNvSpPr>
@@ -504,7 +505,7 @@
       </p:grpSpPr>
       <p:sp>
         <p:nvSpPr>
-          <p:cNvPr id="2123346579" name="Slide Image Placeholder 1"/>
+          <p:cNvPr id="1205468750" name="Slide Image Placeholder 1"/>
           <p:cNvSpPr>
             <a:spLocks noChangeAspect="1" noGrp="1" noRot="1"/>
           </p:cNvSpPr>
@@ -521,7 +522,7 @@
       </p:sp>
       <p:sp>
         <p:nvSpPr>
-          <p:cNvPr id="420824283" name="Notes Placeholder 2"/>
+          <p:cNvPr id="1876952868" name="Notes Placeholder 2"/>
           <p:cNvSpPr>
             <a:spLocks noGrp="1"/>
           </p:cNvSpPr>
@@ -546,7 +547,7 @@
       </p:sp>
       <p:sp>
         <p:nvSpPr>
-          <p:cNvPr id="1575430289" name="Slide Number Placeholder 3"/>
+          <p:cNvPr id="1718582986" name="Slide Number Placeholder 3"/>
           <p:cNvSpPr>
             <a:spLocks noGrp="1"/>
           </p:cNvSpPr>
@@ -663,6 +664,91 @@
 </p:notes>
 </file>
 
+<file path=ppt/notesSlides/notesSlide3.xml><?xml version="1.0" encoding="utf-8"?>
+<p:notes xmlns:a="http://schemas.openxmlformats.org/drawingml/2006/main" xmlns:r="http://schemas.openxmlformats.org/officeDocument/2006/relationships" xmlns:p="http://schemas.openxmlformats.org/presentationml/2006/main" xmlns:m="http://schemas.openxmlformats.org/officeDocument/2006/math" xmlns:w="http://schemas.openxmlformats.org/wordprocessingml/2006/main">
+  <p:cSld name="">
+    <p:spTree>
+      <p:nvGrpSpPr>
+        <p:cNvPr id="1" name=""/>
+        <p:cNvGrpSpPr/>
+        <p:nvPr/>
+      </p:nvGrpSpPr>
+      <p:grpSpPr bwMode="auto">
+        <a:xfrm>
+          <a:off x="0" y="0"/>
+          <a:ext cx="0" cy="0"/>
+          <a:chOff x="0" y="0"/>
+          <a:chExt cx="0" cy="0"/>
+        </a:xfrm>
+      </p:grpSpPr>
+      <p:sp>
+        <p:nvSpPr>
+          <p:cNvPr id="2" name="Slide Image Placeholder 1"/>
+          <p:cNvSpPr>
+            <a:spLocks noChangeAspect="1" noGrp="1" noRot="1"/>
+          </p:cNvSpPr>
+          <p:nvPr>
+            <p:ph type="sldImg"/>
+          </p:nvPr>
+        </p:nvSpPr>
+        <p:spPr bwMode="auto"/>
+      </p:sp>
+      <p:sp>
+        <p:nvSpPr>
+          <p:cNvPr id="3" name="Notes Placeholder 2"/>
+          <p:cNvSpPr>
+            <a:spLocks noGrp="1"/>
+          </p:cNvSpPr>
+          <p:nvPr>
+            <p:ph type="body" idx="1"/>
+          </p:nvPr>
+        </p:nvSpPr>
+        <p:spPr bwMode="auto"/>
+        <p:txBody>
+          <a:bodyPr/>
+          <a:lstStyle/>
+          <a:p>
+            <a:pPr>
+              <a:defRPr/>
+            </a:pPr>
+            <a:endParaRPr/>
+          </a:p>
+        </p:txBody>
+      </p:sp>
+      <p:sp>
+        <p:nvSpPr>
+          <p:cNvPr id="4" name="Slide Number Placeholder 3"/>
+          <p:cNvSpPr>
+            <a:spLocks noGrp="1"/>
+          </p:cNvSpPr>
+          <p:nvPr>
+            <p:ph type="sldNum" sz="quarter" idx="10"/>
+          </p:nvPr>
+        </p:nvSpPr>
+        <p:spPr bwMode="auto"/>
+        <p:txBody>
+          <a:bodyPr/>
+          <a:lstStyle/>
+          <a:p>
+            <a:pPr>
+              <a:defRPr/>
+            </a:pPr>
+            <a:fld id="{B5D478D3-3B21-6817-CCC9-CB9B3836E056}" type="slidenum">
+              <a:rPr/>
+              <a:t/>
+            </a:fld>
+            <a:endParaRPr/>
+          </a:p>
+        </p:txBody>
+      </p:sp>
+    </p:spTree>
+  </p:cSld>
+  <p:clrMapOvr>
+    <a:masterClrMapping/>
+  </p:clrMapOvr>
+</p:notes>
+</file>
+
 <file path=ppt/slideLayouts/slideLayout1.xml><?xml version="1.0" encoding="utf-8"?>
 <p:sldLayout xmlns:a="http://schemas.openxmlformats.org/drawingml/2006/main" xmlns:r="http://schemas.openxmlformats.org/officeDocument/2006/relationships" xmlns:p="http://schemas.openxmlformats.org/presentationml/2006/main" xmlns:m="http://schemas.openxmlformats.org/officeDocument/2006/math" xmlns:w="http://schemas.openxmlformats.org/wordprocessingml/2006/main" matchingName="" preserve="1" showMasterPhAnim="0" showMasterSp="1" type="title" userDrawn="1">
   <p:cSld name="Title Slide">
@@ -682,7 +768,7 @@
       </p:grpSpPr>
       <p:sp>
         <p:nvSpPr>
-          <p:cNvPr id="436315733" name="Title 1"/>
+          <p:cNvPr id="628506171" name="Title 1"/>
           <p:cNvSpPr>
             <a:spLocks noGrp="1"/>
           </p:cNvSpPr>
@@ -717,7 +803,7 @@
       </p:sp>
       <p:sp>
         <p:nvSpPr>
-          <p:cNvPr id="1587590720" name="Subtitle 2"/>
+          <p:cNvPr id="212714472" name="Subtitle 2"/>
           <p:cNvSpPr>
             <a:spLocks noGrp="1"/>
           </p:cNvSpPr>
@@ -785,7 +871,7 @@
       </p:sp>
       <p:sp>
         <p:nvSpPr>
-          <p:cNvPr id="636050654" name="Date Placeholder 3"/>
+          <p:cNvPr id="127986693" name="Date Placeholder 3"/>
           <p:cNvSpPr>
             <a:spLocks noGrp="1"/>
           </p:cNvSpPr>
@@ -811,7 +897,7 @@
       </p:sp>
       <p:sp>
         <p:nvSpPr>
-          <p:cNvPr id="447175345" name="Footer Placeholder 4"/>
+          <p:cNvPr id="1377797319" name="Footer Placeholder 4"/>
           <p:cNvSpPr>
             <a:spLocks noGrp="1"/>
           </p:cNvSpPr>
@@ -833,7 +919,7 @@
       </p:sp>
       <p:sp>
         <p:nvSpPr>
-          <p:cNvPr id="1741302856" name="Slide Number Placeholder 5"/>
+          <p:cNvPr id="958003220" name="Slide Number Placeholder 5"/>
           <p:cNvSpPr>
             <a:spLocks noGrp="1"/>
           </p:cNvSpPr>
@@ -884,7 +970,7 @@
       </p:grpSpPr>
       <p:sp>
         <p:nvSpPr>
-          <p:cNvPr id="233374895" name="Title 1"/>
+          <p:cNvPr id="1573528504" name="Title 1"/>
           <p:cNvSpPr>
             <a:spLocks noGrp="1"/>
           </p:cNvSpPr>
@@ -910,7 +996,7 @@
       </p:sp>
       <p:sp>
         <p:nvSpPr>
-          <p:cNvPr id="1033548447" name="Vertical Text Placeholder 2"/>
+          <p:cNvPr id="1324261107" name="Vertical Text Placeholder 2"/>
           <p:cNvSpPr>
             <a:spLocks noGrp="1"/>
           </p:cNvSpPr>
@@ -976,7 +1062,7 @@
       </p:sp>
       <p:sp>
         <p:nvSpPr>
-          <p:cNvPr id="1897897824" name="Date Placeholder 3"/>
+          <p:cNvPr id="1569640140" name="Date Placeholder 3"/>
           <p:cNvSpPr>
             <a:spLocks noGrp="1"/>
           </p:cNvSpPr>
@@ -1002,7 +1088,7 @@
       </p:sp>
       <p:sp>
         <p:nvSpPr>
-          <p:cNvPr id="886328047" name="Footer Placeholder 4"/>
+          <p:cNvPr id="1844939002" name="Footer Placeholder 4"/>
           <p:cNvSpPr>
             <a:spLocks noGrp="1"/>
           </p:cNvSpPr>
@@ -1024,7 +1110,7 @@
       </p:sp>
       <p:sp>
         <p:nvSpPr>
-          <p:cNvPr id="523976275" name="Slide Number Placeholder 5"/>
+          <p:cNvPr id="460967716" name="Slide Number Placeholder 5"/>
           <p:cNvSpPr>
             <a:spLocks noGrp="1"/>
           </p:cNvSpPr>
@@ -1075,7 +1161,7 @@
       </p:grpSpPr>
       <p:sp>
         <p:nvSpPr>
-          <p:cNvPr id="1805500099" name="Vertical Title 1"/>
+          <p:cNvPr id="1457980043" name="Vertical Title 1"/>
           <p:cNvSpPr>
             <a:spLocks noGrp="1"/>
           </p:cNvSpPr>
@@ -1106,7 +1192,7 @@
       </p:sp>
       <p:sp>
         <p:nvSpPr>
-          <p:cNvPr id="61372409" name="Vertical Text Placeholder 2"/>
+          <p:cNvPr id="702582287" name="Vertical Text Placeholder 2"/>
           <p:cNvSpPr>
             <a:spLocks noGrp="1"/>
           </p:cNvSpPr>
@@ -1177,7 +1263,7 @@
       </p:sp>
       <p:sp>
         <p:nvSpPr>
-          <p:cNvPr id="1250420063" name="Date Placeholder 3"/>
+          <p:cNvPr id="1702442265" name="Date Placeholder 3"/>
           <p:cNvSpPr>
             <a:spLocks noGrp="1"/>
           </p:cNvSpPr>
@@ -1203,7 +1289,7 @@
       </p:sp>
       <p:sp>
         <p:nvSpPr>
-          <p:cNvPr id="582713578" name="Footer Placeholder 4"/>
+          <p:cNvPr id="2111041258" name="Footer Placeholder 4"/>
           <p:cNvSpPr>
             <a:spLocks noGrp="1"/>
           </p:cNvSpPr>
@@ -1225,7 +1311,7 @@
       </p:sp>
       <p:sp>
         <p:nvSpPr>
-          <p:cNvPr id="1010505652" name="Slide Number Placeholder 5"/>
+          <p:cNvPr id="127491273" name="Slide Number Placeholder 5"/>
           <p:cNvSpPr>
             <a:spLocks noGrp="1"/>
           </p:cNvSpPr>
@@ -1276,7 +1362,7 @@
       </p:grpSpPr>
       <p:sp>
         <p:nvSpPr>
-          <p:cNvPr id="992611268" name="Title 1"/>
+          <p:cNvPr id="870144705" name="Title 1"/>
           <p:cNvSpPr>
             <a:spLocks noGrp="1"/>
           </p:cNvSpPr>
@@ -1302,7 +1388,7 @@
       </p:sp>
       <p:sp>
         <p:nvSpPr>
-          <p:cNvPr id="1791502272" name="Content Placeholder 2"/>
+          <p:cNvPr id="2110699924" name="Content Placeholder 2"/>
           <p:cNvSpPr>
             <a:spLocks noGrp="1"/>
           </p:cNvSpPr>
@@ -1368,7 +1454,7 @@
       </p:sp>
       <p:sp>
         <p:nvSpPr>
-          <p:cNvPr id="1414948757" name="Date Placeholder 3"/>
+          <p:cNvPr id="966984649" name="Date Placeholder 3"/>
           <p:cNvSpPr>
             <a:spLocks noGrp="1"/>
           </p:cNvSpPr>
@@ -1394,7 +1480,7 @@
       </p:sp>
       <p:sp>
         <p:nvSpPr>
-          <p:cNvPr id="1178914373" name="Footer Placeholder 4"/>
+          <p:cNvPr id="875649945" name="Footer Placeholder 4"/>
           <p:cNvSpPr>
             <a:spLocks noGrp="1"/>
           </p:cNvSpPr>
@@ -1416,7 +1502,7 @@
       </p:sp>
       <p:sp>
         <p:nvSpPr>
-          <p:cNvPr id="957756936" name="Slide Number Placeholder 5"/>
+          <p:cNvPr id="218157647" name="Slide Number Placeholder 5"/>
           <p:cNvSpPr>
             <a:spLocks noGrp="1"/>
           </p:cNvSpPr>
@@ -1467,7 +1553,7 @@
       </p:grpSpPr>
       <p:sp>
         <p:nvSpPr>
-          <p:cNvPr id="219132990" name="Title 1"/>
+          <p:cNvPr id="1110052621" name="Title 1"/>
           <p:cNvSpPr>
             <a:spLocks noGrp="1"/>
           </p:cNvSpPr>
@@ -1502,7 +1588,7 @@
       </p:sp>
       <p:sp>
         <p:nvSpPr>
-          <p:cNvPr id="1867562593" name="Text Placeholder 2"/>
+          <p:cNvPr id="1013344636" name="Text Placeholder 2"/>
           <p:cNvSpPr>
             <a:spLocks noGrp="1"/>
           </p:cNvSpPr>
@@ -1624,7 +1710,7 @@
       </p:sp>
       <p:sp>
         <p:nvSpPr>
-          <p:cNvPr id="158211813" name="Date Placeholder 3"/>
+          <p:cNvPr id="582769811" name="Date Placeholder 3"/>
           <p:cNvSpPr>
             <a:spLocks noGrp="1"/>
           </p:cNvSpPr>
@@ -1650,7 +1736,7 @@
       </p:sp>
       <p:sp>
         <p:nvSpPr>
-          <p:cNvPr id="2115399187" name="Footer Placeholder 4"/>
+          <p:cNvPr id="532896224" name="Footer Placeholder 4"/>
           <p:cNvSpPr>
             <a:spLocks noGrp="1"/>
           </p:cNvSpPr>
@@ -1672,7 +1758,7 @@
       </p:sp>
       <p:sp>
         <p:nvSpPr>
-          <p:cNvPr id="187443181" name="Slide Number Placeholder 5"/>
+          <p:cNvPr id="2041265165" name="Slide Number Placeholder 5"/>
           <p:cNvSpPr>
             <a:spLocks noGrp="1"/>
           </p:cNvSpPr>
@@ -1723,7 +1809,7 @@
       </p:grpSpPr>
       <p:sp>
         <p:nvSpPr>
-          <p:cNvPr id="837587263" name="Title 1"/>
+          <p:cNvPr id="137167977" name="Title 1"/>
           <p:cNvSpPr>
             <a:spLocks noGrp="1"/>
           </p:cNvSpPr>
@@ -1749,7 +1835,7 @@
       </p:sp>
       <p:sp>
         <p:nvSpPr>
-          <p:cNvPr id="865809573" name="Content Placeholder 2"/>
+          <p:cNvPr id="1116256965" name="Content Placeholder 2"/>
           <p:cNvSpPr>
             <a:spLocks noGrp="1"/>
           </p:cNvSpPr>
@@ -1820,7 +1906,7 @@
       </p:sp>
       <p:sp>
         <p:nvSpPr>
-          <p:cNvPr id="444456435" name="Content Placeholder 3"/>
+          <p:cNvPr id="1866357068" name="Content Placeholder 3"/>
           <p:cNvSpPr>
             <a:spLocks noGrp="1"/>
           </p:cNvSpPr>
@@ -1891,7 +1977,7 @@
       </p:sp>
       <p:sp>
         <p:nvSpPr>
-          <p:cNvPr id="1462775476" name="Date Placeholder 4"/>
+          <p:cNvPr id="1543134294" name="Date Placeholder 4"/>
           <p:cNvSpPr>
             <a:spLocks noGrp="1"/>
           </p:cNvSpPr>
@@ -1917,7 +2003,7 @@
       </p:sp>
       <p:sp>
         <p:nvSpPr>
-          <p:cNvPr id="607649446" name="Footer Placeholder 5"/>
+          <p:cNvPr id="300894202" name="Footer Placeholder 5"/>
           <p:cNvSpPr>
             <a:spLocks noGrp="1"/>
           </p:cNvSpPr>
@@ -1939,7 +2025,7 @@
       </p:sp>
       <p:sp>
         <p:nvSpPr>
-          <p:cNvPr id="969068439" name="Slide Number Placeholder 6"/>
+          <p:cNvPr id="1121175188" name="Slide Number Placeholder 6"/>
           <p:cNvSpPr>
             <a:spLocks noGrp="1"/>
           </p:cNvSpPr>
@@ -1990,7 +2076,7 @@
       </p:grpSpPr>
       <p:sp>
         <p:nvSpPr>
-          <p:cNvPr id="1291771008" name="Title 1"/>
+          <p:cNvPr id="1972472927" name="Title 1"/>
           <p:cNvSpPr>
             <a:spLocks noGrp="1"/>
           </p:cNvSpPr>
@@ -2021,7 +2107,7 @@
       </p:sp>
       <p:sp>
         <p:nvSpPr>
-          <p:cNvPr id="1000721442" name="Text Placeholder 2"/>
+          <p:cNvPr id="144571322" name="Text Placeholder 2"/>
           <p:cNvSpPr>
             <a:spLocks noGrp="1"/>
           </p:cNvSpPr>
@@ -2089,7 +2175,7 @@
       </p:sp>
       <p:sp>
         <p:nvSpPr>
-          <p:cNvPr id="628130432" name="Content Placeholder 3"/>
+          <p:cNvPr id="1640996834" name="Content Placeholder 3"/>
           <p:cNvSpPr>
             <a:spLocks noGrp="1"/>
           </p:cNvSpPr>
@@ -2160,7 +2246,7 @@
       </p:sp>
       <p:sp>
         <p:nvSpPr>
-          <p:cNvPr id="860198485" name="Text Placeholder 4"/>
+          <p:cNvPr id="737505540" name="Text Placeholder 4"/>
           <p:cNvSpPr>
             <a:spLocks noGrp="1"/>
           </p:cNvSpPr>
@@ -2228,7 +2314,7 @@
       </p:sp>
       <p:sp>
         <p:nvSpPr>
-          <p:cNvPr id="1744296720" name="Content Placeholder 5"/>
+          <p:cNvPr id="1662852458" name="Content Placeholder 5"/>
           <p:cNvSpPr>
             <a:spLocks noGrp="1"/>
           </p:cNvSpPr>
@@ -2299,7 +2385,7 @@
       </p:sp>
       <p:sp>
         <p:nvSpPr>
-          <p:cNvPr id="1070844574" name="Date Placeholder 6"/>
+          <p:cNvPr id="485902517" name="Date Placeholder 6"/>
           <p:cNvSpPr>
             <a:spLocks noGrp="1"/>
           </p:cNvSpPr>
@@ -2325,7 +2411,7 @@
       </p:sp>
       <p:sp>
         <p:nvSpPr>
-          <p:cNvPr id="1976104690" name="Footer Placeholder 7"/>
+          <p:cNvPr id="278946314" name="Footer Placeholder 7"/>
           <p:cNvSpPr>
             <a:spLocks noGrp="1"/>
           </p:cNvSpPr>
@@ -2347,7 +2433,7 @@
       </p:sp>
       <p:sp>
         <p:nvSpPr>
-          <p:cNvPr id="572489037" name="Slide Number Placeholder 8"/>
+          <p:cNvPr id="195110367" name="Slide Number Placeholder 8"/>
           <p:cNvSpPr>
             <a:spLocks noGrp="1"/>
           </p:cNvSpPr>
@@ -2398,7 +2484,7 @@
       </p:grpSpPr>
       <p:sp>
         <p:nvSpPr>
-          <p:cNvPr id="1259775084" name="Title 1"/>
+          <p:cNvPr id="748215825" name="Title 1"/>
           <p:cNvSpPr>
             <a:spLocks noGrp="1"/>
           </p:cNvSpPr>
@@ -2424,7 +2510,7 @@
       </p:sp>
       <p:sp>
         <p:nvSpPr>
-          <p:cNvPr id="948983888" name="Date Placeholder 2"/>
+          <p:cNvPr id="1926251785" name="Date Placeholder 2"/>
           <p:cNvSpPr>
             <a:spLocks noGrp="1"/>
           </p:cNvSpPr>
@@ -2450,7 +2536,7 @@
       </p:sp>
       <p:sp>
         <p:nvSpPr>
-          <p:cNvPr id="1801675128" name="Footer Placeholder 3"/>
+          <p:cNvPr id="1680484661" name="Footer Placeholder 3"/>
           <p:cNvSpPr>
             <a:spLocks noGrp="1"/>
           </p:cNvSpPr>
@@ -2472,7 +2558,7 @@
       </p:sp>
       <p:sp>
         <p:nvSpPr>
-          <p:cNvPr id="1728430009" name="Slide Number Placeholder 4"/>
+          <p:cNvPr id="584321220" name="Slide Number Placeholder 4"/>
           <p:cNvSpPr>
             <a:spLocks noGrp="1"/>
           </p:cNvSpPr>
@@ -2523,7 +2609,7 @@
       </p:grpSpPr>
       <p:sp>
         <p:nvSpPr>
-          <p:cNvPr id="122521579" name="Date Placeholder 1"/>
+          <p:cNvPr id="1045704255" name="Date Placeholder 1"/>
           <p:cNvSpPr>
             <a:spLocks noGrp="1"/>
           </p:cNvSpPr>
@@ -2549,7 +2635,7 @@
       </p:sp>
       <p:sp>
         <p:nvSpPr>
-          <p:cNvPr id="1077704198" name="Footer Placeholder 2"/>
+          <p:cNvPr id="209439955" name="Footer Placeholder 2"/>
           <p:cNvSpPr>
             <a:spLocks noGrp="1"/>
           </p:cNvSpPr>
@@ -2571,7 +2657,7 @@
       </p:sp>
       <p:sp>
         <p:nvSpPr>
-          <p:cNvPr id="1189555456" name="Slide Number Placeholder 3"/>
+          <p:cNvPr id="1428059767" name="Slide Number Placeholder 3"/>
           <p:cNvSpPr>
             <a:spLocks noGrp="1"/>
           </p:cNvSpPr>
@@ -2622,7 +2708,7 @@
       </p:grpSpPr>
       <p:sp>
         <p:nvSpPr>
-          <p:cNvPr id="1217313151" name="Title 1"/>
+          <p:cNvPr id="2106341006" name="Title 1"/>
           <p:cNvSpPr>
             <a:spLocks noGrp="1"/>
           </p:cNvSpPr>
@@ -2657,7 +2743,7 @@
       </p:sp>
       <p:sp>
         <p:nvSpPr>
-          <p:cNvPr id="285650806" name="Content Placeholder 2"/>
+          <p:cNvPr id="879218208" name="Content Placeholder 2"/>
           <p:cNvSpPr>
             <a:spLocks noGrp="1"/>
           </p:cNvSpPr>
@@ -2756,7 +2842,7 @@
       </p:sp>
       <p:sp>
         <p:nvSpPr>
-          <p:cNvPr id="1784357812" name="Text Placeholder 3"/>
+          <p:cNvPr id="761997951" name="Text Placeholder 3"/>
           <p:cNvSpPr>
             <a:spLocks noGrp="1"/>
           </p:cNvSpPr>
@@ -2824,7 +2910,7 @@
       </p:sp>
       <p:sp>
         <p:nvSpPr>
-          <p:cNvPr id="174198518" name="Date Placeholder 4"/>
+          <p:cNvPr id="1933403739" name="Date Placeholder 4"/>
           <p:cNvSpPr>
             <a:spLocks noGrp="1"/>
           </p:cNvSpPr>
@@ -2850,7 +2936,7 @@
       </p:sp>
       <p:sp>
         <p:nvSpPr>
-          <p:cNvPr id="1019347401" name="Footer Placeholder 5"/>
+          <p:cNvPr id="1086449871" name="Footer Placeholder 5"/>
           <p:cNvSpPr>
             <a:spLocks noGrp="1"/>
           </p:cNvSpPr>
@@ -2872,7 +2958,7 @@
       </p:sp>
       <p:sp>
         <p:nvSpPr>
-          <p:cNvPr id="764286525" name="Slide Number Placeholder 6"/>
+          <p:cNvPr id="1570432118" name="Slide Number Placeholder 6"/>
           <p:cNvSpPr>
             <a:spLocks noGrp="1"/>
           </p:cNvSpPr>
@@ -2923,7 +3009,7 @@
       </p:grpSpPr>
       <p:sp>
         <p:nvSpPr>
-          <p:cNvPr id="1766711584" name="Title 1"/>
+          <p:cNvPr id="214873002" name="Title 1"/>
           <p:cNvSpPr>
             <a:spLocks noGrp="1"/>
           </p:cNvSpPr>
@@ -2958,7 +3044,7 @@
       </p:sp>
       <p:sp>
         <p:nvSpPr>
-          <p:cNvPr id="225121448" name="Picture Placeholder 2"/>
+          <p:cNvPr id="1387180197" name="Picture Placeholder 2"/>
           <p:cNvSpPr>
             <a:spLocks noChangeAspect="1" noGrp="1"/>
           </p:cNvSpPr>
@@ -3026,7 +3112,7 @@
       </p:sp>
       <p:sp>
         <p:nvSpPr>
-          <p:cNvPr id="241838834" name="Text Placeholder 3"/>
+          <p:cNvPr id="1007549447" name="Text Placeholder 3"/>
           <p:cNvSpPr>
             <a:spLocks noGrp="1"/>
           </p:cNvSpPr>
@@ -3094,7 +3180,7 @@
       </p:sp>
       <p:sp>
         <p:nvSpPr>
-          <p:cNvPr id="834108255" name="Date Placeholder 4"/>
+          <p:cNvPr id="1791895889" name="Date Placeholder 4"/>
           <p:cNvSpPr>
             <a:spLocks noGrp="1"/>
           </p:cNvSpPr>
@@ -3120,7 +3206,7 @@
       </p:sp>
       <p:sp>
         <p:nvSpPr>
-          <p:cNvPr id="1050869291" name="Footer Placeholder 5"/>
+          <p:cNvPr id="1763542879" name="Footer Placeholder 5"/>
           <p:cNvSpPr>
             <a:spLocks noGrp="1"/>
           </p:cNvSpPr>
@@ -3142,7 +3228,7 @@
       </p:sp>
       <p:sp>
         <p:nvSpPr>
-          <p:cNvPr id="1539431622" name="Slide Number Placeholder 6"/>
+          <p:cNvPr id="1160929360" name="Slide Number Placeholder 6"/>
           <p:cNvSpPr>
             <a:spLocks noGrp="1"/>
           </p:cNvSpPr>
@@ -3201,7 +3287,7 @@
       </p:grpSpPr>
       <p:sp>
         <p:nvSpPr>
-          <p:cNvPr id="705912059" name="Title Placeholder 1"/>
+          <p:cNvPr id="718380730" name="Title Placeholder 1"/>
           <p:cNvSpPr>
             <a:spLocks noGrp="1"/>
           </p:cNvSpPr>
@@ -3237,7 +3323,7 @@
       </p:sp>
       <p:sp>
         <p:nvSpPr>
-          <p:cNvPr id="1979594582" name="Text Placeholder 2"/>
+          <p:cNvPr id="2078194988" name="Text Placeholder 2"/>
           <p:cNvSpPr>
             <a:spLocks noGrp="1"/>
           </p:cNvSpPr>
@@ -3313,7 +3399,7 @@
       </p:sp>
       <p:sp>
         <p:nvSpPr>
-          <p:cNvPr id="1857861994" name="Date Placeholder 3"/>
+          <p:cNvPr id="420560671" name="Date Placeholder 3"/>
           <p:cNvSpPr>
             <a:spLocks noGrp="1"/>
           </p:cNvSpPr>
@@ -3357,7 +3443,7 @@
       </p:sp>
       <p:sp>
         <p:nvSpPr>
-          <p:cNvPr id="478000238" name="Footer Placeholder 4"/>
+          <p:cNvPr id="1565922673" name="Footer Placeholder 4"/>
           <p:cNvSpPr>
             <a:spLocks noGrp="1"/>
           </p:cNvSpPr>
@@ -3397,7 +3483,7 @@
       </p:sp>
       <p:sp>
         <p:nvSpPr>
-          <p:cNvPr id="1172708282" name="Slide Number Placeholder 5"/>
+          <p:cNvPr id="1824967276" name="Slide Number Placeholder 5"/>
           <p:cNvSpPr>
             <a:spLocks noGrp="1"/>
           </p:cNvSpPr>
@@ -3757,7 +3843,7 @@
       </p:grpSpPr>
       <p:sp>
         <p:nvSpPr>
-          <p:cNvPr id="710601938" name="Title 1"/>
+          <p:cNvPr id="2101572661" name="Title 1"/>
           <p:cNvSpPr>
             <a:spLocks noGrp="1"/>
           </p:cNvSpPr>
@@ -3801,7 +3887,7 @@
       </p:sp>
       <p:sp>
         <p:nvSpPr>
-          <p:cNvPr id="1970887236" name="Subtitle 2"/>
+          <p:cNvPr id="1604452101" name="Subtitle 2"/>
           <p:cNvSpPr>
             <a:spLocks noGrp="1"/>
           </p:cNvSpPr>
@@ -3944,7 +4030,7 @@
         <p:spPr bwMode="auto">
           <a:xfrm rot="0" flipH="0" flipV="0">
             <a:off x="953892" y="1510392"/>
-            <a:ext cx="8810733" cy="2072999"/>
+            <a:ext cx="8829813" cy="2072999"/>
           </a:xfrm>
           <a:prstGeom prst="rect">
             <a:avLst/>
@@ -3982,6 +4068,36 @@
               </a:rPr>
               <a:t>, дизайн</a:t>
             </a:r>
+            <a:r>
+              <a:rPr lang="en-US" sz="2600">
+                <a:solidFill>
+                  <a:schemeClr val="bg1"/>
+                </a:solidFill>
+                <a:latin typeface="Ubuntu Sans"/>
+                <a:cs typeface="Ubuntu Sans"/>
+              </a:rPr>
+              <a:t> </a:t>
+            </a:r>
+            <a:r>
+              <a:rPr lang="bg-BG" sz="2600">
+                <a:solidFill>
+                  <a:schemeClr val="bg1"/>
+                </a:solidFill>
+                <a:latin typeface="Ubuntu Sans"/>
+                <a:cs typeface="Ubuntu Sans"/>
+              </a:rPr>
+              <a:t>и </a:t>
+            </a:r>
+            <a:r>
+              <a:rPr lang="en-US" sz="2600">
+                <a:solidFill>
+                  <a:schemeClr val="bg1"/>
+                </a:solidFill>
+                <a:latin typeface="Ubuntu Sans"/>
+                <a:cs typeface="Ubuntu Sans"/>
+              </a:rPr>
+              <a:t>GitHub</a:t>
+            </a:r>
             <a:endParaRPr sz="2600">
               <a:solidFill>
                 <a:schemeClr val="bg1"/>
@@ -4071,6 +4187,28 @@
               </a:rPr>
               <a:t>Александър Симеонов</a:t>
             </a:r>
+            <a:r>
+              <a:rPr lang="en-US" sz="2600">
+                <a:solidFill>
+                  <a:schemeClr val="bg1"/>
+                </a:solidFill>
+                <a:latin typeface="Ubuntu Sans"/>
+                <a:ea typeface="Ubuntu Sans"/>
+                <a:cs typeface="Ubuntu Sans"/>
+              </a:rPr>
+              <a:t> - </a:t>
+            </a:r>
+            <a:r>
+              <a:rPr lang="bg-BG" sz="2600">
+                <a:solidFill>
+                  <a:schemeClr val="bg1"/>
+                </a:solidFill>
+                <a:latin typeface="Ubuntu Sans"/>
+                <a:ea typeface="Ubuntu Sans"/>
+                <a:cs typeface="Ubuntu Sans"/>
+              </a:rPr>
+              <a:t>правене на сайт</a:t>
+            </a:r>
             <a:endParaRPr sz="2600">
               <a:solidFill>
                 <a:schemeClr val="bg1"/>
@@ -4096,6 +4234,17 @@
                 <a:cs typeface="Ubuntu Sans"/>
               </a:rPr>
               <a:t>Илиян Сахатчиев</a:t>
+            </a:r>
+            <a:r>
+              <a:rPr lang="en-US" sz="2600">
+                <a:solidFill>
+                  <a:schemeClr val="bg1"/>
+                </a:solidFill>
+                <a:latin typeface="Ubuntu Sans"/>
+                <a:ea typeface="Ubuntu Sans"/>
+                <a:cs typeface="Ubuntu Sans"/>
+              </a:rPr>
+              <a:t> - backend</a:t>
             </a:r>
             <a:endParaRPr>
               <a:solidFill>
@@ -4154,6 +4303,168 @@
               <a:t>Никола Кръстанов</a:t>
             </a:r>
             <a:endParaRPr b="0">
+              <a:solidFill>
+                <a:schemeClr val="bg1"/>
+              </a:solidFill>
+            </a:endParaRPr>
+          </a:p>
+        </p:txBody>
+      </p:sp>
+    </p:spTree>
+  </p:cSld>
+  <p:clrMapOvr>
+    <a:masterClrMapping/>
+  </p:clrMapOvr>
+  <mc:AlternateContent xmlns:mc="http://schemas.openxmlformats.org/markup-compatibility/2006">
+    <mc:Choice xmlns:p159="http://schemas.microsoft.com/office/powerpoint/2015/09/main" xmlns:p14="http://schemas.microsoft.com/office/powerpoint/2010/main" Requires="p159">
+      <p:transition p14:dur="500" advClick="1"/>
+    </mc:Choice>
+    <mc:Fallback>
+      <p:transition advClick="1"/>
+    </mc:Fallback>
+  </mc:AlternateContent>
+</p:sld>
+</file>
+
+<file path=ppt/slides/slide3.xml><?xml version="1.0" encoding="utf-8"?>
+<p:sld xmlns:a="http://schemas.openxmlformats.org/drawingml/2006/main" xmlns:r="http://schemas.openxmlformats.org/officeDocument/2006/relationships" xmlns:p="http://schemas.openxmlformats.org/presentationml/2006/main" xmlns:m="http://schemas.openxmlformats.org/officeDocument/2006/math" xmlns:w="http://schemas.openxmlformats.org/wordprocessingml/2006/main" xmlns:mc="http://schemas.openxmlformats.org/markup-compatibility/2006" showMasterPhAnim="0" showMasterSp="1" show="1">
+  <p:cSld name="">
+    <p:spTree>
+      <p:nvGrpSpPr>
+        <p:cNvPr id="1" name=""/>
+        <p:cNvGrpSpPr/>
+        <p:nvPr/>
+      </p:nvGrpSpPr>
+      <p:grpSpPr bwMode="auto">
+        <a:xfrm>
+          <a:off x="0" y="0"/>
+          <a:ext cx="0" cy="0"/>
+          <a:chOff x="0" y="0"/>
+          <a:chExt cx="0" cy="0"/>
+        </a:xfrm>
+      </p:grpSpPr>
+      <p:sp>
+        <p:nvSpPr>
+          <p:cNvPr id="745327546" name="Title 1"/>
+          <p:cNvSpPr>
+            <a:spLocks noGrp="1"/>
+          </p:cNvSpPr>
+          <p:nvPr>
+            <p:ph type="ctrTitle"/>
+          </p:nvPr>
+        </p:nvSpPr>
+        <p:spPr bwMode="auto">
+          <a:xfrm flipH="0" flipV="0">
+            <a:off x="721176" y="251504"/>
+            <a:ext cx="6886608" cy="1381351"/>
+          </a:xfrm>
+        </p:spPr>
+        <p:txBody>
+          <a:bodyPr/>
+          <a:lstStyle/>
+          <a:p>
+            <a:pPr>
+              <a:defRPr/>
+            </a:pPr>
+            <a:r>
+              <a:rPr lang="bg-BG" b="1">
+                <a:solidFill>
+                  <a:schemeClr val="bg1"/>
+                </a:solidFill>
+                <a:latin typeface="Ubuntu Sans"/>
+                <a:cs typeface="Ubuntu Sans"/>
+              </a:rPr>
+              <a:t>Идеята – от къде и защо?</a:t>
+            </a:r>
+            <a:endParaRPr b="1">
+              <a:solidFill>
+                <a:schemeClr val="bg1"/>
+              </a:solidFill>
+              <a:latin typeface="Ubuntu Sans"/>
+              <a:cs typeface="Ubuntu Sans"/>
+            </a:endParaRPr>
+          </a:p>
+        </p:txBody>
+      </p:sp>
+      <p:sp>
+        <p:nvSpPr>
+          <p:cNvPr id="440238925" name=""/>
+          <p:cNvSpPr txBox="1"/>
+          <p:nvPr/>
+        </p:nvSpPr>
+        <p:spPr bwMode="auto">
+          <a:xfrm rot="0" flipH="0" flipV="0">
+            <a:off x="559285" y="1442356"/>
+            <a:ext cx="8367171" cy="914760"/>
+          </a:xfrm>
+          <a:prstGeom prst="rect">
+            <a:avLst/>
+          </a:prstGeom>
+          <a:noFill/>
+        </p:spPr>
+        <p:txBody>
+          <a:bodyPr vertOverflow="overflow" horzOverflow="overflow" vert="horz" wrap="square" lIns="91440" tIns="45720" rIns="91440" bIns="45720" numCol="1" spcCol="0" rtlCol="0" fromWordArt="0" anchor="t" anchorCtr="0" forceAA="0" upright="0" compatLnSpc="0">
+            <a:spAutoFit/>
+          </a:bodyPr>
+          <a:p>
+            <a:pPr marL="283879" indent="-283879">
+              <a:buFont typeface="Arial"/>
+              <a:buChar char="•"/>
+              <a:defRPr/>
+            </a:pPr>
+            <a:r>
+              <a:rPr lang="bg-BG">
+                <a:solidFill>
+                  <a:schemeClr val="bg1"/>
+                </a:solidFill>
+              </a:rPr>
+              <a:t>Проблемите на инд</a:t>
+            </a:r>
+            <a:r>
+              <a:rPr lang="bg-BG">
+                <a:solidFill>
+                  <a:schemeClr val="bg1"/>
+                </a:solidFill>
+              </a:rPr>
+              <a:t>ивиди с деменция</a:t>
+            </a:r>
+            <a:endParaRPr lang="bg-BG">
+              <a:solidFill>
+                <a:schemeClr val="bg1"/>
+              </a:solidFill>
+            </a:endParaRPr>
+          </a:p>
+          <a:p>
+            <a:pPr>
+              <a:defRPr/>
+            </a:pPr>
+            <a:r>
+              <a:rPr lang="bg-BG">
+                <a:solidFill>
+                  <a:schemeClr val="bg1"/>
+                </a:solidFill>
+              </a:rPr>
+              <a:t>	- Силни шумове и светлини</a:t>
+            </a:r>
+            <a:endParaRPr lang="bg-BG">
+              <a:solidFill>
+                <a:schemeClr val="bg1"/>
+              </a:solidFill>
+            </a:endParaRPr>
+          </a:p>
+          <a:p>
+            <a:pPr>
+              <a:defRPr/>
+            </a:pPr>
+            <a:r>
+              <a:rPr lang="bg-BG">
+                <a:solidFill>
+                  <a:schemeClr val="bg1"/>
+                </a:solidFill>
+              </a:rPr>
+              <a:t>	- Забравяне</a:t>
+            </a:r>
+            <a:endParaRPr>
               <a:solidFill>
                 <a:schemeClr val="bg1"/>
               </a:solidFill>

--- a/Prezentaciq.pptx
+++ b/Prezentaciq.pptx
@@ -5,12 +5,19 @@
     <p:sldMasterId id="2147483648" r:id="rId1"/>
   </p:sldMasterIdLst>
   <p:notesMasterIdLst>
-    <p:notesMasterId r:id="rId7"/>
+    <p:notesMasterId r:id="rId14"/>
   </p:notesMasterIdLst>
   <p:sldIdLst>
     <p:sldId id="256" r:id="rId4"/>
     <p:sldId id="257" r:id="rId5"/>
     <p:sldId id="258" r:id="rId6"/>
+    <p:sldId id="259" r:id="rId7"/>
+    <p:sldId id="260" r:id="rId8"/>
+    <p:sldId id="261" r:id="rId9"/>
+    <p:sldId id="262" r:id="rId10"/>
+    <p:sldId id="263" r:id="rId11"/>
+    <p:sldId id="264" r:id="rId12"/>
+    <p:sldId id="265" r:id="rId13"/>
   </p:sldIdLst>
   <p:sldSz cx="12192000" cy="6858000"/>
   <p:notesSz cx="6858000" cy="9144000"/>
@@ -136,7 +143,7 @@
       </p:grpSpPr>
       <p:sp>
         <p:nvSpPr>
-          <p:cNvPr id="111184141" name="Header Placeholder 1"/>
+          <p:cNvPr id="274772951" name="Header Placeholder 1"/>
           <p:cNvSpPr>
             <a:spLocks noGrp="1"/>
           </p:cNvSpPr>
@@ -170,7 +177,7 @@
       </p:sp>
       <p:sp>
         <p:nvSpPr>
-          <p:cNvPr id="424996992" name="Date Placeholder 2"/>
+          <p:cNvPr id="1882023987" name="Date Placeholder 2"/>
           <p:cNvSpPr>
             <a:spLocks noGrp="1"/>
           </p:cNvSpPr>
@@ -208,7 +215,7 @@
       </p:sp>
       <p:sp>
         <p:nvSpPr>
-          <p:cNvPr id="1136400177" name="Slide Image Placeholder 3"/>
+          <p:cNvPr id="941734668" name="Slide Image Placeholder 3"/>
           <p:cNvSpPr>
             <a:spLocks noChangeAspect="1" noGrp="1" noRot="1"/>
           </p:cNvSpPr>
@@ -244,7 +251,7 @@
       </p:sp>
       <p:sp>
         <p:nvSpPr>
-          <p:cNvPr id="256467042" name="Notes Placeholder 4"/>
+          <p:cNvPr id="23749931" name="Notes Placeholder 4"/>
           <p:cNvSpPr>
             <a:spLocks noGrp="1"/>
           </p:cNvSpPr>
@@ -318,7 +325,7 @@
       </p:sp>
       <p:sp>
         <p:nvSpPr>
-          <p:cNvPr id="1659420694" name="Footer Placeholder 5"/>
+          <p:cNvPr id="1417730686" name="Footer Placeholder 5"/>
           <p:cNvSpPr>
             <a:spLocks noGrp="1"/>
           </p:cNvSpPr>
@@ -352,7 +359,7 @@
       </p:sp>
       <p:sp>
         <p:nvSpPr>
-          <p:cNvPr id="2073144657" name="Slide Number Placeholder 6"/>
+          <p:cNvPr id="342575022" name="Slide Number Placeholder 6"/>
           <p:cNvSpPr>
             <a:spLocks noGrp="1"/>
           </p:cNvSpPr>
@@ -505,7 +512,7 @@
       </p:grpSpPr>
       <p:sp>
         <p:nvSpPr>
-          <p:cNvPr id="1205468750" name="Slide Image Placeholder 1"/>
+          <p:cNvPr id="1809243412" name="Slide Image Placeholder 1"/>
           <p:cNvSpPr>
             <a:spLocks noChangeAspect="1" noGrp="1" noRot="1"/>
           </p:cNvSpPr>
@@ -522,7 +529,7 @@
       </p:sp>
       <p:sp>
         <p:nvSpPr>
-          <p:cNvPr id="1876952868" name="Notes Placeholder 2"/>
+          <p:cNvPr id="978560754" name="Notes Placeholder 2"/>
           <p:cNvSpPr>
             <a:spLocks noGrp="1"/>
           </p:cNvSpPr>
@@ -547,7 +554,7 @@
       </p:sp>
       <p:sp>
         <p:nvSpPr>
-          <p:cNvPr id="1718582986" name="Slide Number Placeholder 3"/>
+          <p:cNvPr id="1205913046" name="Slide Number Placeholder 3"/>
           <p:cNvSpPr>
             <a:spLocks noGrp="1"/>
           </p:cNvSpPr>
@@ -568,6 +575,91 @@
               <a:t>1</a:t>
             </a:fld>
             <a:endParaRPr lang="en-US"/>
+          </a:p>
+        </p:txBody>
+      </p:sp>
+    </p:spTree>
+  </p:cSld>
+  <p:clrMapOvr>
+    <a:masterClrMapping/>
+  </p:clrMapOvr>
+</p:notes>
+</file>
+
+<file path=ppt/notesSlides/notesSlide10.xml><?xml version="1.0" encoding="utf-8"?>
+<p:notes xmlns:a="http://schemas.openxmlformats.org/drawingml/2006/main" xmlns:r="http://schemas.openxmlformats.org/officeDocument/2006/relationships" xmlns:p="http://schemas.openxmlformats.org/presentationml/2006/main" xmlns:m="http://schemas.openxmlformats.org/officeDocument/2006/math" xmlns:w="http://schemas.openxmlformats.org/wordprocessingml/2006/main">
+  <p:cSld name="">
+    <p:spTree>
+      <p:nvGrpSpPr>
+        <p:cNvPr id="1" name=""/>
+        <p:cNvGrpSpPr/>
+        <p:nvPr/>
+      </p:nvGrpSpPr>
+      <p:grpSpPr bwMode="auto">
+        <a:xfrm>
+          <a:off x="0" y="0"/>
+          <a:ext cx="0" cy="0"/>
+          <a:chOff x="0" y="0"/>
+          <a:chExt cx="0" cy="0"/>
+        </a:xfrm>
+      </p:grpSpPr>
+      <p:sp>
+        <p:nvSpPr>
+          <p:cNvPr id="474669033" name="Slide Image Placeholder 1"/>
+          <p:cNvSpPr>
+            <a:spLocks noChangeAspect="1" noGrp="1" noRot="1"/>
+          </p:cNvSpPr>
+          <p:nvPr>
+            <p:ph type="sldImg"/>
+          </p:nvPr>
+        </p:nvSpPr>
+        <p:spPr bwMode="auto"/>
+      </p:sp>
+      <p:sp>
+        <p:nvSpPr>
+          <p:cNvPr id="112916524" name="Notes Placeholder 2"/>
+          <p:cNvSpPr>
+            <a:spLocks noGrp="1"/>
+          </p:cNvSpPr>
+          <p:nvPr>
+            <p:ph type="body" idx="1"/>
+          </p:nvPr>
+        </p:nvSpPr>
+        <p:spPr bwMode="auto"/>
+        <p:txBody>
+          <a:bodyPr/>
+          <a:lstStyle/>
+          <a:p>
+            <a:pPr>
+              <a:defRPr/>
+            </a:pPr>
+            <a:endParaRPr/>
+          </a:p>
+        </p:txBody>
+      </p:sp>
+      <p:sp>
+        <p:nvSpPr>
+          <p:cNvPr id="1058139404" name="Slide Number Placeholder 3"/>
+          <p:cNvSpPr>
+            <a:spLocks noGrp="1"/>
+          </p:cNvSpPr>
+          <p:nvPr>
+            <p:ph type="sldNum" sz="quarter" idx="10"/>
+          </p:nvPr>
+        </p:nvSpPr>
+        <p:spPr bwMode="auto"/>
+        <p:txBody>
+          <a:bodyPr/>
+          <a:lstStyle/>
+          <a:p>
+            <a:pPr>
+              <a:defRPr/>
+            </a:pPr>
+            <a:fld id="{D719823E-755F-288E-8034-47D20B4EC941}" type="slidenum">
+              <a:rPr/>
+              <a:t/>
+            </a:fld>
+            <a:endParaRPr/>
           </a:p>
         </p:txBody>
       </p:sp>
@@ -598,7 +690,7 @@
       </p:grpSpPr>
       <p:sp>
         <p:nvSpPr>
-          <p:cNvPr id="2" name="Slide Image Placeholder 1"/>
+          <p:cNvPr id="552669058" name="Slide Image Placeholder 1"/>
           <p:cNvSpPr>
             <a:spLocks noChangeAspect="1" noGrp="1" noRot="1"/>
           </p:cNvSpPr>
@@ -610,7 +702,7 @@
       </p:sp>
       <p:sp>
         <p:nvSpPr>
-          <p:cNvPr id="3" name="Notes Placeholder 2"/>
+          <p:cNvPr id="1981329726" name="Notes Placeholder 2"/>
           <p:cNvSpPr>
             <a:spLocks noGrp="1"/>
           </p:cNvSpPr>
@@ -632,7 +724,7 @@
       </p:sp>
       <p:sp>
         <p:nvSpPr>
-          <p:cNvPr id="4" name="Slide Number Placeholder 3"/>
+          <p:cNvPr id="681504799" name="Slide Number Placeholder 3"/>
           <p:cNvSpPr>
             <a:spLocks noGrp="1"/>
           </p:cNvSpPr>
@@ -683,6 +775,261 @@
       </p:grpSpPr>
       <p:sp>
         <p:nvSpPr>
+          <p:cNvPr id="612368986" name="Slide Image Placeholder 1"/>
+          <p:cNvSpPr>
+            <a:spLocks noChangeAspect="1" noGrp="1" noRot="1"/>
+          </p:cNvSpPr>
+          <p:nvPr>
+            <p:ph type="sldImg"/>
+          </p:nvPr>
+        </p:nvSpPr>
+        <p:spPr bwMode="auto"/>
+      </p:sp>
+      <p:sp>
+        <p:nvSpPr>
+          <p:cNvPr id="1538966438" name="Notes Placeholder 2"/>
+          <p:cNvSpPr>
+            <a:spLocks noGrp="1"/>
+          </p:cNvSpPr>
+          <p:nvPr>
+            <p:ph type="body" idx="1"/>
+          </p:nvPr>
+        </p:nvSpPr>
+        <p:spPr bwMode="auto"/>
+        <p:txBody>
+          <a:bodyPr/>
+          <a:lstStyle/>
+          <a:p>
+            <a:pPr>
+              <a:defRPr/>
+            </a:pPr>
+            <a:endParaRPr/>
+          </a:p>
+        </p:txBody>
+      </p:sp>
+      <p:sp>
+        <p:nvSpPr>
+          <p:cNvPr id="569874494" name="Slide Number Placeholder 3"/>
+          <p:cNvSpPr>
+            <a:spLocks noGrp="1"/>
+          </p:cNvSpPr>
+          <p:nvPr>
+            <p:ph type="sldNum" sz="quarter" idx="10"/>
+          </p:nvPr>
+        </p:nvSpPr>
+        <p:spPr bwMode="auto"/>
+        <p:txBody>
+          <a:bodyPr/>
+          <a:lstStyle/>
+          <a:p>
+            <a:pPr>
+              <a:defRPr/>
+            </a:pPr>
+            <a:fld id="{B5D478D3-3B21-6817-CCC9-CB9B3836E056}" type="slidenum">
+              <a:rPr/>
+              <a:t/>
+            </a:fld>
+            <a:endParaRPr/>
+          </a:p>
+        </p:txBody>
+      </p:sp>
+    </p:spTree>
+  </p:cSld>
+  <p:clrMapOvr>
+    <a:masterClrMapping/>
+  </p:clrMapOvr>
+</p:notes>
+</file>
+
+<file path=ppt/notesSlides/notesSlide4.xml><?xml version="1.0" encoding="utf-8"?>
+<p:notes xmlns:a="http://schemas.openxmlformats.org/drawingml/2006/main" xmlns:r="http://schemas.openxmlformats.org/officeDocument/2006/relationships" xmlns:p="http://schemas.openxmlformats.org/presentationml/2006/main" xmlns:m="http://schemas.openxmlformats.org/officeDocument/2006/math" xmlns:w="http://schemas.openxmlformats.org/wordprocessingml/2006/main">
+  <p:cSld name="">
+    <p:spTree>
+      <p:nvGrpSpPr>
+        <p:cNvPr id="1" name=""/>
+        <p:cNvGrpSpPr/>
+        <p:nvPr/>
+      </p:nvGrpSpPr>
+      <p:grpSpPr bwMode="auto">
+        <a:xfrm>
+          <a:off x="0" y="0"/>
+          <a:ext cx="0" cy="0"/>
+          <a:chOff x="0" y="0"/>
+          <a:chExt cx="0" cy="0"/>
+        </a:xfrm>
+      </p:grpSpPr>
+      <p:sp>
+        <p:nvSpPr>
+          <p:cNvPr id="568837214" name="Slide Image Placeholder 1"/>
+          <p:cNvSpPr>
+            <a:spLocks noChangeAspect="1" noGrp="1" noRot="1"/>
+          </p:cNvSpPr>
+          <p:nvPr>
+            <p:ph type="sldImg"/>
+          </p:nvPr>
+        </p:nvSpPr>
+        <p:spPr bwMode="auto"/>
+      </p:sp>
+      <p:sp>
+        <p:nvSpPr>
+          <p:cNvPr id="317244712" name="Notes Placeholder 2"/>
+          <p:cNvSpPr>
+            <a:spLocks noGrp="1"/>
+          </p:cNvSpPr>
+          <p:nvPr>
+            <p:ph type="body" idx="1"/>
+          </p:nvPr>
+        </p:nvSpPr>
+        <p:spPr bwMode="auto"/>
+        <p:txBody>
+          <a:bodyPr/>
+          <a:lstStyle/>
+          <a:p>
+            <a:pPr>
+              <a:defRPr/>
+            </a:pPr>
+            <a:endParaRPr/>
+          </a:p>
+        </p:txBody>
+      </p:sp>
+      <p:sp>
+        <p:nvSpPr>
+          <p:cNvPr id="1687507076" name="Slide Number Placeholder 3"/>
+          <p:cNvSpPr>
+            <a:spLocks noGrp="1"/>
+          </p:cNvSpPr>
+          <p:nvPr>
+            <p:ph type="sldNum" sz="quarter" idx="10"/>
+          </p:nvPr>
+        </p:nvSpPr>
+        <p:spPr bwMode="auto"/>
+        <p:txBody>
+          <a:bodyPr/>
+          <a:lstStyle/>
+          <a:p>
+            <a:pPr>
+              <a:defRPr/>
+            </a:pPr>
+            <a:fld id="{5ABAF583-884E-CFEF-8DE5-1203A4B4A717}" type="slidenum">
+              <a:rPr/>
+              <a:t/>
+            </a:fld>
+            <a:endParaRPr/>
+          </a:p>
+        </p:txBody>
+      </p:sp>
+    </p:spTree>
+  </p:cSld>
+  <p:clrMapOvr>
+    <a:masterClrMapping/>
+  </p:clrMapOvr>
+</p:notes>
+</file>
+
+<file path=ppt/notesSlides/notesSlide5.xml><?xml version="1.0" encoding="utf-8"?>
+<p:notes xmlns:a="http://schemas.openxmlformats.org/drawingml/2006/main" xmlns:r="http://schemas.openxmlformats.org/officeDocument/2006/relationships" xmlns:p="http://schemas.openxmlformats.org/presentationml/2006/main" xmlns:m="http://schemas.openxmlformats.org/officeDocument/2006/math" xmlns:w="http://schemas.openxmlformats.org/wordprocessingml/2006/main">
+  <p:cSld name="">
+    <p:spTree>
+      <p:nvGrpSpPr>
+        <p:cNvPr id="1" name=""/>
+        <p:cNvGrpSpPr/>
+        <p:nvPr/>
+      </p:nvGrpSpPr>
+      <p:grpSpPr bwMode="auto">
+        <a:xfrm>
+          <a:off x="0" y="0"/>
+          <a:ext cx="0" cy="0"/>
+          <a:chOff x="0" y="0"/>
+          <a:chExt cx="0" cy="0"/>
+        </a:xfrm>
+      </p:grpSpPr>
+      <p:sp>
+        <p:nvSpPr>
+          <p:cNvPr id="1781777207" name="Slide Image Placeholder 1"/>
+          <p:cNvSpPr>
+            <a:spLocks noChangeAspect="1" noGrp="1" noRot="1"/>
+          </p:cNvSpPr>
+          <p:nvPr>
+            <p:ph type="sldImg"/>
+          </p:nvPr>
+        </p:nvSpPr>
+        <p:spPr bwMode="auto"/>
+      </p:sp>
+      <p:sp>
+        <p:nvSpPr>
+          <p:cNvPr id="324379692" name="Notes Placeholder 2"/>
+          <p:cNvSpPr>
+            <a:spLocks noGrp="1"/>
+          </p:cNvSpPr>
+          <p:nvPr>
+            <p:ph type="body" idx="1"/>
+          </p:nvPr>
+        </p:nvSpPr>
+        <p:spPr bwMode="auto"/>
+        <p:txBody>
+          <a:bodyPr/>
+          <a:lstStyle/>
+          <a:p>
+            <a:pPr>
+              <a:defRPr/>
+            </a:pPr>
+            <a:endParaRPr/>
+          </a:p>
+        </p:txBody>
+      </p:sp>
+      <p:sp>
+        <p:nvSpPr>
+          <p:cNvPr id="160557166" name="Slide Number Placeholder 3"/>
+          <p:cNvSpPr>
+            <a:spLocks noGrp="1"/>
+          </p:cNvSpPr>
+          <p:nvPr>
+            <p:ph type="sldNum" sz="quarter" idx="10"/>
+          </p:nvPr>
+        </p:nvSpPr>
+        <p:spPr bwMode="auto"/>
+        <p:txBody>
+          <a:bodyPr/>
+          <a:lstStyle/>
+          <a:p>
+            <a:pPr>
+              <a:defRPr/>
+            </a:pPr>
+            <a:fld id="{EC57B88A-9EE6-B226-87EE-FAE994B421A8}" type="slidenum">
+              <a:rPr/>
+              <a:t/>
+            </a:fld>
+            <a:endParaRPr/>
+          </a:p>
+        </p:txBody>
+      </p:sp>
+    </p:spTree>
+  </p:cSld>
+  <p:clrMapOvr>
+    <a:masterClrMapping/>
+  </p:clrMapOvr>
+</p:notes>
+</file>
+
+<file path=ppt/notesSlides/notesSlide6.xml><?xml version="1.0" encoding="utf-8"?>
+<p:notes xmlns:a="http://schemas.openxmlformats.org/drawingml/2006/main" xmlns:r="http://schemas.openxmlformats.org/officeDocument/2006/relationships" xmlns:p="http://schemas.openxmlformats.org/presentationml/2006/main" xmlns:m="http://schemas.openxmlformats.org/officeDocument/2006/math" xmlns:w="http://schemas.openxmlformats.org/wordprocessingml/2006/main">
+  <p:cSld name="">
+    <p:spTree>
+      <p:nvGrpSpPr>
+        <p:cNvPr id="1" name=""/>
+        <p:cNvGrpSpPr/>
+        <p:nvPr/>
+      </p:nvGrpSpPr>
+      <p:grpSpPr bwMode="auto">
+        <a:xfrm>
+          <a:off x="0" y="0"/>
+          <a:ext cx="0" cy="0"/>
+          <a:chOff x="0" y="0"/>
+          <a:chExt cx="0" cy="0"/>
+        </a:xfrm>
+      </p:grpSpPr>
+      <p:sp>
+        <p:nvSpPr>
           <p:cNvPr id="2" name="Slide Image Placeholder 1"/>
           <p:cNvSpPr>
             <a:spLocks noChangeAspect="1" noGrp="1" noRot="1"/>
@@ -733,7 +1080,262 @@
             <a:pPr>
               <a:defRPr/>
             </a:pPr>
-            <a:fld id="{B5D478D3-3B21-6817-CCC9-CB9B3836E056}" type="slidenum">
+            <a:fld id="{F3E5CA1D-C782-DD6A-E3E4-FADF595E63EC}" type="slidenum">
+              <a:rPr/>
+              <a:t/>
+            </a:fld>
+            <a:endParaRPr/>
+          </a:p>
+        </p:txBody>
+      </p:sp>
+    </p:spTree>
+  </p:cSld>
+  <p:clrMapOvr>
+    <a:masterClrMapping/>
+  </p:clrMapOvr>
+</p:notes>
+</file>
+
+<file path=ppt/notesSlides/notesSlide7.xml><?xml version="1.0" encoding="utf-8"?>
+<p:notes xmlns:a="http://schemas.openxmlformats.org/drawingml/2006/main" xmlns:r="http://schemas.openxmlformats.org/officeDocument/2006/relationships" xmlns:p="http://schemas.openxmlformats.org/presentationml/2006/main" xmlns:m="http://schemas.openxmlformats.org/officeDocument/2006/math" xmlns:w="http://schemas.openxmlformats.org/wordprocessingml/2006/main">
+  <p:cSld name="">
+    <p:spTree>
+      <p:nvGrpSpPr>
+        <p:cNvPr id="1" name=""/>
+        <p:cNvGrpSpPr/>
+        <p:nvPr/>
+      </p:nvGrpSpPr>
+      <p:grpSpPr bwMode="auto">
+        <a:xfrm>
+          <a:off x="0" y="0"/>
+          <a:ext cx="0" cy="0"/>
+          <a:chOff x="0" y="0"/>
+          <a:chExt cx="0" cy="0"/>
+        </a:xfrm>
+      </p:grpSpPr>
+      <p:sp>
+        <p:nvSpPr>
+          <p:cNvPr id="1101547107" name="Slide Image Placeholder 1"/>
+          <p:cNvSpPr>
+            <a:spLocks noChangeAspect="1" noGrp="1" noRot="1"/>
+          </p:cNvSpPr>
+          <p:nvPr>
+            <p:ph type="sldImg"/>
+          </p:nvPr>
+        </p:nvSpPr>
+        <p:spPr bwMode="auto"/>
+      </p:sp>
+      <p:sp>
+        <p:nvSpPr>
+          <p:cNvPr id="104119793" name="Notes Placeholder 2"/>
+          <p:cNvSpPr>
+            <a:spLocks noGrp="1"/>
+          </p:cNvSpPr>
+          <p:nvPr>
+            <p:ph type="body" idx="1"/>
+          </p:nvPr>
+        </p:nvSpPr>
+        <p:spPr bwMode="auto"/>
+        <p:txBody>
+          <a:bodyPr/>
+          <a:lstStyle/>
+          <a:p>
+            <a:pPr>
+              <a:defRPr/>
+            </a:pPr>
+            <a:endParaRPr/>
+          </a:p>
+        </p:txBody>
+      </p:sp>
+      <p:sp>
+        <p:nvSpPr>
+          <p:cNvPr id="1031447559" name="Slide Number Placeholder 3"/>
+          <p:cNvSpPr>
+            <a:spLocks noGrp="1"/>
+          </p:cNvSpPr>
+          <p:nvPr>
+            <p:ph type="sldNum" sz="quarter" idx="10"/>
+          </p:nvPr>
+        </p:nvSpPr>
+        <p:spPr bwMode="auto"/>
+        <p:txBody>
+          <a:bodyPr/>
+          <a:lstStyle/>
+          <a:p>
+            <a:pPr>
+              <a:defRPr/>
+            </a:pPr>
+            <a:fld id="{F518262F-F903-3EEA-F653-29E78658ED5E}" type="slidenum">
+              <a:rPr/>
+              <a:t/>
+            </a:fld>
+            <a:endParaRPr/>
+          </a:p>
+        </p:txBody>
+      </p:sp>
+    </p:spTree>
+  </p:cSld>
+  <p:clrMapOvr>
+    <a:masterClrMapping/>
+  </p:clrMapOvr>
+</p:notes>
+</file>
+
+<file path=ppt/notesSlides/notesSlide8.xml><?xml version="1.0" encoding="utf-8"?>
+<p:notes xmlns:a="http://schemas.openxmlformats.org/drawingml/2006/main" xmlns:r="http://schemas.openxmlformats.org/officeDocument/2006/relationships" xmlns:p="http://schemas.openxmlformats.org/presentationml/2006/main" xmlns:m="http://schemas.openxmlformats.org/officeDocument/2006/math" xmlns:w="http://schemas.openxmlformats.org/wordprocessingml/2006/main">
+  <p:cSld name="">
+    <p:spTree>
+      <p:nvGrpSpPr>
+        <p:cNvPr id="1" name=""/>
+        <p:cNvGrpSpPr/>
+        <p:nvPr/>
+      </p:nvGrpSpPr>
+      <p:grpSpPr bwMode="auto">
+        <a:xfrm>
+          <a:off x="0" y="0"/>
+          <a:ext cx="0" cy="0"/>
+          <a:chOff x="0" y="0"/>
+          <a:chExt cx="0" cy="0"/>
+        </a:xfrm>
+      </p:grpSpPr>
+      <p:sp>
+        <p:nvSpPr>
+          <p:cNvPr id="2133484545" name="Slide Image Placeholder 1"/>
+          <p:cNvSpPr>
+            <a:spLocks noChangeAspect="1" noGrp="1" noRot="1"/>
+          </p:cNvSpPr>
+          <p:nvPr>
+            <p:ph type="sldImg"/>
+          </p:nvPr>
+        </p:nvSpPr>
+        <p:spPr bwMode="auto"/>
+      </p:sp>
+      <p:sp>
+        <p:nvSpPr>
+          <p:cNvPr id="591611766" name="Notes Placeholder 2"/>
+          <p:cNvSpPr>
+            <a:spLocks noGrp="1"/>
+          </p:cNvSpPr>
+          <p:nvPr>
+            <p:ph type="body" idx="1"/>
+          </p:nvPr>
+        </p:nvSpPr>
+        <p:spPr bwMode="auto"/>
+        <p:txBody>
+          <a:bodyPr/>
+          <a:lstStyle/>
+          <a:p>
+            <a:pPr>
+              <a:defRPr/>
+            </a:pPr>
+            <a:endParaRPr/>
+          </a:p>
+        </p:txBody>
+      </p:sp>
+      <p:sp>
+        <p:nvSpPr>
+          <p:cNvPr id="461345041" name="Slide Number Placeholder 3"/>
+          <p:cNvSpPr>
+            <a:spLocks noGrp="1"/>
+          </p:cNvSpPr>
+          <p:nvPr>
+            <p:ph type="sldNum" sz="quarter" idx="10"/>
+          </p:nvPr>
+        </p:nvSpPr>
+        <p:spPr bwMode="auto"/>
+        <p:txBody>
+          <a:bodyPr/>
+          <a:lstStyle/>
+          <a:p>
+            <a:pPr>
+              <a:defRPr/>
+            </a:pPr>
+            <a:fld id="{E793C7AE-F512-5C8A-CC5D-6CE770C89D4E}" type="slidenum">
+              <a:rPr/>
+              <a:t/>
+            </a:fld>
+            <a:endParaRPr/>
+          </a:p>
+        </p:txBody>
+      </p:sp>
+    </p:spTree>
+  </p:cSld>
+  <p:clrMapOvr>
+    <a:masterClrMapping/>
+  </p:clrMapOvr>
+</p:notes>
+</file>
+
+<file path=ppt/notesSlides/notesSlide9.xml><?xml version="1.0" encoding="utf-8"?>
+<p:notes xmlns:a="http://schemas.openxmlformats.org/drawingml/2006/main" xmlns:r="http://schemas.openxmlformats.org/officeDocument/2006/relationships" xmlns:p="http://schemas.openxmlformats.org/presentationml/2006/main" xmlns:m="http://schemas.openxmlformats.org/officeDocument/2006/math" xmlns:w="http://schemas.openxmlformats.org/wordprocessingml/2006/main">
+  <p:cSld name="">
+    <p:spTree>
+      <p:nvGrpSpPr>
+        <p:cNvPr id="1" name=""/>
+        <p:cNvGrpSpPr/>
+        <p:nvPr/>
+      </p:nvGrpSpPr>
+      <p:grpSpPr bwMode="auto">
+        <a:xfrm>
+          <a:off x="0" y="0"/>
+          <a:ext cx="0" cy="0"/>
+          <a:chOff x="0" y="0"/>
+          <a:chExt cx="0" cy="0"/>
+        </a:xfrm>
+      </p:grpSpPr>
+      <p:sp>
+        <p:nvSpPr>
+          <p:cNvPr id="1916544148" name="Slide Image Placeholder 1"/>
+          <p:cNvSpPr>
+            <a:spLocks noChangeAspect="1" noGrp="1" noRot="1"/>
+          </p:cNvSpPr>
+          <p:nvPr>
+            <p:ph type="sldImg"/>
+          </p:nvPr>
+        </p:nvSpPr>
+        <p:spPr bwMode="auto"/>
+      </p:sp>
+      <p:sp>
+        <p:nvSpPr>
+          <p:cNvPr id="1901063303" name="Notes Placeholder 2"/>
+          <p:cNvSpPr>
+            <a:spLocks noGrp="1"/>
+          </p:cNvSpPr>
+          <p:nvPr>
+            <p:ph type="body" idx="1"/>
+          </p:nvPr>
+        </p:nvSpPr>
+        <p:spPr bwMode="auto"/>
+        <p:txBody>
+          <a:bodyPr/>
+          <a:lstStyle/>
+          <a:p>
+            <a:pPr>
+              <a:defRPr/>
+            </a:pPr>
+            <a:endParaRPr/>
+          </a:p>
+        </p:txBody>
+      </p:sp>
+      <p:sp>
+        <p:nvSpPr>
+          <p:cNvPr id="298686965" name="Slide Number Placeholder 3"/>
+          <p:cNvSpPr>
+            <a:spLocks noGrp="1"/>
+          </p:cNvSpPr>
+          <p:nvPr>
+            <p:ph type="sldNum" sz="quarter" idx="10"/>
+          </p:nvPr>
+        </p:nvSpPr>
+        <p:spPr bwMode="auto"/>
+        <p:txBody>
+          <a:bodyPr/>
+          <a:lstStyle/>
+          <a:p>
+            <a:pPr>
+              <a:defRPr/>
+            </a:pPr>
+            <a:fld id="{63A44C6F-85E4-F237-CE9A-E5F564F6B719}" type="slidenum">
               <a:rPr/>
               <a:t/>
             </a:fld>
@@ -768,7 +1370,7 @@
       </p:grpSpPr>
       <p:sp>
         <p:nvSpPr>
-          <p:cNvPr id="628506171" name="Title 1"/>
+          <p:cNvPr id="607992353" name="Title 1"/>
           <p:cNvSpPr>
             <a:spLocks noGrp="1"/>
           </p:cNvSpPr>
@@ -803,7 +1405,7 @@
       </p:sp>
       <p:sp>
         <p:nvSpPr>
-          <p:cNvPr id="212714472" name="Subtitle 2"/>
+          <p:cNvPr id="414386788" name="Subtitle 2"/>
           <p:cNvSpPr>
             <a:spLocks noGrp="1"/>
           </p:cNvSpPr>
@@ -871,7 +1473,7 @@
       </p:sp>
       <p:sp>
         <p:nvSpPr>
-          <p:cNvPr id="127986693" name="Date Placeholder 3"/>
+          <p:cNvPr id="268602057" name="Date Placeholder 3"/>
           <p:cNvSpPr>
             <a:spLocks noGrp="1"/>
           </p:cNvSpPr>
@@ -897,7 +1499,7 @@
       </p:sp>
       <p:sp>
         <p:nvSpPr>
-          <p:cNvPr id="1377797319" name="Footer Placeholder 4"/>
+          <p:cNvPr id="1705915677" name="Footer Placeholder 4"/>
           <p:cNvSpPr>
             <a:spLocks noGrp="1"/>
           </p:cNvSpPr>
@@ -919,7 +1521,7 @@
       </p:sp>
       <p:sp>
         <p:nvSpPr>
-          <p:cNvPr id="958003220" name="Slide Number Placeholder 5"/>
+          <p:cNvPr id="1671776589" name="Slide Number Placeholder 5"/>
           <p:cNvSpPr>
             <a:spLocks noGrp="1"/>
           </p:cNvSpPr>
@@ -970,7 +1572,7 @@
       </p:grpSpPr>
       <p:sp>
         <p:nvSpPr>
-          <p:cNvPr id="1573528504" name="Title 1"/>
+          <p:cNvPr id="1767536077" name="Title 1"/>
           <p:cNvSpPr>
             <a:spLocks noGrp="1"/>
           </p:cNvSpPr>
@@ -996,7 +1598,7 @@
       </p:sp>
       <p:sp>
         <p:nvSpPr>
-          <p:cNvPr id="1324261107" name="Vertical Text Placeholder 2"/>
+          <p:cNvPr id="1986879301" name="Vertical Text Placeholder 2"/>
           <p:cNvSpPr>
             <a:spLocks noGrp="1"/>
           </p:cNvSpPr>
@@ -1062,7 +1664,7 @@
       </p:sp>
       <p:sp>
         <p:nvSpPr>
-          <p:cNvPr id="1569640140" name="Date Placeholder 3"/>
+          <p:cNvPr id="705915040" name="Date Placeholder 3"/>
           <p:cNvSpPr>
             <a:spLocks noGrp="1"/>
           </p:cNvSpPr>
@@ -1088,7 +1690,7 @@
       </p:sp>
       <p:sp>
         <p:nvSpPr>
-          <p:cNvPr id="1844939002" name="Footer Placeholder 4"/>
+          <p:cNvPr id="1204428902" name="Footer Placeholder 4"/>
           <p:cNvSpPr>
             <a:spLocks noGrp="1"/>
           </p:cNvSpPr>
@@ -1110,7 +1712,7 @@
       </p:sp>
       <p:sp>
         <p:nvSpPr>
-          <p:cNvPr id="460967716" name="Slide Number Placeholder 5"/>
+          <p:cNvPr id="782646054" name="Slide Number Placeholder 5"/>
           <p:cNvSpPr>
             <a:spLocks noGrp="1"/>
           </p:cNvSpPr>
@@ -1161,7 +1763,7 @@
       </p:grpSpPr>
       <p:sp>
         <p:nvSpPr>
-          <p:cNvPr id="1457980043" name="Vertical Title 1"/>
+          <p:cNvPr id="132440941" name="Vertical Title 1"/>
           <p:cNvSpPr>
             <a:spLocks noGrp="1"/>
           </p:cNvSpPr>
@@ -1192,7 +1794,7 @@
       </p:sp>
       <p:sp>
         <p:nvSpPr>
-          <p:cNvPr id="702582287" name="Vertical Text Placeholder 2"/>
+          <p:cNvPr id="1030652772" name="Vertical Text Placeholder 2"/>
           <p:cNvSpPr>
             <a:spLocks noGrp="1"/>
           </p:cNvSpPr>
@@ -1263,7 +1865,7 @@
       </p:sp>
       <p:sp>
         <p:nvSpPr>
-          <p:cNvPr id="1702442265" name="Date Placeholder 3"/>
+          <p:cNvPr id="1756906186" name="Date Placeholder 3"/>
           <p:cNvSpPr>
             <a:spLocks noGrp="1"/>
           </p:cNvSpPr>
@@ -1289,7 +1891,7 @@
       </p:sp>
       <p:sp>
         <p:nvSpPr>
-          <p:cNvPr id="2111041258" name="Footer Placeholder 4"/>
+          <p:cNvPr id="1180371998" name="Footer Placeholder 4"/>
           <p:cNvSpPr>
             <a:spLocks noGrp="1"/>
           </p:cNvSpPr>
@@ -1311,7 +1913,7 @@
       </p:sp>
       <p:sp>
         <p:nvSpPr>
-          <p:cNvPr id="127491273" name="Slide Number Placeholder 5"/>
+          <p:cNvPr id="440120099" name="Slide Number Placeholder 5"/>
           <p:cNvSpPr>
             <a:spLocks noGrp="1"/>
           </p:cNvSpPr>
@@ -1362,7 +1964,7 @@
       </p:grpSpPr>
       <p:sp>
         <p:nvSpPr>
-          <p:cNvPr id="870144705" name="Title 1"/>
+          <p:cNvPr id="1497506508" name="Title 1"/>
           <p:cNvSpPr>
             <a:spLocks noGrp="1"/>
           </p:cNvSpPr>
@@ -1388,7 +1990,7 @@
       </p:sp>
       <p:sp>
         <p:nvSpPr>
-          <p:cNvPr id="2110699924" name="Content Placeholder 2"/>
+          <p:cNvPr id="1468361076" name="Content Placeholder 2"/>
           <p:cNvSpPr>
             <a:spLocks noGrp="1"/>
           </p:cNvSpPr>
@@ -1454,7 +2056,7 @@
       </p:sp>
       <p:sp>
         <p:nvSpPr>
-          <p:cNvPr id="966984649" name="Date Placeholder 3"/>
+          <p:cNvPr id="521861164" name="Date Placeholder 3"/>
           <p:cNvSpPr>
             <a:spLocks noGrp="1"/>
           </p:cNvSpPr>
@@ -1480,7 +2082,7 @@
       </p:sp>
       <p:sp>
         <p:nvSpPr>
-          <p:cNvPr id="875649945" name="Footer Placeholder 4"/>
+          <p:cNvPr id="1883235578" name="Footer Placeholder 4"/>
           <p:cNvSpPr>
             <a:spLocks noGrp="1"/>
           </p:cNvSpPr>
@@ -1502,7 +2104,7 @@
       </p:sp>
       <p:sp>
         <p:nvSpPr>
-          <p:cNvPr id="218157647" name="Slide Number Placeholder 5"/>
+          <p:cNvPr id="1892498620" name="Slide Number Placeholder 5"/>
           <p:cNvSpPr>
             <a:spLocks noGrp="1"/>
           </p:cNvSpPr>
@@ -1553,7 +2155,7 @@
       </p:grpSpPr>
       <p:sp>
         <p:nvSpPr>
-          <p:cNvPr id="1110052621" name="Title 1"/>
+          <p:cNvPr id="2120013000" name="Title 1"/>
           <p:cNvSpPr>
             <a:spLocks noGrp="1"/>
           </p:cNvSpPr>
@@ -1588,7 +2190,7 @@
       </p:sp>
       <p:sp>
         <p:nvSpPr>
-          <p:cNvPr id="1013344636" name="Text Placeholder 2"/>
+          <p:cNvPr id="291646719" name="Text Placeholder 2"/>
           <p:cNvSpPr>
             <a:spLocks noGrp="1"/>
           </p:cNvSpPr>
@@ -1710,7 +2312,7 @@
       </p:sp>
       <p:sp>
         <p:nvSpPr>
-          <p:cNvPr id="582769811" name="Date Placeholder 3"/>
+          <p:cNvPr id="93822368" name="Date Placeholder 3"/>
           <p:cNvSpPr>
             <a:spLocks noGrp="1"/>
           </p:cNvSpPr>
@@ -1736,7 +2338,7 @@
       </p:sp>
       <p:sp>
         <p:nvSpPr>
-          <p:cNvPr id="532896224" name="Footer Placeholder 4"/>
+          <p:cNvPr id="503555072" name="Footer Placeholder 4"/>
           <p:cNvSpPr>
             <a:spLocks noGrp="1"/>
           </p:cNvSpPr>
@@ -1758,7 +2360,7 @@
       </p:sp>
       <p:sp>
         <p:nvSpPr>
-          <p:cNvPr id="2041265165" name="Slide Number Placeholder 5"/>
+          <p:cNvPr id="1474391392" name="Slide Number Placeholder 5"/>
           <p:cNvSpPr>
             <a:spLocks noGrp="1"/>
           </p:cNvSpPr>
@@ -1809,7 +2411,7 @@
       </p:grpSpPr>
       <p:sp>
         <p:nvSpPr>
-          <p:cNvPr id="137167977" name="Title 1"/>
+          <p:cNvPr id="581584448" name="Title 1"/>
           <p:cNvSpPr>
             <a:spLocks noGrp="1"/>
           </p:cNvSpPr>
@@ -1835,7 +2437,7 @@
       </p:sp>
       <p:sp>
         <p:nvSpPr>
-          <p:cNvPr id="1116256965" name="Content Placeholder 2"/>
+          <p:cNvPr id="1914315441" name="Content Placeholder 2"/>
           <p:cNvSpPr>
             <a:spLocks noGrp="1"/>
           </p:cNvSpPr>
@@ -1906,7 +2508,7 @@
       </p:sp>
       <p:sp>
         <p:nvSpPr>
-          <p:cNvPr id="1866357068" name="Content Placeholder 3"/>
+          <p:cNvPr id="1072176085" name="Content Placeholder 3"/>
           <p:cNvSpPr>
             <a:spLocks noGrp="1"/>
           </p:cNvSpPr>
@@ -1977,7 +2579,7 @@
       </p:sp>
       <p:sp>
         <p:nvSpPr>
-          <p:cNvPr id="1543134294" name="Date Placeholder 4"/>
+          <p:cNvPr id="1010572691" name="Date Placeholder 4"/>
           <p:cNvSpPr>
             <a:spLocks noGrp="1"/>
           </p:cNvSpPr>
@@ -2003,7 +2605,7 @@
       </p:sp>
       <p:sp>
         <p:nvSpPr>
-          <p:cNvPr id="300894202" name="Footer Placeholder 5"/>
+          <p:cNvPr id="1091904216" name="Footer Placeholder 5"/>
           <p:cNvSpPr>
             <a:spLocks noGrp="1"/>
           </p:cNvSpPr>
@@ -2025,7 +2627,7 @@
       </p:sp>
       <p:sp>
         <p:nvSpPr>
-          <p:cNvPr id="1121175188" name="Slide Number Placeholder 6"/>
+          <p:cNvPr id="1246417062" name="Slide Number Placeholder 6"/>
           <p:cNvSpPr>
             <a:spLocks noGrp="1"/>
           </p:cNvSpPr>
@@ -2076,7 +2678,7 @@
       </p:grpSpPr>
       <p:sp>
         <p:nvSpPr>
-          <p:cNvPr id="1972472927" name="Title 1"/>
+          <p:cNvPr id="1422857592" name="Title 1"/>
           <p:cNvSpPr>
             <a:spLocks noGrp="1"/>
           </p:cNvSpPr>
@@ -2107,7 +2709,7 @@
       </p:sp>
       <p:sp>
         <p:nvSpPr>
-          <p:cNvPr id="144571322" name="Text Placeholder 2"/>
+          <p:cNvPr id="1772533630" name="Text Placeholder 2"/>
           <p:cNvSpPr>
             <a:spLocks noGrp="1"/>
           </p:cNvSpPr>
@@ -2175,7 +2777,7 @@
       </p:sp>
       <p:sp>
         <p:nvSpPr>
-          <p:cNvPr id="1640996834" name="Content Placeholder 3"/>
+          <p:cNvPr id="631235616" name="Content Placeholder 3"/>
           <p:cNvSpPr>
             <a:spLocks noGrp="1"/>
           </p:cNvSpPr>
@@ -2246,7 +2848,7 @@
       </p:sp>
       <p:sp>
         <p:nvSpPr>
-          <p:cNvPr id="737505540" name="Text Placeholder 4"/>
+          <p:cNvPr id="1424596740" name="Text Placeholder 4"/>
           <p:cNvSpPr>
             <a:spLocks noGrp="1"/>
           </p:cNvSpPr>
@@ -2314,7 +2916,7 @@
       </p:sp>
       <p:sp>
         <p:nvSpPr>
-          <p:cNvPr id="1662852458" name="Content Placeholder 5"/>
+          <p:cNvPr id="1942433689" name="Content Placeholder 5"/>
           <p:cNvSpPr>
             <a:spLocks noGrp="1"/>
           </p:cNvSpPr>
@@ -2385,7 +2987,7 @@
       </p:sp>
       <p:sp>
         <p:nvSpPr>
-          <p:cNvPr id="485902517" name="Date Placeholder 6"/>
+          <p:cNvPr id="1544463694" name="Date Placeholder 6"/>
           <p:cNvSpPr>
             <a:spLocks noGrp="1"/>
           </p:cNvSpPr>
@@ -2411,7 +3013,7 @@
       </p:sp>
       <p:sp>
         <p:nvSpPr>
-          <p:cNvPr id="278946314" name="Footer Placeholder 7"/>
+          <p:cNvPr id="836676126" name="Footer Placeholder 7"/>
           <p:cNvSpPr>
             <a:spLocks noGrp="1"/>
           </p:cNvSpPr>
@@ -2433,7 +3035,7 @@
       </p:sp>
       <p:sp>
         <p:nvSpPr>
-          <p:cNvPr id="195110367" name="Slide Number Placeholder 8"/>
+          <p:cNvPr id="1345043304" name="Slide Number Placeholder 8"/>
           <p:cNvSpPr>
             <a:spLocks noGrp="1"/>
           </p:cNvSpPr>
@@ -2484,7 +3086,7 @@
       </p:grpSpPr>
       <p:sp>
         <p:nvSpPr>
-          <p:cNvPr id="748215825" name="Title 1"/>
+          <p:cNvPr id="444792031" name="Title 1"/>
           <p:cNvSpPr>
             <a:spLocks noGrp="1"/>
           </p:cNvSpPr>
@@ -2510,7 +3112,7 @@
       </p:sp>
       <p:sp>
         <p:nvSpPr>
-          <p:cNvPr id="1926251785" name="Date Placeholder 2"/>
+          <p:cNvPr id="1013895824" name="Date Placeholder 2"/>
           <p:cNvSpPr>
             <a:spLocks noGrp="1"/>
           </p:cNvSpPr>
@@ -2536,7 +3138,7 @@
       </p:sp>
       <p:sp>
         <p:nvSpPr>
-          <p:cNvPr id="1680484661" name="Footer Placeholder 3"/>
+          <p:cNvPr id="1959037146" name="Footer Placeholder 3"/>
           <p:cNvSpPr>
             <a:spLocks noGrp="1"/>
           </p:cNvSpPr>
@@ -2558,7 +3160,7 @@
       </p:sp>
       <p:sp>
         <p:nvSpPr>
-          <p:cNvPr id="584321220" name="Slide Number Placeholder 4"/>
+          <p:cNvPr id="1929413922" name="Slide Number Placeholder 4"/>
           <p:cNvSpPr>
             <a:spLocks noGrp="1"/>
           </p:cNvSpPr>
@@ -2609,7 +3211,7 @@
       </p:grpSpPr>
       <p:sp>
         <p:nvSpPr>
-          <p:cNvPr id="1045704255" name="Date Placeholder 1"/>
+          <p:cNvPr id="1490824323" name="Date Placeholder 1"/>
           <p:cNvSpPr>
             <a:spLocks noGrp="1"/>
           </p:cNvSpPr>
@@ -2635,7 +3237,7 @@
       </p:sp>
       <p:sp>
         <p:nvSpPr>
-          <p:cNvPr id="209439955" name="Footer Placeholder 2"/>
+          <p:cNvPr id="1867662239" name="Footer Placeholder 2"/>
           <p:cNvSpPr>
             <a:spLocks noGrp="1"/>
           </p:cNvSpPr>
@@ -2657,7 +3259,7 @@
       </p:sp>
       <p:sp>
         <p:nvSpPr>
-          <p:cNvPr id="1428059767" name="Slide Number Placeholder 3"/>
+          <p:cNvPr id="961392768" name="Slide Number Placeholder 3"/>
           <p:cNvSpPr>
             <a:spLocks noGrp="1"/>
           </p:cNvSpPr>
@@ -2708,7 +3310,7 @@
       </p:grpSpPr>
       <p:sp>
         <p:nvSpPr>
-          <p:cNvPr id="2106341006" name="Title 1"/>
+          <p:cNvPr id="581522080" name="Title 1"/>
           <p:cNvSpPr>
             <a:spLocks noGrp="1"/>
           </p:cNvSpPr>
@@ -2743,7 +3345,7 @@
       </p:sp>
       <p:sp>
         <p:nvSpPr>
-          <p:cNvPr id="879218208" name="Content Placeholder 2"/>
+          <p:cNvPr id="1662324772" name="Content Placeholder 2"/>
           <p:cNvSpPr>
             <a:spLocks noGrp="1"/>
           </p:cNvSpPr>
@@ -2842,7 +3444,7 @@
       </p:sp>
       <p:sp>
         <p:nvSpPr>
-          <p:cNvPr id="761997951" name="Text Placeholder 3"/>
+          <p:cNvPr id="1870411722" name="Text Placeholder 3"/>
           <p:cNvSpPr>
             <a:spLocks noGrp="1"/>
           </p:cNvSpPr>
@@ -2910,7 +3512,7 @@
       </p:sp>
       <p:sp>
         <p:nvSpPr>
-          <p:cNvPr id="1933403739" name="Date Placeholder 4"/>
+          <p:cNvPr id="1655003544" name="Date Placeholder 4"/>
           <p:cNvSpPr>
             <a:spLocks noGrp="1"/>
           </p:cNvSpPr>
@@ -2936,7 +3538,7 @@
       </p:sp>
       <p:sp>
         <p:nvSpPr>
-          <p:cNvPr id="1086449871" name="Footer Placeholder 5"/>
+          <p:cNvPr id="2100000481" name="Footer Placeholder 5"/>
           <p:cNvSpPr>
             <a:spLocks noGrp="1"/>
           </p:cNvSpPr>
@@ -2958,7 +3560,7 @@
       </p:sp>
       <p:sp>
         <p:nvSpPr>
-          <p:cNvPr id="1570432118" name="Slide Number Placeholder 6"/>
+          <p:cNvPr id="1628474000" name="Slide Number Placeholder 6"/>
           <p:cNvSpPr>
             <a:spLocks noGrp="1"/>
           </p:cNvSpPr>
@@ -3009,7 +3611,7 @@
       </p:grpSpPr>
       <p:sp>
         <p:nvSpPr>
-          <p:cNvPr id="214873002" name="Title 1"/>
+          <p:cNvPr id="1370645593" name="Title 1"/>
           <p:cNvSpPr>
             <a:spLocks noGrp="1"/>
           </p:cNvSpPr>
@@ -3044,7 +3646,7 @@
       </p:sp>
       <p:sp>
         <p:nvSpPr>
-          <p:cNvPr id="1387180197" name="Picture Placeholder 2"/>
+          <p:cNvPr id="1955371361" name="Picture Placeholder 2"/>
           <p:cNvSpPr>
             <a:spLocks noChangeAspect="1" noGrp="1"/>
           </p:cNvSpPr>
@@ -3112,7 +3714,7 @@
       </p:sp>
       <p:sp>
         <p:nvSpPr>
-          <p:cNvPr id="1007549447" name="Text Placeholder 3"/>
+          <p:cNvPr id="379155982" name="Text Placeholder 3"/>
           <p:cNvSpPr>
             <a:spLocks noGrp="1"/>
           </p:cNvSpPr>
@@ -3180,7 +3782,7 @@
       </p:sp>
       <p:sp>
         <p:nvSpPr>
-          <p:cNvPr id="1791895889" name="Date Placeholder 4"/>
+          <p:cNvPr id="443360954" name="Date Placeholder 4"/>
           <p:cNvSpPr>
             <a:spLocks noGrp="1"/>
           </p:cNvSpPr>
@@ -3206,7 +3808,7 @@
       </p:sp>
       <p:sp>
         <p:nvSpPr>
-          <p:cNvPr id="1763542879" name="Footer Placeholder 5"/>
+          <p:cNvPr id="452135796" name="Footer Placeholder 5"/>
           <p:cNvSpPr>
             <a:spLocks noGrp="1"/>
           </p:cNvSpPr>
@@ -3228,7 +3830,7 @@
       </p:sp>
       <p:sp>
         <p:nvSpPr>
-          <p:cNvPr id="1160929360" name="Slide Number Placeholder 6"/>
+          <p:cNvPr id="94894427" name="Slide Number Placeholder 6"/>
           <p:cNvSpPr>
             <a:spLocks noGrp="1"/>
           </p:cNvSpPr>
@@ -3287,7 +3889,7 @@
       </p:grpSpPr>
       <p:sp>
         <p:nvSpPr>
-          <p:cNvPr id="718380730" name="Title Placeholder 1"/>
+          <p:cNvPr id="1498203030" name="Title Placeholder 1"/>
           <p:cNvSpPr>
             <a:spLocks noGrp="1"/>
           </p:cNvSpPr>
@@ -3323,7 +3925,7 @@
       </p:sp>
       <p:sp>
         <p:nvSpPr>
-          <p:cNvPr id="2078194988" name="Text Placeholder 2"/>
+          <p:cNvPr id="893507156" name="Text Placeholder 2"/>
           <p:cNvSpPr>
             <a:spLocks noGrp="1"/>
           </p:cNvSpPr>
@@ -3399,7 +4001,7 @@
       </p:sp>
       <p:sp>
         <p:nvSpPr>
-          <p:cNvPr id="420560671" name="Date Placeholder 3"/>
+          <p:cNvPr id="271284085" name="Date Placeholder 3"/>
           <p:cNvSpPr>
             <a:spLocks noGrp="1"/>
           </p:cNvSpPr>
@@ -3443,7 +4045,7 @@
       </p:sp>
       <p:sp>
         <p:nvSpPr>
-          <p:cNvPr id="1565922673" name="Footer Placeholder 4"/>
+          <p:cNvPr id="79681711" name="Footer Placeholder 4"/>
           <p:cNvSpPr>
             <a:spLocks noGrp="1"/>
           </p:cNvSpPr>
@@ -3483,7 +4085,7 @@
       </p:sp>
       <p:sp>
         <p:nvSpPr>
-          <p:cNvPr id="1824967276" name="Slide Number Placeholder 5"/>
+          <p:cNvPr id="419576729" name="Slide Number Placeholder 5"/>
           <p:cNvSpPr>
             <a:spLocks noGrp="1"/>
           </p:cNvSpPr>
@@ -3843,7 +4445,7 @@
       </p:grpSpPr>
       <p:sp>
         <p:nvSpPr>
-          <p:cNvPr id="2101572661" name="Title 1"/>
+          <p:cNvPr id="629009700" name="Title 1"/>
           <p:cNvSpPr>
             <a:spLocks noGrp="1"/>
           </p:cNvSpPr>
@@ -3852,9 +4454,9 @@
           </p:nvPr>
         </p:nvSpPr>
         <p:spPr bwMode="auto">
-          <a:xfrm>
-            <a:off x="340178" y="251505"/>
-            <a:ext cx="9144000" cy="2387599"/>
+          <a:xfrm flipH="0" flipV="0">
+            <a:off x="340177" y="314324"/>
+            <a:ext cx="9144000" cy="1867578"/>
           </a:xfrm>
         </p:spPr>
         <p:txBody>
@@ -3887,7 +4489,7 @@
       </p:sp>
       <p:sp>
         <p:nvSpPr>
-          <p:cNvPr id="1604452101" name="Subtitle 2"/>
+          <p:cNvPr id="919561071" name="Subtitle 2"/>
           <p:cNvSpPr>
             <a:spLocks noGrp="1"/>
           </p:cNvSpPr>
@@ -3897,7 +4499,7 @@
         </p:nvSpPr>
         <p:spPr bwMode="auto">
           <a:xfrm flipH="0" flipV="0">
-            <a:off x="5347607" y="2894466"/>
+            <a:off x="5347606" y="2265815"/>
             <a:ext cx="4546178" cy="929140"/>
           </a:xfrm>
         </p:spPr>
@@ -3944,6 +4546,101 @@
           </a:p>
         </p:txBody>
       </p:sp>
+    </p:spTree>
+  </p:cSld>
+  <p:clrMapOvr>
+    <a:masterClrMapping/>
+  </p:clrMapOvr>
+  <mc:AlternateContent xmlns:mc="http://schemas.openxmlformats.org/markup-compatibility/2006">
+    <mc:Choice xmlns:p159="http://schemas.microsoft.com/office/powerpoint/2015/09/main" xmlns:p14="http://schemas.microsoft.com/office/powerpoint/2010/main" Requires="p159">
+      <p:transition p14:dur="500" advClick="1"/>
+    </mc:Choice>
+    <mc:Fallback>
+      <p:transition advClick="1"/>
+    </mc:Fallback>
+  </mc:AlternateContent>
+</p:sld>
+</file>
+
+<file path=ppt/slides/slide10.xml><?xml version="1.0" encoding="utf-8"?>
+<p:sld xmlns:a="http://schemas.openxmlformats.org/drawingml/2006/main" xmlns:r="http://schemas.openxmlformats.org/officeDocument/2006/relationships" xmlns:p="http://schemas.openxmlformats.org/presentationml/2006/main" xmlns:m="http://schemas.openxmlformats.org/officeDocument/2006/math" xmlns:w="http://schemas.openxmlformats.org/wordprocessingml/2006/main" xmlns:mc="http://schemas.openxmlformats.org/markup-compatibility/2006" showMasterPhAnim="0" showMasterSp="1" show="1">
+  <p:cSld name="">
+    <p:spTree>
+      <p:nvGrpSpPr>
+        <p:cNvPr id="1" name=""/>
+        <p:cNvGrpSpPr/>
+        <p:nvPr/>
+      </p:nvGrpSpPr>
+      <p:grpSpPr bwMode="auto">
+        <a:xfrm>
+          <a:off x="0" y="0"/>
+          <a:ext cx="0" cy="0"/>
+          <a:chOff x="0" y="0"/>
+          <a:chExt cx="0" cy="0"/>
+        </a:xfrm>
+      </p:grpSpPr>
+      <p:sp>
+        <p:nvSpPr>
+          <p:cNvPr id="410955073" name=""/>
+          <p:cNvSpPr txBox="1"/>
+          <p:nvPr/>
+        </p:nvSpPr>
+        <p:spPr bwMode="auto">
+          <a:xfrm rot="0" flipH="0" flipV="0">
+            <a:off x="810599" y="1238249"/>
+            <a:ext cx="9841679" cy="823320"/>
+          </a:xfrm>
+          <a:prstGeom prst="rect">
+            <a:avLst/>
+          </a:prstGeom>
+          <a:noFill/>
+        </p:spPr>
+        <p:txBody>
+          <a:bodyPr vertOverflow="overflow" horzOverflow="overflow" vert="horz" wrap="square" lIns="91440" tIns="45720" rIns="91440" bIns="45720" numCol="1" spcCol="0" rtlCol="0" fromWordArt="0" anchor="t" anchorCtr="0" forceAA="0" upright="0" compatLnSpc="0">
+            <a:spAutoFit/>
+          </a:bodyPr>
+          <a:p>
+            <a:pPr>
+              <a:defRPr/>
+            </a:pPr>
+            <a:r>
+              <a:rPr lang="bg-BG" sz="4800">
+                <a:solidFill>
+                  <a:schemeClr val="bg1"/>
+                </a:solidFill>
+              </a:rPr>
+              <a:t>Благодарим Ви за вниманието!</a:t>
+            </a:r>
+            <a:endParaRPr sz="4800">
+              <a:solidFill>
+                <a:schemeClr val="bg1"/>
+              </a:solidFill>
+            </a:endParaRPr>
+          </a:p>
+        </p:txBody>
+      </p:sp>
+      <p:pic>
+        <p:nvPicPr>
+          <p:cNvPr id="1410341809" name=""/>
+          <p:cNvPicPr>
+            <a:picLocks noChangeAspect="1"/>
+          </p:cNvPicPr>
+          <p:nvPr/>
+        </p:nvPicPr>
+        <p:blipFill rotWithShape="1">
+          <a:blip r:embed="rId3"/>
+          <a:stretch/>
+        </p:blipFill>
+        <p:spPr bwMode="auto">
+          <a:xfrm flipH="0" flipV="0">
+            <a:off x="3990157" y="2304293"/>
+            <a:ext cx="3482564" cy="2833851"/>
+          </a:xfrm>
+          <a:prstGeom prst="rect">
+            <a:avLst/>
+          </a:prstGeom>
+        </p:spPr>
+      </p:pic>
     </p:spTree>
   </p:cSld>
   <p:clrMapOvr>
@@ -3979,7 +4676,7 @@
       </p:grpSpPr>
       <p:sp>
         <p:nvSpPr>
-          <p:cNvPr id="1722334530" name="Title 1"/>
+          <p:cNvPr id="1343171562" name="Title 1"/>
           <p:cNvSpPr>
             <a:spLocks noGrp="1"/>
           </p:cNvSpPr>
@@ -4023,14 +4720,14 @@
       </p:sp>
       <p:sp>
         <p:nvSpPr>
-          <p:cNvPr id="1665018725" name=""/>
+          <p:cNvPr id="1335105683" name=""/>
           <p:cNvSpPr txBox="1"/>
           <p:nvPr/>
         </p:nvSpPr>
         <p:spPr bwMode="auto">
           <a:xfrm rot="0" flipH="0" flipV="0">
-            <a:off x="953892" y="1510392"/>
-            <a:ext cx="8829813" cy="2072999"/>
+            <a:off x="953892" y="1510391"/>
+            <a:ext cx="8848532" cy="2469238"/>
           </a:xfrm>
           <a:prstGeom prst="rect">
             <a:avLst/>
@@ -4124,6 +4821,76 @@
               </a:rPr>
               <a:t>Алексей Стойновски - събиране на информация</a:t>
             </a:r>
+            <a:r>
+              <a:rPr sz="2600">
+                <a:solidFill>
+                  <a:schemeClr val="bg1"/>
+                </a:solidFill>
+                <a:latin typeface="Ubuntu Sans"/>
+                <a:ea typeface="Ubuntu Sans"/>
+                <a:cs typeface="Ubuntu Sans"/>
+              </a:rPr>
+              <a:t>,</a:t>
+            </a:r>
+            <a:r>
+              <a:rPr lang="en-US" sz="2600">
+                <a:solidFill>
+                  <a:schemeClr val="bg1"/>
+                </a:solidFill>
+                <a:latin typeface="Ubuntu Sans"/>
+                <a:ea typeface="Ubuntu Sans"/>
+                <a:cs typeface="Ubuntu Sans"/>
+              </a:rPr>
+              <a:t> </a:t>
+            </a:r>
+            <a:r>
+              <a:rPr lang="bg-BG" sz="2600">
+                <a:solidFill>
+                  <a:schemeClr val="bg1"/>
+                </a:solidFill>
+                <a:latin typeface="Ubuntu Sans"/>
+                <a:ea typeface="Ubuntu Sans"/>
+                <a:cs typeface="Ubuntu Sans"/>
+              </a:rPr>
+              <a:t>обединение на елементите</a:t>
+            </a:r>
+            <a:endParaRPr lang="bg-BG" sz="2600">
+              <a:solidFill>
+                <a:schemeClr val="bg1"/>
+              </a:solidFill>
+              <a:latin typeface="Ubuntu Sans"/>
+              <a:ea typeface="Ubuntu Sans"/>
+              <a:cs typeface="Ubuntu Sans"/>
+            </a:endParaRPr>
+          </a:p>
+          <a:p>
+            <a:pPr marL="371994" indent="-371994">
+              <a:buFont typeface="Arial"/>
+              <a:buChar char="•"/>
+              <a:defRPr/>
+            </a:pPr>
+            <a:r>
+              <a:rPr lang="bg-BG" sz="2600">
+                <a:solidFill>
+                  <a:schemeClr val="bg1"/>
+                </a:solidFill>
+                <a:latin typeface="Ubuntu Sans"/>
+                <a:ea typeface="Ubuntu Sans"/>
+                <a:cs typeface="Ubuntu Sans"/>
+              </a:rPr>
+              <a:t>Виктор Ванчов - </a:t>
+            </a:r>
+            <a:r>
+              <a:rPr lang="en-US" sz="2600">
+                <a:solidFill>
+                  <a:schemeClr val="bg1"/>
+                </a:solidFill>
+                <a:latin typeface="Ubuntu Sans"/>
+                <a:ea typeface="Ubuntu Sans"/>
+                <a:cs typeface="Ubuntu Sans"/>
+              </a:rPr>
+              <a:t>arduino</a:t>
+            </a:r>
             <a:endParaRPr sz="2600">
               <a:solidFill>
                 <a:schemeClr val="bg1"/>
@@ -4148,7 +4915,7 @@
                 <a:ea typeface="Ubuntu Sans"/>
                 <a:cs typeface="Ubuntu Sans"/>
               </a:rPr>
-              <a:t>Виктор Ванчов - </a:t>
+              <a:t>Александър Симеонов</a:t>
             </a:r>
             <a:r>
               <a:rPr lang="en-US" sz="2600">
@@ -4159,7 +4926,18 @@
                 <a:ea typeface="Ubuntu Sans"/>
                 <a:cs typeface="Ubuntu Sans"/>
               </a:rPr>
-              <a:t>arduino</a:t>
+              <a:t> - </a:t>
+            </a:r>
+            <a:r>
+              <a:rPr lang="bg-BG" sz="2600">
+                <a:solidFill>
+                  <a:schemeClr val="bg1"/>
+                </a:solidFill>
+                <a:latin typeface="Ubuntu Sans"/>
+                <a:ea typeface="Ubuntu Sans"/>
+                <a:cs typeface="Ubuntu Sans"/>
+              </a:rPr>
+              <a:t>правене на сайт</a:t>
             </a:r>
             <a:endParaRPr sz="2600">
               <a:solidFill>
@@ -4185,7 +4963,7 @@
                 <a:ea typeface="Ubuntu Sans"/>
                 <a:cs typeface="Ubuntu Sans"/>
               </a:rPr>
-              <a:t>Александър Симеонов</a:t>
+              <a:t>Илиян Сахатчиев</a:t>
             </a:r>
             <a:r>
               <a:rPr lang="en-US" sz="2600">
@@ -4196,55 +4974,7 @@
                 <a:ea typeface="Ubuntu Sans"/>
                 <a:cs typeface="Ubuntu Sans"/>
               </a:rPr>
-              <a:t> - </a:t>
-            </a:r>
-            <a:r>
-              <a:rPr lang="bg-BG" sz="2600">
-                <a:solidFill>
-                  <a:schemeClr val="bg1"/>
-                </a:solidFill>
-                <a:latin typeface="Ubuntu Sans"/>
-                <a:ea typeface="Ubuntu Sans"/>
-                <a:cs typeface="Ubuntu Sans"/>
-              </a:rPr>
-              <a:t>правене на сайт</a:t>
-            </a:r>
-            <a:endParaRPr sz="2600">
-              <a:solidFill>
-                <a:schemeClr val="bg1"/>
-              </a:solidFill>
-              <a:latin typeface="Ubuntu Sans"/>
-              <a:ea typeface="Ubuntu Sans"/>
-              <a:cs typeface="Ubuntu Sans"/>
-            </a:endParaRPr>
-          </a:p>
-          <a:p>
-            <a:pPr marL="371994" indent="-371994">
-              <a:buFont typeface="Arial"/>
-              <a:buChar char="•"/>
-              <a:defRPr/>
-            </a:pPr>
-            <a:r>
-              <a:rPr lang="bg-BG" sz="2600">
-                <a:solidFill>
-                  <a:schemeClr val="bg1"/>
-                </a:solidFill>
-                <a:latin typeface="Ubuntu Sans"/>
-                <a:ea typeface="Ubuntu Sans"/>
-                <a:cs typeface="Ubuntu Sans"/>
-              </a:rPr>
-              <a:t>Илиян Сахатчиев</a:t>
-            </a:r>
-            <a:r>
-              <a:rPr lang="en-US" sz="2600">
-                <a:solidFill>
-                  <a:schemeClr val="bg1"/>
-                </a:solidFill>
-                <a:latin typeface="Ubuntu Sans"/>
-                <a:ea typeface="Ubuntu Sans"/>
-                <a:cs typeface="Ubuntu Sans"/>
-              </a:rPr>
-              <a:t> - backend</a:t>
+              <a:t> - backend, Arduino</a:t>
             </a:r>
             <a:endParaRPr>
               <a:solidFill>
@@ -4258,13 +4988,13 @@
       </p:sp>
       <p:sp>
         <p:nvSpPr>
-          <p:cNvPr id="1439067117" name=""/>
+          <p:cNvPr id="1260303035" name=""/>
           <p:cNvSpPr txBox="1"/>
           <p:nvPr/>
         </p:nvSpPr>
         <p:spPr bwMode="auto">
           <a:xfrm rot="0" flipH="0" flipV="0">
-            <a:off x="749785" y="3966933"/>
+            <a:off x="749784" y="4205057"/>
             <a:ext cx="7021358" cy="640440"/>
           </a:xfrm>
           <a:prstGeom prst="rect">
@@ -4345,7 +5075,7 @@
       </p:grpSpPr>
       <p:sp>
         <p:nvSpPr>
-          <p:cNvPr id="745327546" name="Title 1"/>
+          <p:cNvPr id="1973829767" name="Title 1"/>
           <p:cNvSpPr>
             <a:spLocks noGrp="1"/>
           </p:cNvSpPr>
@@ -4388,14 +5118,14 @@
       </p:sp>
       <p:sp>
         <p:nvSpPr>
-          <p:cNvPr id="440238925" name=""/>
+          <p:cNvPr id="411591719" name=""/>
           <p:cNvSpPr txBox="1"/>
           <p:nvPr/>
         </p:nvSpPr>
         <p:spPr bwMode="auto">
           <a:xfrm rot="0" flipH="0" flipV="0">
-            <a:off x="559285" y="1442356"/>
-            <a:ext cx="8367171" cy="914760"/>
+            <a:off x="559284" y="1690005"/>
+            <a:ext cx="7358764" cy="2194920"/>
           </a:xfrm>
           <a:prstGeom prst="rect">
             <a:avLst/>
@@ -4407,26 +5137,96 @@
             <a:spAutoFit/>
           </a:bodyPr>
           <a:p>
+            <a:pPr>
+              <a:defRPr/>
+            </a:pPr>
+            <a:r>
+              <a:rPr lang="bg-BG" sz="2000">
+                <a:solidFill>
+                  <a:schemeClr val="bg1"/>
+                </a:solidFill>
+              </a:rPr>
+              <a:t>Проблемите на хората с деменция:</a:t>
+            </a:r>
+            <a:endParaRPr sz="2000">
+              <a:solidFill>
+                <a:schemeClr val="bg1"/>
+              </a:solidFill>
+            </a:endParaRPr>
+          </a:p>
+          <a:p>
             <a:pPr marL="283879" indent="-283879">
               <a:buFont typeface="Arial"/>
               <a:buChar char="•"/>
               <a:defRPr/>
             </a:pPr>
             <a:r>
-              <a:rPr lang="bg-BG">
-                <a:solidFill>
-                  <a:schemeClr val="bg1"/>
-                </a:solidFill>
-              </a:rPr>
-              <a:t>Проблемите на инд</a:t>
-            </a:r>
-            <a:r>
-              <a:rPr lang="bg-BG">
-                <a:solidFill>
-                  <a:schemeClr val="bg1"/>
-                </a:solidFill>
-              </a:rPr>
-              <a:t>ивиди с деменция</a:t>
+              <a:rPr lang="bg-BG" sz="2000">
+                <a:solidFill>
+                  <a:schemeClr val="bg1"/>
+                </a:solidFill>
+              </a:rPr>
+              <a:t>забравят</a:t>
+            </a:r>
+            <a:endParaRPr lang="bg-BG" sz="2000">
+              <a:solidFill>
+                <a:schemeClr val="bg1"/>
+              </a:solidFill>
+            </a:endParaRPr>
+          </a:p>
+          <a:p>
+            <a:pPr marL="283879" indent="-283879">
+              <a:buFont typeface="Arial"/>
+              <a:buChar char="•"/>
+              <a:defRPr/>
+            </a:pPr>
+            <a:r>
+              <a:rPr lang="bg-BG" sz="2000">
+                <a:solidFill>
+                  <a:schemeClr val="bg1"/>
+                </a:solidFill>
+              </a:rPr>
+              <a:t>не искат да си вземат лекарствата</a:t>
+            </a:r>
+            <a:endParaRPr sz="2000">
+              <a:solidFill>
+                <a:schemeClr val="bg1"/>
+              </a:solidFill>
+            </a:endParaRPr>
+          </a:p>
+          <a:p>
+            <a:pPr marL="683929" lvl="1" indent="-283879">
+              <a:buFont typeface="Arial"/>
+              <a:buChar char="–"/>
+              <a:defRPr/>
+            </a:pPr>
+            <a:r>
+              <a:rPr lang="bg-BG" sz="2000">
+                <a:solidFill>
+                  <a:schemeClr val="bg1"/>
+                </a:solidFill>
+              </a:rPr>
+              <a:t>с музиката се целим подсъзнателно да им въздействаме</a:t>
+            </a:r>
+            <a:endParaRPr sz="2000">
+              <a:solidFill>
+                <a:schemeClr val="bg1"/>
+              </a:solidFill>
+            </a:endParaRPr>
+          </a:p>
+          <a:p>
+            <a:pPr marL="283879" lvl="0" indent="-283879">
+              <a:buFont typeface="Arial"/>
+              <a:buChar char="•"/>
+              <a:defRPr/>
+            </a:pPr>
+            <a:r>
+              <a:rPr lang="bg-BG" sz="2000">
+                <a:solidFill>
+                  <a:schemeClr val="bg1"/>
+                </a:solidFill>
+              </a:rPr>
+              <a:t>вземат грешните лекарства</a:t>
             </a:r>
             <a:endParaRPr lang="bg-BG">
               <a:solidFill>
@@ -4435,39 +5235,1303 @@
             </a:endParaRPr>
           </a:p>
           <a:p>
-            <a:pPr>
-              <a:defRPr/>
-            </a:pPr>
-            <a:r>
-              <a:rPr lang="bg-BG">
-                <a:solidFill>
-                  <a:schemeClr val="bg1"/>
-                </a:solidFill>
-              </a:rPr>
-              <a:t>	- Силни шумове и светлини</a:t>
-            </a:r>
+            <a:pPr lvl="0">
+              <a:defRPr/>
+            </a:pPr>
             <a:endParaRPr lang="bg-BG">
               <a:solidFill>
                 <a:schemeClr val="bg1"/>
               </a:solidFill>
             </a:endParaRPr>
           </a:p>
-          <a:p>
-            <a:pPr>
-              <a:defRPr/>
-            </a:pPr>
+        </p:txBody>
+      </p:sp>
+    </p:spTree>
+  </p:cSld>
+  <p:clrMapOvr>
+    <a:masterClrMapping/>
+  </p:clrMapOvr>
+  <mc:AlternateContent xmlns:mc="http://schemas.openxmlformats.org/markup-compatibility/2006">
+    <mc:Choice xmlns:p159="http://schemas.microsoft.com/office/powerpoint/2015/09/main" xmlns:p14="http://schemas.microsoft.com/office/powerpoint/2010/main" Requires="p159">
+      <p:transition p14:dur="500" advClick="1"/>
+    </mc:Choice>
+    <mc:Fallback>
+      <p:transition advClick="1"/>
+    </mc:Fallback>
+  </mc:AlternateContent>
+</p:sld>
+</file>
+
+<file path=ppt/slides/slide4.xml><?xml version="1.0" encoding="utf-8"?>
+<p:sld xmlns:a="http://schemas.openxmlformats.org/drawingml/2006/main" xmlns:r="http://schemas.openxmlformats.org/officeDocument/2006/relationships" xmlns:p="http://schemas.openxmlformats.org/presentationml/2006/main" xmlns:m="http://schemas.openxmlformats.org/officeDocument/2006/math" xmlns:w="http://schemas.openxmlformats.org/wordprocessingml/2006/main" xmlns:mc="http://schemas.openxmlformats.org/markup-compatibility/2006" showMasterPhAnim="0" showMasterSp="1" show="1">
+  <p:cSld name="">
+    <p:spTree>
+      <p:nvGrpSpPr>
+        <p:cNvPr id="1" name=""/>
+        <p:cNvGrpSpPr/>
+        <p:nvPr/>
+      </p:nvGrpSpPr>
+      <p:grpSpPr bwMode="auto">
+        <a:xfrm>
+          <a:off x="0" y="0"/>
+          <a:ext cx="0" cy="0"/>
+          <a:chOff x="0" y="0"/>
+          <a:chExt cx="0" cy="0"/>
+        </a:xfrm>
+      </p:grpSpPr>
+      <p:sp>
+        <p:nvSpPr>
+          <p:cNvPr id="1515086536" name="Title 1"/>
+          <p:cNvSpPr>
+            <a:spLocks noGrp="1"/>
+          </p:cNvSpPr>
+          <p:nvPr>
+            <p:ph type="title"/>
+          </p:nvPr>
+        </p:nvSpPr>
+        <p:spPr bwMode="auto"/>
+        <p:txBody>
+          <a:bodyPr/>
+          <a:lstStyle/>
+          <a:p>
+            <a:pPr>
+              <a:defRPr/>
+            </a:pPr>
+            <a:r>
+              <a:rPr lang="bg-BG" b="1">
+                <a:solidFill>
+                  <a:schemeClr val="bg1"/>
+                </a:solidFill>
+                <a:latin typeface="Ubuntu Sans"/>
+                <a:ea typeface="Ubuntu Sans"/>
+                <a:cs typeface="Ubuntu Sans"/>
+              </a:rPr>
+              <a:t>Технологии</a:t>
+            </a:r>
+            <a:endParaRPr b="1">
+              <a:solidFill>
+                <a:schemeClr val="bg1"/>
+              </a:solidFill>
+              <a:latin typeface="Ubuntu Sans"/>
+              <a:cs typeface="Ubuntu Sans"/>
+            </a:endParaRPr>
+          </a:p>
+        </p:txBody>
+      </p:sp>
+      <p:sp>
+        <p:nvSpPr>
+          <p:cNvPr id="213781527" name="Content Placeholder 2"/>
+          <p:cNvSpPr>
+            <a:spLocks noGrp="1"/>
+          </p:cNvSpPr>
+          <p:nvPr>
+            <p:ph idx="1"/>
+          </p:nvPr>
+        </p:nvSpPr>
+        <p:spPr bwMode="auto">
+          <a:xfrm flipH="0" flipV="0">
+            <a:off x="695323" y="1644649"/>
+            <a:ext cx="9754574" cy="4351338"/>
+          </a:xfrm>
+        </p:spPr>
+        <p:txBody>
+          <a:bodyPr/>
+          <a:lstStyle/>
+          <a:p>
+            <a:pPr>
+              <a:defRPr/>
+            </a:pPr>
+            <a:r>
+              <a:rPr lang="en-US" sz="2800" b="0" i="0" u="none" strike="noStrike" cap="none" spc="0">
+                <a:solidFill>
+                  <a:schemeClr val="bg1"/>
+                </a:solidFill>
+                <a:latin typeface="+mn-lt"/>
+                <a:ea typeface="+mn-ea"/>
+                <a:cs typeface="+mn-cs"/>
+              </a:rPr>
+              <a:t>GitHub</a:t>
+            </a:r>
+            <a:endParaRPr lang="bg-BG">
+              <a:solidFill>
+                <a:schemeClr val="bg1"/>
+              </a:solidFill>
+            </a:endParaRPr>
+          </a:p>
+          <a:p>
+            <a:pPr>
+              <a:defRPr/>
+            </a:pPr>
+            <a:r>
+              <a:rPr lang="en-US">
+                <a:solidFill>
+                  <a:schemeClr val="bg1"/>
+                </a:solidFill>
+              </a:rPr>
+              <a:t>Krita – </a:t>
+            </a:r>
             <a:r>
               <a:rPr lang="bg-BG">
                 <a:solidFill>
                   <a:schemeClr val="bg1"/>
                 </a:solidFill>
               </a:rPr>
-              <a:t>	- Забравяне</a:t>
-            </a:r>
+              <a:t>за дизайн на фонове и лого</a:t>
+            </a:r>
+            <a:endParaRPr lang="bg-BG">
+              <a:solidFill>
+                <a:schemeClr val="bg1"/>
+              </a:solidFill>
+            </a:endParaRPr>
+          </a:p>
+          <a:p>
+            <a:pPr>
+              <a:defRPr/>
+            </a:pPr>
+            <a:r>
+              <a:rPr lang="en-US">
+                <a:solidFill>
+                  <a:schemeClr val="bg1"/>
+                </a:solidFill>
+              </a:rPr>
+              <a:t>Ibis Paint X – </a:t>
+            </a:r>
+            <a:r>
+              <a:rPr lang="bg-BG">
+                <a:solidFill>
+                  <a:schemeClr val="bg1"/>
+                </a:solidFill>
+              </a:rPr>
+              <a:t>за скициране на сайта</a:t>
+            </a:r>
+            <a:endParaRPr lang="bg-BG">
+              <a:solidFill>
+                <a:schemeClr val="bg1"/>
+              </a:solidFill>
+            </a:endParaRPr>
+          </a:p>
+          <a:p>
+            <a:pPr>
+              <a:defRPr/>
+            </a:pPr>
+            <a:r>
+              <a:rPr lang="en-US">
+                <a:solidFill>
+                  <a:schemeClr val="bg1"/>
+                </a:solidFill>
+              </a:rPr>
+              <a:t>Arduino </a:t>
+            </a:r>
+            <a:r>
+              <a:rPr lang="bg-BG">
+                <a:solidFill>
+                  <a:schemeClr val="bg1"/>
+                </a:solidFill>
+              </a:rPr>
+              <a:t>платки </a:t>
+            </a:r>
+            <a:r>
+              <a:rPr lang="bg-BG">
+                <a:solidFill>
+                  <a:schemeClr val="bg1"/>
+                </a:solidFill>
+              </a:rPr>
+              <a:t>и </a:t>
+            </a:r>
+            <a:r>
+              <a:rPr lang="en-US">
+                <a:solidFill>
+                  <a:schemeClr val="bg1"/>
+                </a:solidFill>
+              </a:rPr>
+              <a:t>IDE</a:t>
+            </a:r>
+            <a:r>
+              <a:rPr lang="bg-BG">
+                <a:solidFill>
+                  <a:schemeClr val="bg1"/>
+                </a:solidFill>
+              </a:rPr>
+              <a:t> – з</a:t>
+            </a:r>
+            <a:r>
+              <a:rPr lang="bg-BG">
+                <a:solidFill>
+                  <a:schemeClr val="bg1"/>
+                </a:solidFill>
+              </a:rPr>
+              <a:t>а програмиране на функционираща кутия</a:t>
+            </a:r>
+            <a:endParaRPr lang="bg-BG">
+              <a:solidFill>
+                <a:schemeClr val="bg1"/>
+              </a:solidFill>
+            </a:endParaRPr>
+          </a:p>
+          <a:p>
+            <a:pPr>
+              <a:defRPr/>
+            </a:pPr>
+            <a:r>
+              <a:rPr lang="en-US">
+                <a:solidFill>
+                  <a:schemeClr val="bg1"/>
+                </a:solidFill>
+              </a:rPr>
+              <a:t>Cursor ai – </a:t>
+            </a:r>
+            <a:r>
+              <a:rPr lang="bg-BG">
+                <a:solidFill>
+                  <a:schemeClr val="bg1"/>
+                </a:solidFill>
+              </a:rPr>
+              <a:t>помощ за кодовете за кутията и сайта </a:t>
+            </a:r>
+            <a:endParaRPr lang="bg-BG">
+              <a:solidFill>
+                <a:schemeClr val="bg1"/>
+              </a:solidFill>
+            </a:endParaRPr>
+          </a:p>
+          <a:p>
+            <a:pPr marL="0" indent="0">
+              <a:buFont typeface="Arial"/>
+              <a:buNone/>
+              <a:defRPr/>
+            </a:pPr>
             <a:endParaRPr>
               <a:solidFill>
                 <a:schemeClr val="bg1"/>
               </a:solidFill>
+            </a:endParaRPr>
+          </a:p>
+        </p:txBody>
+      </p:sp>
+    </p:spTree>
+  </p:cSld>
+  <p:clrMapOvr>
+    <a:masterClrMapping/>
+  </p:clrMapOvr>
+  <mc:AlternateContent xmlns:mc="http://schemas.openxmlformats.org/markup-compatibility/2006">
+    <mc:Choice xmlns:p159="http://schemas.microsoft.com/office/powerpoint/2015/09/main" xmlns:p14="http://schemas.microsoft.com/office/powerpoint/2010/main" Requires="p159">
+      <p:transition p14:dur="500" advClick="1"/>
+    </mc:Choice>
+    <mc:Fallback>
+      <p:transition advClick="1"/>
+    </mc:Fallback>
+  </mc:AlternateContent>
+</p:sld>
+</file>
+
+<file path=ppt/slides/slide5.xml><?xml version="1.0" encoding="utf-8"?>
+<p:sld xmlns:a="http://schemas.openxmlformats.org/drawingml/2006/main" xmlns:r="http://schemas.openxmlformats.org/officeDocument/2006/relationships" xmlns:p="http://schemas.openxmlformats.org/presentationml/2006/main" xmlns:m="http://schemas.openxmlformats.org/officeDocument/2006/math" xmlns:w="http://schemas.openxmlformats.org/wordprocessingml/2006/main" xmlns:mc="http://schemas.openxmlformats.org/markup-compatibility/2006" showMasterPhAnim="0" showMasterSp="1" show="1">
+  <p:cSld name="">
+    <p:spTree>
+      <p:nvGrpSpPr>
+        <p:cNvPr id="1" name=""/>
+        <p:cNvGrpSpPr/>
+        <p:nvPr/>
+      </p:nvGrpSpPr>
+      <p:grpSpPr bwMode="auto">
+        <a:xfrm>
+          <a:off x="0" y="0"/>
+          <a:ext cx="0" cy="0"/>
+          <a:chOff x="0" y="0"/>
+          <a:chExt cx="0" cy="0"/>
+        </a:xfrm>
+      </p:grpSpPr>
+      <p:sp>
+        <p:nvSpPr>
+          <p:cNvPr id="1888383228" name="Title 1"/>
+          <p:cNvSpPr>
+            <a:spLocks noGrp="1"/>
+          </p:cNvSpPr>
+          <p:nvPr>
+            <p:ph type="title"/>
+          </p:nvPr>
+        </p:nvSpPr>
+        <p:spPr bwMode="auto"/>
+        <p:txBody>
+          <a:bodyPr/>
+          <a:lstStyle/>
+          <a:p>
+            <a:pPr>
+              <a:defRPr/>
+            </a:pPr>
+            <a:r>
+              <a:rPr lang="bg-BG" b="1">
+                <a:solidFill>
+                  <a:schemeClr val="bg1"/>
+                </a:solidFill>
+                <a:latin typeface="Ubuntu Sans"/>
+                <a:ea typeface="Ubuntu Sans"/>
+                <a:cs typeface="Ubuntu Sans"/>
+              </a:rPr>
+              <a:t>Актуализация</a:t>
+            </a:r>
+            <a:endParaRPr b="1">
+              <a:solidFill>
+                <a:schemeClr val="bg1"/>
+              </a:solidFill>
+              <a:latin typeface="Ubuntu Sans"/>
+              <a:cs typeface="Ubuntu Sans"/>
+            </a:endParaRPr>
+          </a:p>
+        </p:txBody>
+      </p:sp>
+      <p:sp>
+        <p:nvSpPr>
+          <p:cNvPr id="989443024" name="Content Placeholder 2"/>
+          <p:cNvSpPr>
+            <a:spLocks noGrp="1"/>
+          </p:cNvSpPr>
+          <p:nvPr>
+            <p:ph idx="1"/>
+          </p:nvPr>
+        </p:nvSpPr>
+        <p:spPr bwMode="auto">
+          <a:xfrm flipH="0" flipV="0">
+            <a:off x="838198" y="1825624"/>
+            <a:ext cx="9392625" cy="4351338"/>
+          </a:xfrm>
+        </p:spPr>
+        <p:txBody>
+          <a:bodyPr/>
+          <a:lstStyle/>
+          <a:p>
+            <a:pPr>
+              <a:defRPr/>
+            </a:pPr>
+            <a:r>
+              <a:rPr lang="bg-BG">
+                <a:solidFill>
+                  <a:schemeClr val="bg1"/>
+                </a:solidFill>
+                <a:latin typeface="Ubuntu Sans"/>
+                <a:ea typeface="Ubuntu Sans"/>
+                <a:cs typeface="Ubuntu Sans"/>
+              </a:rPr>
+              <a:t>Успяхме да направим прототип на кутията, които има </a:t>
+            </a:r>
+            <a:r>
+              <a:rPr lang="bg-BG">
+                <a:solidFill>
+                  <a:schemeClr val="bg1"/>
+                </a:solidFill>
+                <a:latin typeface="Ubuntu Sans"/>
+                <a:ea typeface="Ubuntu Sans"/>
+                <a:cs typeface="Ubuntu Sans"/>
+              </a:rPr>
+              <a:t>нагласящи се периоди на взимане</a:t>
+            </a:r>
+            <a:r>
+              <a:rPr lang="bg-BG">
+                <a:solidFill>
+                  <a:schemeClr val="bg1"/>
+                </a:solidFill>
+                <a:latin typeface="Ubuntu Sans"/>
+                <a:cs typeface="Ubuntu Sans"/>
+              </a:rPr>
+              <a:t> и показва кое лекарство трябва да се вземе.</a:t>
+            </a:r>
+            <a:endParaRPr lang="bg-BG">
+              <a:solidFill>
+                <a:schemeClr val="bg1"/>
+              </a:solidFill>
+              <a:latin typeface="Ubuntu Sans"/>
+              <a:ea typeface="Ubuntu Sans"/>
+              <a:cs typeface="Ubuntu Sans"/>
+            </a:endParaRPr>
+          </a:p>
+          <a:p>
+            <a:pPr>
+              <a:defRPr/>
+            </a:pPr>
+            <a:r>
+              <a:rPr lang="bg-BG" sz="2800" b="0" i="0" u="none" strike="noStrike" cap="none" spc="0">
+                <a:solidFill>
+                  <a:schemeClr val="bg1"/>
+                </a:solidFill>
+                <a:latin typeface="Ubuntu Sans"/>
+                <a:ea typeface="Ubuntu Sans"/>
+                <a:cs typeface="Ubuntu Sans"/>
+              </a:rPr>
+              <a:t>Направихме</a:t>
+            </a:r>
+            <a:r>
+              <a:rPr lang="bg-BG">
+                <a:solidFill>
+                  <a:schemeClr val="bg1"/>
+                </a:solidFill>
+                <a:latin typeface="Ubuntu Sans"/>
+                <a:cs typeface="Ubuntu Sans"/>
+              </a:rPr>
+              <a:t> и сайт, който да се свърже с кутията и да нагласи</a:t>
+            </a:r>
+            <a:r>
+              <a:rPr lang="bg-BG">
+                <a:solidFill>
+                  <a:schemeClr val="bg1"/>
+                </a:solidFill>
+                <a:latin typeface="Ubuntu Sans"/>
+                <a:cs typeface="Ubuntu Sans"/>
+              </a:rPr>
+              <a:t> всички специфики.</a:t>
+            </a:r>
+            <a:endParaRPr lang="bg-BG">
+              <a:solidFill>
+                <a:schemeClr val="bg1"/>
+              </a:solidFill>
+              <a:latin typeface="Ubuntu Sans"/>
+              <a:cs typeface="Ubuntu Sans"/>
+            </a:endParaRPr>
+          </a:p>
+          <a:p>
+            <a:pPr marL="0" indent="0">
+              <a:buFont typeface="Arial"/>
+              <a:buNone/>
+              <a:defRPr/>
+            </a:pPr>
+            <a:endParaRPr lang="bg-BG">
+              <a:solidFill>
+                <a:schemeClr val="bg1"/>
+              </a:solidFill>
+              <a:latin typeface="Ubuntu Sans"/>
+              <a:cs typeface="Ubuntu Sans"/>
+            </a:endParaRPr>
+          </a:p>
+        </p:txBody>
+      </p:sp>
+    </p:spTree>
+  </p:cSld>
+  <p:clrMapOvr>
+    <a:masterClrMapping/>
+  </p:clrMapOvr>
+  <mc:AlternateContent xmlns:mc="http://schemas.openxmlformats.org/markup-compatibility/2006">
+    <mc:Choice xmlns:p159="http://schemas.microsoft.com/office/powerpoint/2015/09/main" xmlns:p14="http://schemas.microsoft.com/office/powerpoint/2010/main" Requires="p159">
+      <p:transition p14:dur="500" advClick="1"/>
+    </mc:Choice>
+    <mc:Fallback>
+      <p:transition advClick="1"/>
+    </mc:Fallback>
+  </mc:AlternateContent>
+</p:sld>
+</file>
+
+<file path=ppt/slides/slide6.xml><?xml version="1.0" encoding="utf-8"?>
+<p:sld xmlns:a="http://schemas.openxmlformats.org/drawingml/2006/main" xmlns:r="http://schemas.openxmlformats.org/officeDocument/2006/relationships" xmlns:p="http://schemas.openxmlformats.org/presentationml/2006/main" xmlns:m="http://schemas.openxmlformats.org/officeDocument/2006/math" xmlns:w="http://schemas.openxmlformats.org/wordprocessingml/2006/main" xmlns:mc="http://schemas.openxmlformats.org/markup-compatibility/2006" showMasterPhAnim="0" showMasterSp="1" show="1">
+  <p:cSld name="">
+    <p:spTree>
+      <p:nvGrpSpPr>
+        <p:cNvPr id="1" name=""/>
+        <p:cNvGrpSpPr/>
+        <p:nvPr/>
+      </p:nvGrpSpPr>
+      <p:grpSpPr bwMode="auto">
+        <a:xfrm>
+          <a:off x="0" y="0"/>
+          <a:ext cx="0" cy="0"/>
+          <a:chOff x="0" y="0"/>
+          <a:chExt cx="0" cy="0"/>
+        </a:xfrm>
+      </p:grpSpPr>
+      <p:sp>
+        <p:nvSpPr>
+          <p:cNvPr id="1418913664" name="Title 1"/>
+          <p:cNvSpPr>
+            <a:spLocks noGrp="1"/>
+          </p:cNvSpPr>
+          <p:nvPr>
+            <p:ph type="title"/>
+          </p:nvPr>
+        </p:nvSpPr>
+        <p:spPr bwMode="auto"/>
+        <p:txBody>
+          <a:bodyPr/>
+          <a:lstStyle/>
+          <a:p>
+            <a:pPr>
+              <a:defRPr/>
+            </a:pPr>
+            <a:r>
+              <a:rPr b="1">
+                <a:solidFill>
+                  <a:schemeClr val="bg1"/>
+                </a:solidFill>
+                <a:latin typeface="Ubuntu Sans"/>
+                <a:ea typeface="Ubuntu Sans"/>
+                <a:cs typeface="Ubuntu Sans"/>
+              </a:rPr>
+              <a:t>Medicine Man </a:t>
+            </a:r>
+            <a:r>
+              <a:rPr lang="bg-BG" b="1">
+                <a:solidFill>
+                  <a:schemeClr val="bg1"/>
+                </a:solidFill>
+                <a:latin typeface="Ubuntu Sans"/>
+                <a:ea typeface="Ubuntu Sans"/>
+                <a:cs typeface="Ubuntu Sans"/>
+              </a:rPr>
+              <a:t>в бъдещето:</a:t>
+            </a:r>
+            <a:endParaRPr b="1">
+              <a:solidFill>
+                <a:schemeClr val="bg1"/>
+              </a:solidFill>
+              <a:latin typeface="Ubuntu Sans"/>
+              <a:cs typeface="Ubuntu Sans"/>
+            </a:endParaRPr>
+          </a:p>
+        </p:txBody>
+      </p:sp>
+      <p:sp>
+        <p:nvSpPr>
+          <p:cNvPr id="1424981808" name=""/>
+          <p:cNvSpPr txBox="1"/>
+          <p:nvPr/>
+        </p:nvSpPr>
+        <p:spPr bwMode="auto">
+          <a:xfrm rot="0" flipH="0" flipV="0">
+            <a:off x="905849" y="1895474"/>
+            <a:ext cx="10439399" cy="366119"/>
+          </a:xfrm>
+          <a:prstGeom prst="rect">
+            <a:avLst/>
+          </a:prstGeom>
+          <a:noFill/>
+        </p:spPr>
+        <p:txBody>
+          <a:bodyPr vertOverflow="overflow" horzOverflow="overflow" vert="horz" wrap="square" lIns="91440" tIns="45720" rIns="91440" bIns="45720" numCol="1" spcCol="0" rtlCol="0" fromWordArt="0" anchor="t" anchorCtr="0" forceAA="0" upright="0" compatLnSpc="0">
+            <a:spAutoFit/>
+          </a:bodyPr>
+          <a:p>
+            <a:pPr>
+              <a:defRPr/>
+            </a:pPr>
+            <a:endParaRPr/>
+          </a:p>
+        </p:txBody>
+      </p:sp>
+      <p:sp>
+        <p:nvSpPr>
+          <p:cNvPr id="762076445" name=""/>
+          <p:cNvSpPr txBox="1"/>
+          <p:nvPr/>
+        </p:nvSpPr>
+        <p:spPr bwMode="auto">
+          <a:xfrm rot="0" flipH="0" flipV="0">
+            <a:off x="1220174" y="1790699"/>
+            <a:ext cx="7428959" cy="2286359"/>
+          </a:xfrm>
+          <a:prstGeom prst="rect">
+            <a:avLst/>
+          </a:prstGeom>
+          <a:noFill/>
+        </p:spPr>
+        <p:txBody>
+          <a:bodyPr vertOverflow="overflow" horzOverflow="overflow" vert="horz" wrap="square" lIns="91440" tIns="45720" rIns="91440" bIns="45720" numCol="1" spcCol="0" rtlCol="0" fromWordArt="0" anchor="t" anchorCtr="0" forceAA="0" upright="0" compatLnSpc="0">
+            <a:spAutoFit/>
+          </a:bodyPr>
+          <a:p>
+            <a:pPr marL="283879" indent="-283879">
+              <a:buFont typeface="Arial"/>
+              <a:buChar char="–"/>
+              <a:defRPr/>
+            </a:pPr>
+            <a:r>
+              <a:rPr lang="bg-BG">
+                <a:solidFill>
+                  <a:schemeClr val="bg1"/>
+                </a:solidFill>
+              </a:rPr>
+              <a:t>да избереш модел на кутията (и колко раздела има в нея)</a:t>
+            </a:r>
+            <a:endParaRPr lang="bg-BG">
+              <a:solidFill>
+                <a:schemeClr val="bg1"/>
+              </a:solidFill>
+            </a:endParaRPr>
+          </a:p>
+          <a:p>
+            <a:pPr marL="283879" indent="-283879">
+              <a:buFont typeface="Arial"/>
+              <a:buChar char="–"/>
+              <a:defRPr/>
+            </a:pPr>
+            <a:endParaRPr>
+              <a:solidFill>
+                <a:schemeClr val="bg1"/>
+              </a:solidFill>
+            </a:endParaRPr>
+          </a:p>
+          <a:p>
+            <a:pPr marL="283879" indent="-283879">
+              <a:buFont typeface="Arial"/>
+              <a:buChar char="–"/>
+              <a:defRPr/>
+            </a:pPr>
+            <a:r>
+              <a:rPr lang="bg-BG">
+                <a:solidFill>
+                  <a:schemeClr val="bg1"/>
+                </a:solidFill>
+              </a:rPr>
+              <a:t>при 5 минути без изключване на алармата се звъни на извънреден контакт</a:t>
+            </a:r>
+            <a:endParaRPr lang="bg-BG">
+              <a:solidFill>
+                <a:schemeClr val="bg1"/>
+              </a:solidFill>
+            </a:endParaRPr>
+          </a:p>
+          <a:p>
+            <a:pPr marL="283879" indent="-283879">
+              <a:buFont typeface="Arial"/>
+              <a:buChar char="–"/>
+              <a:defRPr/>
+            </a:pPr>
+            <a:endParaRPr>
+              <a:solidFill>
+                <a:schemeClr val="bg1"/>
+              </a:solidFill>
+            </a:endParaRPr>
+          </a:p>
+          <a:p>
+            <a:pPr marL="283879" indent="-283879">
+              <a:buFont typeface="Arial"/>
+              <a:buChar char="–"/>
+              <a:defRPr/>
+            </a:pPr>
+            <a:r>
+              <a:rPr lang="bg-BG">
+                <a:solidFill>
+                  <a:schemeClr val="bg1"/>
+                </a:solidFill>
+              </a:rPr>
+              <a:t>да може да се избира всякаква песен за алармата </a:t>
+            </a:r>
+            <a:endParaRPr lang="bg-BG">
+              <a:solidFill>
+                <a:schemeClr val="bg1"/>
+              </a:solidFill>
+            </a:endParaRPr>
+          </a:p>
+          <a:p>
+            <a:pPr marL="283879" indent="-283879">
+              <a:buFont typeface="Arial"/>
+              <a:buChar char="–"/>
+              <a:defRPr/>
+            </a:pPr>
+            <a:endParaRPr>
+              <a:solidFill>
+                <a:schemeClr val="bg1"/>
+              </a:solidFill>
+            </a:endParaRPr>
+          </a:p>
+          <a:p>
+            <a:pPr>
+              <a:defRPr/>
+            </a:pPr>
+            <a:endParaRPr>
+              <a:solidFill>
+                <a:schemeClr val="bg1"/>
+              </a:solidFill>
+            </a:endParaRPr>
+          </a:p>
+        </p:txBody>
+      </p:sp>
+    </p:spTree>
+  </p:cSld>
+  <p:clrMapOvr>
+    <a:masterClrMapping/>
+  </p:clrMapOvr>
+  <mc:AlternateContent xmlns:mc="http://schemas.openxmlformats.org/markup-compatibility/2006">
+    <mc:Choice xmlns:p159="http://schemas.microsoft.com/office/powerpoint/2015/09/main" xmlns:p14="http://schemas.microsoft.com/office/powerpoint/2010/main" Requires="p159">
+      <p:transition p14:dur="500" advClick="1"/>
+    </mc:Choice>
+    <mc:Fallback>
+      <p:transition advClick="1"/>
+    </mc:Fallback>
+  </mc:AlternateContent>
+</p:sld>
+</file>
+
+<file path=ppt/slides/slide7.xml><?xml version="1.0" encoding="utf-8"?>
+<p:sld xmlns:a="http://schemas.openxmlformats.org/drawingml/2006/main" xmlns:r="http://schemas.openxmlformats.org/officeDocument/2006/relationships" xmlns:p="http://schemas.openxmlformats.org/presentationml/2006/main" xmlns:m="http://schemas.openxmlformats.org/officeDocument/2006/math" xmlns:w="http://schemas.openxmlformats.org/wordprocessingml/2006/main" xmlns:mc="http://schemas.openxmlformats.org/markup-compatibility/2006" showMasterPhAnim="0" showMasterSp="1" show="1">
+  <p:cSld name="">
+    <p:spTree>
+      <p:nvGrpSpPr>
+        <p:cNvPr id="1" name=""/>
+        <p:cNvGrpSpPr/>
+        <p:nvPr/>
+      </p:nvGrpSpPr>
+      <p:grpSpPr bwMode="auto">
+        <a:xfrm>
+          <a:off x="0" y="0"/>
+          <a:ext cx="0" cy="0"/>
+          <a:chOff x="0" y="0"/>
+          <a:chExt cx="0" cy="0"/>
+        </a:xfrm>
+      </p:grpSpPr>
+      <p:sp>
+        <p:nvSpPr>
+          <p:cNvPr id="1702977861" name=""/>
+          <p:cNvSpPr txBox="1"/>
+          <p:nvPr/>
+        </p:nvSpPr>
+        <p:spPr bwMode="auto">
+          <a:xfrm rot="0" flipH="0" flipV="0">
+            <a:off x="2239349" y="2074905"/>
+            <a:ext cx="7420694" cy="1189080"/>
+          </a:xfrm>
+          <a:prstGeom prst="rect">
+            <a:avLst/>
+          </a:prstGeom>
+          <a:noFill/>
+        </p:spPr>
+        <p:txBody>
+          <a:bodyPr vertOverflow="overflow" horzOverflow="overflow" vert="horz" wrap="square" lIns="91440" tIns="45720" rIns="91440" bIns="45720" numCol="1" spcCol="0" rtlCol="0" fromWordArt="0" anchor="t" anchorCtr="0" forceAA="0" upright="0" compatLnSpc="0">
+            <a:spAutoFit/>
+          </a:bodyPr>
+          <a:p>
+            <a:pPr>
+              <a:defRPr/>
+            </a:pPr>
+            <a:r>
+              <a:rPr lang="bg-BG" sz="7200" b="1">
+                <a:solidFill>
+                  <a:schemeClr val="bg1"/>
+                </a:solidFill>
+                <a:latin typeface="Ubuntu Sans"/>
+                <a:ea typeface="Ubuntu Sans"/>
+                <a:cs typeface="Ubuntu Sans"/>
+              </a:rPr>
+              <a:t>Демонстрация</a:t>
+            </a:r>
+            <a:endParaRPr sz="7200" b="1">
+              <a:solidFill>
+                <a:schemeClr val="bg1"/>
+              </a:solidFill>
+              <a:latin typeface="Ubuntu Sans"/>
+              <a:cs typeface="Ubuntu Sans"/>
+            </a:endParaRPr>
+          </a:p>
+        </p:txBody>
+      </p:sp>
+    </p:spTree>
+  </p:cSld>
+  <p:clrMapOvr>
+    <a:masterClrMapping/>
+  </p:clrMapOvr>
+  <mc:AlternateContent xmlns:mc="http://schemas.openxmlformats.org/markup-compatibility/2006">
+    <mc:Choice xmlns:p159="http://schemas.microsoft.com/office/powerpoint/2015/09/main" xmlns:p14="http://schemas.microsoft.com/office/powerpoint/2010/main" Requires="p159">
+      <p:transition p14:dur="500" advClick="1"/>
+    </mc:Choice>
+    <mc:Fallback>
+      <p:transition advClick="1"/>
+    </mc:Fallback>
+  </mc:AlternateContent>
+</p:sld>
+</file>
+
+<file path=ppt/slides/slide8.xml><?xml version="1.0" encoding="utf-8"?>
+<p:sld xmlns:a="http://schemas.openxmlformats.org/drawingml/2006/main" xmlns:r="http://schemas.openxmlformats.org/officeDocument/2006/relationships" xmlns:p="http://schemas.openxmlformats.org/presentationml/2006/main" xmlns:m="http://schemas.openxmlformats.org/officeDocument/2006/math" xmlns:w="http://schemas.openxmlformats.org/wordprocessingml/2006/main" xmlns:mc="http://schemas.openxmlformats.org/markup-compatibility/2006" showMasterPhAnim="0" showMasterSp="1" show="1">
+  <p:cSld name="">
+    <p:spTree>
+      <p:nvGrpSpPr>
+        <p:cNvPr id="1" name=""/>
+        <p:cNvGrpSpPr/>
+        <p:nvPr/>
+      </p:nvGrpSpPr>
+      <p:grpSpPr bwMode="auto">
+        <a:xfrm>
+          <a:off x="0" y="0"/>
+          <a:ext cx="0" cy="0"/>
+          <a:chOff x="0" y="0"/>
+          <a:chExt cx="0" cy="0"/>
+        </a:xfrm>
+      </p:grpSpPr>
+      <p:sp>
+        <p:nvSpPr>
+          <p:cNvPr id="1627998819" name="Title 1"/>
+          <p:cNvSpPr>
+            <a:spLocks noGrp="1"/>
+          </p:cNvSpPr>
+          <p:nvPr>
+            <p:ph type="title"/>
+          </p:nvPr>
+        </p:nvSpPr>
+        <p:spPr bwMode="auto"/>
+        <p:txBody>
+          <a:bodyPr/>
+          <a:lstStyle/>
+          <a:p>
+            <a:pPr>
+              <a:defRPr/>
+            </a:pPr>
+            <a:r>
+              <a:rPr lang="bg-BG" b="1">
+                <a:solidFill>
+                  <a:schemeClr val="bg1"/>
+                </a:solidFill>
+                <a:latin typeface="Ubuntu Sans"/>
+                <a:ea typeface="Ubuntu Sans"/>
+                <a:cs typeface="Ubuntu Sans"/>
+              </a:rPr>
+              <a:t>Нашето преживяване</a:t>
+            </a:r>
+            <a:endParaRPr/>
+          </a:p>
+        </p:txBody>
+      </p:sp>
+      <p:sp>
+        <p:nvSpPr>
+          <p:cNvPr id="1663682892" name=""/>
+          <p:cNvSpPr txBox="1"/>
+          <p:nvPr/>
+        </p:nvSpPr>
+        <p:spPr bwMode="auto">
+          <a:xfrm rot="0" flipH="0" flipV="0">
+            <a:off x="477223" y="1876423"/>
+            <a:ext cx="7659988" cy="2012040"/>
+          </a:xfrm>
+          <a:prstGeom prst="rect">
+            <a:avLst/>
+          </a:prstGeom>
+          <a:noFill/>
+        </p:spPr>
+        <p:txBody>
+          <a:bodyPr vertOverflow="overflow" horzOverflow="overflow" vert="horz" wrap="square" lIns="91440" tIns="45720" rIns="91440" bIns="45720" numCol="1" spcCol="0" rtlCol="0" fromWordArt="0" anchor="t" anchorCtr="0" forceAA="0" upright="0" compatLnSpc="0">
+            <a:spAutoFit/>
+          </a:bodyPr>
+          <a:p>
+            <a:pPr marL="283879" indent="-283879">
+              <a:buFont typeface="Arial"/>
+              <a:buChar char="–"/>
+              <a:defRPr/>
+            </a:pPr>
+            <a:r>
+              <a:rPr lang="bg-BG" b="1">
+                <a:solidFill>
+                  <a:schemeClr val="bg1"/>
+                </a:solidFill>
+                <a:latin typeface="Ubuntu Sans"/>
+                <a:ea typeface="Ubuntu Sans"/>
+                <a:cs typeface="Ubuntu Sans"/>
+              </a:rPr>
+              <a:t>За нас беше едно много </a:t>
+            </a:r>
+            <a:r>
+              <a:rPr lang="en-US" b="1" i="1" u="sng">
+                <a:solidFill>
+                  <a:schemeClr val="bg1"/>
+                </a:solidFill>
+                <a:latin typeface="Ubuntu Sans"/>
+                <a:ea typeface="Ubuntu Sans"/>
+                <a:cs typeface="Ubuntu Sans"/>
+              </a:rPr>
+              <a:t>BIZZARE</a:t>
+            </a:r>
+            <a:r>
+              <a:rPr lang="en-US" b="1">
+                <a:solidFill>
+                  <a:schemeClr val="bg1"/>
+                </a:solidFill>
+                <a:latin typeface="Ubuntu Sans"/>
+                <a:ea typeface="Ubuntu Sans"/>
+                <a:cs typeface="Ubuntu Sans"/>
+              </a:rPr>
+              <a:t> </a:t>
+            </a:r>
+            <a:r>
+              <a:rPr lang="bg-BG" b="1">
+                <a:solidFill>
+                  <a:schemeClr val="bg1"/>
+                </a:solidFill>
+                <a:latin typeface="Ubuntu Sans"/>
+                <a:ea typeface="Ubuntu Sans"/>
+                <a:cs typeface="Ubuntu Sans"/>
+              </a:rPr>
+              <a:t>преживяване</a:t>
+            </a:r>
+            <a:endParaRPr lang="bg-BG" b="1">
+              <a:solidFill>
+                <a:schemeClr val="bg1"/>
+              </a:solidFill>
+              <a:latin typeface="Ubuntu Sans"/>
+              <a:ea typeface="Ubuntu Sans"/>
+              <a:cs typeface="Ubuntu Sans"/>
+            </a:endParaRPr>
+          </a:p>
+          <a:p>
+            <a:pPr marL="283879" indent="-283879">
+              <a:buFont typeface="Arial"/>
+              <a:buChar char="–"/>
+              <a:defRPr/>
+            </a:pPr>
+            <a:r>
+              <a:rPr lang="bg-BG" b="1">
+                <a:solidFill>
+                  <a:schemeClr val="bg1"/>
+                </a:solidFill>
+                <a:latin typeface="Ubuntu Sans"/>
+                <a:ea typeface="Ubuntu Sans"/>
+                <a:cs typeface="Ubuntu Sans"/>
+              </a:rPr>
+              <a:t>Истински </a:t>
+            </a:r>
+            <a:r>
+              <a:rPr lang="en-US" b="1" i="1" u="sng">
+                <a:solidFill>
+                  <a:schemeClr val="bg1"/>
+                </a:solidFill>
+                <a:latin typeface="Ubuntu Sans"/>
+                <a:ea typeface="Ubuntu Sans"/>
+                <a:cs typeface="Ubuntu Sans"/>
+              </a:rPr>
+              <a:t>ADVENTURE</a:t>
+            </a:r>
+            <a:r>
+              <a:rPr lang="en-US" b="1">
+                <a:solidFill>
+                  <a:schemeClr val="bg1"/>
+                </a:solidFill>
+                <a:latin typeface="Ubuntu Sans"/>
+                <a:ea typeface="Ubuntu Sans"/>
+                <a:cs typeface="Ubuntu Sans"/>
+              </a:rPr>
+              <a:t> </a:t>
+            </a:r>
+            <a:r>
+              <a:rPr lang="bg-BG" b="1">
+                <a:solidFill>
+                  <a:schemeClr val="bg1"/>
+                </a:solidFill>
+                <a:latin typeface="Ubuntu Sans"/>
+                <a:ea typeface="Ubuntu Sans"/>
+                <a:cs typeface="Ubuntu Sans"/>
+              </a:rPr>
+              <a:t>в сфери, в които никога не сме работили</a:t>
+            </a:r>
+            <a:endParaRPr lang="bg-BG" b="1">
+              <a:solidFill>
+                <a:schemeClr val="bg1"/>
+              </a:solidFill>
+              <a:latin typeface="Ubuntu Sans"/>
+              <a:ea typeface="Ubuntu Sans"/>
+              <a:cs typeface="Ubuntu Sans"/>
+            </a:endParaRPr>
+          </a:p>
+          <a:p>
+            <a:pPr marL="283879" indent="-283879">
+              <a:buFont typeface="Arial"/>
+              <a:buChar char="–"/>
+              <a:defRPr/>
+            </a:pPr>
+            <a:r>
+              <a:rPr lang="bg-BG" b="1">
+                <a:solidFill>
+                  <a:schemeClr val="bg1"/>
+                </a:solidFill>
+                <a:latin typeface="Ubuntu Sans"/>
+                <a:ea typeface="Ubuntu Sans"/>
+                <a:cs typeface="Ubuntu Sans"/>
+              </a:rPr>
+              <a:t>Половината се разболяхме</a:t>
+            </a:r>
+            <a:endParaRPr lang="bg-BG" b="1">
+              <a:solidFill>
+                <a:schemeClr val="bg1"/>
+              </a:solidFill>
+              <a:latin typeface="Ubuntu Sans"/>
+              <a:ea typeface="Ubuntu Sans"/>
+              <a:cs typeface="Ubuntu Sans"/>
+            </a:endParaRPr>
+          </a:p>
+          <a:p>
+            <a:pPr marL="283879" indent="-283879">
+              <a:buFont typeface="Arial"/>
+              <a:buChar char="–"/>
+              <a:defRPr/>
+            </a:pPr>
+            <a:r>
+              <a:rPr lang="bg-BG" b="1">
+                <a:solidFill>
+                  <a:schemeClr val="bg1"/>
+                </a:solidFill>
+                <a:latin typeface="Ubuntu Sans"/>
+                <a:ea typeface="Ubuntu Sans"/>
+                <a:cs typeface="Ubuntu Sans"/>
+              </a:rPr>
+              <a:t>Менторът ни идваше с части само след 14 часа </a:t>
+            </a:r>
+            <a:endParaRPr lang="bg-BG" b="1">
+              <a:solidFill>
+                <a:schemeClr val="bg1"/>
+              </a:solidFill>
+              <a:latin typeface="Ubuntu Sans"/>
+              <a:ea typeface="Ubuntu Sans"/>
+              <a:cs typeface="Ubuntu Sans"/>
+            </a:endParaRPr>
+          </a:p>
+          <a:p>
+            <a:pPr marL="283879" indent="-283879">
+              <a:buFont typeface="Arial"/>
+              <a:buChar char="–"/>
+              <a:defRPr/>
+            </a:pPr>
+            <a:r>
+              <a:rPr lang="bg-BG" b="1">
+                <a:solidFill>
+                  <a:schemeClr val="bg1"/>
+                </a:solidFill>
+                <a:latin typeface="Ubuntu Sans"/>
+                <a:ea typeface="Ubuntu Sans"/>
+                <a:cs typeface="Ubuntu Sans"/>
+              </a:rPr>
+              <a:t>Много се забавлявахме и смятаме да участваме всяка година до края на обучението ни в ТУЕС</a:t>
+            </a:r>
+            <a:endParaRPr lang="bg-BG" b="1">
+              <a:solidFill>
+                <a:schemeClr val="bg1"/>
+              </a:solidFill>
+              <a:latin typeface="Ubuntu Sans"/>
+              <a:ea typeface="Ubuntu Sans"/>
+              <a:cs typeface="Ubuntu Sans"/>
+            </a:endParaRPr>
+          </a:p>
+          <a:p>
+            <a:pPr marL="283878" indent="-283878">
+              <a:buFont typeface="Arial"/>
+              <a:buChar char="–"/>
+              <a:defRPr/>
+            </a:pPr>
+            <a:endParaRPr lang="bg-BG">
+              <a:solidFill>
+                <a:schemeClr val="bg1"/>
+              </a:solidFill>
+              <a:latin typeface="Ubuntu Sans"/>
+              <a:ea typeface="Ubuntu Sans"/>
+              <a:cs typeface="Ubuntu Sans"/>
+            </a:endParaRPr>
+          </a:p>
+        </p:txBody>
+      </p:sp>
+    </p:spTree>
+  </p:cSld>
+  <p:clrMapOvr>
+    <a:masterClrMapping/>
+  </p:clrMapOvr>
+  <mc:AlternateContent xmlns:mc="http://schemas.openxmlformats.org/markup-compatibility/2006">
+    <mc:Choice xmlns:p159="http://schemas.microsoft.com/office/powerpoint/2015/09/main" xmlns:p14="http://schemas.microsoft.com/office/powerpoint/2010/main" Requires="p159">
+      <p:transition p14:dur="500" advClick="1"/>
+    </mc:Choice>
+    <mc:Fallback>
+      <p:transition advClick="1"/>
+    </mc:Fallback>
+  </mc:AlternateContent>
+</p:sld>
+</file>
+
+<file path=ppt/slides/slide9.xml><?xml version="1.0" encoding="utf-8"?>
+<p:sld xmlns:a="http://schemas.openxmlformats.org/drawingml/2006/main" xmlns:r="http://schemas.openxmlformats.org/officeDocument/2006/relationships" xmlns:p="http://schemas.openxmlformats.org/presentationml/2006/main" xmlns:m="http://schemas.openxmlformats.org/officeDocument/2006/math" xmlns:w="http://schemas.openxmlformats.org/wordprocessingml/2006/main" xmlns:mc="http://schemas.openxmlformats.org/markup-compatibility/2006" showMasterPhAnim="0" showMasterSp="1" show="1">
+  <p:cSld name="">
+    <p:spTree>
+      <p:nvGrpSpPr>
+        <p:cNvPr id="1" name=""/>
+        <p:cNvGrpSpPr/>
+        <p:nvPr/>
+      </p:nvGrpSpPr>
+      <p:grpSpPr bwMode="auto">
+        <a:xfrm>
+          <a:off x="0" y="0"/>
+          <a:ext cx="0" cy="0"/>
+          <a:chOff x="0" y="0"/>
+          <a:chExt cx="0" cy="0"/>
+        </a:xfrm>
+      </p:grpSpPr>
+      <p:sp>
+        <p:nvSpPr>
+          <p:cNvPr id="1282295336" name="Title 1"/>
+          <p:cNvSpPr>
+            <a:spLocks noGrp="1"/>
+          </p:cNvSpPr>
+          <p:nvPr>
+            <p:ph type="title"/>
+          </p:nvPr>
+        </p:nvSpPr>
+        <p:spPr bwMode="auto"/>
+        <p:txBody>
+          <a:bodyPr/>
+          <a:lstStyle/>
+          <a:p>
+            <a:pPr>
+              <a:defRPr/>
+            </a:pPr>
+            <a:r>
+              <a:rPr lang="bg-BG" b="1">
+                <a:solidFill>
+                  <a:schemeClr val="bg1"/>
+                </a:solidFill>
+                <a:latin typeface="Ubuntu Sans"/>
+                <a:ea typeface="Ubuntu Sans"/>
+                <a:cs typeface="Ubuntu Sans"/>
+              </a:rPr>
+              <a:t>Какво научихме</a:t>
+            </a:r>
+            <a:endParaRPr b="1">
+              <a:solidFill>
+                <a:schemeClr val="bg1"/>
+              </a:solidFill>
+            </a:endParaRPr>
+          </a:p>
+        </p:txBody>
+      </p:sp>
+      <p:sp>
+        <p:nvSpPr>
+          <p:cNvPr id="1140844459" name=""/>
+          <p:cNvSpPr txBox="1"/>
+          <p:nvPr/>
+        </p:nvSpPr>
+        <p:spPr bwMode="auto">
+          <a:xfrm rot="0" flipH="0" flipV="0">
+            <a:off x="724873" y="1952623"/>
+            <a:ext cx="9512683" cy="1554840"/>
+          </a:xfrm>
+          <a:prstGeom prst="rect">
+            <a:avLst/>
+          </a:prstGeom>
+          <a:noFill/>
+        </p:spPr>
+        <p:txBody>
+          <a:bodyPr vertOverflow="overflow" horzOverflow="overflow" vert="horz" wrap="square" lIns="91440" tIns="45720" rIns="91440" bIns="45720" numCol="1" spcCol="0" rtlCol="0" fromWordArt="0" anchor="t" anchorCtr="0" forceAA="0" upright="0" compatLnSpc="0">
+            <a:spAutoFit/>
+          </a:bodyPr>
+          <a:p>
+            <a:pPr marL="283879" indent="-283879">
+              <a:buFont typeface="Arial"/>
+              <a:buChar char="–"/>
+              <a:defRPr/>
+            </a:pPr>
+            <a:r>
+              <a:rPr lang="bg-BG" sz="2400">
+                <a:solidFill>
+                  <a:schemeClr val="bg1"/>
+                </a:solidFill>
+                <a:latin typeface="Ubuntu Sans"/>
+                <a:ea typeface="Ubuntu Sans"/>
+                <a:cs typeface="Ubuntu Sans"/>
+              </a:rPr>
+              <a:t>работа с </a:t>
+            </a:r>
+            <a:r>
+              <a:rPr lang="en-US" sz="2400">
+                <a:solidFill>
+                  <a:schemeClr val="bg1"/>
+                </a:solidFill>
+                <a:latin typeface="Ubuntu Sans"/>
+                <a:ea typeface="Ubuntu Sans"/>
+                <a:cs typeface="Ubuntu Sans"/>
+              </a:rPr>
+              <a:t>Arduino</a:t>
+            </a:r>
+            <a:endParaRPr sz="2400">
+              <a:solidFill>
+                <a:schemeClr val="bg1"/>
+              </a:solidFill>
+              <a:latin typeface="Ubuntu Sans"/>
+              <a:ea typeface="Ubuntu Sans"/>
+              <a:cs typeface="Ubuntu Sans"/>
+            </a:endParaRPr>
+          </a:p>
+          <a:p>
+            <a:pPr marL="283879" indent="-283879">
+              <a:buFont typeface="Arial"/>
+              <a:buChar char="–"/>
+              <a:defRPr/>
+            </a:pPr>
+            <a:r>
+              <a:rPr lang="en-US" sz="2400">
+                <a:solidFill>
+                  <a:schemeClr val="bg1"/>
+                </a:solidFill>
+                <a:latin typeface="Ubuntu Sans"/>
+                <a:ea typeface="Ubuntu Sans"/>
+                <a:cs typeface="Ubuntu Sans"/>
+              </a:rPr>
+              <a:t>HTML и</a:t>
+            </a:r>
+            <a:r>
+              <a:rPr lang="bg-BG" sz="2400">
+                <a:solidFill>
+                  <a:schemeClr val="bg1"/>
+                </a:solidFill>
+                <a:latin typeface="Ubuntu Sans"/>
+                <a:ea typeface="Ubuntu Sans"/>
+                <a:cs typeface="Ubuntu Sans"/>
+              </a:rPr>
+              <a:t> създаване на сайт</a:t>
+            </a:r>
+            <a:endParaRPr sz="2400">
+              <a:solidFill>
+                <a:schemeClr val="bg1"/>
+              </a:solidFill>
+              <a:latin typeface="Ubuntu Sans"/>
+              <a:ea typeface="Ubuntu Sans"/>
+              <a:cs typeface="Ubuntu Sans"/>
+            </a:endParaRPr>
+          </a:p>
+          <a:p>
+            <a:pPr marL="283879" indent="-283879">
+              <a:buFont typeface="Arial"/>
+              <a:buChar char="–"/>
+              <a:defRPr/>
+            </a:pPr>
+            <a:r>
+              <a:rPr lang="bg-BG" sz="2400">
+                <a:solidFill>
+                  <a:schemeClr val="bg1"/>
+                </a:solidFill>
+                <a:latin typeface="Ubuntu Sans"/>
+                <a:ea typeface="Ubuntu Sans"/>
+                <a:cs typeface="Ubuntu Sans"/>
+              </a:rPr>
+              <a:t>как да използваме изкуствен интелект ефективно</a:t>
+            </a:r>
+            <a:endParaRPr sz="2400">
+              <a:solidFill>
+                <a:schemeClr val="bg1"/>
+              </a:solidFill>
+              <a:latin typeface="Ubuntu Sans"/>
+              <a:ea typeface="Ubuntu Sans"/>
+              <a:cs typeface="Ubuntu Sans"/>
+            </a:endParaRPr>
+          </a:p>
+          <a:p>
+            <a:pPr marL="283879" indent="-283879">
+              <a:buFont typeface="Arial"/>
+              <a:buChar char="–"/>
+              <a:defRPr/>
+            </a:pPr>
+            <a:r>
+              <a:rPr lang="bg-BG" sz="2400">
+                <a:solidFill>
+                  <a:schemeClr val="bg1"/>
+                </a:solidFill>
+                <a:latin typeface="Ubuntu Sans"/>
+                <a:ea typeface="Ubuntu Sans"/>
+                <a:cs typeface="Ubuntu Sans"/>
+              </a:rPr>
+              <a:t>работа в екип</a:t>
+            </a:r>
+            <a:endParaRPr>
+              <a:solidFill>
+                <a:schemeClr val="bg1"/>
+              </a:solidFill>
+              <a:latin typeface="Ubuntu Sans"/>
+              <a:cs typeface="Ubuntu Sans"/>
             </a:endParaRPr>
           </a:p>
         </p:txBody>

--- a/Prezentaciq.pptx
+++ b/Prezentaciq.pptx
@@ -5,7 +5,7 @@
     <p:sldMasterId id="2147483648" r:id="rId1"/>
   </p:sldMasterIdLst>
   <p:notesMasterIdLst>
-    <p:notesMasterId r:id="rId14"/>
+    <p:notesMasterId r:id="rId18"/>
   </p:notesMasterIdLst>
   <p:sldIdLst>
     <p:sldId id="256" r:id="rId4"/>
@@ -18,6 +18,10 @@
     <p:sldId id="263" r:id="rId11"/>
     <p:sldId id="264" r:id="rId12"/>
     <p:sldId id="265" r:id="rId13"/>
+    <p:sldId id="266" r:id="rId14"/>
+    <p:sldId id="267" r:id="rId15"/>
+    <p:sldId id="268" r:id="rId16"/>
+    <p:sldId id="269" r:id="rId17"/>
   </p:sldIdLst>
   <p:sldSz cx="12192000" cy="6858000"/>
   <p:notesSz cx="6858000" cy="9144000"/>
@@ -143,7 +147,7 @@
       </p:grpSpPr>
       <p:sp>
         <p:nvSpPr>
-          <p:cNvPr id="274772951" name="Header Placeholder 1"/>
+          <p:cNvPr id="1932412450" name="Header Placeholder 1"/>
           <p:cNvSpPr>
             <a:spLocks noGrp="1"/>
           </p:cNvSpPr>
@@ -177,7 +181,7 @@
       </p:sp>
       <p:sp>
         <p:nvSpPr>
-          <p:cNvPr id="1882023987" name="Date Placeholder 2"/>
+          <p:cNvPr id="1316764062" name="Date Placeholder 2"/>
           <p:cNvSpPr>
             <a:spLocks noGrp="1"/>
           </p:cNvSpPr>
@@ -215,7 +219,7 @@
       </p:sp>
       <p:sp>
         <p:nvSpPr>
-          <p:cNvPr id="941734668" name="Slide Image Placeholder 3"/>
+          <p:cNvPr id="893571253" name="Slide Image Placeholder 3"/>
           <p:cNvSpPr>
             <a:spLocks noChangeAspect="1" noGrp="1" noRot="1"/>
           </p:cNvSpPr>
@@ -251,7 +255,7 @@
       </p:sp>
       <p:sp>
         <p:nvSpPr>
-          <p:cNvPr id="23749931" name="Notes Placeholder 4"/>
+          <p:cNvPr id="466976141" name="Notes Placeholder 4"/>
           <p:cNvSpPr>
             <a:spLocks noGrp="1"/>
           </p:cNvSpPr>
@@ -325,7 +329,7 @@
       </p:sp>
       <p:sp>
         <p:nvSpPr>
-          <p:cNvPr id="1417730686" name="Footer Placeholder 5"/>
+          <p:cNvPr id="1150908665" name="Footer Placeholder 5"/>
           <p:cNvSpPr>
             <a:spLocks noGrp="1"/>
           </p:cNvSpPr>
@@ -359,7 +363,7 @@
       </p:sp>
       <p:sp>
         <p:nvSpPr>
-          <p:cNvPr id="342575022" name="Slide Number Placeholder 6"/>
+          <p:cNvPr id="22959854" name="Slide Number Placeholder 6"/>
           <p:cNvSpPr>
             <a:spLocks noGrp="1"/>
           </p:cNvSpPr>
@@ -512,7 +516,7 @@
       </p:grpSpPr>
       <p:sp>
         <p:nvSpPr>
-          <p:cNvPr id="1809243412" name="Slide Image Placeholder 1"/>
+          <p:cNvPr id="696014909" name="Slide Image Placeholder 1"/>
           <p:cNvSpPr>
             <a:spLocks noChangeAspect="1" noGrp="1" noRot="1"/>
           </p:cNvSpPr>
@@ -529,7 +533,7 @@
       </p:sp>
       <p:sp>
         <p:nvSpPr>
-          <p:cNvPr id="978560754" name="Notes Placeholder 2"/>
+          <p:cNvPr id="1590408812" name="Notes Placeholder 2"/>
           <p:cNvSpPr>
             <a:spLocks noGrp="1"/>
           </p:cNvSpPr>
@@ -554,7 +558,7 @@
       </p:sp>
       <p:sp>
         <p:nvSpPr>
-          <p:cNvPr id="1205913046" name="Slide Number Placeholder 3"/>
+          <p:cNvPr id="43109193" name="Slide Number Placeholder 3"/>
           <p:cNvSpPr>
             <a:spLocks noGrp="1"/>
           </p:cNvSpPr>
@@ -605,7 +609,7 @@
       </p:grpSpPr>
       <p:sp>
         <p:nvSpPr>
-          <p:cNvPr id="474669033" name="Slide Image Placeholder 1"/>
+          <p:cNvPr id="2" name="Slide Image Placeholder 1"/>
           <p:cNvSpPr>
             <a:spLocks noChangeAspect="1" noGrp="1" noRot="1"/>
           </p:cNvSpPr>
@@ -617,7 +621,7 @@
       </p:sp>
       <p:sp>
         <p:nvSpPr>
-          <p:cNvPr id="112916524" name="Notes Placeholder 2"/>
+          <p:cNvPr id="3" name="Notes Placeholder 2"/>
           <p:cNvSpPr>
             <a:spLocks noGrp="1"/>
           </p:cNvSpPr>
@@ -639,7 +643,347 @@
       </p:sp>
       <p:sp>
         <p:nvSpPr>
-          <p:cNvPr id="1058139404" name="Slide Number Placeholder 3"/>
+          <p:cNvPr id="4" name="Slide Number Placeholder 3"/>
+          <p:cNvSpPr>
+            <a:spLocks noGrp="1"/>
+          </p:cNvSpPr>
+          <p:nvPr>
+            <p:ph type="sldNum" sz="quarter" idx="10"/>
+          </p:nvPr>
+        </p:nvSpPr>
+        <p:spPr bwMode="auto"/>
+        <p:txBody>
+          <a:bodyPr/>
+          <a:lstStyle/>
+          <a:p>
+            <a:pPr>
+              <a:defRPr/>
+            </a:pPr>
+            <a:fld id="{A5C52C9A-CB03-5833-6119-EBA298FF276D}" type="slidenum">
+              <a:rPr/>
+              <a:t/>
+            </a:fld>
+            <a:endParaRPr/>
+          </a:p>
+        </p:txBody>
+      </p:sp>
+    </p:spTree>
+  </p:cSld>
+  <p:clrMapOvr>
+    <a:masterClrMapping/>
+  </p:clrMapOvr>
+</p:notes>
+</file>
+
+<file path=ppt/notesSlides/notesSlide11.xml><?xml version="1.0" encoding="utf-8"?>
+<p:notes xmlns:a="http://schemas.openxmlformats.org/drawingml/2006/main" xmlns:r="http://schemas.openxmlformats.org/officeDocument/2006/relationships" xmlns:p="http://schemas.openxmlformats.org/presentationml/2006/main" xmlns:m="http://schemas.openxmlformats.org/officeDocument/2006/math" xmlns:w="http://schemas.openxmlformats.org/wordprocessingml/2006/main">
+  <p:cSld name="">
+    <p:spTree>
+      <p:nvGrpSpPr>
+        <p:cNvPr id="1" name=""/>
+        <p:cNvGrpSpPr/>
+        <p:nvPr/>
+      </p:nvGrpSpPr>
+      <p:grpSpPr bwMode="auto">
+        <a:xfrm>
+          <a:off x="0" y="0"/>
+          <a:ext cx="0" cy="0"/>
+          <a:chOff x="0" y="0"/>
+          <a:chExt cx="0" cy="0"/>
+        </a:xfrm>
+      </p:grpSpPr>
+      <p:sp>
+        <p:nvSpPr>
+          <p:cNvPr id="1535264342" name="Slide Image Placeholder 1"/>
+          <p:cNvSpPr>
+            <a:spLocks noChangeAspect="1" noGrp="1" noRot="1"/>
+          </p:cNvSpPr>
+          <p:nvPr>
+            <p:ph type="sldImg"/>
+          </p:nvPr>
+        </p:nvSpPr>
+        <p:spPr bwMode="auto"/>
+      </p:sp>
+      <p:sp>
+        <p:nvSpPr>
+          <p:cNvPr id="987466522" name="Notes Placeholder 2"/>
+          <p:cNvSpPr>
+            <a:spLocks noGrp="1"/>
+          </p:cNvSpPr>
+          <p:nvPr>
+            <p:ph type="body" idx="1"/>
+          </p:nvPr>
+        </p:nvSpPr>
+        <p:spPr bwMode="auto"/>
+        <p:txBody>
+          <a:bodyPr/>
+          <a:lstStyle/>
+          <a:p>
+            <a:pPr>
+              <a:defRPr/>
+            </a:pPr>
+            <a:endParaRPr/>
+          </a:p>
+        </p:txBody>
+      </p:sp>
+      <p:sp>
+        <p:nvSpPr>
+          <p:cNvPr id="1171352344" name="Slide Number Placeholder 3"/>
+          <p:cNvSpPr>
+            <a:spLocks noGrp="1"/>
+          </p:cNvSpPr>
+          <p:nvPr>
+            <p:ph type="sldNum" sz="quarter" idx="10"/>
+          </p:nvPr>
+        </p:nvSpPr>
+        <p:spPr bwMode="auto"/>
+        <p:txBody>
+          <a:bodyPr/>
+          <a:lstStyle/>
+          <a:p>
+            <a:pPr>
+              <a:defRPr/>
+            </a:pPr>
+            <a:fld id="{3C49A6FF-DC7E-27A8-916A-7EA30C17A71F}" type="slidenum">
+              <a:rPr/>
+              <a:t/>
+            </a:fld>
+            <a:endParaRPr/>
+          </a:p>
+        </p:txBody>
+      </p:sp>
+    </p:spTree>
+  </p:cSld>
+  <p:clrMapOvr>
+    <a:masterClrMapping/>
+  </p:clrMapOvr>
+</p:notes>
+</file>
+
+<file path=ppt/notesSlides/notesSlide12.xml><?xml version="1.0" encoding="utf-8"?>
+<p:notes xmlns:a="http://schemas.openxmlformats.org/drawingml/2006/main" xmlns:r="http://schemas.openxmlformats.org/officeDocument/2006/relationships" xmlns:p="http://schemas.openxmlformats.org/presentationml/2006/main" xmlns:m="http://schemas.openxmlformats.org/officeDocument/2006/math" xmlns:w="http://schemas.openxmlformats.org/wordprocessingml/2006/main">
+  <p:cSld name="">
+    <p:spTree>
+      <p:nvGrpSpPr>
+        <p:cNvPr id="1" name=""/>
+        <p:cNvGrpSpPr/>
+        <p:nvPr/>
+      </p:nvGrpSpPr>
+      <p:grpSpPr bwMode="auto">
+        <a:xfrm>
+          <a:off x="0" y="0"/>
+          <a:ext cx="0" cy="0"/>
+          <a:chOff x="0" y="0"/>
+          <a:chExt cx="0" cy="0"/>
+        </a:xfrm>
+      </p:grpSpPr>
+      <p:sp>
+        <p:nvSpPr>
+          <p:cNvPr id="1301144208" name="Slide Image Placeholder 1"/>
+          <p:cNvSpPr>
+            <a:spLocks noChangeAspect="1" noGrp="1" noRot="1"/>
+          </p:cNvSpPr>
+          <p:nvPr>
+            <p:ph type="sldImg"/>
+          </p:nvPr>
+        </p:nvSpPr>
+        <p:spPr bwMode="auto"/>
+      </p:sp>
+      <p:sp>
+        <p:nvSpPr>
+          <p:cNvPr id="1059819341" name="Notes Placeholder 2"/>
+          <p:cNvSpPr>
+            <a:spLocks noGrp="1"/>
+          </p:cNvSpPr>
+          <p:nvPr>
+            <p:ph type="body" idx="1"/>
+          </p:nvPr>
+        </p:nvSpPr>
+        <p:spPr bwMode="auto"/>
+        <p:txBody>
+          <a:bodyPr/>
+          <a:lstStyle/>
+          <a:p>
+            <a:pPr>
+              <a:defRPr/>
+            </a:pPr>
+            <a:endParaRPr/>
+          </a:p>
+        </p:txBody>
+      </p:sp>
+      <p:sp>
+        <p:nvSpPr>
+          <p:cNvPr id="1197852803" name="Slide Number Placeholder 3"/>
+          <p:cNvSpPr>
+            <a:spLocks noGrp="1"/>
+          </p:cNvSpPr>
+          <p:nvPr>
+            <p:ph type="sldNum" sz="quarter" idx="10"/>
+          </p:nvPr>
+        </p:nvSpPr>
+        <p:spPr bwMode="auto"/>
+        <p:txBody>
+          <a:bodyPr/>
+          <a:lstStyle/>
+          <a:p>
+            <a:pPr>
+              <a:defRPr/>
+            </a:pPr>
+            <a:fld id="{E793C7AE-F512-5C8A-CC5D-6CE770C89D4E}" type="slidenum">
+              <a:rPr/>
+              <a:t/>
+            </a:fld>
+            <a:endParaRPr/>
+          </a:p>
+        </p:txBody>
+      </p:sp>
+    </p:spTree>
+  </p:cSld>
+  <p:clrMapOvr>
+    <a:masterClrMapping/>
+  </p:clrMapOvr>
+</p:notes>
+</file>
+
+<file path=ppt/notesSlides/notesSlide13.xml><?xml version="1.0" encoding="utf-8"?>
+<p:notes xmlns:a="http://schemas.openxmlformats.org/drawingml/2006/main" xmlns:r="http://schemas.openxmlformats.org/officeDocument/2006/relationships" xmlns:p="http://schemas.openxmlformats.org/presentationml/2006/main" xmlns:m="http://schemas.openxmlformats.org/officeDocument/2006/math" xmlns:w="http://schemas.openxmlformats.org/wordprocessingml/2006/main">
+  <p:cSld name="">
+    <p:spTree>
+      <p:nvGrpSpPr>
+        <p:cNvPr id="1" name=""/>
+        <p:cNvGrpSpPr/>
+        <p:nvPr/>
+      </p:nvGrpSpPr>
+      <p:grpSpPr bwMode="auto">
+        <a:xfrm>
+          <a:off x="0" y="0"/>
+          <a:ext cx="0" cy="0"/>
+          <a:chOff x="0" y="0"/>
+          <a:chExt cx="0" cy="0"/>
+        </a:xfrm>
+      </p:grpSpPr>
+      <p:sp>
+        <p:nvSpPr>
+          <p:cNvPr id="721670671" name="Slide Image Placeholder 1"/>
+          <p:cNvSpPr>
+            <a:spLocks noChangeAspect="1" noGrp="1" noRot="1"/>
+          </p:cNvSpPr>
+          <p:nvPr>
+            <p:ph type="sldImg"/>
+          </p:nvPr>
+        </p:nvSpPr>
+        <p:spPr bwMode="auto"/>
+      </p:sp>
+      <p:sp>
+        <p:nvSpPr>
+          <p:cNvPr id="1760485065" name="Notes Placeholder 2"/>
+          <p:cNvSpPr>
+            <a:spLocks noGrp="1"/>
+          </p:cNvSpPr>
+          <p:nvPr>
+            <p:ph type="body" idx="1"/>
+          </p:nvPr>
+        </p:nvSpPr>
+        <p:spPr bwMode="auto"/>
+        <p:txBody>
+          <a:bodyPr/>
+          <a:lstStyle/>
+          <a:p>
+            <a:pPr>
+              <a:defRPr/>
+            </a:pPr>
+            <a:endParaRPr/>
+          </a:p>
+        </p:txBody>
+      </p:sp>
+      <p:sp>
+        <p:nvSpPr>
+          <p:cNvPr id="1842300390" name="Slide Number Placeholder 3"/>
+          <p:cNvSpPr>
+            <a:spLocks noGrp="1"/>
+          </p:cNvSpPr>
+          <p:nvPr>
+            <p:ph type="sldNum" sz="quarter" idx="10"/>
+          </p:nvPr>
+        </p:nvSpPr>
+        <p:spPr bwMode="auto"/>
+        <p:txBody>
+          <a:bodyPr/>
+          <a:lstStyle/>
+          <a:p>
+            <a:pPr>
+              <a:defRPr/>
+            </a:pPr>
+            <a:fld id="{63A44C6F-85E4-F237-CE9A-E5F564F6B719}" type="slidenum">
+              <a:rPr/>
+              <a:t/>
+            </a:fld>
+            <a:endParaRPr/>
+          </a:p>
+        </p:txBody>
+      </p:sp>
+    </p:spTree>
+  </p:cSld>
+  <p:clrMapOvr>
+    <a:masterClrMapping/>
+  </p:clrMapOvr>
+</p:notes>
+</file>
+
+<file path=ppt/notesSlides/notesSlide14.xml><?xml version="1.0" encoding="utf-8"?>
+<p:notes xmlns:a="http://schemas.openxmlformats.org/drawingml/2006/main" xmlns:r="http://schemas.openxmlformats.org/officeDocument/2006/relationships" xmlns:p="http://schemas.openxmlformats.org/presentationml/2006/main" xmlns:m="http://schemas.openxmlformats.org/officeDocument/2006/math" xmlns:w="http://schemas.openxmlformats.org/wordprocessingml/2006/main">
+  <p:cSld name="">
+    <p:spTree>
+      <p:nvGrpSpPr>
+        <p:cNvPr id="1" name=""/>
+        <p:cNvGrpSpPr/>
+        <p:nvPr/>
+      </p:nvGrpSpPr>
+      <p:grpSpPr bwMode="auto">
+        <a:xfrm>
+          <a:off x="0" y="0"/>
+          <a:ext cx="0" cy="0"/>
+          <a:chOff x="0" y="0"/>
+          <a:chExt cx="0" cy="0"/>
+        </a:xfrm>
+      </p:grpSpPr>
+      <p:sp>
+        <p:nvSpPr>
+          <p:cNvPr id="1993333725" name="Slide Image Placeholder 1"/>
+          <p:cNvSpPr>
+            <a:spLocks noChangeAspect="1" noGrp="1" noRot="1"/>
+          </p:cNvSpPr>
+          <p:nvPr>
+            <p:ph type="sldImg"/>
+          </p:nvPr>
+        </p:nvSpPr>
+        <p:spPr bwMode="auto"/>
+      </p:sp>
+      <p:sp>
+        <p:nvSpPr>
+          <p:cNvPr id="2017688875" name="Notes Placeholder 2"/>
+          <p:cNvSpPr>
+            <a:spLocks noGrp="1"/>
+          </p:cNvSpPr>
+          <p:nvPr>
+            <p:ph type="body" idx="1"/>
+          </p:nvPr>
+        </p:nvSpPr>
+        <p:spPr bwMode="auto"/>
+        <p:txBody>
+          <a:bodyPr/>
+          <a:lstStyle/>
+          <a:p>
+            <a:pPr>
+              <a:defRPr/>
+            </a:pPr>
+            <a:endParaRPr/>
+          </a:p>
+        </p:txBody>
+      </p:sp>
+      <p:sp>
+        <p:nvSpPr>
+          <p:cNvPr id="64705775" name="Slide Number Placeholder 3"/>
           <p:cNvSpPr>
             <a:spLocks noGrp="1"/>
           </p:cNvSpPr>
@@ -690,7 +1034,7 @@
       </p:grpSpPr>
       <p:sp>
         <p:nvSpPr>
-          <p:cNvPr id="552669058" name="Slide Image Placeholder 1"/>
+          <p:cNvPr id="90839030" name="Slide Image Placeholder 1"/>
           <p:cNvSpPr>
             <a:spLocks noChangeAspect="1" noGrp="1" noRot="1"/>
           </p:cNvSpPr>
@@ -702,7 +1046,7 @@
       </p:sp>
       <p:sp>
         <p:nvSpPr>
-          <p:cNvPr id="1981329726" name="Notes Placeholder 2"/>
+          <p:cNvPr id="312250741" name="Notes Placeholder 2"/>
           <p:cNvSpPr>
             <a:spLocks noGrp="1"/>
           </p:cNvSpPr>
@@ -724,7 +1068,7 @@
       </p:sp>
       <p:sp>
         <p:nvSpPr>
-          <p:cNvPr id="681504799" name="Slide Number Placeholder 3"/>
+          <p:cNvPr id="443496656" name="Slide Number Placeholder 3"/>
           <p:cNvSpPr>
             <a:spLocks noGrp="1"/>
           </p:cNvSpPr>
@@ -775,7 +1119,7 @@
       </p:grpSpPr>
       <p:sp>
         <p:nvSpPr>
-          <p:cNvPr id="612368986" name="Slide Image Placeholder 1"/>
+          <p:cNvPr id="1056071346" name="Slide Image Placeholder 1"/>
           <p:cNvSpPr>
             <a:spLocks noChangeAspect="1" noGrp="1" noRot="1"/>
           </p:cNvSpPr>
@@ -787,7 +1131,7 @@
       </p:sp>
       <p:sp>
         <p:nvSpPr>
-          <p:cNvPr id="1538966438" name="Notes Placeholder 2"/>
+          <p:cNvPr id="807058552" name="Notes Placeholder 2"/>
           <p:cNvSpPr>
             <a:spLocks noGrp="1"/>
           </p:cNvSpPr>
@@ -809,7 +1153,7 @@
       </p:sp>
       <p:sp>
         <p:nvSpPr>
-          <p:cNvPr id="569874494" name="Slide Number Placeholder 3"/>
+          <p:cNvPr id="408763648" name="Slide Number Placeholder 3"/>
           <p:cNvSpPr>
             <a:spLocks noGrp="1"/>
           </p:cNvSpPr>
@@ -825,7 +1169,7 @@
             <a:pPr>
               <a:defRPr/>
             </a:pPr>
-            <a:fld id="{B5D478D3-3B21-6817-CCC9-CB9B3836E056}" type="slidenum">
+            <a:fld id="{5ABAF583-884E-CFEF-8DE5-1203A4B4A717}" type="slidenum">
               <a:rPr/>
               <a:t/>
             </a:fld>
@@ -860,7 +1204,7 @@
       </p:grpSpPr>
       <p:sp>
         <p:nvSpPr>
-          <p:cNvPr id="568837214" name="Slide Image Placeholder 1"/>
+          <p:cNvPr id="599047508" name="Slide Image Placeholder 1"/>
           <p:cNvSpPr>
             <a:spLocks noChangeAspect="1" noGrp="1" noRot="1"/>
           </p:cNvSpPr>
@@ -872,7 +1216,7 @@
       </p:sp>
       <p:sp>
         <p:nvSpPr>
-          <p:cNvPr id="317244712" name="Notes Placeholder 2"/>
+          <p:cNvPr id="487096554" name="Notes Placeholder 2"/>
           <p:cNvSpPr>
             <a:spLocks noGrp="1"/>
           </p:cNvSpPr>
@@ -894,7 +1238,7 @@
       </p:sp>
       <p:sp>
         <p:nvSpPr>
-          <p:cNvPr id="1687507076" name="Slide Number Placeholder 3"/>
+          <p:cNvPr id="324656921" name="Slide Number Placeholder 3"/>
           <p:cNvSpPr>
             <a:spLocks noGrp="1"/>
           </p:cNvSpPr>
@@ -910,7 +1254,7 @@
             <a:pPr>
               <a:defRPr/>
             </a:pPr>
-            <a:fld id="{5ABAF583-884E-CFEF-8DE5-1203A4B4A717}" type="slidenum">
+            <a:fld id="{B5D478D3-3B21-6817-CCC9-CB9B3836E056}" type="slidenum">
               <a:rPr/>
               <a:t/>
             </a:fld>
@@ -945,7 +1289,7 @@
       </p:grpSpPr>
       <p:sp>
         <p:nvSpPr>
-          <p:cNvPr id="1781777207" name="Slide Image Placeholder 1"/>
+          <p:cNvPr id="31314764" name="Slide Image Placeholder 1"/>
           <p:cNvSpPr>
             <a:spLocks noChangeAspect="1" noGrp="1" noRot="1"/>
           </p:cNvSpPr>
@@ -957,7 +1301,7 @@
       </p:sp>
       <p:sp>
         <p:nvSpPr>
-          <p:cNvPr id="324379692" name="Notes Placeholder 2"/>
+          <p:cNvPr id="304762778" name="Notes Placeholder 2"/>
           <p:cNvSpPr>
             <a:spLocks noGrp="1"/>
           </p:cNvSpPr>
@@ -979,7 +1323,7 @@
       </p:sp>
       <p:sp>
         <p:nvSpPr>
-          <p:cNvPr id="160557166" name="Slide Number Placeholder 3"/>
+          <p:cNvPr id="1660641538" name="Slide Number Placeholder 3"/>
           <p:cNvSpPr>
             <a:spLocks noGrp="1"/>
           </p:cNvSpPr>
@@ -1030,7 +1374,7 @@
       </p:grpSpPr>
       <p:sp>
         <p:nvSpPr>
-          <p:cNvPr id="2" name="Slide Image Placeholder 1"/>
+          <p:cNvPr id="1104058262" name="Slide Image Placeholder 1"/>
           <p:cNvSpPr>
             <a:spLocks noChangeAspect="1" noGrp="1" noRot="1"/>
           </p:cNvSpPr>
@@ -1042,7 +1386,7 @@
       </p:sp>
       <p:sp>
         <p:nvSpPr>
-          <p:cNvPr id="3" name="Notes Placeholder 2"/>
+          <p:cNvPr id="656978290" name="Notes Placeholder 2"/>
           <p:cNvSpPr>
             <a:spLocks noGrp="1"/>
           </p:cNvSpPr>
@@ -1064,7 +1408,7 @@
       </p:sp>
       <p:sp>
         <p:nvSpPr>
-          <p:cNvPr id="4" name="Slide Number Placeholder 3"/>
+          <p:cNvPr id="1245327061" name="Slide Number Placeholder 3"/>
           <p:cNvSpPr>
             <a:spLocks noGrp="1"/>
           </p:cNvSpPr>
@@ -1115,7 +1459,7 @@
       </p:grpSpPr>
       <p:sp>
         <p:nvSpPr>
-          <p:cNvPr id="1101547107" name="Slide Image Placeholder 1"/>
+          <p:cNvPr id="2" name="Slide Image Placeholder 1"/>
           <p:cNvSpPr>
             <a:spLocks noChangeAspect="1" noGrp="1" noRot="1"/>
           </p:cNvSpPr>
@@ -1127,7 +1471,7 @@
       </p:sp>
       <p:sp>
         <p:nvSpPr>
-          <p:cNvPr id="104119793" name="Notes Placeholder 2"/>
+          <p:cNvPr id="3" name="Notes Placeholder 2"/>
           <p:cNvSpPr>
             <a:spLocks noGrp="1"/>
           </p:cNvSpPr>
@@ -1149,7 +1493,7 @@
       </p:sp>
       <p:sp>
         <p:nvSpPr>
-          <p:cNvPr id="1031447559" name="Slide Number Placeholder 3"/>
+          <p:cNvPr id="4" name="Slide Number Placeholder 3"/>
           <p:cNvSpPr>
             <a:spLocks noGrp="1"/>
           </p:cNvSpPr>
@@ -1165,7 +1509,7 @@
             <a:pPr>
               <a:defRPr/>
             </a:pPr>
-            <a:fld id="{F518262F-F903-3EEA-F653-29E78658ED5E}" type="slidenum">
+            <a:fld id="{11D4B5DF-E6FB-4919-CFDC-7F786DAD042E}" type="slidenum">
               <a:rPr/>
               <a:t/>
             </a:fld>
@@ -1200,7 +1544,7 @@
       </p:grpSpPr>
       <p:sp>
         <p:nvSpPr>
-          <p:cNvPr id="2133484545" name="Slide Image Placeholder 1"/>
+          <p:cNvPr id="1944269978" name="Slide Image Placeholder 1"/>
           <p:cNvSpPr>
             <a:spLocks noChangeAspect="1" noGrp="1" noRot="1"/>
           </p:cNvSpPr>
@@ -1212,7 +1556,7 @@
       </p:sp>
       <p:sp>
         <p:nvSpPr>
-          <p:cNvPr id="591611766" name="Notes Placeholder 2"/>
+          <p:cNvPr id="1130409623" name="Notes Placeholder 2"/>
           <p:cNvSpPr>
             <a:spLocks noGrp="1"/>
           </p:cNvSpPr>
@@ -1234,7 +1578,7 @@
       </p:sp>
       <p:sp>
         <p:nvSpPr>
-          <p:cNvPr id="461345041" name="Slide Number Placeholder 3"/>
+          <p:cNvPr id="1424577868" name="Slide Number Placeholder 3"/>
           <p:cNvSpPr>
             <a:spLocks noGrp="1"/>
           </p:cNvSpPr>
@@ -1250,7 +1594,7 @@
             <a:pPr>
               <a:defRPr/>
             </a:pPr>
-            <a:fld id="{E793C7AE-F512-5C8A-CC5D-6CE770C89D4E}" type="slidenum">
+            <a:fld id="{26A4A41D-E2A1-FC31-472C-40DA7E093D91}" type="slidenum">
               <a:rPr/>
               <a:t/>
             </a:fld>
@@ -1285,7 +1629,7 @@
       </p:grpSpPr>
       <p:sp>
         <p:nvSpPr>
-          <p:cNvPr id="1916544148" name="Slide Image Placeholder 1"/>
+          <p:cNvPr id="550716524" name="Slide Image Placeholder 1"/>
           <p:cNvSpPr>
             <a:spLocks noChangeAspect="1" noGrp="1" noRot="1"/>
           </p:cNvSpPr>
@@ -1297,7 +1641,7 @@
       </p:sp>
       <p:sp>
         <p:nvSpPr>
-          <p:cNvPr id="1901063303" name="Notes Placeholder 2"/>
+          <p:cNvPr id="1505229174" name="Notes Placeholder 2"/>
           <p:cNvSpPr>
             <a:spLocks noGrp="1"/>
           </p:cNvSpPr>
@@ -1319,7 +1663,7 @@
       </p:sp>
       <p:sp>
         <p:nvSpPr>
-          <p:cNvPr id="298686965" name="Slide Number Placeholder 3"/>
+          <p:cNvPr id="1111671222" name="Slide Number Placeholder 3"/>
           <p:cNvSpPr>
             <a:spLocks noGrp="1"/>
           </p:cNvSpPr>
@@ -1335,7 +1679,7 @@
             <a:pPr>
               <a:defRPr/>
             </a:pPr>
-            <a:fld id="{63A44C6F-85E4-F237-CE9A-E5F564F6B719}" type="slidenum">
+            <a:fld id="{F518262F-F903-3EEA-F653-29E78658ED5E}" type="slidenum">
               <a:rPr/>
               <a:t/>
             </a:fld>
@@ -1370,7 +1714,7 @@
       </p:grpSpPr>
       <p:sp>
         <p:nvSpPr>
-          <p:cNvPr id="607992353" name="Title 1"/>
+          <p:cNvPr id="1780352951" name="Title 1"/>
           <p:cNvSpPr>
             <a:spLocks noGrp="1"/>
           </p:cNvSpPr>
@@ -1405,7 +1749,7 @@
       </p:sp>
       <p:sp>
         <p:nvSpPr>
-          <p:cNvPr id="414386788" name="Subtitle 2"/>
+          <p:cNvPr id="907386235" name="Subtitle 2"/>
           <p:cNvSpPr>
             <a:spLocks noGrp="1"/>
           </p:cNvSpPr>
@@ -1473,7 +1817,7 @@
       </p:sp>
       <p:sp>
         <p:nvSpPr>
-          <p:cNvPr id="268602057" name="Date Placeholder 3"/>
+          <p:cNvPr id="2141280045" name="Date Placeholder 3"/>
           <p:cNvSpPr>
             <a:spLocks noGrp="1"/>
           </p:cNvSpPr>
@@ -1499,7 +1843,7 @@
       </p:sp>
       <p:sp>
         <p:nvSpPr>
-          <p:cNvPr id="1705915677" name="Footer Placeholder 4"/>
+          <p:cNvPr id="1481293353" name="Footer Placeholder 4"/>
           <p:cNvSpPr>
             <a:spLocks noGrp="1"/>
           </p:cNvSpPr>
@@ -1521,7 +1865,7 @@
       </p:sp>
       <p:sp>
         <p:nvSpPr>
-          <p:cNvPr id="1671776589" name="Slide Number Placeholder 5"/>
+          <p:cNvPr id="519246687" name="Slide Number Placeholder 5"/>
           <p:cNvSpPr>
             <a:spLocks noGrp="1"/>
           </p:cNvSpPr>
@@ -1572,7 +1916,7 @@
       </p:grpSpPr>
       <p:sp>
         <p:nvSpPr>
-          <p:cNvPr id="1767536077" name="Title 1"/>
+          <p:cNvPr id="158948764" name="Title 1"/>
           <p:cNvSpPr>
             <a:spLocks noGrp="1"/>
           </p:cNvSpPr>
@@ -1598,7 +1942,7 @@
       </p:sp>
       <p:sp>
         <p:nvSpPr>
-          <p:cNvPr id="1986879301" name="Vertical Text Placeholder 2"/>
+          <p:cNvPr id="915362234" name="Vertical Text Placeholder 2"/>
           <p:cNvSpPr>
             <a:spLocks noGrp="1"/>
           </p:cNvSpPr>
@@ -1664,7 +2008,7 @@
       </p:sp>
       <p:sp>
         <p:nvSpPr>
-          <p:cNvPr id="705915040" name="Date Placeholder 3"/>
+          <p:cNvPr id="883975497" name="Date Placeholder 3"/>
           <p:cNvSpPr>
             <a:spLocks noGrp="1"/>
           </p:cNvSpPr>
@@ -1690,7 +2034,7 @@
       </p:sp>
       <p:sp>
         <p:nvSpPr>
-          <p:cNvPr id="1204428902" name="Footer Placeholder 4"/>
+          <p:cNvPr id="2136126546" name="Footer Placeholder 4"/>
           <p:cNvSpPr>
             <a:spLocks noGrp="1"/>
           </p:cNvSpPr>
@@ -1712,7 +2056,7 @@
       </p:sp>
       <p:sp>
         <p:nvSpPr>
-          <p:cNvPr id="782646054" name="Slide Number Placeholder 5"/>
+          <p:cNvPr id="1889996042" name="Slide Number Placeholder 5"/>
           <p:cNvSpPr>
             <a:spLocks noGrp="1"/>
           </p:cNvSpPr>
@@ -1763,7 +2107,7 @@
       </p:grpSpPr>
       <p:sp>
         <p:nvSpPr>
-          <p:cNvPr id="132440941" name="Vertical Title 1"/>
+          <p:cNvPr id="1111930960" name="Vertical Title 1"/>
           <p:cNvSpPr>
             <a:spLocks noGrp="1"/>
           </p:cNvSpPr>
@@ -1794,7 +2138,7 @@
       </p:sp>
       <p:sp>
         <p:nvSpPr>
-          <p:cNvPr id="1030652772" name="Vertical Text Placeholder 2"/>
+          <p:cNvPr id="1053881815" name="Vertical Text Placeholder 2"/>
           <p:cNvSpPr>
             <a:spLocks noGrp="1"/>
           </p:cNvSpPr>
@@ -1865,7 +2209,7 @@
       </p:sp>
       <p:sp>
         <p:nvSpPr>
-          <p:cNvPr id="1756906186" name="Date Placeholder 3"/>
+          <p:cNvPr id="1845421495" name="Date Placeholder 3"/>
           <p:cNvSpPr>
             <a:spLocks noGrp="1"/>
           </p:cNvSpPr>
@@ -1891,7 +2235,7 @@
       </p:sp>
       <p:sp>
         <p:nvSpPr>
-          <p:cNvPr id="1180371998" name="Footer Placeholder 4"/>
+          <p:cNvPr id="1810289913" name="Footer Placeholder 4"/>
           <p:cNvSpPr>
             <a:spLocks noGrp="1"/>
           </p:cNvSpPr>
@@ -1913,7 +2257,7 @@
       </p:sp>
       <p:sp>
         <p:nvSpPr>
-          <p:cNvPr id="440120099" name="Slide Number Placeholder 5"/>
+          <p:cNvPr id="773463901" name="Slide Number Placeholder 5"/>
           <p:cNvSpPr>
             <a:spLocks noGrp="1"/>
           </p:cNvSpPr>
@@ -1964,7 +2308,7 @@
       </p:grpSpPr>
       <p:sp>
         <p:nvSpPr>
-          <p:cNvPr id="1497506508" name="Title 1"/>
+          <p:cNvPr id="716152496" name="Title 1"/>
           <p:cNvSpPr>
             <a:spLocks noGrp="1"/>
           </p:cNvSpPr>
@@ -1990,7 +2334,7 @@
       </p:sp>
       <p:sp>
         <p:nvSpPr>
-          <p:cNvPr id="1468361076" name="Content Placeholder 2"/>
+          <p:cNvPr id="715786624" name="Content Placeholder 2"/>
           <p:cNvSpPr>
             <a:spLocks noGrp="1"/>
           </p:cNvSpPr>
@@ -2056,7 +2400,7 @@
       </p:sp>
       <p:sp>
         <p:nvSpPr>
-          <p:cNvPr id="521861164" name="Date Placeholder 3"/>
+          <p:cNvPr id="1132857672" name="Date Placeholder 3"/>
           <p:cNvSpPr>
             <a:spLocks noGrp="1"/>
           </p:cNvSpPr>
@@ -2082,7 +2426,7 @@
       </p:sp>
       <p:sp>
         <p:nvSpPr>
-          <p:cNvPr id="1883235578" name="Footer Placeholder 4"/>
+          <p:cNvPr id="1076735177" name="Footer Placeholder 4"/>
           <p:cNvSpPr>
             <a:spLocks noGrp="1"/>
           </p:cNvSpPr>
@@ -2104,7 +2448,7 @@
       </p:sp>
       <p:sp>
         <p:nvSpPr>
-          <p:cNvPr id="1892498620" name="Slide Number Placeholder 5"/>
+          <p:cNvPr id="1377902521" name="Slide Number Placeholder 5"/>
           <p:cNvSpPr>
             <a:spLocks noGrp="1"/>
           </p:cNvSpPr>
@@ -2155,7 +2499,7 @@
       </p:grpSpPr>
       <p:sp>
         <p:nvSpPr>
-          <p:cNvPr id="2120013000" name="Title 1"/>
+          <p:cNvPr id="511851456" name="Title 1"/>
           <p:cNvSpPr>
             <a:spLocks noGrp="1"/>
           </p:cNvSpPr>
@@ -2190,7 +2534,7 @@
       </p:sp>
       <p:sp>
         <p:nvSpPr>
-          <p:cNvPr id="291646719" name="Text Placeholder 2"/>
+          <p:cNvPr id="204283459" name="Text Placeholder 2"/>
           <p:cNvSpPr>
             <a:spLocks noGrp="1"/>
           </p:cNvSpPr>
@@ -2312,7 +2656,7 @@
       </p:sp>
       <p:sp>
         <p:nvSpPr>
-          <p:cNvPr id="93822368" name="Date Placeholder 3"/>
+          <p:cNvPr id="264708020" name="Date Placeholder 3"/>
           <p:cNvSpPr>
             <a:spLocks noGrp="1"/>
           </p:cNvSpPr>
@@ -2338,7 +2682,7 @@
       </p:sp>
       <p:sp>
         <p:nvSpPr>
-          <p:cNvPr id="503555072" name="Footer Placeholder 4"/>
+          <p:cNvPr id="1675664489" name="Footer Placeholder 4"/>
           <p:cNvSpPr>
             <a:spLocks noGrp="1"/>
           </p:cNvSpPr>
@@ -2360,7 +2704,7 @@
       </p:sp>
       <p:sp>
         <p:nvSpPr>
-          <p:cNvPr id="1474391392" name="Slide Number Placeholder 5"/>
+          <p:cNvPr id="1384803802" name="Slide Number Placeholder 5"/>
           <p:cNvSpPr>
             <a:spLocks noGrp="1"/>
           </p:cNvSpPr>
@@ -2411,7 +2755,7 @@
       </p:grpSpPr>
       <p:sp>
         <p:nvSpPr>
-          <p:cNvPr id="581584448" name="Title 1"/>
+          <p:cNvPr id="852774012" name="Title 1"/>
           <p:cNvSpPr>
             <a:spLocks noGrp="1"/>
           </p:cNvSpPr>
@@ -2437,7 +2781,7 @@
       </p:sp>
       <p:sp>
         <p:nvSpPr>
-          <p:cNvPr id="1914315441" name="Content Placeholder 2"/>
+          <p:cNvPr id="1043937769" name="Content Placeholder 2"/>
           <p:cNvSpPr>
             <a:spLocks noGrp="1"/>
           </p:cNvSpPr>
@@ -2508,7 +2852,7 @@
       </p:sp>
       <p:sp>
         <p:nvSpPr>
-          <p:cNvPr id="1072176085" name="Content Placeholder 3"/>
+          <p:cNvPr id="985015629" name="Content Placeholder 3"/>
           <p:cNvSpPr>
             <a:spLocks noGrp="1"/>
           </p:cNvSpPr>
@@ -2579,7 +2923,7 @@
       </p:sp>
       <p:sp>
         <p:nvSpPr>
-          <p:cNvPr id="1010572691" name="Date Placeholder 4"/>
+          <p:cNvPr id="39251863" name="Date Placeholder 4"/>
           <p:cNvSpPr>
             <a:spLocks noGrp="1"/>
           </p:cNvSpPr>
@@ -2605,7 +2949,7 @@
       </p:sp>
       <p:sp>
         <p:nvSpPr>
-          <p:cNvPr id="1091904216" name="Footer Placeholder 5"/>
+          <p:cNvPr id="1120492744" name="Footer Placeholder 5"/>
           <p:cNvSpPr>
             <a:spLocks noGrp="1"/>
           </p:cNvSpPr>
@@ -2627,7 +2971,7 @@
       </p:sp>
       <p:sp>
         <p:nvSpPr>
-          <p:cNvPr id="1246417062" name="Slide Number Placeholder 6"/>
+          <p:cNvPr id="2080483144" name="Slide Number Placeholder 6"/>
           <p:cNvSpPr>
             <a:spLocks noGrp="1"/>
           </p:cNvSpPr>
@@ -2678,7 +3022,7 @@
       </p:grpSpPr>
       <p:sp>
         <p:nvSpPr>
-          <p:cNvPr id="1422857592" name="Title 1"/>
+          <p:cNvPr id="698520788" name="Title 1"/>
           <p:cNvSpPr>
             <a:spLocks noGrp="1"/>
           </p:cNvSpPr>
@@ -2709,7 +3053,7 @@
       </p:sp>
       <p:sp>
         <p:nvSpPr>
-          <p:cNvPr id="1772533630" name="Text Placeholder 2"/>
+          <p:cNvPr id="1644879458" name="Text Placeholder 2"/>
           <p:cNvSpPr>
             <a:spLocks noGrp="1"/>
           </p:cNvSpPr>
@@ -2777,7 +3121,7 @@
       </p:sp>
       <p:sp>
         <p:nvSpPr>
-          <p:cNvPr id="631235616" name="Content Placeholder 3"/>
+          <p:cNvPr id="853184002" name="Content Placeholder 3"/>
           <p:cNvSpPr>
             <a:spLocks noGrp="1"/>
           </p:cNvSpPr>
@@ -2848,7 +3192,7 @@
       </p:sp>
       <p:sp>
         <p:nvSpPr>
-          <p:cNvPr id="1424596740" name="Text Placeholder 4"/>
+          <p:cNvPr id="69326498" name="Text Placeholder 4"/>
           <p:cNvSpPr>
             <a:spLocks noGrp="1"/>
           </p:cNvSpPr>
@@ -2916,7 +3260,7 @@
       </p:sp>
       <p:sp>
         <p:nvSpPr>
-          <p:cNvPr id="1942433689" name="Content Placeholder 5"/>
+          <p:cNvPr id="24578637" name="Content Placeholder 5"/>
           <p:cNvSpPr>
             <a:spLocks noGrp="1"/>
           </p:cNvSpPr>
@@ -2987,7 +3331,7 @@
       </p:sp>
       <p:sp>
         <p:nvSpPr>
-          <p:cNvPr id="1544463694" name="Date Placeholder 6"/>
+          <p:cNvPr id="930397625" name="Date Placeholder 6"/>
           <p:cNvSpPr>
             <a:spLocks noGrp="1"/>
           </p:cNvSpPr>
@@ -3013,7 +3357,7 @@
       </p:sp>
       <p:sp>
         <p:nvSpPr>
-          <p:cNvPr id="836676126" name="Footer Placeholder 7"/>
+          <p:cNvPr id="1823803357" name="Footer Placeholder 7"/>
           <p:cNvSpPr>
             <a:spLocks noGrp="1"/>
           </p:cNvSpPr>
@@ -3035,7 +3379,7 @@
       </p:sp>
       <p:sp>
         <p:nvSpPr>
-          <p:cNvPr id="1345043304" name="Slide Number Placeholder 8"/>
+          <p:cNvPr id="1609103670" name="Slide Number Placeholder 8"/>
           <p:cNvSpPr>
             <a:spLocks noGrp="1"/>
           </p:cNvSpPr>
@@ -3086,7 +3430,7 @@
       </p:grpSpPr>
       <p:sp>
         <p:nvSpPr>
-          <p:cNvPr id="444792031" name="Title 1"/>
+          <p:cNvPr id="1387969436" name="Title 1"/>
           <p:cNvSpPr>
             <a:spLocks noGrp="1"/>
           </p:cNvSpPr>
@@ -3112,7 +3456,7 @@
       </p:sp>
       <p:sp>
         <p:nvSpPr>
-          <p:cNvPr id="1013895824" name="Date Placeholder 2"/>
+          <p:cNvPr id="1370322980" name="Date Placeholder 2"/>
           <p:cNvSpPr>
             <a:spLocks noGrp="1"/>
           </p:cNvSpPr>
@@ -3138,7 +3482,7 @@
       </p:sp>
       <p:sp>
         <p:nvSpPr>
-          <p:cNvPr id="1959037146" name="Footer Placeholder 3"/>
+          <p:cNvPr id="1453657492" name="Footer Placeholder 3"/>
           <p:cNvSpPr>
             <a:spLocks noGrp="1"/>
           </p:cNvSpPr>
@@ -3160,7 +3504,7 @@
       </p:sp>
       <p:sp>
         <p:nvSpPr>
-          <p:cNvPr id="1929413922" name="Slide Number Placeholder 4"/>
+          <p:cNvPr id="519407401" name="Slide Number Placeholder 4"/>
           <p:cNvSpPr>
             <a:spLocks noGrp="1"/>
           </p:cNvSpPr>
@@ -3211,7 +3555,7 @@
       </p:grpSpPr>
       <p:sp>
         <p:nvSpPr>
-          <p:cNvPr id="1490824323" name="Date Placeholder 1"/>
+          <p:cNvPr id="1190919244" name="Date Placeholder 1"/>
           <p:cNvSpPr>
             <a:spLocks noGrp="1"/>
           </p:cNvSpPr>
@@ -3237,7 +3581,7 @@
       </p:sp>
       <p:sp>
         <p:nvSpPr>
-          <p:cNvPr id="1867662239" name="Footer Placeholder 2"/>
+          <p:cNvPr id="1907721621" name="Footer Placeholder 2"/>
           <p:cNvSpPr>
             <a:spLocks noGrp="1"/>
           </p:cNvSpPr>
@@ -3259,7 +3603,7 @@
       </p:sp>
       <p:sp>
         <p:nvSpPr>
-          <p:cNvPr id="961392768" name="Slide Number Placeholder 3"/>
+          <p:cNvPr id="310008091" name="Slide Number Placeholder 3"/>
           <p:cNvSpPr>
             <a:spLocks noGrp="1"/>
           </p:cNvSpPr>
@@ -3310,7 +3654,7 @@
       </p:grpSpPr>
       <p:sp>
         <p:nvSpPr>
-          <p:cNvPr id="581522080" name="Title 1"/>
+          <p:cNvPr id="1099609519" name="Title 1"/>
           <p:cNvSpPr>
             <a:spLocks noGrp="1"/>
           </p:cNvSpPr>
@@ -3345,7 +3689,7 @@
       </p:sp>
       <p:sp>
         <p:nvSpPr>
-          <p:cNvPr id="1662324772" name="Content Placeholder 2"/>
+          <p:cNvPr id="906785458" name="Content Placeholder 2"/>
           <p:cNvSpPr>
             <a:spLocks noGrp="1"/>
           </p:cNvSpPr>
@@ -3444,7 +3788,7 @@
       </p:sp>
       <p:sp>
         <p:nvSpPr>
-          <p:cNvPr id="1870411722" name="Text Placeholder 3"/>
+          <p:cNvPr id="1807052667" name="Text Placeholder 3"/>
           <p:cNvSpPr>
             <a:spLocks noGrp="1"/>
           </p:cNvSpPr>
@@ -3512,7 +3856,7 @@
       </p:sp>
       <p:sp>
         <p:nvSpPr>
-          <p:cNvPr id="1655003544" name="Date Placeholder 4"/>
+          <p:cNvPr id="1476909226" name="Date Placeholder 4"/>
           <p:cNvSpPr>
             <a:spLocks noGrp="1"/>
           </p:cNvSpPr>
@@ -3538,7 +3882,7 @@
       </p:sp>
       <p:sp>
         <p:nvSpPr>
-          <p:cNvPr id="2100000481" name="Footer Placeholder 5"/>
+          <p:cNvPr id="100366141" name="Footer Placeholder 5"/>
           <p:cNvSpPr>
             <a:spLocks noGrp="1"/>
           </p:cNvSpPr>
@@ -3560,7 +3904,7 @@
       </p:sp>
       <p:sp>
         <p:nvSpPr>
-          <p:cNvPr id="1628474000" name="Slide Number Placeholder 6"/>
+          <p:cNvPr id="377432793" name="Slide Number Placeholder 6"/>
           <p:cNvSpPr>
             <a:spLocks noGrp="1"/>
           </p:cNvSpPr>
@@ -3611,7 +3955,7 @@
       </p:grpSpPr>
       <p:sp>
         <p:nvSpPr>
-          <p:cNvPr id="1370645593" name="Title 1"/>
+          <p:cNvPr id="551156194" name="Title 1"/>
           <p:cNvSpPr>
             <a:spLocks noGrp="1"/>
           </p:cNvSpPr>
@@ -3646,7 +3990,7 @@
       </p:sp>
       <p:sp>
         <p:nvSpPr>
-          <p:cNvPr id="1955371361" name="Picture Placeholder 2"/>
+          <p:cNvPr id="138030227" name="Picture Placeholder 2"/>
           <p:cNvSpPr>
             <a:spLocks noChangeAspect="1" noGrp="1"/>
           </p:cNvSpPr>
@@ -3714,7 +4058,7 @@
       </p:sp>
       <p:sp>
         <p:nvSpPr>
-          <p:cNvPr id="379155982" name="Text Placeholder 3"/>
+          <p:cNvPr id="914429362" name="Text Placeholder 3"/>
           <p:cNvSpPr>
             <a:spLocks noGrp="1"/>
           </p:cNvSpPr>
@@ -3782,7 +4126,7 @@
       </p:sp>
       <p:sp>
         <p:nvSpPr>
-          <p:cNvPr id="443360954" name="Date Placeholder 4"/>
+          <p:cNvPr id="1298497268" name="Date Placeholder 4"/>
           <p:cNvSpPr>
             <a:spLocks noGrp="1"/>
           </p:cNvSpPr>
@@ -3808,7 +4152,7 @@
       </p:sp>
       <p:sp>
         <p:nvSpPr>
-          <p:cNvPr id="452135796" name="Footer Placeholder 5"/>
+          <p:cNvPr id="1861265397" name="Footer Placeholder 5"/>
           <p:cNvSpPr>
             <a:spLocks noGrp="1"/>
           </p:cNvSpPr>
@@ -3830,7 +4174,7 @@
       </p:sp>
       <p:sp>
         <p:nvSpPr>
-          <p:cNvPr id="94894427" name="Slide Number Placeholder 6"/>
+          <p:cNvPr id="446424511" name="Slide Number Placeholder 6"/>
           <p:cNvSpPr>
             <a:spLocks noGrp="1"/>
           </p:cNvSpPr>
@@ -3889,7 +4233,7 @@
       </p:grpSpPr>
       <p:sp>
         <p:nvSpPr>
-          <p:cNvPr id="1498203030" name="Title Placeholder 1"/>
+          <p:cNvPr id="500640220" name="Title Placeholder 1"/>
           <p:cNvSpPr>
             <a:spLocks noGrp="1"/>
           </p:cNvSpPr>
@@ -3925,7 +4269,7 @@
       </p:sp>
       <p:sp>
         <p:nvSpPr>
-          <p:cNvPr id="893507156" name="Text Placeholder 2"/>
+          <p:cNvPr id="980608600" name="Text Placeholder 2"/>
           <p:cNvSpPr>
             <a:spLocks noGrp="1"/>
           </p:cNvSpPr>
@@ -4001,7 +4345,7 @@
       </p:sp>
       <p:sp>
         <p:nvSpPr>
-          <p:cNvPr id="271284085" name="Date Placeholder 3"/>
+          <p:cNvPr id="1566114418" name="Date Placeholder 3"/>
           <p:cNvSpPr>
             <a:spLocks noGrp="1"/>
           </p:cNvSpPr>
@@ -4045,7 +4389,7 @@
       </p:sp>
       <p:sp>
         <p:nvSpPr>
-          <p:cNvPr id="79681711" name="Footer Placeholder 4"/>
+          <p:cNvPr id="590930462" name="Footer Placeholder 4"/>
           <p:cNvSpPr>
             <a:spLocks noGrp="1"/>
           </p:cNvSpPr>
@@ -4085,7 +4429,7 @@
       </p:sp>
       <p:sp>
         <p:nvSpPr>
-          <p:cNvPr id="419576729" name="Slide Number Placeholder 5"/>
+          <p:cNvPr id="453604928" name="Slide Number Placeholder 5"/>
           <p:cNvSpPr>
             <a:spLocks noGrp="1"/>
           </p:cNvSpPr>
@@ -4445,7 +4789,7 @@
       </p:grpSpPr>
       <p:sp>
         <p:nvSpPr>
-          <p:cNvPr id="629009700" name="Title 1"/>
+          <p:cNvPr id="1669897345" name="Title 1"/>
           <p:cNvSpPr>
             <a:spLocks noGrp="1"/>
           </p:cNvSpPr>
@@ -4489,7 +4833,7 @@
       </p:sp>
       <p:sp>
         <p:nvSpPr>
-          <p:cNvPr id="919561071" name="Subtitle 2"/>
+          <p:cNvPr id="715673669" name="Subtitle 2"/>
           <p:cNvSpPr>
             <a:spLocks noGrp="1"/>
           </p:cNvSpPr>
@@ -4581,7 +4925,1553 @@
       </p:grpSpPr>
       <p:sp>
         <p:nvSpPr>
-          <p:cNvPr id="410955073" name=""/>
+          <p:cNvPr id="1043915878" name="Title 1"/>
+          <p:cNvSpPr>
+            <a:spLocks noGrp="1"/>
+          </p:cNvSpPr>
+          <p:nvPr>
+            <p:ph type="title"/>
+          </p:nvPr>
+        </p:nvSpPr>
+        <p:spPr bwMode="auto"/>
+        <p:txBody>
+          <a:bodyPr/>
+          <a:lstStyle/>
+          <a:p>
+            <a:pPr>
+              <a:defRPr/>
+            </a:pPr>
+            <a:r>
+              <a:rPr lang="bg-BG" b="1">
+                <a:solidFill>
+                  <a:schemeClr val="bg1"/>
+                </a:solidFill>
+                <a:latin typeface="Ubuntu Sans"/>
+                <a:ea typeface="Ubuntu Sans"/>
+                <a:cs typeface="Ubuntu Sans"/>
+              </a:rPr>
+              <a:t>Анализ на живота на батерията</a:t>
+            </a:r>
+            <a:endParaRPr b="1">
+              <a:solidFill>
+                <a:schemeClr val="bg1"/>
+              </a:solidFill>
+              <a:latin typeface="Ubuntu Sans"/>
+              <a:cs typeface="Ubuntu Sans"/>
+            </a:endParaRPr>
+          </a:p>
+        </p:txBody>
+      </p:sp>
+      <p:sp>
+        <p:nvSpPr>
+          <p:cNvPr id="713705419" name="Content Placeholder 2"/>
+          <p:cNvSpPr>
+            <a:spLocks noGrp="1"/>
+          </p:cNvSpPr>
+          <p:nvPr>
+            <p:ph idx="1"/>
+          </p:nvPr>
+        </p:nvSpPr>
+        <p:spPr bwMode="auto"/>
+        <p:txBody>
+          <a:bodyPr/>
+          <a:lstStyle/>
+          <a:p>
+            <a:pPr>
+              <a:defRPr/>
+            </a:pPr>
+            <a:r>
+              <a:rPr lang="bg-BG">
+                <a:solidFill>
+                  <a:schemeClr val="bg1"/>
+                </a:solidFill>
+                <a:latin typeface="Ubuntu Sans"/>
+                <a:ea typeface="Ubuntu Sans"/>
+                <a:cs typeface="Ubuntu Sans"/>
+              </a:rPr>
+              <a:t>Капацитет: </a:t>
+            </a:r>
+            <a:r>
+              <a:rPr lang="en-US">
+                <a:solidFill>
+                  <a:schemeClr val="bg1"/>
+                </a:solidFill>
+                <a:latin typeface="Ubuntu Sans"/>
+                <a:ea typeface="Ubuntu Sans"/>
+                <a:cs typeface="Ubuntu Sans"/>
+              </a:rPr>
+              <a:t>600 mAh</a:t>
+            </a:r>
+            <a:endParaRPr lang="en-US">
+              <a:solidFill>
+                <a:schemeClr val="bg1"/>
+              </a:solidFill>
+              <a:latin typeface="Ubuntu Sans"/>
+              <a:ea typeface="Ubuntu Sans"/>
+              <a:cs typeface="Ubuntu Sans"/>
+            </a:endParaRPr>
+          </a:p>
+          <a:p>
+            <a:pPr>
+              <a:defRPr/>
+            </a:pPr>
+            <a:r>
+              <a:rPr lang="bg-BG">
+                <a:solidFill>
+                  <a:schemeClr val="bg1"/>
+                </a:solidFill>
+                <a:latin typeface="Ubuntu Sans"/>
+                <a:ea typeface="Ubuntu Sans"/>
+                <a:cs typeface="Ubuntu Sans"/>
+              </a:rPr>
+              <a:t>Изчисления – спрямо целодневна работа на проекта</a:t>
+            </a:r>
+            <a:endParaRPr lang="bg-BG">
+              <a:solidFill>
+                <a:schemeClr val="bg1"/>
+              </a:solidFill>
+              <a:latin typeface="Ubuntu Sans"/>
+              <a:ea typeface="Ubuntu Sans"/>
+              <a:cs typeface="Ubuntu Sans"/>
+            </a:endParaRPr>
+          </a:p>
+          <a:p>
+            <a:pPr>
+              <a:defRPr/>
+            </a:pPr>
+            <a:r>
+              <a:rPr lang="bg-BG">
+                <a:solidFill>
+                  <a:schemeClr val="bg1"/>
+                </a:solidFill>
+                <a:latin typeface="Ubuntu Sans"/>
+                <a:ea typeface="Ubuntu Sans"/>
+                <a:cs typeface="Ubuntu Sans"/>
+              </a:rPr>
+              <a:t>Консумация на ток:</a:t>
+            </a:r>
+            <a:endParaRPr lang="bg-BG">
+              <a:solidFill>
+                <a:schemeClr val="bg1"/>
+              </a:solidFill>
+              <a:latin typeface="Ubuntu Sans"/>
+              <a:ea typeface="Ubuntu Sans"/>
+              <a:cs typeface="Ubuntu Sans"/>
+            </a:endParaRPr>
+          </a:p>
+          <a:p>
+            <a:pPr marL="457200" lvl="1" indent="0">
+              <a:buFont typeface="Arial"/>
+              <a:buNone/>
+              <a:defRPr/>
+            </a:pPr>
+            <a:r>
+              <a:rPr sz="2800" b="0" i="0" u="none">
+                <a:solidFill>
+                  <a:schemeClr val="bg1"/>
+                </a:solidFill>
+                <a:latin typeface="Ubuntu Sans"/>
+                <a:ea typeface="Ubuntu Sans"/>
+                <a:cs typeface="Ubuntu Sans"/>
+              </a:rPr>
+              <a:t>Arduino Uno R4: 140 mA </a:t>
+            </a:r>
+            <a:endParaRPr sz="2800" b="0" i="0" u="none">
+              <a:solidFill>
+                <a:schemeClr val="bg1"/>
+              </a:solidFill>
+              <a:latin typeface="Ubuntu Sans"/>
+              <a:ea typeface="Ubuntu Sans"/>
+              <a:cs typeface="Ubuntu Sans"/>
+            </a:endParaRPr>
+          </a:p>
+          <a:p>
+            <a:pPr marL="457200" lvl="1" indent="0">
+              <a:buFont typeface="Arial"/>
+              <a:buNone/>
+              <a:defRPr/>
+            </a:pPr>
+            <a:r>
+              <a:rPr sz="2800" b="0" i="0" u="none">
+                <a:solidFill>
+                  <a:schemeClr val="bg1"/>
+                </a:solidFill>
+                <a:latin typeface="Ubuntu Sans"/>
+                <a:ea typeface="Ubuntu Sans"/>
+                <a:cs typeface="Ubuntu Sans"/>
+              </a:rPr>
+              <a:t>2xLEDs и зумери(Средно работят по 1 час на ден): 80 mA</a:t>
+            </a:r>
+            <a:endParaRPr sz="2800" b="0" i="0" u="none">
+              <a:solidFill>
+                <a:schemeClr val="bg1"/>
+              </a:solidFill>
+              <a:latin typeface="Ubuntu Sans"/>
+              <a:ea typeface="Ubuntu Sans"/>
+              <a:cs typeface="Ubuntu Sans"/>
+            </a:endParaRPr>
+          </a:p>
+          <a:p>
+            <a:pPr marL="457200" lvl="1" indent="0">
+              <a:buFont typeface="Arial"/>
+              <a:buNone/>
+              <a:defRPr/>
+            </a:pPr>
+            <a:r>
+              <a:rPr sz="2800" b="0" i="0" u="none">
+                <a:solidFill>
+                  <a:schemeClr val="bg1"/>
+                </a:solidFill>
+                <a:latin typeface="Ubuntu Sans"/>
+                <a:ea typeface="Ubuntu Sans"/>
+                <a:cs typeface="Ubuntu Sans"/>
+              </a:rPr>
+              <a:t>IR Sensor: 25 mA </a:t>
+            </a:r>
+            <a:endParaRPr sz="2800" b="0" i="0" u="none">
+              <a:solidFill>
+                <a:schemeClr val="bg1"/>
+              </a:solidFill>
+              <a:latin typeface="Ubuntu Sans"/>
+              <a:ea typeface="Ubuntu Sans"/>
+              <a:cs typeface="Ubuntu Sans"/>
+            </a:endParaRPr>
+          </a:p>
+          <a:p>
+            <a:pPr marL="457200" lvl="1" indent="0">
+              <a:buFont typeface="Arial"/>
+              <a:buNone/>
+              <a:defRPr/>
+            </a:pPr>
+            <a:r>
+              <a:rPr sz="2800" b="0" i="0" u="none">
+                <a:solidFill>
+                  <a:schemeClr val="bg1"/>
+                </a:solidFill>
+                <a:latin typeface="Ubuntu Sans"/>
+                <a:ea typeface="Ubuntu Sans"/>
+                <a:cs typeface="Ubuntu Sans"/>
+              </a:rPr>
+              <a:t>I        =140+ (80 * 1/24)+25=168.33 mA</a:t>
+            </a:r>
+            <a:endParaRPr>
+              <a:solidFill>
+                <a:schemeClr val="bg1"/>
+              </a:solidFill>
+              <a:latin typeface="Ubuntu Sans"/>
+              <a:cs typeface="Ubuntu Sans"/>
+            </a:endParaRPr>
+          </a:p>
+        </p:txBody>
+      </p:sp>
+      <p:sp>
+        <p:nvSpPr>
+          <p:cNvPr id="1640567046" name=""/>
+          <p:cNvSpPr txBox="1"/>
+          <p:nvPr/>
+        </p:nvSpPr>
+        <p:spPr bwMode="auto">
+          <a:xfrm rot="0" flipH="0" flipV="0">
+            <a:off x="1418062" y="4777379"/>
+            <a:ext cx="1988703" cy="366120"/>
+          </a:xfrm>
+          <a:prstGeom prst="rect">
+            <a:avLst/>
+          </a:prstGeom>
+          <a:noFill/>
+        </p:spPr>
+        <p:txBody>
+          <a:bodyPr vertOverflow="overflow" horzOverflow="overflow" vert="horz" wrap="square" lIns="91440" tIns="45720" rIns="91440" bIns="45720" numCol="1" spcCol="0" rtlCol="0" fromWordArt="0" anchor="t" anchorCtr="0" forceAA="0" upright="0" compatLnSpc="0">
+            <a:spAutoFit/>
+          </a:bodyPr>
+          <a:p>
+            <a:pPr>
+              <a:defRPr/>
+            </a:pPr>
+            <a:r>
+              <a:rPr lang="en-US" sz="1800" b="0" i="0" u="none" strike="noStrike" cap="none" spc="0">
+                <a:solidFill>
+                  <a:schemeClr val="bg1"/>
+                </a:solidFill>
+                <a:latin typeface="Ubuntu Sans"/>
+                <a:ea typeface="Ubuntu Sans"/>
+                <a:cs typeface="Ubuntu Sans"/>
+              </a:rPr>
+              <a:t>total</a:t>
+            </a:r>
+            <a:endParaRPr/>
+          </a:p>
+        </p:txBody>
+      </p:sp>
+    </p:spTree>
+  </p:cSld>
+  <p:clrMapOvr>
+    <a:masterClrMapping/>
+  </p:clrMapOvr>
+  <mc:AlternateContent xmlns:mc="http://schemas.openxmlformats.org/markup-compatibility/2006">
+    <mc:Choice xmlns:p159="http://schemas.microsoft.com/office/powerpoint/2015/09/main" xmlns:p14="http://schemas.microsoft.com/office/powerpoint/2010/main" Requires="p159">
+      <p:transition p14:dur="500" advClick="1"/>
+    </mc:Choice>
+    <mc:Fallback>
+      <p:transition advClick="1"/>
+    </mc:Fallback>
+  </mc:AlternateContent>
+</p:sld>
+</file>
+
+<file path=ppt/slides/slide11.xml><?xml version="1.0" encoding="utf-8"?>
+<p:sld xmlns:a="http://schemas.openxmlformats.org/drawingml/2006/main" xmlns:r="http://schemas.openxmlformats.org/officeDocument/2006/relationships" xmlns:p="http://schemas.openxmlformats.org/presentationml/2006/main" xmlns:m="http://schemas.openxmlformats.org/officeDocument/2006/math" xmlns:w="http://schemas.openxmlformats.org/wordprocessingml/2006/main" xmlns:mc="http://schemas.openxmlformats.org/markup-compatibility/2006" showMasterPhAnim="0" showMasterSp="1" show="1">
+  <p:cSld name="">
+    <p:spTree>
+      <p:nvGrpSpPr>
+        <p:cNvPr id="1" name=""/>
+        <p:cNvGrpSpPr/>
+        <p:nvPr/>
+      </p:nvGrpSpPr>
+      <p:grpSpPr bwMode="auto">
+        <a:xfrm>
+          <a:off x="0" y="0"/>
+          <a:ext cx="0" cy="0"/>
+          <a:chOff x="0" y="0"/>
+          <a:chExt cx="0" cy="0"/>
+        </a:xfrm>
+      </p:grpSpPr>
+      <p:sp>
+        <p:nvSpPr>
+          <p:cNvPr id="1348875459" name="Title 1"/>
+          <p:cNvSpPr>
+            <a:spLocks noGrp="1"/>
+          </p:cNvSpPr>
+          <p:nvPr>
+            <p:ph type="title"/>
+          </p:nvPr>
+        </p:nvSpPr>
+        <p:spPr bwMode="auto"/>
+        <p:txBody>
+          <a:bodyPr/>
+          <a:lstStyle/>
+          <a:p>
+            <a:pPr>
+              <a:defRPr/>
+            </a:pPr>
+            <a:r>
+              <a:rPr lang="bg-BG" b="1">
+                <a:solidFill>
+                  <a:schemeClr val="bg1"/>
+                </a:solidFill>
+                <a:latin typeface="Ubuntu Sans"/>
+                <a:ea typeface="Ubuntu Sans"/>
+                <a:cs typeface="Ubuntu Sans"/>
+              </a:rPr>
+              <a:t>Процес на разработка:</a:t>
+            </a:r>
+            <a:endParaRPr b="1">
+              <a:solidFill>
+                <a:schemeClr val="bg1"/>
+              </a:solidFill>
+              <a:latin typeface="Ubuntu Sans"/>
+              <a:cs typeface="Ubuntu Sans"/>
+            </a:endParaRPr>
+          </a:p>
+        </p:txBody>
+      </p:sp>
+      <p:sp>
+        <p:nvSpPr>
+          <p:cNvPr id="204911831" name="Content Placeholder 2"/>
+          <p:cNvSpPr>
+            <a:spLocks noGrp="1"/>
+          </p:cNvSpPr>
+          <p:nvPr>
+            <p:ph idx="1"/>
+          </p:nvPr>
+        </p:nvSpPr>
+        <p:spPr bwMode="auto">
+          <a:xfrm flipH="0" flipV="0">
+            <a:off x="419099" y="1825624"/>
+            <a:ext cx="2734649" cy="4351338"/>
+          </a:xfrm>
+        </p:spPr>
+        <p:txBody>
+          <a:bodyPr/>
+          <a:lstStyle/>
+          <a:p>
+            <a:pPr marL="0" indent="0" algn="ctr">
+              <a:buFont typeface="Arial"/>
+              <a:buNone/>
+              <a:defRPr/>
+            </a:pPr>
+            <a:r>
+              <a:rPr lang="bg-BG" sz="2600" u="sng">
+                <a:solidFill>
+                  <a:schemeClr val="bg1"/>
+                </a:solidFill>
+                <a:latin typeface="Ubuntu Sans"/>
+                <a:ea typeface="Ubuntu Sans"/>
+                <a:cs typeface="Ubuntu Sans"/>
+              </a:rPr>
+              <a:t>Сряда</a:t>
+            </a:r>
+            <a:endParaRPr sz="2600">
+              <a:solidFill>
+                <a:schemeClr val="bg1"/>
+              </a:solidFill>
+              <a:latin typeface="Ubuntu Sans"/>
+              <a:cs typeface="Ubuntu Sans"/>
+            </a:endParaRPr>
+          </a:p>
+          <a:p>
+            <a:pPr marL="0" indent="0" algn="ctr">
+              <a:buFont typeface="Arial"/>
+              <a:buNone/>
+              <a:defRPr/>
+            </a:pPr>
+            <a:r>
+              <a:rPr lang="en-US" sz="2600">
+                <a:solidFill>
+                  <a:schemeClr val="bg1"/>
+                </a:solidFill>
+                <a:latin typeface="Ubuntu Sans"/>
+                <a:ea typeface="Ubuntu Sans"/>
+                <a:cs typeface="Ubuntu Sans"/>
+              </a:rPr>
+              <a:t>Brainstorming </a:t>
+            </a:r>
+            <a:r>
+              <a:rPr lang="bg-BG" sz="2600">
+                <a:solidFill>
+                  <a:schemeClr val="bg1"/>
+                </a:solidFill>
+                <a:latin typeface="Ubuntu Sans"/>
+                <a:ea typeface="Ubuntu Sans"/>
+                <a:cs typeface="Ubuntu Sans"/>
+              </a:rPr>
+              <a:t>за идея</a:t>
+            </a:r>
+            <a:endParaRPr sz="2600">
+              <a:solidFill>
+                <a:schemeClr val="bg1"/>
+              </a:solidFill>
+              <a:latin typeface="Ubuntu Sans"/>
+              <a:ea typeface="Ubuntu Sans"/>
+              <a:cs typeface="Ubuntu Sans"/>
+            </a:endParaRPr>
+          </a:p>
+          <a:p>
+            <a:pPr marL="0" indent="0" algn="ctr">
+              <a:buFont typeface="Arial"/>
+              <a:buNone/>
+              <a:defRPr/>
+            </a:pPr>
+            <a:r>
+              <a:rPr lang="bg-BG" sz="2600">
+                <a:solidFill>
+                  <a:schemeClr val="bg1"/>
+                </a:solidFill>
+                <a:latin typeface="Ubuntu Sans"/>
+                <a:ea typeface="Ubuntu Sans"/>
+                <a:cs typeface="Ubuntu Sans"/>
+              </a:rPr>
+              <a:t>3</a:t>
+            </a:r>
+            <a:r>
+              <a:rPr lang="en-US" sz="2600">
+                <a:solidFill>
+                  <a:schemeClr val="bg1"/>
+                </a:solidFill>
+                <a:latin typeface="Ubuntu Sans"/>
+                <a:ea typeface="Ubuntu Sans"/>
+                <a:cs typeface="Ubuntu Sans"/>
+              </a:rPr>
+              <a:t>D </a:t>
+            </a:r>
+            <a:r>
+              <a:rPr lang="bg-BG" sz="2600">
+                <a:solidFill>
+                  <a:schemeClr val="bg1"/>
+                </a:solidFill>
+                <a:latin typeface="Ubuntu Sans"/>
+                <a:ea typeface="Ubuntu Sans"/>
+                <a:cs typeface="Ubuntu Sans"/>
+              </a:rPr>
+              <a:t>модел и принтиране </a:t>
+            </a:r>
+            <a:endParaRPr sz="2600">
+              <a:solidFill>
+                <a:schemeClr val="bg1"/>
+              </a:solidFill>
+              <a:latin typeface="Ubuntu Sans"/>
+              <a:ea typeface="Ubuntu Sans"/>
+              <a:cs typeface="Ubuntu Sans"/>
+            </a:endParaRPr>
+          </a:p>
+          <a:p>
+            <a:pPr marL="0" indent="0" algn="ctr">
+              <a:buFont typeface="Arial"/>
+              <a:buNone/>
+              <a:defRPr/>
+            </a:pPr>
+            <a:r>
+              <a:rPr lang="bg-BG" sz="2600">
+                <a:solidFill>
+                  <a:schemeClr val="bg1"/>
+                </a:solidFill>
+                <a:latin typeface="Ubuntu Sans"/>
+                <a:ea typeface="Ubuntu Sans"/>
+                <a:cs typeface="Ubuntu Sans"/>
+              </a:rPr>
+              <a:t>Създаване на няколко скици на сайта</a:t>
+            </a:r>
+            <a:endParaRPr>
+              <a:solidFill>
+                <a:schemeClr val="bg1"/>
+              </a:solidFill>
+              <a:latin typeface="Ubuntu Sans"/>
+              <a:cs typeface="Ubuntu Sans"/>
+            </a:endParaRPr>
+          </a:p>
+        </p:txBody>
+      </p:sp>
+      <p:sp>
+        <p:nvSpPr>
+          <p:cNvPr id="84200880" name="Content Placeholder 2"/>
+          <p:cNvSpPr>
+            <a:spLocks noGrp="1"/>
+          </p:cNvSpPr>
+          <p:nvPr/>
+        </p:nvSpPr>
+        <p:spPr bwMode="auto">
+          <a:xfrm flipH="0" flipV="0">
+            <a:off x="3361350" y="1825624"/>
+            <a:ext cx="2734648" cy="4351338"/>
+          </a:xfrm>
+        </p:spPr>
+        <p:txBody>
+          <a:bodyPr vert="horz" lIns="91440" tIns="45720" rIns="91440" bIns="45720" rtlCol="0">
+            <a:normAutofit/>
+          </a:bodyPr>
+          <a:lstStyle>
+            <a:lvl1pPr marL="228600" indent="-228600" algn="l" defTabSz="914400" rtl="0">
+              <a:lnSpc>
+                <a:spcPct val="90000"/>
+              </a:lnSpc>
+              <a:spcBef>
+                <a:spcPts val="999"/>
+              </a:spcBef>
+              <a:buFont typeface="Arial"/>
+              <a:buChar char="•"/>
+              <a:defRPr sz="2800">
+                <a:solidFill>
+                  <a:schemeClr val="tx1"/>
+                </a:solidFill>
+                <a:latin typeface="+mn-lt"/>
+                <a:ea typeface="+mn-ea"/>
+                <a:cs typeface="+mn-cs"/>
+              </a:defRPr>
+            </a:lvl1pPr>
+            <a:lvl2pPr marL="685800" indent="-228600" algn="l" defTabSz="914400" rtl="0">
+              <a:lnSpc>
+                <a:spcPct val="90000"/>
+              </a:lnSpc>
+              <a:spcBef>
+                <a:spcPts val="499"/>
+              </a:spcBef>
+              <a:buFont typeface="Arial"/>
+              <a:buChar char="•"/>
+              <a:defRPr sz="2400">
+                <a:solidFill>
+                  <a:schemeClr val="tx1"/>
+                </a:solidFill>
+                <a:latin typeface="+mn-lt"/>
+                <a:ea typeface="+mn-ea"/>
+                <a:cs typeface="+mn-cs"/>
+              </a:defRPr>
+            </a:lvl2pPr>
+            <a:lvl3pPr marL="1143000" indent="-228600" algn="l" defTabSz="914400" rtl="0">
+              <a:lnSpc>
+                <a:spcPct val="90000"/>
+              </a:lnSpc>
+              <a:spcBef>
+                <a:spcPts val="499"/>
+              </a:spcBef>
+              <a:buFont typeface="Arial"/>
+              <a:buChar char="•"/>
+              <a:defRPr sz="2000">
+                <a:solidFill>
+                  <a:schemeClr val="tx1"/>
+                </a:solidFill>
+                <a:latin typeface="+mn-lt"/>
+                <a:ea typeface="+mn-ea"/>
+                <a:cs typeface="+mn-cs"/>
+              </a:defRPr>
+            </a:lvl3pPr>
+            <a:lvl4pPr marL="1600200" indent="-228600" algn="l" defTabSz="914400" rtl="0">
+              <a:lnSpc>
+                <a:spcPct val="90000"/>
+              </a:lnSpc>
+              <a:spcBef>
+                <a:spcPts val="499"/>
+              </a:spcBef>
+              <a:buFont typeface="Arial"/>
+              <a:buChar char="•"/>
+              <a:defRPr sz="1800">
+                <a:solidFill>
+                  <a:schemeClr val="tx1"/>
+                </a:solidFill>
+                <a:latin typeface="+mn-lt"/>
+                <a:ea typeface="+mn-ea"/>
+                <a:cs typeface="+mn-cs"/>
+              </a:defRPr>
+            </a:lvl4pPr>
+            <a:lvl5pPr marL="2057400" indent="-228600" algn="l" defTabSz="914400" rtl="0">
+              <a:lnSpc>
+                <a:spcPct val="90000"/>
+              </a:lnSpc>
+              <a:spcBef>
+                <a:spcPts val="499"/>
+              </a:spcBef>
+              <a:buFont typeface="Arial"/>
+              <a:buChar char="•"/>
+              <a:defRPr sz="1800">
+                <a:solidFill>
+                  <a:schemeClr val="tx1"/>
+                </a:solidFill>
+                <a:latin typeface="+mn-lt"/>
+                <a:ea typeface="+mn-ea"/>
+                <a:cs typeface="+mn-cs"/>
+              </a:defRPr>
+            </a:lvl5pPr>
+            <a:lvl6pPr marL="2514599" indent="-228600" algn="l" defTabSz="914400" rtl="0">
+              <a:lnSpc>
+                <a:spcPct val="90000"/>
+              </a:lnSpc>
+              <a:spcBef>
+                <a:spcPts val="499"/>
+              </a:spcBef>
+              <a:buFont typeface="Arial"/>
+              <a:buChar char="•"/>
+              <a:defRPr sz="1800">
+                <a:solidFill>
+                  <a:schemeClr val="tx1"/>
+                </a:solidFill>
+                <a:latin typeface="+mn-lt"/>
+                <a:ea typeface="+mn-ea"/>
+                <a:cs typeface="+mn-cs"/>
+              </a:defRPr>
+            </a:lvl6pPr>
+            <a:lvl7pPr marL="2971800" indent="-228600" algn="l" defTabSz="914400" rtl="0">
+              <a:lnSpc>
+                <a:spcPct val="90000"/>
+              </a:lnSpc>
+              <a:spcBef>
+                <a:spcPts val="499"/>
+              </a:spcBef>
+              <a:buFont typeface="Arial"/>
+              <a:buChar char="•"/>
+              <a:defRPr sz="1800">
+                <a:solidFill>
+                  <a:schemeClr val="tx1"/>
+                </a:solidFill>
+                <a:latin typeface="+mn-lt"/>
+                <a:ea typeface="+mn-ea"/>
+                <a:cs typeface="+mn-cs"/>
+              </a:defRPr>
+            </a:lvl7pPr>
+            <a:lvl8pPr marL="3429000" indent="-228600" algn="l" defTabSz="914400" rtl="0">
+              <a:lnSpc>
+                <a:spcPct val="90000"/>
+              </a:lnSpc>
+              <a:spcBef>
+                <a:spcPts val="499"/>
+              </a:spcBef>
+              <a:buFont typeface="Arial"/>
+              <a:buChar char="•"/>
+              <a:defRPr sz="1800">
+                <a:solidFill>
+                  <a:schemeClr val="tx1"/>
+                </a:solidFill>
+                <a:latin typeface="+mn-lt"/>
+                <a:ea typeface="+mn-ea"/>
+                <a:cs typeface="+mn-cs"/>
+              </a:defRPr>
+            </a:lvl8pPr>
+            <a:lvl9pPr marL="3886200" indent="-228600" algn="l" defTabSz="914400" rtl="0">
+              <a:lnSpc>
+                <a:spcPct val="90000"/>
+              </a:lnSpc>
+              <a:spcBef>
+                <a:spcPts val="499"/>
+              </a:spcBef>
+              <a:buFont typeface="Arial"/>
+              <a:buChar char="•"/>
+              <a:defRPr sz="1800">
+                <a:solidFill>
+                  <a:schemeClr val="tx1"/>
+                </a:solidFill>
+                <a:latin typeface="+mn-lt"/>
+                <a:ea typeface="+mn-ea"/>
+                <a:cs typeface="+mn-cs"/>
+              </a:defRPr>
+            </a:lvl9pPr>
+          </a:lstStyle>
+          <a:p>
+            <a:pPr marL="0" indent="0" algn="ctr">
+              <a:buFont typeface="Arial"/>
+              <a:buNone/>
+              <a:defRPr/>
+            </a:pPr>
+            <a:r>
+              <a:rPr lang="bg-BG" sz="2600" u="sng">
+                <a:solidFill>
+                  <a:schemeClr val="bg1"/>
+                </a:solidFill>
+                <a:latin typeface="Ubuntu Sans"/>
+                <a:ea typeface="Ubuntu Sans"/>
+                <a:cs typeface="Ubuntu Sans"/>
+              </a:rPr>
+              <a:t>Четвъртък</a:t>
+            </a:r>
+            <a:endParaRPr sz="2600">
+              <a:solidFill>
+                <a:schemeClr val="bg1"/>
+              </a:solidFill>
+              <a:latin typeface="Ubuntu Sans"/>
+              <a:cs typeface="Ubuntu Sans"/>
+            </a:endParaRPr>
+          </a:p>
+          <a:p>
+            <a:pPr marL="0" indent="0" algn="ctr">
+              <a:buFont typeface="Arial"/>
+              <a:buNone/>
+              <a:defRPr/>
+            </a:pPr>
+            <a:r>
+              <a:rPr lang="bg-BG">
+                <a:solidFill>
+                  <a:schemeClr val="bg1"/>
+                </a:solidFill>
+                <a:latin typeface="Ubuntu Sans"/>
+                <a:cs typeface="Ubuntu Sans"/>
+              </a:rPr>
+              <a:t>Създаване на сайта и правене на основния код</a:t>
+            </a:r>
+            <a:endParaRPr lang="bg-BG">
+              <a:solidFill>
+                <a:schemeClr val="bg1"/>
+              </a:solidFill>
+              <a:latin typeface="Ubuntu Sans"/>
+              <a:cs typeface="Ubuntu Sans"/>
+            </a:endParaRPr>
+          </a:p>
+          <a:p>
+            <a:pPr marL="0" indent="0" algn="ctr">
+              <a:buFont typeface="Arial"/>
+              <a:buNone/>
+              <a:defRPr/>
+            </a:pPr>
+            <a:r>
+              <a:rPr lang="bg-BG">
+                <a:solidFill>
+                  <a:schemeClr val="bg1"/>
+                </a:solidFill>
+                <a:latin typeface="Ubuntu Sans"/>
+                <a:cs typeface="Ubuntu Sans"/>
+              </a:rPr>
+              <a:t>Рисуване на дизайнове и лого</a:t>
+            </a:r>
+            <a:endParaRPr>
+              <a:solidFill>
+                <a:schemeClr val="bg1"/>
+              </a:solidFill>
+              <a:latin typeface="Ubuntu Sans"/>
+              <a:cs typeface="Ubuntu Sans"/>
+            </a:endParaRPr>
+          </a:p>
+        </p:txBody>
+      </p:sp>
+      <p:sp>
+        <p:nvSpPr>
+          <p:cNvPr id="111172462" name="Content Placeholder 2"/>
+          <p:cNvSpPr>
+            <a:spLocks noGrp="1"/>
+          </p:cNvSpPr>
+          <p:nvPr/>
+        </p:nvSpPr>
+        <p:spPr bwMode="auto">
+          <a:xfrm flipH="0" flipV="0">
+            <a:off x="6534149" y="1825624"/>
+            <a:ext cx="2734648" cy="4351338"/>
+          </a:xfrm>
+        </p:spPr>
+        <p:txBody>
+          <a:bodyPr vert="horz" lIns="91440" tIns="45720" rIns="91440" bIns="45720" rtlCol="0">
+            <a:normAutofit/>
+          </a:bodyPr>
+          <a:lstStyle>
+            <a:lvl1pPr marL="228600" indent="-228600" algn="l" defTabSz="914400" rtl="0">
+              <a:lnSpc>
+                <a:spcPct val="90000"/>
+              </a:lnSpc>
+              <a:spcBef>
+                <a:spcPts val="999"/>
+              </a:spcBef>
+              <a:buFont typeface="Arial"/>
+              <a:buChar char="•"/>
+              <a:defRPr sz="2800">
+                <a:solidFill>
+                  <a:schemeClr val="tx1"/>
+                </a:solidFill>
+                <a:latin typeface="+mn-lt"/>
+                <a:ea typeface="+mn-ea"/>
+                <a:cs typeface="+mn-cs"/>
+              </a:defRPr>
+            </a:lvl1pPr>
+            <a:lvl2pPr marL="685800" indent="-228600" algn="l" defTabSz="914400" rtl="0">
+              <a:lnSpc>
+                <a:spcPct val="90000"/>
+              </a:lnSpc>
+              <a:spcBef>
+                <a:spcPts val="499"/>
+              </a:spcBef>
+              <a:buFont typeface="Arial"/>
+              <a:buChar char="•"/>
+              <a:defRPr sz="2400">
+                <a:solidFill>
+                  <a:schemeClr val="tx1"/>
+                </a:solidFill>
+                <a:latin typeface="+mn-lt"/>
+                <a:ea typeface="+mn-ea"/>
+                <a:cs typeface="+mn-cs"/>
+              </a:defRPr>
+            </a:lvl2pPr>
+            <a:lvl3pPr marL="1143000" indent="-228600" algn="l" defTabSz="914400" rtl="0">
+              <a:lnSpc>
+                <a:spcPct val="90000"/>
+              </a:lnSpc>
+              <a:spcBef>
+                <a:spcPts val="499"/>
+              </a:spcBef>
+              <a:buFont typeface="Arial"/>
+              <a:buChar char="•"/>
+              <a:defRPr sz="2000">
+                <a:solidFill>
+                  <a:schemeClr val="tx1"/>
+                </a:solidFill>
+                <a:latin typeface="+mn-lt"/>
+                <a:ea typeface="+mn-ea"/>
+                <a:cs typeface="+mn-cs"/>
+              </a:defRPr>
+            </a:lvl3pPr>
+            <a:lvl4pPr marL="1600200" indent="-228600" algn="l" defTabSz="914400" rtl="0">
+              <a:lnSpc>
+                <a:spcPct val="90000"/>
+              </a:lnSpc>
+              <a:spcBef>
+                <a:spcPts val="499"/>
+              </a:spcBef>
+              <a:buFont typeface="Arial"/>
+              <a:buChar char="•"/>
+              <a:defRPr sz="1800">
+                <a:solidFill>
+                  <a:schemeClr val="tx1"/>
+                </a:solidFill>
+                <a:latin typeface="+mn-lt"/>
+                <a:ea typeface="+mn-ea"/>
+                <a:cs typeface="+mn-cs"/>
+              </a:defRPr>
+            </a:lvl4pPr>
+            <a:lvl5pPr marL="2057400" indent="-228600" algn="l" defTabSz="914400" rtl="0">
+              <a:lnSpc>
+                <a:spcPct val="90000"/>
+              </a:lnSpc>
+              <a:spcBef>
+                <a:spcPts val="499"/>
+              </a:spcBef>
+              <a:buFont typeface="Arial"/>
+              <a:buChar char="•"/>
+              <a:defRPr sz="1800">
+                <a:solidFill>
+                  <a:schemeClr val="tx1"/>
+                </a:solidFill>
+                <a:latin typeface="+mn-lt"/>
+                <a:ea typeface="+mn-ea"/>
+                <a:cs typeface="+mn-cs"/>
+              </a:defRPr>
+            </a:lvl5pPr>
+            <a:lvl6pPr marL="2514599" indent="-228600" algn="l" defTabSz="914400" rtl="0">
+              <a:lnSpc>
+                <a:spcPct val="90000"/>
+              </a:lnSpc>
+              <a:spcBef>
+                <a:spcPts val="499"/>
+              </a:spcBef>
+              <a:buFont typeface="Arial"/>
+              <a:buChar char="•"/>
+              <a:defRPr sz="1800">
+                <a:solidFill>
+                  <a:schemeClr val="tx1"/>
+                </a:solidFill>
+                <a:latin typeface="+mn-lt"/>
+                <a:ea typeface="+mn-ea"/>
+                <a:cs typeface="+mn-cs"/>
+              </a:defRPr>
+            </a:lvl6pPr>
+            <a:lvl7pPr marL="2971800" indent="-228600" algn="l" defTabSz="914400" rtl="0">
+              <a:lnSpc>
+                <a:spcPct val="90000"/>
+              </a:lnSpc>
+              <a:spcBef>
+                <a:spcPts val="499"/>
+              </a:spcBef>
+              <a:buFont typeface="Arial"/>
+              <a:buChar char="•"/>
+              <a:defRPr sz="1800">
+                <a:solidFill>
+                  <a:schemeClr val="tx1"/>
+                </a:solidFill>
+                <a:latin typeface="+mn-lt"/>
+                <a:ea typeface="+mn-ea"/>
+                <a:cs typeface="+mn-cs"/>
+              </a:defRPr>
+            </a:lvl7pPr>
+            <a:lvl8pPr marL="3429000" indent="-228600" algn="l" defTabSz="914400" rtl="0">
+              <a:lnSpc>
+                <a:spcPct val="90000"/>
+              </a:lnSpc>
+              <a:spcBef>
+                <a:spcPts val="499"/>
+              </a:spcBef>
+              <a:buFont typeface="Arial"/>
+              <a:buChar char="•"/>
+              <a:defRPr sz="1800">
+                <a:solidFill>
+                  <a:schemeClr val="tx1"/>
+                </a:solidFill>
+                <a:latin typeface="+mn-lt"/>
+                <a:ea typeface="+mn-ea"/>
+                <a:cs typeface="+mn-cs"/>
+              </a:defRPr>
+            </a:lvl8pPr>
+            <a:lvl9pPr marL="3886200" indent="-228600" algn="l" defTabSz="914400" rtl="0">
+              <a:lnSpc>
+                <a:spcPct val="90000"/>
+              </a:lnSpc>
+              <a:spcBef>
+                <a:spcPts val="499"/>
+              </a:spcBef>
+              <a:buFont typeface="Arial"/>
+              <a:buChar char="•"/>
+              <a:defRPr sz="1800">
+                <a:solidFill>
+                  <a:schemeClr val="tx1"/>
+                </a:solidFill>
+                <a:latin typeface="+mn-lt"/>
+                <a:ea typeface="+mn-ea"/>
+                <a:cs typeface="+mn-cs"/>
+              </a:defRPr>
+            </a:lvl9pPr>
+          </a:lstStyle>
+          <a:p>
+            <a:pPr marL="0" indent="0" algn="ctr">
+              <a:buFont typeface="Arial"/>
+              <a:buNone/>
+              <a:defRPr/>
+            </a:pPr>
+            <a:r>
+              <a:rPr lang="bg-BG" u="sng">
+                <a:solidFill>
+                  <a:schemeClr val="bg1"/>
+                </a:solidFill>
+                <a:latin typeface="Ubuntu Sans"/>
+                <a:cs typeface="Ubuntu Sans"/>
+              </a:rPr>
+              <a:t>Петък</a:t>
+            </a:r>
+            <a:endParaRPr lang="bg-BG">
+              <a:solidFill>
+                <a:schemeClr val="bg1"/>
+              </a:solidFill>
+              <a:latin typeface="Ubuntu Sans"/>
+              <a:cs typeface="Ubuntu Sans"/>
+            </a:endParaRPr>
+          </a:p>
+          <a:p>
+            <a:pPr marL="0" indent="0" algn="ctr">
+              <a:buFont typeface="Arial"/>
+              <a:buNone/>
+              <a:defRPr/>
+            </a:pPr>
+            <a:r>
+              <a:rPr lang="bg-BG">
+                <a:solidFill>
+                  <a:schemeClr val="bg1"/>
+                </a:solidFill>
+                <a:latin typeface="Ubuntu Sans"/>
+                <a:cs typeface="Ubuntu Sans"/>
+              </a:rPr>
+              <a:t>Довършване на проекта</a:t>
+            </a:r>
+            <a:endParaRPr>
+              <a:solidFill>
+                <a:schemeClr val="bg1"/>
+              </a:solidFill>
+              <a:latin typeface="Ubuntu Sans"/>
+              <a:cs typeface="Ubuntu Sans"/>
+            </a:endParaRPr>
+          </a:p>
+        </p:txBody>
+      </p:sp>
+    </p:spTree>
+  </p:cSld>
+  <p:clrMapOvr>
+    <a:masterClrMapping/>
+  </p:clrMapOvr>
+  <mc:AlternateContent xmlns:mc="http://schemas.openxmlformats.org/markup-compatibility/2006">
+    <mc:Choice xmlns:p159="http://schemas.microsoft.com/office/powerpoint/2015/09/main" xmlns:p14="http://schemas.microsoft.com/office/powerpoint/2010/main" Requires="p159">
+      <p:transition p14:dur="500" advClick="1"/>
+    </mc:Choice>
+    <mc:Fallback>
+      <p:transition advClick="1"/>
+    </mc:Fallback>
+  </mc:AlternateContent>
+</p:sld>
+</file>
+
+<file path=ppt/slides/slide12.xml><?xml version="1.0" encoding="utf-8"?>
+<p:sld xmlns:a="http://schemas.openxmlformats.org/drawingml/2006/main" xmlns:r="http://schemas.openxmlformats.org/officeDocument/2006/relationships" xmlns:p="http://schemas.openxmlformats.org/presentationml/2006/main" xmlns:m="http://schemas.openxmlformats.org/officeDocument/2006/math" xmlns:w="http://schemas.openxmlformats.org/wordprocessingml/2006/main" xmlns:mc="http://schemas.openxmlformats.org/markup-compatibility/2006" showMasterPhAnim="0" showMasterSp="1" show="1">
+  <p:cSld name="">
+    <p:spTree>
+      <p:nvGrpSpPr>
+        <p:cNvPr id="1" name=""/>
+        <p:cNvGrpSpPr/>
+        <p:nvPr/>
+      </p:nvGrpSpPr>
+      <p:grpSpPr bwMode="auto">
+        <a:xfrm>
+          <a:off x="0" y="0"/>
+          <a:ext cx="0" cy="0"/>
+          <a:chOff x="0" y="0"/>
+          <a:chExt cx="0" cy="0"/>
+        </a:xfrm>
+      </p:grpSpPr>
+      <p:sp>
+        <p:nvSpPr>
+          <p:cNvPr id="1372582822" name="Title 1"/>
+          <p:cNvSpPr>
+            <a:spLocks noGrp="1"/>
+          </p:cNvSpPr>
+          <p:nvPr>
+            <p:ph type="title"/>
+          </p:nvPr>
+        </p:nvSpPr>
+        <p:spPr bwMode="auto"/>
+        <p:txBody>
+          <a:bodyPr/>
+          <a:lstStyle/>
+          <a:p>
+            <a:pPr>
+              <a:defRPr/>
+            </a:pPr>
+            <a:r>
+              <a:rPr lang="bg-BG" b="1">
+                <a:solidFill>
+                  <a:schemeClr val="bg1"/>
+                </a:solidFill>
+                <a:latin typeface="Ubuntu Sans"/>
+                <a:ea typeface="Ubuntu Sans"/>
+                <a:cs typeface="Ubuntu Sans"/>
+              </a:rPr>
+              <a:t>Нашето преживяване</a:t>
+            </a:r>
+            <a:endParaRPr/>
+          </a:p>
+        </p:txBody>
+      </p:sp>
+      <p:sp>
+        <p:nvSpPr>
+          <p:cNvPr id="722693665" name=""/>
+          <p:cNvSpPr txBox="1"/>
+          <p:nvPr/>
+        </p:nvSpPr>
+        <p:spPr bwMode="auto">
+          <a:xfrm rot="0" flipH="0" flipV="0">
+            <a:off x="477222" y="1614485"/>
+            <a:ext cx="9157231" cy="3353159"/>
+          </a:xfrm>
+          <a:prstGeom prst="rect">
+            <a:avLst/>
+          </a:prstGeom>
+          <a:noFill/>
+        </p:spPr>
+        <p:txBody>
+          <a:bodyPr vertOverflow="overflow" horzOverflow="overflow" vert="horz" wrap="square" lIns="91440" tIns="45720" rIns="91440" bIns="45720" numCol="1" spcCol="0" rtlCol="0" fromWordArt="0" anchor="t" anchorCtr="0" forceAA="0" upright="0" compatLnSpc="0">
+            <a:spAutoFit/>
+          </a:bodyPr>
+          <a:p>
+            <a:pPr marL="283879" indent="-283879">
+              <a:buFont typeface="Arial"/>
+              <a:buChar char="–"/>
+              <a:defRPr/>
+            </a:pPr>
+            <a:r>
+              <a:rPr lang="bg-BG" sz="2800" b="0">
+                <a:solidFill>
+                  <a:schemeClr val="bg1"/>
+                </a:solidFill>
+                <a:latin typeface="Ubuntu Sans"/>
+                <a:ea typeface="Ubuntu Sans"/>
+                <a:cs typeface="Ubuntu Sans"/>
+              </a:rPr>
+              <a:t>За нас беше едно много </a:t>
+            </a:r>
+            <a:r>
+              <a:rPr lang="en-US" sz="2800" b="0" i="1" u="sng">
+                <a:solidFill>
+                  <a:schemeClr val="bg1"/>
+                </a:solidFill>
+                <a:latin typeface="Ubuntu Sans"/>
+                <a:ea typeface="Ubuntu Sans"/>
+                <a:cs typeface="Ubuntu Sans"/>
+              </a:rPr>
+              <a:t>BIZZARE</a:t>
+            </a:r>
+            <a:r>
+              <a:rPr lang="en-US" sz="2800" b="0">
+                <a:solidFill>
+                  <a:schemeClr val="bg1"/>
+                </a:solidFill>
+                <a:latin typeface="Ubuntu Sans"/>
+                <a:ea typeface="Ubuntu Sans"/>
+                <a:cs typeface="Ubuntu Sans"/>
+              </a:rPr>
+              <a:t> </a:t>
+            </a:r>
+            <a:r>
+              <a:rPr lang="bg-BG" sz="2800" b="0">
+                <a:solidFill>
+                  <a:schemeClr val="bg1"/>
+                </a:solidFill>
+                <a:latin typeface="Ubuntu Sans"/>
+                <a:ea typeface="Ubuntu Sans"/>
+                <a:cs typeface="Ubuntu Sans"/>
+              </a:rPr>
+              <a:t>преживяване</a:t>
+            </a:r>
+            <a:endParaRPr sz="2800" b="0">
+              <a:solidFill>
+                <a:schemeClr val="bg1"/>
+              </a:solidFill>
+              <a:latin typeface="Ubuntu Sans"/>
+              <a:ea typeface="Ubuntu Sans"/>
+              <a:cs typeface="Ubuntu Sans"/>
+            </a:endParaRPr>
+          </a:p>
+          <a:p>
+            <a:pPr marL="283879" indent="-283879">
+              <a:buFont typeface="Arial"/>
+              <a:buChar char="–"/>
+              <a:defRPr/>
+            </a:pPr>
+            <a:r>
+              <a:rPr lang="bg-BG" sz="2800" b="0">
+                <a:solidFill>
+                  <a:schemeClr val="bg1"/>
+                </a:solidFill>
+                <a:latin typeface="Ubuntu Sans"/>
+                <a:ea typeface="Ubuntu Sans"/>
+                <a:cs typeface="Ubuntu Sans"/>
+              </a:rPr>
+              <a:t>Истински </a:t>
+            </a:r>
+            <a:r>
+              <a:rPr lang="en-US" sz="2800" b="0" i="1" u="sng">
+                <a:solidFill>
+                  <a:schemeClr val="bg1"/>
+                </a:solidFill>
+                <a:latin typeface="Ubuntu Sans"/>
+                <a:ea typeface="Ubuntu Sans"/>
+                <a:cs typeface="Ubuntu Sans"/>
+              </a:rPr>
+              <a:t>ADVENTURE</a:t>
+            </a:r>
+            <a:r>
+              <a:rPr lang="en-US" sz="2800" b="0">
+                <a:solidFill>
+                  <a:schemeClr val="bg1"/>
+                </a:solidFill>
+                <a:latin typeface="Ubuntu Sans"/>
+                <a:ea typeface="Ubuntu Sans"/>
+                <a:cs typeface="Ubuntu Sans"/>
+              </a:rPr>
+              <a:t> </a:t>
+            </a:r>
+            <a:r>
+              <a:rPr lang="bg-BG" sz="2800" b="0">
+                <a:solidFill>
+                  <a:schemeClr val="bg1"/>
+                </a:solidFill>
+                <a:latin typeface="Ubuntu Sans"/>
+                <a:ea typeface="Ubuntu Sans"/>
+                <a:cs typeface="Ubuntu Sans"/>
+              </a:rPr>
+              <a:t>в сфери, в които никога не сме работили</a:t>
+            </a:r>
+            <a:endParaRPr sz="2800" b="0">
+              <a:solidFill>
+                <a:schemeClr val="bg1"/>
+              </a:solidFill>
+              <a:latin typeface="Ubuntu Sans"/>
+              <a:ea typeface="Ubuntu Sans"/>
+              <a:cs typeface="Ubuntu Sans"/>
+            </a:endParaRPr>
+          </a:p>
+          <a:p>
+            <a:pPr marL="283879" indent="-283879">
+              <a:buFont typeface="Arial"/>
+              <a:buChar char="–"/>
+              <a:defRPr/>
+            </a:pPr>
+            <a:r>
+              <a:rPr lang="bg-BG" sz="2800" b="0">
+                <a:solidFill>
+                  <a:schemeClr val="bg1"/>
+                </a:solidFill>
+                <a:latin typeface="Ubuntu Sans"/>
+                <a:ea typeface="Ubuntu Sans"/>
+                <a:cs typeface="Ubuntu Sans"/>
+              </a:rPr>
+              <a:t>Половината се разболяхме</a:t>
+            </a:r>
+            <a:endParaRPr sz="2800" b="0">
+              <a:solidFill>
+                <a:schemeClr val="bg1"/>
+              </a:solidFill>
+              <a:latin typeface="Ubuntu Sans"/>
+              <a:ea typeface="Ubuntu Sans"/>
+              <a:cs typeface="Ubuntu Sans"/>
+            </a:endParaRPr>
+          </a:p>
+          <a:p>
+            <a:pPr marL="283879" indent="-283879">
+              <a:buFont typeface="Arial"/>
+              <a:buChar char="–"/>
+              <a:defRPr/>
+            </a:pPr>
+            <a:r>
+              <a:rPr lang="bg-BG" sz="2800" b="0">
+                <a:solidFill>
+                  <a:schemeClr val="bg1"/>
+                </a:solidFill>
+                <a:latin typeface="Ubuntu Sans"/>
+                <a:ea typeface="Ubuntu Sans"/>
+                <a:cs typeface="Ubuntu Sans"/>
+              </a:rPr>
+              <a:t>Менторът ни идваше с части само след 14 часа </a:t>
+            </a:r>
+            <a:endParaRPr sz="2800" b="0">
+              <a:solidFill>
+                <a:schemeClr val="bg1"/>
+              </a:solidFill>
+              <a:latin typeface="Ubuntu Sans"/>
+              <a:ea typeface="Ubuntu Sans"/>
+              <a:cs typeface="Ubuntu Sans"/>
+            </a:endParaRPr>
+          </a:p>
+          <a:p>
+            <a:pPr marL="283879" indent="-283879">
+              <a:buFont typeface="Arial"/>
+              <a:buChar char="–"/>
+              <a:defRPr/>
+            </a:pPr>
+            <a:r>
+              <a:rPr lang="bg-BG" sz="2800" b="0">
+                <a:solidFill>
+                  <a:schemeClr val="bg1"/>
+                </a:solidFill>
+                <a:latin typeface="Ubuntu Sans"/>
+                <a:ea typeface="Ubuntu Sans"/>
+                <a:cs typeface="Ubuntu Sans"/>
+              </a:rPr>
+              <a:t>Много се забавлявахме и смятаме да участваме всяка година до края на обучението ни в ТУЕС</a:t>
+            </a:r>
+            <a:endParaRPr lang="bg-BG" b="1">
+              <a:solidFill>
+                <a:schemeClr val="bg1"/>
+              </a:solidFill>
+              <a:latin typeface="Ubuntu Sans"/>
+              <a:ea typeface="Ubuntu Sans"/>
+              <a:cs typeface="Ubuntu Sans"/>
+            </a:endParaRPr>
+          </a:p>
+          <a:p>
+            <a:pPr marL="283878" indent="-283878">
+              <a:buFont typeface="Arial"/>
+              <a:buChar char="–"/>
+              <a:defRPr/>
+            </a:pPr>
+            <a:endParaRPr lang="bg-BG">
+              <a:solidFill>
+                <a:schemeClr val="bg1"/>
+              </a:solidFill>
+              <a:latin typeface="Ubuntu Sans"/>
+              <a:ea typeface="Ubuntu Sans"/>
+              <a:cs typeface="Ubuntu Sans"/>
+            </a:endParaRPr>
+          </a:p>
+        </p:txBody>
+      </p:sp>
+    </p:spTree>
+  </p:cSld>
+  <p:clrMapOvr>
+    <a:masterClrMapping/>
+  </p:clrMapOvr>
+  <mc:AlternateContent xmlns:mc="http://schemas.openxmlformats.org/markup-compatibility/2006">
+    <mc:Choice xmlns:p159="http://schemas.microsoft.com/office/powerpoint/2015/09/main" xmlns:p14="http://schemas.microsoft.com/office/powerpoint/2010/main" Requires="p159">
+      <p:transition p14:dur="500" advClick="1"/>
+    </mc:Choice>
+    <mc:Fallback>
+      <p:transition advClick="1"/>
+    </mc:Fallback>
+  </mc:AlternateContent>
+</p:sld>
+</file>
+
+<file path=ppt/slides/slide13.xml><?xml version="1.0" encoding="utf-8"?>
+<p:sld xmlns:a="http://schemas.openxmlformats.org/drawingml/2006/main" xmlns:r="http://schemas.openxmlformats.org/officeDocument/2006/relationships" xmlns:p="http://schemas.openxmlformats.org/presentationml/2006/main" xmlns:m="http://schemas.openxmlformats.org/officeDocument/2006/math" xmlns:w="http://schemas.openxmlformats.org/wordprocessingml/2006/main" xmlns:mc="http://schemas.openxmlformats.org/markup-compatibility/2006" showMasterPhAnim="0" showMasterSp="1" show="1">
+  <p:cSld name="">
+    <p:spTree>
+      <p:nvGrpSpPr>
+        <p:cNvPr id="1" name=""/>
+        <p:cNvGrpSpPr/>
+        <p:nvPr/>
+      </p:nvGrpSpPr>
+      <p:grpSpPr bwMode="auto">
+        <a:xfrm>
+          <a:off x="0" y="0"/>
+          <a:ext cx="0" cy="0"/>
+          <a:chOff x="0" y="0"/>
+          <a:chExt cx="0" cy="0"/>
+        </a:xfrm>
+      </p:grpSpPr>
+      <p:sp>
+        <p:nvSpPr>
+          <p:cNvPr id="233471347" name="Title 1"/>
+          <p:cNvSpPr>
+            <a:spLocks noGrp="1"/>
+          </p:cNvSpPr>
+          <p:nvPr>
+            <p:ph type="title"/>
+          </p:nvPr>
+        </p:nvSpPr>
+        <p:spPr bwMode="auto"/>
+        <p:txBody>
+          <a:bodyPr/>
+          <a:lstStyle/>
+          <a:p>
+            <a:pPr>
+              <a:defRPr/>
+            </a:pPr>
+            <a:r>
+              <a:rPr lang="bg-BG" b="1">
+                <a:solidFill>
+                  <a:schemeClr val="bg1"/>
+                </a:solidFill>
+                <a:latin typeface="Ubuntu Sans"/>
+                <a:ea typeface="Ubuntu Sans"/>
+                <a:cs typeface="Ubuntu Sans"/>
+              </a:rPr>
+              <a:t>Какво научихме</a:t>
+            </a:r>
+            <a:endParaRPr b="1">
+              <a:solidFill>
+                <a:schemeClr val="bg1"/>
+              </a:solidFill>
+            </a:endParaRPr>
+          </a:p>
+        </p:txBody>
+      </p:sp>
+      <p:sp>
+        <p:nvSpPr>
+          <p:cNvPr id="1244464403" name=""/>
+          <p:cNvSpPr txBox="1"/>
+          <p:nvPr/>
+        </p:nvSpPr>
+        <p:spPr bwMode="auto">
+          <a:xfrm rot="0" flipH="0" flipV="0">
+            <a:off x="838199" y="1630319"/>
+            <a:ext cx="9513042" cy="1798679"/>
+          </a:xfrm>
+          <a:prstGeom prst="rect">
+            <a:avLst/>
+          </a:prstGeom>
+          <a:noFill/>
+        </p:spPr>
+        <p:txBody>
+          <a:bodyPr vertOverflow="overflow" horzOverflow="overflow" vert="horz" wrap="square" lIns="91440" tIns="45720" rIns="91440" bIns="45720" numCol="1" spcCol="0" rtlCol="0" fromWordArt="0" anchor="t" anchorCtr="0" forceAA="0" upright="0" compatLnSpc="0">
+            <a:spAutoFit/>
+          </a:bodyPr>
+          <a:p>
+            <a:pPr marL="283879" indent="-283879">
+              <a:buFont typeface="Arial"/>
+              <a:buChar char="–"/>
+              <a:defRPr/>
+            </a:pPr>
+            <a:r>
+              <a:rPr lang="bg-BG" sz="2800">
+                <a:solidFill>
+                  <a:schemeClr val="bg1"/>
+                </a:solidFill>
+                <a:latin typeface="Ubuntu Sans"/>
+                <a:ea typeface="Ubuntu Sans"/>
+                <a:cs typeface="Ubuntu Sans"/>
+              </a:rPr>
+              <a:t>работа с </a:t>
+            </a:r>
+            <a:r>
+              <a:rPr lang="en-US" sz="2800">
+                <a:solidFill>
+                  <a:schemeClr val="bg1"/>
+                </a:solidFill>
+                <a:latin typeface="Ubuntu Sans"/>
+                <a:ea typeface="Ubuntu Sans"/>
+                <a:cs typeface="Ubuntu Sans"/>
+              </a:rPr>
+              <a:t>Arduino</a:t>
+            </a:r>
+            <a:endParaRPr sz="2800">
+              <a:solidFill>
+                <a:schemeClr val="bg1"/>
+              </a:solidFill>
+              <a:latin typeface="Ubuntu Sans"/>
+              <a:ea typeface="Ubuntu Sans"/>
+              <a:cs typeface="Ubuntu Sans"/>
+            </a:endParaRPr>
+          </a:p>
+          <a:p>
+            <a:pPr marL="283879" indent="-283879">
+              <a:buFont typeface="Arial"/>
+              <a:buChar char="–"/>
+              <a:defRPr/>
+            </a:pPr>
+            <a:r>
+              <a:rPr lang="en-US" sz="2800">
+                <a:solidFill>
+                  <a:schemeClr val="bg1"/>
+                </a:solidFill>
+                <a:latin typeface="Ubuntu Sans"/>
+                <a:ea typeface="Ubuntu Sans"/>
+                <a:cs typeface="Ubuntu Sans"/>
+              </a:rPr>
+              <a:t>HTML и</a:t>
+            </a:r>
+            <a:r>
+              <a:rPr lang="bg-BG" sz="2800">
+                <a:solidFill>
+                  <a:schemeClr val="bg1"/>
+                </a:solidFill>
+                <a:latin typeface="Ubuntu Sans"/>
+                <a:ea typeface="Ubuntu Sans"/>
+                <a:cs typeface="Ubuntu Sans"/>
+              </a:rPr>
+              <a:t> създаване на сайт</a:t>
+            </a:r>
+            <a:endParaRPr sz="2800">
+              <a:solidFill>
+                <a:schemeClr val="bg1"/>
+              </a:solidFill>
+              <a:latin typeface="Ubuntu Sans"/>
+              <a:ea typeface="Ubuntu Sans"/>
+              <a:cs typeface="Ubuntu Sans"/>
+            </a:endParaRPr>
+          </a:p>
+          <a:p>
+            <a:pPr marL="283879" indent="-283879">
+              <a:buFont typeface="Arial"/>
+              <a:buChar char="–"/>
+              <a:defRPr/>
+            </a:pPr>
+            <a:r>
+              <a:rPr lang="bg-BG" sz="2800">
+                <a:solidFill>
+                  <a:schemeClr val="bg1"/>
+                </a:solidFill>
+                <a:latin typeface="Ubuntu Sans"/>
+                <a:ea typeface="Ubuntu Sans"/>
+                <a:cs typeface="Ubuntu Sans"/>
+              </a:rPr>
+              <a:t>как да използваме изкуствен интелект ефективно</a:t>
+            </a:r>
+            <a:endParaRPr sz="2800">
+              <a:solidFill>
+                <a:schemeClr val="bg1"/>
+              </a:solidFill>
+              <a:latin typeface="Ubuntu Sans"/>
+              <a:ea typeface="Ubuntu Sans"/>
+              <a:cs typeface="Ubuntu Sans"/>
+            </a:endParaRPr>
+          </a:p>
+          <a:p>
+            <a:pPr marL="283879" indent="-283879">
+              <a:buFont typeface="Arial"/>
+              <a:buChar char="–"/>
+              <a:defRPr/>
+            </a:pPr>
+            <a:r>
+              <a:rPr lang="bg-BG" sz="2800">
+                <a:solidFill>
+                  <a:schemeClr val="bg1"/>
+                </a:solidFill>
+                <a:latin typeface="Ubuntu Sans"/>
+                <a:ea typeface="Ubuntu Sans"/>
+                <a:cs typeface="Ubuntu Sans"/>
+              </a:rPr>
+              <a:t>работа в екип</a:t>
+            </a:r>
+            <a:endParaRPr>
+              <a:solidFill>
+                <a:schemeClr val="bg1"/>
+              </a:solidFill>
+              <a:latin typeface="Ubuntu Sans"/>
+              <a:cs typeface="Ubuntu Sans"/>
+            </a:endParaRPr>
+          </a:p>
+        </p:txBody>
+      </p:sp>
+    </p:spTree>
+  </p:cSld>
+  <p:clrMapOvr>
+    <a:masterClrMapping/>
+  </p:clrMapOvr>
+  <mc:AlternateContent xmlns:mc="http://schemas.openxmlformats.org/markup-compatibility/2006">
+    <mc:Choice xmlns:p159="http://schemas.microsoft.com/office/powerpoint/2015/09/main" xmlns:p14="http://schemas.microsoft.com/office/powerpoint/2010/main" Requires="p159">
+      <p:transition p14:dur="500" advClick="1"/>
+    </mc:Choice>
+    <mc:Fallback>
+      <p:transition advClick="1"/>
+    </mc:Fallback>
+  </mc:AlternateContent>
+</p:sld>
+</file>
+
+<file path=ppt/slides/slide14.xml><?xml version="1.0" encoding="utf-8"?>
+<p:sld xmlns:a="http://schemas.openxmlformats.org/drawingml/2006/main" xmlns:r="http://schemas.openxmlformats.org/officeDocument/2006/relationships" xmlns:p="http://schemas.openxmlformats.org/presentationml/2006/main" xmlns:m="http://schemas.openxmlformats.org/officeDocument/2006/math" xmlns:w="http://schemas.openxmlformats.org/wordprocessingml/2006/main" xmlns:mc="http://schemas.openxmlformats.org/markup-compatibility/2006" showMasterPhAnim="0" showMasterSp="1" show="1">
+  <p:cSld name="">
+    <p:spTree>
+      <p:nvGrpSpPr>
+        <p:cNvPr id="1" name=""/>
+        <p:cNvGrpSpPr/>
+        <p:nvPr/>
+      </p:nvGrpSpPr>
+      <p:grpSpPr bwMode="auto">
+        <a:xfrm>
+          <a:off x="0" y="0"/>
+          <a:ext cx="0" cy="0"/>
+          <a:chOff x="0" y="0"/>
+          <a:chExt cx="0" cy="0"/>
+        </a:xfrm>
+      </p:grpSpPr>
+      <p:sp>
+        <p:nvSpPr>
+          <p:cNvPr id="641146105" name=""/>
           <p:cNvSpPr txBox="1"/>
           <p:nvPr/>
         </p:nvSpPr>
@@ -4621,7 +6511,7 @@
       </p:sp>
       <p:pic>
         <p:nvPicPr>
-          <p:cNvPr id="1410341809" name=""/>
+          <p:cNvPr id="1855213847" name=""/>
           <p:cNvPicPr>
             <a:picLocks noChangeAspect="1"/>
           </p:cNvPicPr>
@@ -4633,7 +6523,7 @@
         </p:blipFill>
         <p:spPr bwMode="auto">
           <a:xfrm flipH="0" flipV="0">
-            <a:off x="3990157" y="2304293"/>
+            <a:off x="3990156" y="2304293"/>
             <a:ext cx="3482564" cy="2833851"/>
           </a:xfrm>
           <a:prstGeom prst="rect">
@@ -4676,7 +6566,7 @@
       </p:grpSpPr>
       <p:sp>
         <p:nvSpPr>
-          <p:cNvPr id="1343171562" name="Title 1"/>
+          <p:cNvPr id="1545885661" name="Title 1"/>
           <p:cNvSpPr>
             <a:spLocks noGrp="1"/>
           </p:cNvSpPr>
@@ -4718,16 +6608,190 @@
           </a:p>
         </p:txBody>
       </p:sp>
-      <p:sp>
-        <p:nvSpPr>
-          <p:cNvPr id="1335105683" name=""/>
+      <p:pic>
+        <p:nvPicPr>
+          <p:cNvPr id="173088202" name=""/>
+          <p:cNvPicPr>
+            <a:picLocks noChangeAspect="1"/>
+          </p:cNvPicPr>
+          <p:nvPr/>
+        </p:nvPicPr>
+        <p:blipFill rotWithShape="1">
+          <a:blip r:embed="rId3"/>
+          <a:srcRect l="0" t="0" r="0" b="30816"/>
+          <a:stretch/>
+        </p:blipFill>
+        <p:spPr bwMode="auto">
+          <a:xfrm rot="21116953" flipH="0" flipV="0">
+            <a:off x="8130021" y="369730"/>
+            <a:ext cx="2555601" cy="2406021"/>
+          </a:xfrm>
+          <a:prstGeom prst="rect">
+            <a:avLst/>
+          </a:prstGeom>
+          <a:ln w="12700">
+            <a:solidFill>
+              <a:schemeClr val="tx1"/>
+            </a:solidFill>
+            <a:prstDash val="solid"/>
+          </a:ln>
+        </p:spPr>
+      </p:pic>
+      <p:pic>
+        <p:nvPicPr>
+          <p:cNvPr id="1306347692" name=""/>
+          <p:cNvPicPr>
+            <a:picLocks noChangeAspect="1"/>
+          </p:cNvPicPr>
+          <p:nvPr/>
+        </p:nvPicPr>
+        <p:blipFill rotWithShape="1">
+          <a:blip r:embed="rId4"/>
+          <a:srcRect l="0" t="6545" r="0" b="6275"/>
+          <a:stretch/>
+        </p:blipFill>
+        <p:spPr bwMode="auto">
+          <a:xfrm rot="0" flipH="0" flipV="0">
+            <a:off x="4359281" y="1632856"/>
+            <a:ext cx="1736717" cy="1643086"/>
+          </a:xfrm>
+          <a:prstGeom prst="rect">
+            <a:avLst/>
+          </a:prstGeom>
+          <a:ln w="12700">
+            <a:solidFill>
+              <a:schemeClr val="tx1"/>
+            </a:solidFill>
+            <a:prstDash val="solid"/>
+          </a:ln>
+        </p:spPr>
+      </p:pic>
+      <p:pic>
+        <p:nvPicPr>
+          <p:cNvPr id="1899329112" name=""/>
+          <p:cNvPicPr>
+            <a:picLocks noChangeAspect="1"/>
+          </p:cNvPicPr>
+          <p:nvPr/>
+        </p:nvPicPr>
+        <p:blipFill rotWithShape="1">
+          <a:blip r:embed="rId5"/>
+          <a:srcRect l="0" t="19914" r="0" b="3737"/>
+          <a:stretch/>
+        </p:blipFill>
+        <p:spPr bwMode="auto">
+          <a:xfrm rot="21017907" flipH="0" flipV="0">
+            <a:off x="2326506" y="2433699"/>
+            <a:ext cx="1614063" cy="1643086"/>
+          </a:xfrm>
+          <a:prstGeom prst="rect">
+            <a:avLst/>
+          </a:prstGeom>
+          <a:ln w="12700">
+            <a:solidFill>
+              <a:schemeClr val="tx1"/>
+            </a:solidFill>
+            <a:prstDash val="solid"/>
+          </a:ln>
+        </p:spPr>
+      </p:pic>
+      <p:pic>
+        <p:nvPicPr>
+          <p:cNvPr id="1169777123" name=""/>
+          <p:cNvPicPr>
+            <a:picLocks noChangeAspect="1"/>
+          </p:cNvPicPr>
+          <p:nvPr/>
+        </p:nvPicPr>
+        <p:blipFill rotWithShape="1">
+          <a:blip r:embed="rId6"/>
+          <a:srcRect l="0" t="13657" r="0" b="10989"/>
+          <a:stretch/>
+        </p:blipFill>
+        <p:spPr bwMode="auto">
+          <a:xfrm rot="789906" flipH="0" flipV="0">
+            <a:off x="261108" y="2184872"/>
+            <a:ext cx="1635384" cy="1643086"/>
+          </a:xfrm>
+          <a:prstGeom prst="rect">
+            <a:avLst/>
+          </a:prstGeom>
+          <a:ln w="12700">
+            <a:solidFill>
+              <a:schemeClr val="tx1"/>
+            </a:solidFill>
+            <a:prstDash val="solid"/>
+          </a:ln>
+        </p:spPr>
+      </p:pic>
+      <p:pic>
+        <p:nvPicPr>
+          <p:cNvPr id="1050055083" name=""/>
+          <p:cNvPicPr>
+            <a:picLocks noChangeAspect="1"/>
+          </p:cNvPicPr>
+          <p:nvPr/>
+        </p:nvPicPr>
+        <p:blipFill rotWithShape="1">
+          <a:blip r:embed="rId7"/>
+          <a:srcRect l="0" t="9454" r="0" b="27220"/>
+          <a:stretch/>
+        </p:blipFill>
+        <p:spPr bwMode="auto">
+          <a:xfrm rot="502398" flipH="0" flipV="0">
+            <a:off x="6438732" y="2902869"/>
+            <a:ext cx="1593255" cy="1793639"/>
+          </a:xfrm>
+          <a:prstGeom prst="rect">
+            <a:avLst/>
+          </a:prstGeom>
+          <a:ln w="12700">
+            <a:solidFill>
+              <a:schemeClr val="tx1"/>
+            </a:solidFill>
+            <a:prstDash val="solid"/>
+          </a:ln>
+        </p:spPr>
+      </p:pic>
+      <p:pic>
+        <p:nvPicPr>
+          <p:cNvPr id="1049375473" name=""/>
+          <p:cNvPicPr>
+            <a:picLocks noChangeAspect="1"/>
+          </p:cNvPicPr>
+          <p:nvPr/>
+        </p:nvPicPr>
+        <p:blipFill rotWithShape="1">
+          <a:blip r:embed="rId8"/>
+          <a:srcRect l="0" t="16690" r="0" b="15172"/>
+          <a:stretch/>
+        </p:blipFill>
+        <p:spPr bwMode="auto">
+          <a:xfrm rot="492277" flipH="0" flipV="0">
+            <a:off x="3993036" y="4433212"/>
+            <a:ext cx="1812149" cy="1646332"/>
+          </a:xfrm>
+          <a:prstGeom prst="rect">
+            <a:avLst/>
+          </a:prstGeom>
+          <a:ln w="12700">
+            <a:solidFill>
+              <a:schemeClr val="tx1"/>
+            </a:solidFill>
+            <a:prstDash val="solid"/>
+          </a:ln>
+        </p:spPr>
+      </p:pic>
+      <p:sp>
+        <p:nvSpPr>
+          <p:cNvPr id="1392356509" name=""/>
           <p:cNvSpPr txBox="1"/>
           <p:nvPr/>
         </p:nvSpPr>
         <p:spPr bwMode="auto">
-          <a:xfrm rot="0" flipH="0" flipV="0">
-            <a:off x="953892" y="1510391"/>
-            <a:ext cx="8848532" cy="2469238"/>
+          <a:xfrm rot="21159830" flipH="0" flipV="0">
+            <a:off x="8342523" y="2832116"/>
+            <a:ext cx="3738535" cy="731879"/>
           </a:xfrm>
           <a:prstGeom prst="rect">
             <a:avLst/>
@@ -4739,13 +6803,11 @@
             <a:spAutoFit/>
           </a:bodyPr>
           <a:p>
-            <a:pPr marL="371994" indent="-371994">
-              <a:buFont typeface="Arial"/>
-              <a:buChar char="•"/>
-              <a:defRPr/>
-            </a:pPr>
-            <a:r>
-              <a:rPr lang="bg-BG" sz="2600">
+            <a:pPr>
+              <a:defRPr/>
+            </a:pPr>
+            <a:r>
+              <a:rPr lang="bg-BG" sz="2200" b="1">
                 <a:solidFill>
                   <a:schemeClr val="bg1"/>
                 </a:solidFill>
@@ -4753,49 +6815,9 @@
                 <a:ea typeface="Ubuntu Sans"/>
                 <a:cs typeface="Ubuntu Sans"/>
               </a:rPr>
-              <a:t>Ивелина Кръстанова - капитан</a:t>
-            </a:r>
-            <a:r>
-              <a:rPr lang="bg-BG" sz="2600">
-                <a:solidFill>
-                  <a:schemeClr val="bg1"/>
-                </a:solidFill>
-                <a:latin typeface="Ubuntu Sans"/>
-                <a:cs typeface="Ubuntu Sans"/>
-              </a:rPr>
-              <a:t>, дизайн</a:t>
-            </a:r>
-            <a:r>
-              <a:rPr lang="en-US" sz="2600">
-                <a:solidFill>
-                  <a:schemeClr val="bg1"/>
-                </a:solidFill>
-                <a:latin typeface="Ubuntu Sans"/>
-                <a:cs typeface="Ubuntu Sans"/>
-              </a:rPr>
-              <a:t> </a:t>
-            </a:r>
-            <a:r>
-              <a:rPr lang="bg-BG" sz="2600">
-                <a:solidFill>
-                  <a:schemeClr val="bg1"/>
-                </a:solidFill>
-                <a:latin typeface="Ubuntu Sans"/>
-                <a:cs typeface="Ubuntu Sans"/>
-              </a:rPr>
-              <a:t>и </a:t>
-            </a:r>
-            <a:r>
-              <a:rPr lang="en-US" sz="2600">
-                <a:solidFill>
-                  <a:schemeClr val="bg1"/>
-                </a:solidFill>
-                <a:latin typeface="Ubuntu Sans"/>
-                <a:cs typeface="Ubuntu Sans"/>
-              </a:rPr>
-              <a:t>GitHub</a:t>
-            </a:r>
-            <a:endParaRPr sz="2600">
+              <a:t>ментор</a:t>
+            </a:r>
+            <a:endParaRPr lang="bg-BG" sz="2200" b="1">
               <a:solidFill>
                 <a:schemeClr val="bg1"/>
               </a:solidFill>
@@ -4805,13 +6827,11 @@
             </a:endParaRPr>
           </a:p>
           <a:p>
-            <a:pPr marL="371994" indent="-371994">
-              <a:buFont typeface="Arial"/>
-              <a:buChar char="•"/>
-              <a:defRPr/>
-            </a:pPr>
-            <a:r>
-              <a:rPr lang="bg-BG" sz="2600">
+            <a:pPr>
+              <a:defRPr/>
+            </a:pPr>
+            <a:r>
+              <a:rPr lang="bg-BG" sz="2000" b="0">
                 <a:solidFill>
                   <a:schemeClr val="bg1"/>
                 </a:solidFill>
@@ -4819,10 +6839,102 @@
                 <a:ea typeface="Ubuntu Sans"/>
                 <a:cs typeface="Ubuntu Sans"/>
               </a:rPr>
-              <a:t>Алексей Стойновски - събиране на информация</a:t>
-            </a:r>
-            <a:r>
-              <a:rPr sz="2600">
+              <a:t>Никола Кръстанов</a:t>
+            </a:r>
+            <a:endParaRPr b="1">
+              <a:solidFill>
+                <a:schemeClr val="bg1"/>
+              </a:solidFill>
+              <a:latin typeface="Ubuntu Sans"/>
+              <a:cs typeface="Ubuntu Sans"/>
+            </a:endParaRPr>
+          </a:p>
+        </p:txBody>
+      </p:sp>
+      <p:sp>
+        <p:nvSpPr>
+          <p:cNvPr id="71853397" name=""/>
+          <p:cNvSpPr txBox="1"/>
+          <p:nvPr/>
+        </p:nvSpPr>
+        <p:spPr bwMode="auto">
+          <a:xfrm rot="0" flipH="0" flipV="0">
+            <a:off x="6168656" y="1512093"/>
+            <a:ext cx="1986157" cy="640440"/>
+          </a:xfrm>
+          <a:prstGeom prst="rect">
+            <a:avLst/>
+          </a:prstGeom>
+          <a:noFill/>
+        </p:spPr>
+        <p:txBody>
+          <a:bodyPr vertOverflow="overflow" horzOverflow="overflow" vert="horz" wrap="square" lIns="91440" tIns="45720" rIns="91440" bIns="45720" numCol="1" spcCol="0" rtlCol="0" fromWordArt="0" anchor="t" anchorCtr="0" forceAA="0" upright="0" compatLnSpc="0">
+            <a:spAutoFit/>
+          </a:bodyPr>
+          <a:p>
+            <a:pPr>
+              <a:defRPr/>
+            </a:pPr>
+            <a:r>
+              <a:rPr lang="bg-BG">
+                <a:solidFill>
+                  <a:schemeClr val="bg1"/>
+                </a:solidFill>
+              </a:rPr>
+              <a:t>Ивелина</a:t>
+            </a:r>
+            <a:endParaRPr lang="bg-BG">
+              <a:solidFill>
+                <a:schemeClr val="bg1"/>
+              </a:solidFill>
+            </a:endParaRPr>
+          </a:p>
+          <a:p>
+            <a:pPr>
+              <a:defRPr/>
+            </a:pPr>
+            <a:r>
+              <a:rPr lang="bg-BG">
+                <a:solidFill>
+                  <a:schemeClr val="bg1"/>
+                </a:solidFill>
+              </a:rPr>
+              <a:t>Кръстанова</a:t>
+            </a:r>
+            <a:endParaRPr>
+              <a:solidFill>
+                <a:schemeClr val="bg1"/>
+              </a:solidFill>
+            </a:endParaRPr>
+          </a:p>
+        </p:txBody>
+      </p:sp>
+      <p:sp>
+        <p:nvSpPr>
+          <p:cNvPr id="360169845" name=""/>
+          <p:cNvSpPr txBox="1"/>
+          <p:nvPr/>
+        </p:nvSpPr>
+        <p:spPr bwMode="auto">
+          <a:xfrm rot="551985" flipH="0" flipV="0">
+            <a:off x="6161514" y="4857749"/>
+            <a:ext cx="3208901" cy="640440"/>
+          </a:xfrm>
+          <a:prstGeom prst="rect">
+            <a:avLst/>
+          </a:prstGeom>
+          <a:noFill/>
+        </p:spPr>
+        <p:txBody>
+          <a:bodyPr vertOverflow="overflow" horzOverflow="overflow" vert="horz" wrap="square" lIns="91440" tIns="45720" rIns="91440" bIns="45720" numCol="1" spcCol="0" rtlCol="0" fromWordArt="0" anchor="t" anchorCtr="0" forceAA="0" upright="0" compatLnSpc="0">
+            <a:spAutoFit/>
+          </a:bodyPr>
+          <a:p>
+            <a:pPr>
+              <a:defRPr/>
+            </a:pPr>
+            <a:r>
+              <a:rPr lang="bg-BG">
                 <a:solidFill>
                   <a:schemeClr val="bg1"/>
                 </a:solidFill>
@@ -4830,151 +6942,7 @@
                 <a:ea typeface="Ubuntu Sans"/>
                 <a:cs typeface="Ubuntu Sans"/>
               </a:rPr>
-              <a:t>,</a:t>
-            </a:r>
-            <a:r>
-              <a:rPr lang="en-US" sz="2600">
-                <a:solidFill>
-                  <a:schemeClr val="bg1"/>
-                </a:solidFill>
-                <a:latin typeface="Ubuntu Sans"/>
-                <a:ea typeface="Ubuntu Sans"/>
-                <a:cs typeface="Ubuntu Sans"/>
-              </a:rPr>
-              <a:t> </a:t>
-            </a:r>
-            <a:r>
-              <a:rPr lang="bg-BG" sz="2600">
-                <a:solidFill>
-                  <a:schemeClr val="bg1"/>
-                </a:solidFill>
-                <a:latin typeface="Ubuntu Sans"/>
-                <a:ea typeface="Ubuntu Sans"/>
-                <a:cs typeface="Ubuntu Sans"/>
-              </a:rPr>
-              <a:t>обединение на елементите</a:t>
-            </a:r>
-            <a:endParaRPr lang="bg-BG" sz="2600">
-              <a:solidFill>
-                <a:schemeClr val="bg1"/>
-              </a:solidFill>
-              <a:latin typeface="Ubuntu Sans"/>
-              <a:ea typeface="Ubuntu Sans"/>
-              <a:cs typeface="Ubuntu Sans"/>
-            </a:endParaRPr>
-          </a:p>
-          <a:p>
-            <a:pPr marL="371994" indent="-371994">
-              <a:buFont typeface="Arial"/>
-              <a:buChar char="•"/>
-              <a:defRPr/>
-            </a:pPr>
-            <a:r>
-              <a:rPr lang="bg-BG" sz="2600">
-                <a:solidFill>
-                  <a:schemeClr val="bg1"/>
-                </a:solidFill>
-                <a:latin typeface="Ubuntu Sans"/>
-                <a:ea typeface="Ubuntu Sans"/>
-                <a:cs typeface="Ubuntu Sans"/>
-              </a:rPr>
-              <a:t>Виктор Ванчов - </a:t>
-            </a:r>
-            <a:r>
-              <a:rPr lang="en-US" sz="2600">
-                <a:solidFill>
-                  <a:schemeClr val="bg1"/>
-                </a:solidFill>
-                <a:latin typeface="Ubuntu Sans"/>
-                <a:ea typeface="Ubuntu Sans"/>
-                <a:cs typeface="Ubuntu Sans"/>
-              </a:rPr>
-              <a:t>arduino</a:t>
-            </a:r>
-            <a:endParaRPr sz="2600">
-              <a:solidFill>
-                <a:schemeClr val="bg1"/>
-              </a:solidFill>
-              <a:latin typeface="Ubuntu Sans"/>
-              <a:ea typeface="Ubuntu Sans"/>
-              <a:cs typeface="Ubuntu Sans"/>
-            </a:endParaRPr>
-          </a:p>
-          <a:p>
-            <a:pPr marL="371994" indent="-371994">
-              <a:buFont typeface="Arial"/>
-              <a:buChar char="•"/>
-              <a:defRPr/>
-            </a:pPr>
-            <a:r>
-              <a:rPr lang="bg-BG" sz="2600">
-                <a:solidFill>
-                  <a:schemeClr val="bg1"/>
-                </a:solidFill>
-                <a:latin typeface="Ubuntu Sans"/>
-                <a:ea typeface="Ubuntu Sans"/>
-                <a:cs typeface="Ubuntu Sans"/>
-              </a:rPr>
-              <a:t>Александър Симеонов</a:t>
-            </a:r>
-            <a:r>
-              <a:rPr lang="en-US" sz="2600">
-                <a:solidFill>
-                  <a:schemeClr val="bg1"/>
-                </a:solidFill>
-                <a:latin typeface="Ubuntu Sans"/>
-                <a:ea typeface="Ubuntu Sans"/>
-                <a:cs typeface="Ubuntu Sans"/>
-              </a:rPr>
-              <a:t> - </a:t>
-            </a:r>
-            <a:r>
-              <a:rPr lang="bg-BG" sz="2600">
-                <a:solidFill>
-                  <a:schemeClr val="bg1"/>
-                </a:solidFill>
-                <a:latin typeface="Ubuntu Sans"/>
-                <a:ea typeface="Ubuntu Sans"/>
-                <a:cs typeface="Ubuntu Sans"/>
-              </a:rPr>
-              <a:t>правене на сайт</a:t>
-            </a:r>
-            <a:endParaRPr sz="2600">
-              <a:solidFill>
-                <a:schemeClr val="bg1"/>
-              </a:solidFill>
-              <a:latin typeface="Ubuntu Sans"/>
-              <a:ea typeface="Ubuntu Sans"/>
-              <a:cs typeface="Ubuntu Sans"/>
-            </a:endParaRPr>
-          </a:p>
-          <a:p>
-            <a:pPr marL="371994" indent="-371994">
-              <a:buFont typeface="Arial"/>
-              <a:buChar char="•"/>
-              <a:defRPr/>
-            </a:pPr>
-            <a:r>
-              <a:rPr lang="bg-BG" sz="2600">
-                <a:solidFill>
-                  <a:schemeClr val="bg1"/>
-                </a:solidFill>
-                <a:latin typeface="Ubuntu Sans"/>
-                <a:ea typeface="Ubuntu Sans"/>
-                <a:cs typeface="Ubuntu Sans"/>
-              </a:rPr>
-              <a:t>Илиян Сахатчиев</a:t>
-            </a:r>
-            <a:r>
-              <a:rPr lang="en-US" sz="2600">
-                <a:solidFill>
-                  <a:schemeClr val="bg1"/>
-                </a:solidFill>
-                <a:latin typeface="Ubuntu Sans"/>
-                <a:ea typeface="Ubuntu Sans"/>
-                <a:cs typeface="Ubuntu Sans"/>
-              </a:rPr>
-              <a:t> - backend, Arduino</a:t>
+              <a:t>Виктор</a:t>
             </a:r>
             <a:endParaRPr>
               <a:solidFill>
@@ -4984,18 +6952,41 @@
               <a:cs typeface="Ubuntu Sans"/>
             </a:endParaRPr>
           </a:p>
-        </p:txBody>
-      </p:sp>
-      <p:sp>
-        <p:nvSpPr>
-          <p:cNvPr id="1260303035" name=""/>
+          <a:p>
+            <a:pPr>
+              <a:defRPr/>
+            </a:pPr>
+            <a:r>
+              <a:rPr lang="bg-BG">
+                <a:solidFill>
+                  <a:schemeClr val="bg1"/>
+                </a:solidFill>
+                <a:latin typeface="Ubuntu Sans"/>
+                <a:ea typeface="Ubuntu Sans"/>
+                <a:cs typeface="Ubuntu Sans"/>
+              </a:rPr>
+              <a:t>Ванчов</a:t>
+            </a:r>
+            <a:endParaRPr>
+              <a:solidFill>
+                <a:schemeClr val="bg1"/>
+              </a:solidFill>
+              <a:latin typeface="Ubuntu Sans"/>
+              <a:cs typeface="Ubuntu Sans"/>
+            </a:endParaRPr>
+          </a:p>
+        </p:txBody>
+      </p:sp>
+      <p:sp>
+        <p:nvSpPr>
+          <p:cNvPr id="243700412" name=""/>
           <p:cNvSpPr txBox="1"/>
           <p:nvPr/>
         </p:nvSpPr>
         <p:spPr bwMode="auto">
-          <a:xfrm rot="0" flipH="0" flipV="0">
-            <a:off x="749784" y="4205057"/>
-            <a:ext cx="7021358" cy="640440"/>
+          <a:xfrm rot="20501817" flipH="0" flipV="0">
+            <a:off x="2191820" y="4040920"/>
+            <a:ext cx="2580390" cy="366120"/>
           </a:xfrm>
           <a:prstGeom prst="rect">
             <a:avLst/>
@@ -5011,7 +7002,7 @@
               <a:defRPr/>
             </a:pPr>
             <a:r>
-              <a:rPr lang="bg-BG" sz="3600" b="1">
+              <a:rPr lang="bg-BG">
                 <a:solidFill>
                   <a:schemeClr val="bg1"/>
                 </a:solidFill>
@@ -5019,10 +7010,44 @@
                 <a:ea typeface="Ubuntu Sans"/>
                 <a:cs typeface="Ubuntu Sans"/>
               </a:rPr>
-              <a:t>Ментор: </a:t>
-            </a:r>
-            <a:r>
-              <a:rPr lang="bg-BG" sz="3600" b="0">
+              <a:t>Алексей Стойновски</a:t>
+            </a:r>
+            <a:endParaRPr>
+              <a:solidFill>
+                <a:schemeClr val="bg1"/>
+              </a:solidFill>
+              <a:latin typeface="Ubuntu Sans"/>
+              <a:cs typeface="Ubuntu Sans"/>
+            </a:endParaRPr>
+          </a:p>
+        </p:txBody>
+      </p:sp>
+      <p:sp>
+        <p:nvSpPr>
+          <p:cNvPr id="1167311582" name=""/>
+          <p:cNvSpPr txBox="1"/>
+          <p:nvPr/>
+        </p:nvSpPr>
+        <p:spPr bwMode="auto">
+          <a:xfrm rot="914660" flipH="0" flipV="0">
+            <a:off x="1854" y="4017974"/>
+            <a:ext cx="2586150" cy="366120"/>
+          </a:xfrm>
+          <a:prstGeom prst="rect">
+            <a:avLst/>
+          </a:prstGeom>
+          <a:noFill/>
+        </p:spPr>
+        <p:txBody>
+          <a:bodyPr vertOverflow="overflow" horzOverflow="overflow" vert="horz" wrap="square" lIns="91440" tIns="45720" rIns="91440" bIns="45720" numCol="1" spcCol="0" rtlCol="0" fromWordArt="0" anchor="t" anchorCtr="0" forceAA="0" upright="0" compatLnSpc="0">
+            <a:spAutoFit/>
+          </a:bodyPr>
+          <a:p>
+            <a:pPr>
+              <a:defRPr/>
+            </a:pPr>
+            <a:r>
+              <a:rPr lang="bg-BG">
                 <a:solidFill>
                   <a:schemeClr val="bg1"/>
                 </a:solidFill>
@@ -5030,12 +7055,59 @@
                 <a:ea typeface="Ubuntu Sans"/>
                 <a:cs typeface="Ubuntu Sans"/>
               </a:rPr>
-              <a:t>Никола Кръстанов</a:t>
-            </a:r>
-            <a:endParaRPr b="0">
+              <a:t>Илиян Сахатчиев</a:t>
+            </a:r>
+            <a:endParaRPr>
               <a:solidFill>
                 <a:schemeClr val="bg1"/>
               </a:solidFill>
+              <a:latin typeface="Ubuntu Sans"/>
+              <a:cs typeface="Ubuntu Sans"/>
+            </a:endParaRPr>
+          </a:p>
+        </p:txBody>
+      </p:sp>
+      <p:sp>
+        <p:nvSpPr>
+          <p:cNvPr id="106138144" name=""/>
+          <p:cNvSpPr txBox="1"/>
+          <p:nvPr/>
+        </p:nvSpPr>
+        <p:spPr bwMode="auto">
+          <a:xfrm rot="0" flipH="0" flipV="0">
+            <a:off x="3668343" y="6143624"/>
+            <a:ext cx="4365607" cy="366120"/>
+          </a:xfrm>
+          <a:prstGeom prst="rect">
+            <a:avLst/>
+          </a:prstGeom>
+          <a:noFill/>
+        </p:spPr>
+        <p:txBody>
+          <a:bodyPr vertOverflow="overflow" horzOverflow="overflow" vert="horz" wrap="square" lIns="91440" tIns="45720" rIns="91440" bIns="45720" numCol="1" spcCol="0" rtlCol="0" fromWordArt="0" anchor="t" anchorCtr="0" forceAA="0" upright="0" compatLnSpc="0">
+            <a:spAutoFit/>
+          </a:bodyPr>
+          <a:p>
+            <a:pPr>
+              <a:defRPr/>
+            </a:pPr>
+            <a:r>
+              <a:rPr lang="bg-BG" b="1">
+                <a:solidFill>
+                  <a:schemeClr val="bg1"/>
+                </a:solidFill>
+                <a:latin typeface="Ubuntu Sans"/>
+                <a:ea typeface="Ubuntu Sans"/>
+                <a:cs typeface="Ubuntu Sans"/>
+              </a:rPr>
+              <a:t>Александър Симеонов</a:t>
+            </a:r>
+            <a:endParaRPr>
+              <a:solidFill>
+                <a:schemeClr val="bg1"/>
+              </a:solidFill>
+              <a:latin typeface="Ubuntu Sans"/>
+              <a:cs typeface="Ubuntu Sans"/>
             </a:endParaRPr>
           </a:p>
         </p:txBody>
@@ -5075,20 +7147,15 @@
       </p:grpSpPr>
       <p:sp>
         <p:nvSpPr>
-          <p:cNvPr id="1973829767" name="Title 1"/>
-          <p:cNvSpPr>
-            <a:spLocks noGrp="1"/>
-          </p:cNvSpPr>
-          <p:nvPr>
-            <p:ph type="ctrTitle"/>
-          </p:nvPr>
-        </p:nvSpPr>
-        <p:spPr bwMode="auto">
-          <a:xfrm flipH="0" flipV="0">
-            <a:off x="721176" y="251504"/>
-            <a:ext cx="6886608" cy="1381351"/>
-          </a:xfrm>
-        </p:spPr>
+          <p:cNvPr id="1149853687" name="Title 1"/>
+          <p:cNvSpPr>
+            <a:spLocks noGrp="1"/>
+          </p:cNvSpPr>
+          <p:nvPr>
+            <p:ph type="title"/>
+          </p:nvPr>
+        </p:nvSpPr>
+        <p:spPr bwMode="auto"/>
         <p:txBody>
           <a:bodyPr/>
           <a:lstStyle/>
@@ -5102,9 +7169,10 @@
                   <a:schemeClr val="bg1"/>
                 </a:solidFill>
                 <a:latin typeface="Ubuntu Sans"/>
+                <a:ea typeface="Ubuntu Sans"/>
                 <a:cs typeface="Ubuntu Sans"/>
               </a:rPr>
-              <a:t>Идеята – от къде и защо?</a:t>
+              <a:t>Технологии</a:t>
             </a:r>
             <a:endParaRPr b="1">
               <a:solidFill>
@@ -5116,136 +7184,51 @@
           </a:p>
         </p:txBody>
       </p:sp>
-      <p:sp>
-        <p:nvSpPr>
-          <p:cNvPr id="411591719" name=""/>
-          <p:cNvSpPr txBox="1"/>
+      <p:pic>
+        <p:nvPicPr>
+          <p:cNvPr id="917229266" name=""/>
+          <p:cNvPicPr>
+            <a:picLocks noChangeAspect="1"/>
+          </p:cNvPicPr>
           <p:nvPr/>
-        </p:nvSpPr>
+        </p:nvPicPr>
+        <p:blipFill rotWithShape="1">
+          <a:blip r:embed="rId3"/>
+          <a:stretch/>
+        </p:blipFill>
         <p:spPr bwMode="auto">
-          <a:xfrm rot="0" flipH="0" flipV="0">
-            <a:off x="559284" y="1690005"/>
-            <a:ext cx="7358764" cy="2194920"/>
+          <a:xfrm flipH="0" flipV="0">
+            <a:off x="2624137" y="1959000"/>
+            <a:ext cx="2038349" cy="2038349"/>
           </a:xfrm>
           <a:prstGeom prst="rect">
             <a:avLst/>
           </a:prstGeom>
-          <a:noFill/>
         </p:spPr>
-        <p:txBody>
-          <a:bodyPr vertOverflow="overflow" horzOverflow="overflow" vert="horz" wrap="square" lIns="91440" tIns="45720" rIns="91440" bIns="45720" numCol="1" spcCol="0" rtlCol="0" fromWordArt="0" anchor="t" anchorCtr="0" forceAA="0" upright="0" compatLnSpc="0">
-            <a:spAutoFit/>
-          </a:bodyPr>
-          <a:p>
-            <a:pPr>
-              <a:defRPr/>
-            </a:pPr>
-            <a:r>
-              <a:rPr lang="bg-BG" sz="2000">
-                <a:solidFill>
-                  <a:schemeClr val="bg1"/>
-                </a:solidFill>
-              </a:rPr>
-              <a:t>Проблемите на хората с деменция:</a:t>
-            </a:r>
-            <a:endParaRPr sz="2000">
-              <a:solidFill>
-                <a:schemeClr val="bg1"/>
-              </a:solidFill>
-            </a:endParaRPr>
-          </a:p>
-          <a:p>
-            <a:pPr marL="283879" indent="-283879">
-              <a:buFont typeface="Arial"/>
-              <a:buChar char="•"/>
-              <a:defRPr/>
-            </a:pPr>
-            <a:r>
-              <a:rPr lang="bg-BG" sz="2000">
-                <a:solidFill>
-                  <a:schemeClr val="bg1"/>
-                </a:solidFill>
-              </a:rPr>
-              <a:t>забравят</a:t>
-            </a:r>
-            <a:endParaRPr lang="bg-BG" sz="2000">
-              <a:solidFill>
-                <a:schemeClr val="bg1"/>
-              </a:solidFill>
-            </a:endParaRPr>
-          </a:p>
-          <a:p>
-            <a:pPr marL="283879" indent="-283879">
-              <a:buFont typeface="Arial"/>
-              <a:buChar char="•"/>
-              <a:defRPr/>
-            </a:pPr>
-            <a:r>
-              <a:rPr lang="bg-BG" sz="2000">
-                <a:solidFill>
-                  <a:schemeClr val="bg1"/>
-                </a:solidFill>
-              </a:rPr>
-              <a:t>не искат да си вземат лекарствата</a:t>
-            </a:r>
-            <a:endParaRPr sz="2000">
-              <a:solidFill>
-                <a:schemeClr val="bg1"/>
-              </a:solidFill>
-            </a:endParaRPr>
-          </a:p>
-          <a:p>
-            <a:pPr marL="683929" lvl="1" indent="-283879">
-              <a:buFont typeface="Arial"/>
-              <a:buChar char="–"/>
-              <a:defRPr/>
-            </a:pPr>
-            <a:r>
-              <a:rPr lang="bg-BG" sz="2000">
-                <a:solidFill>
-                  <a:schemeClr val="bg1"/>
-                </a:solidFill>
-              </a:rPr>
-              <a:t>с музиката се целим подсъзнателно да им въздействаме</a:t>
-            </a:r>
-            <a:endParaRPr sz="2000">
-              <a:solidFill>
-                <a:schemeClr val="bg1"/>
-              </a:solidFill>
-            </a:endParaRPr>
-          </a:p>
-          <a:p>
-            <a:pPr marL="283879" lvl="0" indent="-283879">
-              <a:buFont typeface="Arial"/>
-              <a:buChar char="•"/>
-              <a:defRPr/>
-            </a:pPr>
-            <a:r>
-              <a:rPr lang="bg-BG" sz="2000">
-                <a:solidFill>
-                  <a:schemeClr val="bg1"/>
-                </a:solidFill>
-              </a:rPr>
-              <a:t>вземат грешните лекарства</a:t>
-            </a:r>
-            <a:endParaRPr lang="bg-BG">
-              <a:solidFill>
-                <a:schemeClr val="bg1"/>
-              </a:solidFill>
-            </a:endParaRPr>
-          </a:p>
-          <a:p>
-            <a:pPr lvl="0">
-              <a:defRPr/>
-            </a:pPr>
-            <a:endParaRPr lang="bg-BG">
-              <a:solidFill>
-                <a:schemeClr val="bg1"/>
-              </a:solidFill>
-            </a:endParaRPr>
-          </a:p>
-        </p:txBody>
-      </p:sp>
+      </p:pic>
+      <p:pic>
+        <p:nvPicPr>
+          <p:cNvPr id="1596485865" name=""/>
+          <p:cNvPicPr>
+            <a:picLocks noChangeAspect="1"/>
+          </p:cNvPicPr>
+          <p:nvPr/>
+        </p:nvPicPr>
+        <p:blipFill rotWithShape="1">
+          <a:blip r:embed="rId4"/>
+          <a:srcRect l="37680" t="21864" r="36802" b="22186"/>
+          <a:stretch/>
+        </p:blipFill>
+        <p:spPr bwMode="auto">
+          <a:xfrm flipH="0" flipV="0">
+            <a:off x="6299624" y="1595437"/>
+            <a:ext cx="1835040" cy="2574975"/>
+          </a:xfrm>
+          <a:prstGeom prst="rect">
+            <a:avLst/>
+          </a:prstGeom>
+        </p:spPr>
+      </p:pic>
     </p:spTree>
   </p:cSld>
   <p:clrMapOvr>
@@ -5281,15 +7264,20 @@
       </p:grpSpPr>
       <p:sp>
         <p:nvSpPr>
-          <p:cNvPr id="1515086536" name="Title 1"/>
-          <p:cNvSpPr>
-            <a:spLocks noGrp="1"/>
-          </p:cNvSpPr>
-          <p:nvPr>
-            <p:ph type="title"/>
-          </p:nvPr>
-        </p:nvSpPr>
-        <p:spPr bwMode="auto"/>
+          <p:cNvPr id="448557838" name="Title 1"/>
+          <p:cNvSpPr>
+            <a:spLocks noGrp="1"/>
+          </p:cNvSpPr>
+          <p:nvPr>
+            <p:ph type="ctrTitle"/>
+          </p:nvPr>
+        </p:nvSpPr>
+        <p:spPr bwMode="auto">
+          <a:xfrm flipH="0" flipV="0">
+            <a:off x="721176" y="251504"/>
+            <a:ext cx="6886608" cy="1381351"/>
+          </a:xfrm>
+        </p:spPr>
         <p:txBody>
           <a:bodyPr/>
           <a:lstStyle/>
@@ -5303,10 +7291,9 @@
                   <a:schemeClr val="bg1"/>
                 </a:solidFill>
                 <a:latin typeface="Ubuntu Sans"/>
-                <a:ea typeface="Ubuntu Sans"/>
                 <a:cs typeface="Ubuntu Sans"/>
               </a:rPr>
-              <a:t>Технологии</a:t>
+              <a:t>Идеята – от къде и защо?</a:t>
             </a:r>
             <a:endParaRPr b="1">
               <a:solidFill>
@@ -5320,37 +7307,115 @@
       </p:sp>
       <p:sp>
         <p:nvSpPr>
-          <p:cNvPr id="213781527" name="Content Placeholder 2"/>
-          <p:cNvSpPr>
-            <a:spLocks noGrp="1"/>
-          </p:cNvSpPr>
-          <p:nvPr>
-            <p:ph idx="1"/>
-          </p:nvPr>
+          <p:cNvPr id="1336206221" name=""/>
+          <p:cNvSpPr txBox="1"/>
+          <p:nvPr/>
         </p:nvSpPr>
         <p:spPr bwMode="auto">
-          <a:xfrm flipH="0" flipV="0">
-            <a:off x="695323" y="1644649"/>
-            <a:ext cx="9754574" cy="4351338"/>
+          <a:xfrm rot="0" flipH="0" flipV="0">
+            <a:off x="559283" y="1690004"/>
+            <a:ext cx="7359123" cy="2926440"/>
           </a:xfrm>
+          <a:prstGeom prst="rect">
+            <a:avLst/>
+          </a:prstGeom>
+          <a:noFill/>
         </p:spPr>
         <p:txBody>
-          <a:bodyPr/>
-          <a:lstStyle/>
-          <a:p>
-            <a:pPr>
-              <a:defRPr/>
-            </a:pPr>
-            <a:r>
-              <a:rPr lang="en-US" sz="2800" b="0" i="0" u="none" strike="noStrike" cap="none" spc="0">
+          <a:bodyPr vertOverflow="overflow" horzOverflow="overflow" vert="horz" wrap="square" lIns="91440" tIns="45720" rIns="91440" bIns="45720" numCol="1" spcCol="0" rtlCol="0" fromWordArt="0" anchor="t" anchorCtr="0" forceAA="0" upright="0" compatLnSpc="0">
+            <a:spAutoFit/>
+          </a:bodyPr>
+          <a:p>
+            <a:pPr>
+              <a:defRPr/>
+            </a:pPr>
+            <a:r>
+              <a:rPr lang="bg-BG" sz="2800">
                 <a:solidFill>
                   <a:schemeClr val="bg1"/>
                 </a:solidFill>
-                <a:latin typeface="+mn-lt"/>
-                <a:ea typeface="+mn-ea"/>
-                <a:cs typeface="+mn-cs"/>
               </a:rPr>
-              <a:t>GitHub</a:t>
+              <a:t>Проблемите на хората с деменция:</a:t>
+            </a:r>
+            <a:endParaRPr sz="2800">
+              <a:solidFill>
+                <a:schemeClr val="bg1"/>
+              </a:solidFill>
+            </a:endParaRPr>
+          </a:p>
+          <a:p>
+            <a:pPr marL="283879" indent="-283879">
+              <a:buFont typeface="Arial"/>
+              <a:buChar char="•"/>
+              <a:defRPr/>
+            </a:pPr>
+            <a:r>
+              <a:rPr lang="bg-BG" sz="2800">
+                <a:solidFill>
+                  <a:schemeClr val="bg1"/>
+                </a:solidFill>
+              </a:rPr>
+              <a:t>забравят</a:t>
+            </a:r>
+            <a:endParaRPr sz="2800">
+              <a:solidFill>
+                <a:schemeClr val="bg1"/>
+              </a:solidFill>
+            </a:endParaRPr>
+          </a:p>
+          <a:p>
+            <a:pPr marL="283879" indent="-283879">
+              <a:buFont typeface="Arial"/>
+              <a:buChar char="•"/>
+              <a:defRPr/>
+            </a:pPr>
+            <a:r>
+              <a:rPr lang="bg-BG" sz="2800">
+                <a:solidFill>
+                  <a:schemeClr val="bg1"/>
+                </a:solidFill>
+              </a:rPr>
+              <a:t>не искат да си вземат лекарствата</a:t>
+            </a:r>
+            <a:endParaRPr sz="2800">
+              <a:solidFill>
+                <a:schemeClr val="bg1"/>
+              </a:solidFill>
+            </a:endParaRPr>
+          </a:p>
+          <a:p>
+            <a:pPr marL="683929" lvl="1" indent="-283879">
+              <a:buFont typeface="Arial"/>
+              <a:buChar char="–"/>
+              <a:defRPr/>
+            </a:pPr>
+            <a:r>
+              <a:rPr lang="bg-BG" sz="2800">
+                <a:solidFill>
+                  <a:schemeClr val="bg1"/>
+                </a:solidFill>
+              </a:rPr>
+              <a:t>с музиката се целим подсъзнателно да им въздействаме</a:t>
+            </a:r>
+            <a:endParaRPr sz="2800">
+              <a:solidFill>
+                <a:schemeClr val="bg1"/>
+              </a:solidFill>
+            </a:endParaRPr>
+          </a:p>
+          <a:p>
+            <a:pPr marL="283879" lvl="0" indent="-283879">
+              <a:buFont typeface="Arial"/>
+              <a:buChar char="•"/>
+              <a:defRPr/>
+            </a:pPr>
+            <a:r>
+              <a:rPr lang="bg-BG" sz="2800">
+                <a:solidFill>
+                  <a:schemeClr val="bg1"/>
+                </a:solidFill>
+              </a:rPr>
+              <a:t>вземат грешните лекарства</a:t>
             </a:r>
             <a:endParaRPr lang="bg-BG">
               <a:solidFill>
@@ -5359,148 +7424,10 @@
             </a:endParaRPr>
           </a:p>
           <a:p>
-            <a:pPr>
-              <a:defRPr/>
-            </a:pPr>
-            <a:r>
-              <a:rPr lang="en-US">
-                <a:solidFill>
-                  <a:schemeClr val="bg1"/>
-                </a:solidFill>
-              </a:rPr>
-              <a:t>Krita – </a:t>
-            </a:r>
-            <a:r>
-              <a:rPr lang="bg-BG">
-                <a:solidFill>
-                  <a:schemeClr val="bg1"/>
-                </a:solidFill>
-              </a:rPr>
-              <a:t>за дизайн на фонове и лого</a:t>
-            </a:r>
+            <a:pPr lvl="0">
+              <a:defRPr/>
+            </a:pPr>
             <a:endParaRPr lang="bg-BG">
-              <a:solidFill>
-                <a:schemeClr val="bg1"/>
-              </a:solidFill>
-            </a:endParaRPr>
-          </a:p>
-          <a:p>
-            <a:pPr>
-              <a:defRPr/>
-            </a:pPr>
-            <a:r>
-              <a:rPr lang="en-US">
-                <a:solidFill>
-                  <a:schemeClr val="bg1"/>
-                </a:solidFill>
-              </a:rPr>
-              <a:t>Ibis Paint X – </a:t>
-            </a:r>
-            <a:r>
-              <a:rPr lang="bg-BG">
-                <a:solidFill>
-                  <a:schemeClr val="bg1"/>
-                </a:solidFill>
-              </a:rPr>
-              <a:t>за скициране на сайта</a:t>
-            </a:r>
-            <a:endParaRPr lang="bg-BG">
-              <a:solidFill>
-                <a:schemeClr val="bg1"/>
-              </a:solidFill>
-            </a:endParaRPr>
-          </a:p>
-          <a:p>
-            <a:pPr>
-              <a:defRPr/>
-            </a:pPr>
-            <a:r>
-              <a:rPr lang="en-US">
-                <a:solidFill>
-                  <a:schemeClr val="bg1"/>
-                </a:solidFill>
-              </a:rPr>
-              <a:t>Arduino </a:t>
-            </a:r>
-            <a:r>
-              <a:rPr lang="bg-BG">
-                <a:solidFill>
-                  <a:schemeClr val="bg1"/>
-                </a:solidFill>
-              </a:rPr>
-              <a:t>платки </a:t>
-            </a:r>
-            <a:r>
-              <a:rPr lang="bg-BG">
-                <a:solidFill>
-                  <a:schemeClr val="bg1"/>
-                </a:solidFill>
-              </a:rPr>
-              <a:t>и </a:t>
-            </a:r>
-            <a:r>
-              <a:rPr lang="en-US">
-                <a:solidFill>
-                  <a:schemeClr val="bg1"/>
-                </a:solidFill>
-              </a:rPr>
-              <a:t>IDE</a:t>
-            </a:r>
-            <a:r>
-              <a:rPr lang="bg-BG">
-                <a:solidFill>
-                  <a:schemeClr val="bg1"/>
-                </a:solidFill>
-              </a:rPr>
-              <a:t> – з</a:t>
-            </a:r>
-            <a:r>
-              <a:rPr lang="bg-BG">
-                <a:solidFill>
-                  <a:schemeClr val="bg1"/>
-                </a:solidFill>
-              </a:rPr>
-              <a:t>а програмиране на функционираща кутия</a:t>
-            </a:r>
-            <a:endParaRPr lang="bg-BG">
-              <a:solidFill>
-                <a:schemeClr val="bg1"/>
-              </a:solidFill>
-            </a:endParaRPr>
-          </a:p>
-          <a:p>
-            <a:pPr>
-              <a:defRPr/>
-            </a:pPr>
-            <a:r>
-              <a:rPr lang="en-US">
-                <a:solidFill>
-                  <a:schemeClr val="bg1"/>
-                </a:solidFill>
-              </a:rPr>
-              <a:t>Cursor ai – </a:t>
-            </a:r>
-            <a:r>
-              <a:rPr lang="bg-BG">
-                <a:solidFill>
-                  <a:schemeClr val="bg1"/>
-                </a:solidFill>
-              </a:rPr>
-              <a:t>помощ за кодовете за кутията и сайта </a:t>
-            </a:r>
-            <a:endParaRPr lang="bg-BG">
-              <a:solidFill>
-                <a:schemeClr val="bg1"/>
-              </a:solidFill>
-            </a:endParaRPr>
-          </a:p>
-          <a:p>
-            <a:pPr marL="0" indent="0">
-              <a:buFont typeface="Arial"/>
-              <a:buNone/>
-              <a:defRPr/>
-            </a:pPr>
-            <a:endParaRPr>
               <a:solidFill>
                 <a:schemeClr val="bg1"/>
               </a:solidFill>
@@ -5543,7 +7470,7 @@
       </p:grpSpPr>
       <p:sp>
         <p:nvSpPr>
-          <p:cNvPr id="1888383228" name="Title 1"/>
+          <p:cNvPr id="1772636609" name="Title 1"/>
           <p:cNvSpPr>
             <a:spLocks noGrp="1"/>
           </p:cNvSpPr>
@@ -5582,7 +7509,7 @@
       </p:sp>
       <p:sp>
         <p:nvSpPr>
-          <p:cNvPr id="989443024" name="Content Placeholder 2"/>
+          <p:cNvPr id="573831500" name="Content Placeholder 2"/>
           <p:cNvSpPr>
             <a:spLocks noGrp="1"/>
           </p:cNvSpPr>
@@ -5738,7 +7665,7 @@
       </p:grpSpPr>
       <p:sp>
         <p:nvSpPr>
-          <p:cNvPr id="1418913664" name="Title 1"/>
+          <p:cNvPr id="569148689" name="Title 1"/>
           <p:cNvSpPr>
             <a:spLocks noGrp="1"/>
           </p:cNvSpPr>
@@ -5788,7 +7715,7 @@
       </p:sp>
       <p:sp>
         <p:nvSpPr>
-          <p:cNvPr id="1424981808" name=""/>
+          <p:cNvPr id="1227581339" name=""/>
           <p:cNvSpPr txBox="1"/>
           <p:nvPr/>
         </p:nvSpPr>
@@ -5816,14 +7743,14 @@
       </p:sp>
       <p:sp>
         <p:nvSpPr>
-          <p:cNvPr id="762076445" name=""/>
+          <p:cNvPr id="1880552459" name=""/>
           <p:cNvSpPr txBox="1"/>
           <p:nvPr/>
         </p:nvSpPr>
         <p:spPr bwMode="auto">
           <a:xfrm rot="0" flipH="0" flipV="0">
-            <a:off x="1220174" y="1790699"/>
-            <a:ext cx="7428959" cy="2286359"/>
+            <a:off x="905848" y="1790698"/>
+            <a:ext cx="7430758" cy="3627479"/>
           </a:xfrm>
           <a:prstGeom prst="rect">
             <a:avLst/>
@@ -5841,14 +7768,14 @@
               <a:defRPr/>
             </a:pPr>
             <a:r>
-              <a:rPr lang="bg-BG">
+              <a:rPr lang="bg-BG" sz="2800">
                 <a:solidFill>
                   <a:schemeClr val="bg1"/>
                 </a:solidFill>
               </a:rPr>
               <a:t>да избереш модел на кутията (и колко раздела има в нея)</a:t>
             </a:r>
-            <a:endParaRPr lang="bg-BG">
+            <a:endParaRPr sz="2800">
               <a:solidFill>
                 <a:schemeClr val="bg1"/>
               </a:solidFill>
@@ -5860,7 +7787,15 @@
               <a:buChar char="–"/>
               <a:defRPr/>
             </a:pPr>
-            <a:endParaRPr>
+            <a:r>
+              <a:rPr lang="bg-BG" sz="2800">
+                <a:solidFill>
+                  <a:schemeClr val="bg1"/>
+                </a:solidFill>
+              </a:rPr>
+              <a:t>при 5 минути без изключване на алармата се звъни на извънреден контакт</a:t>
+            </a:r>
+            <a:endParaRPr sz="2800">
               <a:solidFill>
                 <a:schemeClr val="bg1"/>
               </a:solidFill>
@@ -5873,39 +7808,7 @@
               <a:defRPr/>
             </a:pPr>
             <a:r>
-              <a:rPr lang="bg-BG">
-                <a:solidFill>
-                  <a:schemeClr val="bg1"/>
-                </a:solidFill>
-              </a:rPr>
-              <a:t>при 5 минути без изключване на алармата се звъни на извънреден контакт</a:t>
-            </a:r>
-            <a:endParaRPr lang="bg-BG">
-              <a:solidFill>
-                <a:schemeClr val="bg1"/>
-              </a:solidFill>
-            </a:endParaRPr>
-          </a:p>
-          <a:p>
-            <a:pPr marL="283879" indent="-283879">
-              <a:buFont typeface="Arial"/>
-              <a:buChar char="–"/>
-              <a:defRPr/>
-            </a:pPr>
-            <a:endParaRPr>
-              <a:solidFill>
-                <a:schemeClr val="bg1"/>
-              </a:solidFill>
-            </a:endParaRPr>
-          </a:p>
-          <a:p>
-            <a:pPr marL="283879" indent="-283879">
-              <a:buFont typeface="Arial"/>
-              <a:buChar char="–"/>
-              <a:defRPr/>
-            </a:pPr>
-            <a:r>
-              <a:rPr lang="bg-BG">
+              <a:rPr lang="bg-BG" sz="2800">
                 <a:solidFill>
                   <a:schemeClr val="bg1"/>
                 </a:solidFill>
@@ -5977,30 +7880,24 @@
       </p:grpSpPr>
       <p:sp>
         <p:nvSpPr>
-          <p:cNvPr id="1702977861" name=""/>
-          <p:cNvSpPr txBox="1"/>
-          <p:nvPr/>
-        </p:nvSpPr>
-        <p:spPr bwMode="auto">
-          <a:xfrm rot="0" flipH="0" flipV="0">
-            <a:off x="2239349" y="2074905"/>
-            <a:ext cx="7420694" cy="1189080"/>
-          </a:xfrm>
-          <a:prstGeom prst="rect">
-            <a:avLst/>
-          </a:prstGeom>
-          <a:noFill/>
-        </p:spPr>
-        <p:txBody>
-          <a:bodyPr vertOverflow="overflow" horzOverflow="overflow" vert="horz" wrap="square" lIns="91440" tIns="45720" rIns="91440" bIns="45720" numCol="1" spcCol="0" rtlCol="0" fromWordArt="0" anchor="t" anchorCtr="0" forceAA="0" upright="0" compatLnSpc="0">
-            <a:spAutoFit/>
-          </a:bodyPr>
-          <a:p>
-            <a:pPr>
-              <a:defRPr/>
-            </a:pPr>
-            <a:r>
-              <a:rPr lang="bg-BG" sz="7200" b="1">
+          <p:cNvPr id="628107323" name="Title 1"/>
+          <p:cNvSpPr>
+            <a:spLocks noGrp="1"/>
+          </p:cNvSpPr>
+          <p:nvPr>
+            <p:ph type="title"/>
+          </p:nvPr>
+        </p:nvSpPr>
+        <p:spPr bwMode="auto"/>
+        <p:txBody>
+          <a:bodyPr/>
+          <a:lstStyle/>
+          <a:p>
+            <a:pPr>
+              <a:defRPr/>
+            </a:pPr>
+            <a:r>
+              <a:rPr lang="bg-BG" b="1">
                 <a:solidFill>
                   <a:schemeClr val="bg1"/>
                 </a:solidFill>
@@ -6008,9 +7905,9 @@
                 <a:ea typeface="Ubuntu Sans"/>
                 <a:cs typeface="Ubuntu Sans"/>
               </a:rPr>
-              <a:t>Демонстрация</a:t>
-            </a:r>
-            <a:endParaRPr sz="7200" b="1">
+              <a:t>Принципна електрическа схема</a:t>
+            </a:r>
+            <a:endParaRPr b="1">
               <a:solidFill>
                 <a:schemeClr val="bg1"/>
               </a:solidFill>
@@ -6055,7 +7952,7 @@
       </p:grpSpPr>
       <p:sp>
         <p:nvSpPr>
-          <p:cNvPr id="1627998819" name="Title 1"/>
+          <p:cNvPr id="29157479" name="Title 1"/>
           <p:cNvSpPr>
             <a:spLocks noGrp="1"/>
           </p:cNvSpPr>
@@ -6080,240 +7977,13 @@
                 <a:ea typeface="Ubuntu Sans"/>
                 <a:cs typeface="Ubuntu Sans"/>
               </a:rPr>
-              <a:t>Нашето преживяване</a:t>
-            </a:r>
-            <a:endParaRPr/>
-          </a:p>
-        </p:txBody>
-      </p:sp>
-      <p:sp>
-        <p:nvSpPr>
-          <p:cNvPr id="1663682892" name=""/>
-          <p:cNvSpPr txBox="1"/>
-          <p:nvPr/>
-        </p:nvSpPr>
-        <p:spPr bwMode="auto">
-          <a:xfrm rot="0" flipH="0" flipV="0">
-            <a:off x="477223" y="1876423"/>
-            <a:ext cx="7659988" cy="2012040"/>
-          </a:xfrm>
-          <a:prstGeom prst="rect">
-            <a:avLst/>
-          </a:prstGeom>
-          <a:noFill/>
-        </p:spPr>
-        <p:txBody>
-          <a:bodyPr vertOverflow="overflow" horzOverflow="overflow" vert="horz" wrap="square" lIns="91440" tIns="45720" rIns="91440" bIns="45720" numCol="1" spcCol="0" rtlCol="0" fromWordArt="0" anchor="t" anchorCtr="0" forceAA="0" upright="0" compatLnSpc="0">
-            <a:spAutoFit/>
-          </a:bodyPr>
-          <a:p>
-            <a:pPr marL="283879" indent="-283879">
-              <a:buFont typeface="Arial"/>
-              <a:buChar char="–"/>
-              <a:defRPr/>
-            </a:pPr>
-            <a:r>
-              <a:rPr lang="bg-BG" b="1">
-                <a:solidFill>
-                  <a:schemeClr val="bg1"/>
-                </a:solidFill>
-                <a:latin typeface="Ubuntu Sans"/>
-                <a:ea typeface="Ubuntu Sans"/>
-                <a:cs typeface="Ubuntu Sans"/>
-              </a:rPr>
-              <a:t>За нас беше едно много </a:t>
-            </a:r>
-            <a:r>
-              <a:rPr lang="en-US" b="1" i="1" u="sng">
-                <a:solidFill>
-                  <a:schemeClr val="bg1"/>
-                </a:solidFill>
-                <a:latin typeface="Ubuntu Sans"/>
-                <a:ea typeface="Ubuntu Sans"/>
-                <a:cs typeface="Ubuntu Sans"/>
-              </a:rPr>
-              <a:t>BIZZARE</a:t>
-            </a:r>
-            <a:r>
-              <a:rPr lang="en-US" b="1">
-                <a:solidFill>
-                  <a:schemeClr val="bg1"/>
-                </a:solidFill>
-                <a:latin typeface="Ubuntu Sans"/>
-                <a:ea typeface="Ubuntu Sans"/>
-                <a:cs typeface="Ubuntu Sans"/>
-              </a:rPr>
-              <a:t> </a:t>
-            </a:r>
-            <a:r>
-              <a:rPr lang="bg-BG" b="1">
-                <a:solidFill>
-                  <a:schemeClr val="bg1"/>
-                </a:solidFill>
-                <a:latin typeface="Ubuntu Sans"/>
-                <a:ea typeface="Ubuntu Sans"/>
-                <a:cs typeface="Ubuntu Sans"/>
-              </a:rPr>
-              <a:t>преживяване</a:t>
-            </a:r>
-            <a:endParaRPr lang="bg-BG" b="1">
+              <a:t>Блокова схема</a:t>
+            </a:r>
+            <a:endParaRPr b="1">
               <a:solidFill>
                 <a:schemeClr val="bg1"/>
               </a:solidFill>
               <a:latin typeface="Ubuntu Sans"/>
-              <a:ea typeface="Ubuntu Sans"/>
-              <a:cs typeface="Ubuntu Sans"/>
-            </a:endParaRPr>
-          </a:p>
-          <a:p>
-            <a:pPr marL="283879" indent="-283879">
-              <a:buFont typeface="Arial"/>
-              <a:buChar char="–"/>
-              <a:defRPr/>
-            </a:pPr>
-            <a:r>
-              <a:rPr lang="bg-BG" b="1">
-                <a:solidFill>
-                  <a:schemeClr val="bg1"/>
-                </a:solidFill>
-                <a:latin typeface="Ubuntu Sans"/>
-                <a:ea typeface="Ubuntu Sans"/>
-                <a:cs typeface="Ubuntu Sans"/>
-              </a:rPr>
-              <a:t>Истински </a:t>
-            </a:r>
-            <a:r>
-              <a:rPr lang="en-US" b="1" i="1" u="sng">
-                <a:solidFill>
-                  <a:schemeClr val="bg1"/>
-                </a:solidFill>
-                <a:latin typeface="Ubuntu Sans"/>
-                <a:ea typeface="Ubuntu Sans"/>
-                <a:cs typeface="Ubuntu Sans"/>
-              </a:rPr>
-              <a:t>ADVENTURE</a:t>
-            </a:r>
-            <a:r>
-              <a:rPr lang="en-US" b="1">
-                <a:solidFill>
-                  <a:schemeClr val="bg1"/>
-                </a:solidFill>
-                <a:latin typeface="Ubuntu Sans"/>
-                <a:ea typeface="Ubuntu Sans"/>
-                <a:cs typeface="Ubuntu Sans"/>
-              </a:rPr>
-              <a:t> </a:t>
-            </a:r>
-            <a:r>
-              <a:rPr lang="bg-BG" b="1">
-                <a:solidFill>
-                  <a:schemeClr val="bg1"/>
-                </a:solidFill>
-                <a:latin typeface="Ubuntu Sans"/>
-                <a:ea typeface="Ubuntu Sans"/>
-                <a:cs typeface="Ubuntu Sans"/>
-              </a:rPr>
-              <a:t>в сфери, в които никога не сме работили</a:t>
-            </a:r>
-            <a:endParaRPr lang="bg-BG" b="1">
-              <a:solidFill>
-                <a:schemeClr val="bg1"/>
-              </a:solidFill>
-              <a:latin typeface="Ubuntu Sans"/>
-              <a:ea typeface="Ubuntu Sans"/>
-              <a:cs typeface="Ubuntu Sans"/>
-            </a:endParaRPr>
-          </a:p>
-          <a:p>
-            <a:pPr marL="283879" indent="-283879">
-              <a:buFont typeface="Arial"/>
-              <a:buChar char="–"/>
-              <a:defRPr/>
-            </a:pPr>
-            <a:r>
-              <a:rPr lang="bg-BG" b="1">
-                <a:solidFill>
-                  <a:schemeClr val="bg1"/>
-                </a:solidFill>
-                <a:latin typeface="Ubuntu Sans"/>
-                <a:ea typeface="Ubuntu Sans"/>
-                <a:cs typeface="Ubuntu Sans"/>
-              </a:rPr>
-              <a:t>Половината се разболяхме</a:t>
-            </a:r>
-            <a:endParaRPr lang="bg-BG" b="1">
-              <a:solidFill>
-                <a:schemeClr val="bg1"/>
-              </a:solidFill>
-              <a:latin typeface="Ubuntu Sans"/>
-              <a:ea typeface="Ubuntu Sans"/>
-              <a:cs typeface="Ubuntu Sans"/>
-            </a:endParaRPr>
-          </a:p>
-          <a:p>
-            <a:pPr marL="283879" indent="-283879">
-              <a:buFont typeface="Arial"/>
-              <a:buChar char="–"/>
-              <a:defRPr/>
-            </a:pPr>
-            <a:r>
-              <a:rPr lang="bg-BG" b="1">
-                <a:solidFill>
-                  <a:schemeClr val="bg1"/>
-                </a:solidFill>
-                <a:latin typeface="Ubuntu Sans"/>
-                <a:ea typeface="Ubuntu Sans"/>
-                <a:cs typeface="Ubuntu Sans"/>
-              </a:rPr>
-              <a:t>Менторът ни идваше с части само след 14 часа </a:t>
-            </a:r>
-            <a:endParaRPr lang="bg-BG" b="1">
-              <a:solidFill>
-                <a:schemeClr val="bg1"/>
-              </a:solidFill>
-              <a:latin typeface="Ubuntu Sans"/>
-              <a:ea typeface="Ubuntu Sans"/>
-              <a:cs typeface="Ubuntu Sans"/>
-            </a:endParaRPr>
-          </a:p>
-          <a:p>
-            <a:pPr marL="283879" indent="-283879">
-              <a:buFont typeface="Arial"/>
-              <a:buChar char="–"/>
-              <a:defRPr/>
-            </a:pPr>
-            <a:r>
-              <a:rPr lang="bg-BG" b="1">
-                <a:solidFill>
-                  <a:schemeClr val="bg1"/>
-                </a:solidFill>
-                <a:latin typeface="Ubuntu Sans"/>
-                <a:ea typeface="Ubuntu Sans"/>
-                <a:cs typeface="Ubuntu Sans"/>
-              </a:rPr>
-              <a:t>Много се забавлявахме и смятаме да участваме всяка година до края на обучението ни в ТУЕС</a:t>
-            </a:r>
-            <a:endParaRPr lang="bg-BG" b="1">
-              <a:solidFill>
-                <a:schemeClr val="bg1"/>
-              </a:solidFill>
-              <a:latin typeface="Ubuntu Sans"/>
-              <a:ea typeface="Ubuntu Sans"/>
-              <a:cs typeface="Ubuntu Sans"/>
-            </a:endParaRPr>
-          </a:p>
-          <a:p>
-            <a:pPr marL="283878" indent="-283878">
-              <a:buFont typeface="Arial"/>
-              <a:buChar char="–"/>
-              <a:defRPr/>
-            </a:pPr>
-            <a:endParaRPr lang="bg-BG">
-              <a:solidFill>
-                <a:schemeClr val="bg1"/>
-              </a:solidFill>
-              <a:latin typeface="Ubuntu Sans"/>
-              <a:ea typeface="Ubuntu Sans"/>
               <a:cs typeface="Ubuntu Sans"/>
             </a:endParaRPr>
           </a:p>
@@ -6354,51 +8024,14 @@
       </p:grpSpPr>
       <p:sp>
         <p:nvSpPr>
-          <p:cNvPr id="1282295336" name="Title 1"/>
-          <p:cNvSpPr>
-            <a:spLocks noGrp="1"/>
-          </p:cNvSpPr>
-          <p:nvPr>
-            <p:ph type="title"/>
-          </p:nvPr>
-        </p:nvSpPr>
-        <p:spPr bwMode="auto"/>
-        <p:txBody>
-          <a:bodyPr/>
-          <a:lstStyle/>
-          <a:p>
-            <a:pPr>
-              <a:defRPr/>
-            </a:pPr>
-            <a:r>
-              <a:rPr lang="bg-BG" b="1">
-                <a:solidFill>
-                  <a:schemeClr val="bg1"/>
-                </a:solidFill>
-                <a:latin typeface="Ubuntu Sans"/>
-                <a:ea typeface="Ubuntu Sans"/>
-                <a:cs typeface="Ubuntu Sans"/>
-              </a:rPr>
-              <a:t>Какво научихме</a:t>
-            </a:r>
-            <a:endParaRPr b="1">
-              <a:solidFill>
-                <a:schemeClr val="bg1"/>
-              </a:solidFill>
-            </a:endParaRPr>
-          </a:p>
-        </p:txBody>
-      </p:sp>
-      <p:sp>
-        <p:nvSpPr>
-          <p:cNvPr id="1140844459" name=""/>
+          <p:cNvPr id="1778332139" name=""/>
           <p:cNvSpPr txBox="1"/>
           <p:nvPr/>
         </p:nvSpPr>
         <p:spPr bwMode="auto">
           <a:xfrm rot="0" flipH="0" flipV="0">
-            <a:off x="724873" y="1952623"/>
-            <a:ext cx="9512683" cy="1554840"/>
+            <a:off x="2239349" y="2074905"/>
+            <a:ext cx="7420694" cy="1189080"/>
           </a:xfrm>
           <a:prstGeom prst="rect">
             <a:avLst/>
@@ -6410,13 +8043,11 @@
             <a:spAutoFit/>
           </a:bodyPr>
           <a:p>
-            <a:pPr marL="283879" indent="-283879">
-              <a:buFont typeface="Arial"/>
-              <a:buChar char="–"/>
-              <a:defRPr/>
-            </a:pPr>
-            <a:r>
-              <a:rPr lang="bg-BG" sz="2400">
+            <a:pPr>
+              <a:defRPr/>
+            </a:pPr>
+            <a:r>
+              <a:rPr lang="bg-BG" sz="7200" b="1">
                 <a:solidFill>
                   <a:schemeClr val="bg1"/>
                 </a:solidFill>
@@ -6424,109 +8055,9 @@
                 <a:ea typeface="Ubuntu Sans"/>
                 <a:cs typeface="Ubuntu Sans"/>
               </a:rPr>
-              <a:t>работа с </a:t>
-            </a:r>
-            <a:r>
-              <a:rPr lang="en-US" sz="2400">
-                <a:solidFill>
-                  <a:schemeClr val="bg1"/>
-                </a:solidFill>
-                <a:latin typeface="Ubuntu Sans"/>
-                <a:ea typeface="Ubuntu Sans"/>
-                <a:cs typeface="Ubuntu Sans"/>
-              </a:rPr>
-              <a:t>Arduino</a:t>
-            </a:r>
-            <a:endParaRPr sz="2400">
-              <a:solidFill>
-                <a:schemeClr val="bg1"/>
-              </a:solidFill>
-              <a:latin typeface="Ubuntu Sans"/>
-              <a:ea typeface="Ubuntu Sans"/>
-              <a:cs typeface="Ubuntu Sans"/>
-            </a:endParaRPr>
-          </a:p>
-          <a:p>
-            <a:pPr marL="283879" indent="-283879">
-              <a:buFont typeface="Arial"/>
-              <a:buChar char="–"/>
-              <a:defRPr/>
-            </a:pPr>
-            <a:r>
-              <a:rPr lang="en-US" sz="2400">
-                <a:solidFill>
-                  <a:schemeClr val="bg1"/>
-                </a:solidFill>
-                <a:latin typeface="Ubuntu Sans"/>
-                <a:ea typeface="Ubuntu Sans"/>
-                <a:cs typeface="Ubuntu Sans"/>
-              </a:rPr>
-              <a:t>HTML и</a:t>
-            </a:r>
-            <a:r>
-              <a:rPr lang="bg-BG" sz="2400">
-                <a:solidFill>
-                  <a:schemeClr val="bg1"/>
-                </a:solidFill>
-                <a:latin typeface="Ubuntu Sans"/>
-                <a:ea typeface="Ubuntu Sans"/>
-                <a:cs typeface="Ubuntu Sans"/>
-              </a:rPr>
-              <a:t> създаване на сайт</a:t>
-            </a:r>
-            <a:endParaRPr sz="2400">
-              <a:solidFill>
-                <a:schemeClr val="bg1"/>
-              </a:solidFill>
-              <a:latin typeface="Ubuntu Sans"/>
-              <a:ea typeface="Ubuntu Sans"/>
-              <a:cs typeface="Ubuntu Sans"/>
-            </a:endParaRPr>
-          </a:p>
-          <a:p>
-            <a:pPr marL="283879" indent="-283879">
-              <a:buFont typeface="Arial"/>
-              <a:buChar char="–"/>
-              <a:defRPr/>
-            </a:pPr>
-            <a:r>
-              <a:rPr lang="bg-BG" sz="2400">
-                <a:solidFill>
-                  <a:schemeClr val="bg1"/>
-                </a:solidFill>
-                <a:latin typeface="Ubuntu Sans"/>
-                <a:ea typeface="Ubuntu Sans"/>
-                <a:cs typeface="Ubuntu Sans"/>
-              </a:rPr>
-              <a:t>как да използваме изкуствен интелект ефективно</a:t>
-            </a:r>
-            <a:endParaRPr sz="2400">
-              <a:solidFill>
-                <a:schemeClr val="bg1"/>
-              </a:solidFill>
-              <a:latin typeface="Ubuntu Sans"/>
-              <a:ea typeface="Ubuntu Sans"/>
-              <a:cs typeface="Ubuntu Sans"/>
-            </a:endParaRPr>
-          </a:p>
-          <a:p>
-            <a:pPr marL="283879" indent="-283879">
-              <a:buFont typeface="Arial"/>
-              <a:buChar char="–"/>
-              <a:defRPr/>
-            </a:pPr>
-            <a:r>
-              <a:rPr lang="bg-BG" sz="2400">
-                <a:solidFill>
-                  <a:schemeClr val="bg1"/>
-                </a:solidFill>
-                <a:latin typeface="Ubuntu Sans"/>
-                <a:ea typeface="Ubuntu Sans"/>
-                <a:cs typeface="Ubuntu Sans"/>
-              </a:rPr>
-              <a:t>работа в екип</a:t>
-            </a:r>
-            <a:endParaRPr>
+              <a:t>Демонстрация</a:t>
+            </a:r>
+            <a:endParaRPr sz="7200" b="1">
               <a:solidFill>
                 <a:schemeClr val="bg1"/>
               </a:solidFill>

--- a/Prezentaciq.pptx
+++ b/Prezentaciq.pptx
@@ -147,7 +147,7 @@
       </p:grpSpPr>
       <p:sp>
         <p:nvSpPr>
-          <p:cNvPr id="1932412450" name="Header Placeholder 1"/>
+          <p:cNvPr id="58436473" name="Header Placeholder 1"/>
           <p:cNvSpPr>
             <a:spLocks noGrp="1"/>
           </p:cNvSpPr>
@@ -181,7 +181,7 @@
       </p:sp>
       <p:sp>
         <p:nvSpPr>
-          <p:cNvPr id="1316764062" name="Date Placeholder 2"/>
+          <p:cNvPr id="533549276" name="Date Placeholder 2"/>
           <p:cNvSpPr>
             <a:spLocks noGrp="1"/>
           </p:cNvSpPr>
@@ -219,7 +219,7 @@
       </p:sp>
       <p:sp>
         <p:nvSpPr>
-          <p:cNvPr id="893571253" name="Slide Image Placeholder 3"/>
+          <p:cNvPr id="718225031" name="Slide Image Placeholder 3"/>
           <p:cNvSpPr>
             <a:spLocks noChangeAspect="1" noGrp="1" noRot="1"/>
           </p:cNvSpPr>
@@ -255,7 +255,7 @@
       </p:sp>
       <p:sp>
         <p:nvSpPr>
-          <p:cNvPr id="466976141" name="Notes Placeholder 4"/>
+          <p:cNvPr id="286838563" name="Notes Placeholder 4"/>
           <p:cNvSpPr>
             <a:spLocks noGrp="1"/>
           </p:cNvSpPr>
@@ -329,7 +329,7 @@
       </p:sp>
       <p:sp>
         <p:nvSpPr>
-          <p:cNvPr id="1150908665" name="Footer Placeholder 5"/>
+          <p:cNvPr id="531845967" name="Footer Placeholder 5"/>
           <p:cNvSpPr>
             <a:spLocks noGrp="1"/>
           </p:cNvSpPr>
@@ -363,7 +363,7 @@
       </p:sp>
       <p:sp>
         <p:nvSpPr>
-          <p:cNvPr id="22959854" name="Slide Number Placeholder 6"/>
+          <p:cNvPr id="1746309567" name="Slide Number Placeholder 6"/>
           <p:cNvSpPr>
             <a:spLocks noGrp="1"/>
           </p:cNvSpPr>
@@ -516,7 +516,7 @@
       </p:grpSpPr>
       <p:sp>
         <p:nvSpPr>
-          <p:cNvPr id="696014909" name="Slide Image Placeholder 1"/>
+          <p:cNvPr id="1306486001" name="Slide Image Placeholder 1"/>
           <p:cNvSpPr>
             <a:spLocks noChangeAspect="1" noGrp="1" noRot="1"/>
           </p:cNvSpPr>
@@ -533,7 +533,7 @@
       </p:sp>
       <p:sp>
         <p:nvSpPr>
-          <p:cNvPr id="1590408812" name="Notes Placeholder 2"/>
+          <p:cNvPr id="334811234" name="Notes Placeholder 2"/>
           <p:cNvSpPr>
             <a:spLocks noGrp="1"/>
           </p:cNvSpPr>
@@ -558,7 +558,7 @@
       </p:sp>
       <p:sp>
         <p:nvSpPr>
-          <p:cNvPr id="43109193" name="Slide Number Placeholder 3"/>
+          <p:cNvPr id="114077903" name="Slide Number Placeholder 3"/>
           <p:cNvSpPr>
             <a:spLocks noGrp="1"/>
           </p:cNvSpPr>
@@ -609,7 +609,7 @@
       </p:grpSpPr>
       <p:sp>
         <p:nvSpPr>
-          <p:cNvPr id="2" name="Slide Image Placeholder 1"/>
+          <p:cNvPr id="280794990" name="Slide Image Placeholder 1"/>
           <p:cNvSpPr>
             <a:spLocks noChangeAspect="1" noGrp="1" noRot="1"/>
           </p:cNvSpPr>
@@ -621,7 +621,7 @@
       </p:sp>
       <p:sp>
         <p:nvSpPr>
-          <p:cNvPr id="3" name="Notes Placeholder 2"/>
+          <p:cNvPr id="1370732853" name="Notes Placeholder 2"/>
           <p:cNvSpPr>
             <a:spLocks noGrp="1"/>
           </p:cNvSpPr>
@@ -643,7 +643,7 @@
       </p:sp>
       <p:sp>
         <p:nvSpPr>
-          <p:cNvPr id="4" name="Slide Number Placeholder 3"/>
+          <p:cNvPr id="1046857221" name="Slide Number Placeholder 3"/>
           <p:cNvSpPr>
             <a:spLocks noGrp="1"/>
           </p:cNvSpPr>
@@ -659,7 +659,7 @@
             <a:pPr>
               <a:defRPr/>
             </a:pPr>
-            <a:fld id="{A5C52C9A-CB03-5833-6119-EBA298FF276D}" type="slidenum">
+            <a:fld id="{3C49A6FF-DC7E-27A8-916A-7EA30C17A71F}" type="slidenum">
               <a:rPr/>
               <a:t/>
             </a:fld>
@@ -694,7 +694,7 @@
       </p:grpSpPr>
       <p:sp>
         <p:nvSpPr>
-          <p:cNvPr id="1535264342" name="Slide Image Placeholder 1"/>
+          <p:cNvPr id="513255465" name="Slide Image Placeholder 1"/>
           <p:cNvSpPr>
             <a:spLocks noChangeAspect="1" noGrp="1" noRot="1"/>
           </p:cNvSpPr>
@@ -706,7 +706,7 @@
       </p:sp>
       <p:sp>
         <p:nvSpPr>
-          <p:cNvPr id="987466522" name="Notes Placeholder 2"/>
+          <p:cNvPr id="201265743" name="Notes Placeholder 2"/>
           <p:cNvSpPr>
             <a:spLocks noGrp="1"/>
           </p:cNvSpPr>
@@ -728,7 +728,7 @@
       </p:sp>
       <p:sp>
         <p:nvSpPr>
-          <p:cNvPr id="1171352344" name="Slide Number Placeholder 3"/>
+          <p:cNvPr id="706094252" name="Slide Number Placeholder 3"/>
           <p:cNvSpPr>
             <a:spLocks noGrp="1"/>
           </p:cNvSpPr>
@@ -744,7 +744,7 @@
             <a:pPr>
               <a:defRPr/>
             </a:pPr>
-            <a:fld id="{3C49A6FF-DC7E-27A8-916A-7EA30C17A71F}" type="slidenum">
+            <a:fld id="{F3E5CA1D-C782-DD6A-E3E4-FADF595E63EC}" type="slidenum">
               <a:rPr/>
               <a:t/>
             </a:fld>
@@ -779,7 +779,7 @@
       </p:grpSpPr>
       <p:sp>
         <p:nvSpPr>
-          <p:cNvPr id="1301144208" name="Slide Image Placeholder 1"/>
+          <p:cNvPr id="726774625" name="Slide Image Placeholder 1"/>
           <p:cNvSpPr>
             <a:spLocks noChangeAspect="1" noGrp="1" noRot="1"/>
           </p:cNvSpPr>
@@ -791,7 +791,7 @@
       </p:sp>
       <p:sp>
         <p:nvSpPr>
-          <p:cNvPr id="1059819341" name="Notes Placeholder 2"/>
+          <p:cNvPr id="1398756412" name="Notes Placeholder 2"/>
           <p:cNvSpPr>
             <a:spLocks noGrp="1"/>
           </p:cNvSpPr>
@@ -813,7 +813,7 @@
       </p:sp>
       <p:sp>
         <p:nvSpPr>
-          <p:cNvPr id="1197852803" name="Slide Number Placeholder 3"/>
+          <p:cNvPr id="804975547" name="Slide Number Placeholder 3"/>
           <p:cNvSpPr>
             <a:spLocks noGrp="1"/>
           </p:cNvSpPr>
@@ -864,7 +864,7 @@
       </p:grpSpPr>
       <p:sp>
         <p:nvSpPr>
-          <p:cNvPr id="721670671" name="Slide Image Placeholder 1"/>
+          <p:cNvPr id="928911077" name="Slide Image Placeholder 1"/>
           <p:cNvSpPr>
             <a:spLocks noChangeAspect="1" noGrp="1" noRot="1"/>
           </p:cNvSpPr>
@@ -876,7 +876,7 @@
       </p:sp>
       <p:sp>
         <p:nvSpPr>
-          <p:cNvPr id="1760485065" name="Notes Placeholder 2"/>
+          <p:cNvPr id="18493334" name="Notes Placeholder 2"/>
           <p:cNvSpPr>
             <a:spLocks noGrp="1"/>
           </p:cNvSpPr>
@@ -898,7 +898,7 @@
       </p:sp>
       <p:sp>
         <p:nvSpPr>
-          <p:cNvPr id="1842300390" name="Slide Number Placeholder 3"/>
+          <p:cNvPr id="633197055" name="Slide Number Placeholder 3"/>
           <p:cNvSpPr>
             <a:spLocks noGrp="1"/>
           </p:cNvSpPr>
@@ -949,7 +949,7 @@
       </p:grpSpPr>
       <p:sp>
         <p:nvSpPr>
-          <p:cNvPr id="1993333725" name="Slide Image Placeholder 1"/>
+          <p:cNvPr id="1904860296" name="Slide Image Placeholder 1"/>
           <p:cNvSpPr>
             <a:spLocks noChangeAspect="1" noGrp="1" noRot="1"/>
           </p:cNvSpPr>
@@ -961,7 +961,7 @@
       </p:sp>
       <p:sp>
         <p:nvSpPr>
-          <p:cNvPr id="2017688875" name="Notes Placeholder 2"/>
+          <p:cNvPr id="256931860" name="Notes Placeholder 2"/>
           <p:cNvSpPr>
             <a:spLocks noGrp="1"/>
           </p:cNvSpPr>
@@ -983,7 +983,7 @@
       </p:sp>
       <p:sp>
         <p:nvSpPr>
-          <p:cNvPr id="64705775" name="Slide Number Placeholder 3"/>
+          <p:cNvPr id="262495085" name="Slide Number Placeholder 3"/>
           <p:cNvSpPr>
             <a:spLocks noGrp="1"/>
           </p:cNvSpPr>
@@ -1034,7 +1034,7 @@
       </p:grpSpPr>
       <p:sp>
         <p:nvSpPr>
-          <p:cNvPr id="90839030" name="Slide Image Placeholder 1"/>
+          <p:cNvPr id="1306180675" name="Slide Image Placeholder 1"/>
           <p:cNvSpPr>
             <a:spLocks noChangeAspect="1" noGrp="1" noRot="1"/>
           </p:cNvSpPr>
@@ -1046,7 +1046,7 @@
       </p:sp>
       <p:sp>
         <p:nvSpPr>
-          <p:cNvPr id="312250741" name="Notes Placeholder 2"/>
+          <p:cNvPr id="1843498073" name="Notes Placeholder 2"/>
           <p:cNvSpPr>
             <a:spLocks noGrp="1"/>
           </p:cNvSpPr>
@@ -1068,7 +1068,7 @@
       </p:sp>
       <p:sp>
         <p:nvSpPr>
-          <p:cNvPr id="443496656" name="Slide Number Placeholder 3"/>
+          <p:cNvPr id="1170130912" name="Slide Number Placeholder 3"/>
           <p:cNvSpPr>
             <a:spLocks noGrp="1"/>
           </p:cNvSpPr>
@@ -1119,7 +1119,7 @@
       </p:grpSpPr>
       <p:sp>
         <p:nvSpPr>
-          <p:cNvPr id="1056071346" name="Slide Image Placeholder 1"/>
+          <p:cNvPr id="2037917213" name="Slide Image Placeholder 1"/>
           <p:cNvSpPr>
             <a:spLocks noChangeAspect="1" noGrp="1" noRot="1"/>
           </p:cNvSpPr>
@@ -1131,7 +1131,7 @@
       </p:sp>
       <p:sp>
         <p:nvSpPr>
-          <p:cNvPr id="807058552" name="Notes Placeholder 2"/>
+          <p:cNvPr id="1956270095" name="Notes Placeholder 2"/>
           <p:cNvSpPr>
             <a:spLocks noGrp="1"/>
           </p:cNvSpPr>
@@ -1153,7 +1153,7 @@
       </p:sp>
       <p:sp>
         <p:nvSpPr>
-          <p:cNvPr id="408763648" name="Slide Number Placeholder 3"/>
+          <p:cNvPr id="1813001798" name="Slide Number Placeholder 3"/>
           <p:cNvSpPr>
             <a:spLocks noGrp="1"/>
           </p:cNvSpPr>
@@ -1169,7 +1169,7 @@
             <a:pPr>
               <a:defRPr/>
             </a:pPr>
-            <a:fld id="{5ABAF583-884E-CFEF-8DE5-1203A4B4A717}" type="slidenum">
+            <a:fld id="{B5D478D3-3B21-6817-CCC9-CB9B3836E056}" type="slidenum">
               <a:rPr/>
               <a:t/>
             </a:fld>
@@ -1204,7 +1204,7 @@
       </p:grpSpPr>
       <p:sp>
         <p:nvSpPr>
-          <p:cNvPr id="599047508" name="Slide Image Placeholder 1"/>
+          <p:cNvPr id="1257408769" name="Slide Image Placeholder 1"/>
           <p:cNvSpPr>
             <a:spLocks noChangeAspect="1" noGrp="1" noRot="1"/>
           </p:cNvSpPr>
@@ -1216,7 +1216,7 @@
       </p:sp>
       <p:sp>
         <p:nvSpPr>
-          <p:cNvPr id="487096554" name="Notes Placeholder 2"/>
+          <p:cNvPr id="1453484464" name="Notes Placeholder 2"/>
           <p:cNvSpPr>
             <a:spLocks noGrp="1"/>
           </p:cNvSpPr>
@@ -1238,7 +1238,7 @@
       </p:sp>
       <p:sp>
         <p:nvSpPr>
-          <p:cNvPr id="324656921" name="Slide Number Placeholder 3"/>
+          <p:cNvPr id="1330786355" name="Slide Number Placeholder 3"/>
           <p:cNvSpPr>
             <a:spLocks noGrp="1"/>
           </p:cNvSpPr>
@@ -1254,7 +1254,7 @@
             <a:pPr>
               <a:defRPr/>
             </a:pPr>
-            <a:fld id="{B5D478D3-3B21-6817-CCC9-CB9B3836E056}" type="slidenum">
+            <a:fld id="{EC57B88A-9EE6-B226-87EE-FAE994B421A8}" type="slidenum">
               <a:rPr/>
               <a:t/>
             </a:fld>
@@ -1289,7 +1289,7 @@
       </p:grpSpPr>
       <p:sp>
         <p:nvSpPr>
-          <p:cNvPr id="31314764" name="Slide Image Placeholder 1"/>
+          <p:cNvPr id="1523799460" name="Slide Image Placeholder 1"/>
           <p:cNvSpPr>
             <a:spLocks noChangeAspect="1" noGrp="1" noRot="1"/>
           </p:cNvSpPr>
@@ -1301,7 +1301,7 @@
       </p:sp>
       <p:sp>
         <p:nvSpPr>
-          <p:cNvPr id="304762778" name="Notes Placeholder 2"/>
+          <p:cNvPr id="958540731" name="Notes Placeholder 2"/>
           <p:cNvSpPr>
             <a:spLocks noGrp="1"/>
           </p:cNvSpPr>
@@ -1323,7 +1323,7 @@
       </p:sp>
       <p:sp>
         <p:nvSpPr>
-          <p:cNvPr id="1660641538" name="Slide Number Placeholder 3"/>
+          <p:cNvPr id="71238620" name="Slide Number Placeholder 3"/>
           <p:cNvSpPr>
             <a:spLocks noGrp="1"/>
           </p:cNvSpPr>
@@ -1339,7 +1339,7 @@
             <a:pPr>
               <a:defRPr/>
             </a:pPr>
-            <a:fld id="{EC57B88A-9EE6-B226-87EE-FAE994B421A8}" type="slidenum">
+            <a:fld id="{5ABAF583-884E-CFEF-8DE5-1203A4B4A717}" type="slidenum">
               <a:rPr/>
               <a:t/>
             </a:fld>
@@ -1374,7 +1374,7 @@
       </p:grpSpPr>
       <p:sp>
         <p:nvSpPr>
-          <p:cNvPr id="1104058262" name="Slide Image Placeholder 1"/>
+          <p:cNvPr id="1944269978" name="Slide Image Placeholder 1"/>
           <p:cNvSpPr>
             <a:spLocks noChangeAspect="1" noGrp="1" noRot="1"/>
           </p:cNvSpPr>
@@ -1386,7 +1386,7 @@
       </p:sp>
       <p:sp>
         <p:nvSpPr>
-          <p:cNvPr id="656978290" name="Notes Placeholder 2"/>
+          <p:cNvPr id="1130409623" name="Notes Placeholder 2"/>
           <p:cNvSpPr>
             <a:spLocks noGrp="1"/>
           </p:cNvSpPr>
@@ -1408,7 +1408,7 @@
       </p:sp>
       <p:sp>
         <p:nvSpPr>
-          <p:cNvPr id="1245327061" name="Slide Number Placeholder 3"/>
+          <p:cNvPr id="1424577868" name="Slide Number Placeholder 3"/>
           <p:cNvSpPr>
             <a:spLocks noGrp="1"/>
           </p:cNvSpPr>
@@ -1424,7 +1424,7 @@
             <a:pPr>
               <a:defRPr/>
             </a:pPr>
-            <a:fld id="{F3E5CA1D-C782-DD6A-E3E4-FADF595E63EC}" type="slidenum">
+            <a:fld id="{26A4A41D-E2A1-FC31-472C-40DA7E093D91}" type="slidenum">
               <a:rPr/>
               <a:t/>
             </a:fld>
@@ -1544,7 +1544,7 @@
       </p:grpSpPr>
       <p:sp>
         <p:nvSpPr>
-          <p:cNvPr id="1944269978" name="Slide Image Placeholder 1"/>
+          <p:cNvPr id="2061537826" name="Slide Image Placeholder 1"/>
           <p:cNvSpPr>
             <a:spLocks noChangeAspect="1" noGrp="1" noRot="1"/>
           </p:cNvSpPr>
@@ -1556,7 +1556,7 @@
       </p:sp>
       <p:sp>
         <p:nvSpPr>
-          <p:cNvPr id="1130409623" name="Notes Placeholder 2"/>
+          <p:cNvPr id="1698493071" name="Notes Placeholder 2"/>
           <p:cNvSpPr>
             <a:spLocks noGrp="1"/>
           </p:cNvSpPr>
@@ -1578,7 +1578,7 @@
       </p:sp>
       <p:sp>
         <p:nvSpPr>
-          <p:cNvPr id="1424577868" name="Slide Number Placeholder 3"/>
+          <p:cNvPr id="1792982272" name="Slide Number Placeholder 3"/>
           <p:cNvSpPr>
             <a:spLocks noGrp="1"/>
           </p:cNvSpPr>
@@ -1594,7 +1594,7 @@
             <a:pPr>
               <a:defRPr/>
             </a:pPr>
-            <a:fld id="{26A4A41D-E2A1-FC31-472C-40DA7E093D91}" type="slidenum">
+            <a:fld id="{F518262F-F903-3EEA-F653-29E78658ED5E}" type="slidenum">
               <a:rPr/>
               <a:t/>
             </a:fld>
@@ -1629,7 +1629,7 @@
       </p:grpSpPr>
       <p:sp>
         <p:nvSpPr>
-          <p:cNvPr id="550716524" name="Slide Image Placeholder 1"/>
+          <p:cNvPr id="2" name="Slide Image Placeholder 1"/>
           <p:cNvSpPr>
             <a:spLocks noChangeAspect="1" noGrp="1" noRot="1"/>
           </p:cNvSpPr>
@@ -1641,7 +1641,7 @@
       </p:sp>
       <p:sp>
         <p:nvSpPr>
-          <p:cNvPr id="1505229174" name="Notes Placeholder 2"/>
+          <p:cNvPr id="3" name="Notes Placeholder 2"/>
           <p:cNvSpPr>
             <a:spLocks noGrp="1"/>
           </p:cNvSpPr>
@@ -1663,7 +1663,7 @@
       </p:sp>
       <p:sp>
         <p:nvSpPr>
-          <p:cNvPr id="1111671222" name="Slide Number Placeholder 3"/>
+          <p:cNvPr id="4" name="Slide Number Placeholder 3"/>
           <p:cNvSpPr>
             <a:spLocks noGrp="1"/>
           </p:cNvSpPr>
@@ -1679,7 +1679,7 @@
             <a:pPr>
               <a:defRPr/>
             </a:pPr>
-            <a:fld id="{F518262F-F903-3EEA-F653-29E78658ED5E}" type="slidenum">
+            <a:fld id="{A5C52C9A-CB03-5833-6119-EBA298FF276D}" type="slidenum">
               <a:rPr/>
               <a:t/>
             </a:fld>
@@ -1714,7 +1714,7 @@
       </p:grpSpPr>
       <p:sp>
         <p:nvSpPr>
-          <p:cNvPr id="1780352951" name="Title 1"/>
+          <p:cNvPr id="2028843225" name="Title 1"/>
           <p:cNvSpPr>
             <a:spLocks noGrp="1"/>
           </p:cNvSpPr>
@@ -1749,7 +1749,7 @@
       </p:sp>
       <p:sp>
         <p:nvSpPr>
-          <p:cNvPr id="907386235" name="Subtitle 2"/>
+          <p:cNvPr id="1211600737" name="Subtitle 2"/>
           <p:cNvSpPr>
             <a:spLocks noGrp="1"/>
           </p:cNvSpPr>
@@ -1817,7 +1817,7 @@
       </p:sp>
       <p:sp>
         <p:nvSpPr>
-          <p:cNvPr id="2141280045" name="Date Placeholder 3"/>
+          <p:cNvPr id="898336554" name="Date Placeholder 3"/>
           <p:cNvSpPr>
             <a:spLocks noGrp="1"/>
           </p:cNvSpPr>
@@ -1843,7 +1843,7 @@
       </p:sp>
       <p:sp>
         <p:nvSpPr>
-          <p:cNvPr id="1481293353" name="Footer Placeholder 4"/>
+          <p:cNvPr id="1499356894" name="Footer Placeholder 4"/>
           <p:cNvSpPr>
             <a:spLocks noGrp="1"/>
           </p:cNvSpPr>
@@ -1865,7 +1865,7 @@
       </p:sp>
       <p:sp>
         <p:nvSpPr>
-          <p:cNvPr id="519246687" name="Slide Number Placeholder 5"/>
+          <p:cNvPr id="333492766" name="Slide Number Placeholder 5"/>
           <p:cNvSpPr>
             <a:spLocks noGrp="1"/>
           </p:cNvSpPr>
@@ -1916,7 +1916,7 @@
       </p:grpSpPr>
       <p:sp>
         <p:nvSpPr>
-          <p:cNvPr id="158948764" name="Title 1"/>
+          <p:cNvPr id="971245133" name="Title 1"/>
           <p:cNvSpPr>
             <a:spLocks noGrp="1"/>
           </p:cNvSpPr>
@@ -1942,7 +1942,7 @@
       </p:sp>
       <p:sp>
         <p:nvSpPr>
-          <p:cNvPr id="915362234" name="Vertical Text Placeholder 2"/>
+          <p:cNvPr id="824475277" name="Vertical Text Placeholder 2"/>
           <p:cNvSpPr>
             <a:spLocks noGrp="1"/>
           </p:cNvSpPr>
@@ -2008,7 +2008,7 @@
       </p:sp>
       <p:sp>
         <p:nvSpPr>
-          <p:cNvPr id="883975497" name="Date Placeholder 3"/>
+          <p:cNvPr id="1108581748" name="Date Placeholder 3"/>
           <p:cNvSpPr>
             <a:spLocks noGrp="1"/>
           </p:cNvSpPr>
@@ -2034,7 +2034,7 @@
       </p:sp>
       <p:sp>
         <p:nvSpPr>
-          <p:cNvPr id="2136126546" name="Footer Placeholder 4"/>
+          <p:cNvPr id="1387668411" name="Footer Placeholder 4"/>
           <p:cNvSpPr>
             <a:spLocks noGrp="1"/>
           </p:cNvSpPr>
@@ -2056,7 +2056,7 @@
       </p:sp>
       <p:sp>
         <p:nvSpPr>
-          <p:cNvPr id="1889996042" name="Slide Number Placeholder 5"/>
+          <p:cNvPr id="1849048940" name="Slide Number Placeholder 5"/>
           <p:cNvSpPr>
             <a:spLocks noGrp="1"/>
           </p:cNvSpPr>
@@ -2107,7 +2107,7 @@
       </p:grpSpPr>
       <p:sp>
         <p:nvSpPr>
-          <p:cNvPr id="1111930960" name="Vertical Title 1"/>
+          <p:cNvPr id="1978342587" name="Vertical Title 1"/>
           <p:cNvSpPr>
             <a:spLocks noGrp="1"/>
           </p:cNvSpPr>
@@ -2138,7 +2138,7 @@
       </p:sp>
       <p:sp>
         <p:nvSpPr>
-          <p:cNvPr id="1053881815" name="Vertical Text Placeholder 2"/>
+          <p:cNvPr id="451121903" name="Vertical Text Placeholder 2"/>
           <p:cNvSpPr>
             <a:spLocks noGrp="1"/>
           </p:cNvSpPr>
@@ -2209,7 +2209,7 @@
       </p:sp>
       <p:sp>
         <p:nvSpPr>
-          <p:cNvPr id="1845421495" name="Date Placeholder 3"/>
+          <p:cNvPr id="349333578" name="Date Placeholder 3"/>
           <p:cNvSpPr>
             <a:spLocks noGrp="1"/>
           </p:cNvSpPr>
@@ -2235,7 +2235,7 @@
       </p:sp>
       <p:sp>
         <p:nvSpPr>
-          <p:cNvPr id="1810289913" name="Footer Placeholder 4"/>
+          <p:cNvPr id="1098645134" name="Footer Placeholder 4"/>
           <p:cNvSpPr>
             <a:spLocks noGrp="1"/>
           </p:cNvSpPr>
@@ -2257,7 +2257,7 @@
       </p:sp>
       <p:sp>
         <p:nvSpPr>
-          <p:cNvPr id="773463901" name="Slide Number Placeholder 5"/>
+          <p:cNvPr id="656122952" name="Slide Number Placeholder 5"/>
           <p:cNvSpPr>
             <a:spLocks noGrp="1"/>
           </p:cNvSpPr>
@@ -2308,7 +2308,7 @@
       </p:grpSpPr>
       <p:sp>
         <p:nvSpPr>
-          <p:cNvPr id="716152496" name="Title 1"/>
+          <p:cNvPr id="2059368164" name="Title 1"/>
           <p:cNvSpPr>
             <a:spLocks noGrp="1"/>
           </p:cNvSpPr>
@@ -2334,7 +2334,7 @@
       </p:sp>
       <p:sp>
         <p:nvSpPr>
-          <p:cNvPr id="715786624" name="Content Placeholder 2"/>
+          <p:cNvPr id="1485020390" name="Content Placeholder 2"/>
           <p:cNvSpPr>
             <a:spLocks noGrp="1"/>
           </p:cNvSpPr>
@@ -2400,7 +2400,7 @@
       </p:sp>
       <p:sp>
         <p:nvSpPr>
-          <p:cNvPr id="1132857672" name="Date Placeholder 3"/>
+          <p:cNvPr id="1766171673" name="Date Placeholder 3"/>
           <p:cNvSpPr>
             <a:spLocks noGrp="1"/>
           </p:cNvSpPr>
@@ -2426,7 +2426,7 @@
       </p:sp>
       <p:sp>
         <p:nvSpPr>
-          <p:cNvPr id="1076735177" name="Footer Placeholder 4"/>
+          <p:cNvPr id="2008475335" name="Footer Placeholder 4"/>
           <p:cNvSpPr>
             <a:spLocks noGrp="1"/>
           </p:cNvSpPr>
@@ -2448,7 +2448,7 @@
       </p:sp>
       <p:sp>
         <p:nvSpPr>
-          <p:cNvPr id="1377902521" name="Slide Number Placeholder 5"/>
+          <p:cNvPr id="894036957" name="Slide Number Placeholder 5"/>
           <p:cNvSpPr>
             <a:spLocks noGrp="1"/>
           </p:cNvSpPr>
@@ -2499,7 +2499,7 @@
       </p:grpSpPr>
       <p:sp>
         <p:nvSpPr>
-          <p:cNvPr id="511851456" name="Title 1"/>
+          <p:cNvPr id="4818160" name="Title 1"/>
           <p:cNvSpPr>
             <a:spLocks noGrp="1"/>
           </p:cNvSpPr>
@@ -2534,7 +2534,7 @@
       </p:sp>
       <p:sp>
         <p:nvSpPr>
-          <p:cNvPr id="204283459" name="Text Placeholder 2"/>
+          <p:cNvPr id="1079399427" name="Text Placeholder 2"/>
           <p:cNvSpPr>
             <a:spLocks noGrp="1"/>
           </p:cNvSpPr>
@@ -2656,7 +2656,7 @@
       </p:sp>
       <p:sp>
         <p:nvSpPr>
-          <p:cNvPr id="264708020" name="Date Placeholder 3"/>
+          <p:cNvPr id="698100207" name="Date Placeholder 3"/>
           <p:cNvSpPr>
             <a:spLocks noGrp="1"/>
           </p:cNvSpPr>
@@ -2682,7 +2682,7 @@
       </p:sp>
       <p:sp>
         <p:nvSpPr>
-          <p:cNvPr id="1675664489" name="Footer Placeholder 4"/>
+          <p:cNvPr id="1832123180" name="Footer Placeholder 4"/>
           <p:cNvSpPr>
             <a:spLocks noGrp="1"/>
           </p:cNvSpPr>
@@ -2704,7 +2704,7 @@
       </p:sp>
       <p:sp>
         <p:nvSpPr>
-          <p:cNvPr id="1384803802" name="Slide Number Placeholder 5"/>
+          <p:cNvPr id="1062434085" name="Slide Number Placeholder 5"/>
           <p:cNvSpPr>
             <a:spLocks noGrp="1"/>
           </p:cNvSpPr>
@@ -2755,7 +2755,7 @@
       </p:grpSpPr>
       <p:sp>
         <p:nvSpPr>
-          <p:cNvPr id="852774012" name="Title 1"/>
+          <p:cNvPr id="1858567658" name="Title 1"/>
           <p:cNvSpPr>
             <a:spLocks noGrp="1"/>
           </p:cNvSpPr>
@@ -2781,7 +2781,7 @@
       </p:sp>
       <p:sp>
         <p:nvSpPr>
-          <p:cNvPr id="1043937769" name="Content Placeholder 2"/>
+          <p:cNvPr id="272591727" name="Content Placeholder 2"/>
           <p:cNvSpPr>
             <a:spLocks noGrp="1"/>
           </p:cNvSpPr>
@@ -2852,7 +2852,7 @@
       </p:sp>
       <p:sp>
         <p:nvSpPr>
-          <p:cNvPr id="985015629" name="Content Placeholder 3"/>
+          <p:cNvPr id="777142350" name="Content Placeholder 3"/>
           <p:cNvSpPr>
             <a:spLocks noGrp="1"/>
           </p:cNvSpPr>
@@ -2923,7 +2923,7 @@
       </p:sp>
       <p:sp>
         <p:nvSpPr>
-          <p:cNvPr id="39251863" name="Date Placeholder 4"/>
+          <p:cNvPr id="1590750364" name="Date Placeholder 4"/>
           <p:cNvSpPr>
             <a:spLocks noGrp="1"/>
           </p:cNvSpPr>
@@ -2949,7 +2949,7 @@
       </p:sp>
       <p:sp>
         <p:nvSpPr>
-          <p:cNvPr id="1120492744" name="Footer Placeholder 5"/>
+          <p:cNvPr id="420857151" name="Footer Placeholder 5"/>
           <p:cNvSpPr>
             <a:spLocks noGrp="1"/>
           </p:cNvSpPr>
@@ -2971,7 +2971,7 @@
       </p:sp>
       <p:sp>
         <p:nvSpPr>
-          <p:cNvPr id="2080483144" name="Slide Number Placeholder 6"/>
+          <p:cNvPr id="1820612314" name="Slide Number Placeholder 6"/>
           <p:cNvSpPr>
             <a:spLocks noGrp="1"/>
           </p:cNvSpPr>
@@ -3022,7 +3022,7 @@
       </p:grpSpPr>
       <p:sp>
         <p:nvSpPr>
-          <p:cNvPr id="698520788" name="Title 1"/>
+          <p:cNvPr id="1862803555" name="Title 1"/>
           <p:cNvSpPr>
             <a:spLocks noGrp="1"/>
           </p:cNvSpPr>
@@ -3053,7 +3053,7 @@
       </p:sp>
       <p:sp>
         <p:nvSpPr>
-          <p:cNvPr id="1644879458" name="Text Placeholder 2"/>
+          <p:cNvPr id="894038830" name="Text Placeholder 2"/>
           <p:cNvSpPr>
             <a:spLocks noGrp="1"/>
           </p:cNvSpPr>
@@ -3121,7 +3121,7 @@
       </p:sp>
       <p:sp>
         <p:nvSpPr>
-          <p:cNvPr id="853184002" name="Content Placeholder 3"/>
+          <p:cNvPr id="1666568284" name="Content Placeholder 3"/>
           <p:cNvSpPr>
             <a:spLocks noGrp="1"/>
           </p:cNvSpPr>
@@ -3192,7 +3192,7 @@
       </p:sp>
       <p:sp>
         <p:nvSpPr>
-          <p:cNvPr id="69326498" name="Text Placeholder 4"/>
+          <p:cNvPr id="218840421" name="Text Placeholder 4"/>
           <p:cNvSpPr>
             <a:spLocks noGrp="1"/>
           </p:cNvSpPr>
@@ -3260,7 +3260,7 @@
       </p:sp>
       <p:sp>
         <p:nvSpPr>
-          <p:cNvPr id="24578637" name="Content Placeholder 5"/>
+          <p:cNvPr id="1094059749" name="Content Placeholder 5"/>
           <p:cNvSpPr>
             <a:spLocks noGrp="1"/>
           </p:cNvSpPr>
@@ -3331,7 +3331,7 @@
       </p:sp>
       <p:sp>
         <p:nvSpPr>
-          <p:cNvPr id="930397625" name="Date Placeholder 6"/>
+          <p:cNvPr id="678859312" name="Date Placeholder 6"/>
           <p:cNvSpPr>
             <a:spLocks noGrp="1"/>
           </p:cNvSpPr>
@@ -3357,7 +3357,7 @@
       </p:sp>
       <p:sp>
         <p:nvSpPr>
-          <p:cNvPr id="1823803357" name="Footer Placeholder 7"/>
+          <p:cNvPr id="192487608" name="Footer Placeholder 7"/>
           <p:cNvSpPr>
             <a:spLocks noGrp="1"/>
           </p:cNvSpPr>
@@ -3379,7 +3379,7 @@
       </p:sp>
       <p:sp>
         <p:nvSpPr>
-          <p:cNvPr id="1609103670" name="Slide Number Placeholder 8"/>
+          <p:cNvPr id="862285833" name="Slide Number Placeholder 8"/>
           <p:cNvSpPr>
             <a:spLocks noGrp="1"/>
           </p:cNvSpPr>
@@ -3430,7 +3430,7 @@
       </p:grpSpPr>
       <p:sp>
         <p:nvSpPr>
-          <p:cNvPr id="1387969436" name="Title 1"/>
+          <p:cNvPr id="885235263" name="Title 1"/>
           <p:cNvSpPr>
             <a:spLocks noGrp="1"/>
           </p:cNvSpPr>
@@ -3456,7 +3456,7 @@
       </p:sp>
       <p:sp>
         <p:nvSpPr>
-          <p:cNvPr id="1370322980" name="Date Placeholder 2"/>
+          <p:cNvPr id="1975903737" name="Date Placeholder 2"/>
           <p:cNvSpPr>
             <a:spLocks noGrp="1"/>
           </p:cNvSpPr>
@@ -3482,7 +3482,7 @@
       </p:sp>
       <p:sp>
         <p:nvSpPr>
-          <p:cNvPr id="1453657492" name="Footer Placeholder 3"/>
+          <p:cNvPr id="940320898" name="Footer Placeholder 3"/>
           <p:cNvSpPr>
             <a:spLocks noGrp="1"/>
           </p:cNvSpPr>
@@ -3504,7 +3504,7 @@
       </p:sp>
       <p:sp>
         <p:nvSpPr>
-          <p:cNvPr id="519407401" name="Slide Number Placeholder 4"/>
+          <p:cNvPr id="1277158616" name="Slide Number Placeholder 4"/>
           <p:cNvSpPr>
             <a:spLocks noGrp="1"/>
           </p:cNvSpPr>
@@ -3555,7 +3555,7 @@
       </p:grpSpPr>
       <p:sp>
         <p:nvSpPr>
-          <p:cNvPr id="1190919244" name="Date Placeholder 1"/>
+          <p:cNvPr id="2108010052" name="Date Placeholder 1"/>
           <p:cNvSpPr>
             <a:spLocks noGrp="1"/>
           </p:cNvSpPr>
@@ -3581,7 +3581,7 @@
       </p:sp>
       <p:sp>
         <p:nvSpPr>
-          <p:cNvPr id="1907721621" name="Footer Placeholder 2"/>
+          <p:cNvPr id="1263672603" name="Footer Placeholder 2"/>
           <p:cNvSpPr>
             <a:spLocks noGrp="1"/>
           </p:cNvSpPr>
@@ -3603,7 +3603,7 @@
       </p:sp>
       <p:sp>
         <p:nvSpPr>
-          <p:cNvPr id="310008091" name="Slide Number Placeholder 3"/>
+          <p:cNvPr id="528570777" name="Slide Number Placeholder 3"/>
           <p:cNvSpPr>
             <a:spLocks noGrp="1"/>
           </p:cNvSpPr>
@@ -3654,7 +3654,7 @@
       </p:grpSpPr>
       <p:sp>
         <p:nvSpPr>
-          <p:cNvPr id="1099609519" name="Title 1"/>
+          <p:cNvPr id="180930692" name="Title 1"/>
           <p:cNvSpPr>
             <a:spLocks noGrp="1"/>
           </p:cNvSpPr>
@@ -3689,7 +3689,7 @@
       </p:sp>
       <p:sp>
         <p:nvSpPr>
-          <p:cNvPr id="906785458" name="Content Placeholder 2"/>
+          <p:cNvPr id="332707166" name="Content Placeholder 2"/>
           <p:cNvSpPr>
             <a:spLocks noGrp="1"/>
           </p:cNvSpPr>
@@ -3788,7 +3788,7 @@
       </p:sp>
       <p:sp>
         <p:nvSpPr>
-          <p:cNvPr id="1807052667" name="Text Placeholder 3"/>
+          <p:cNvPr id="215945361" name="Text Placeholder 3"/>
           <p:cNvSpPr>
             <a:spLocks noGrp="1"/>
           </p:cNvSpPr>
@@ -3856,7 +3856,7 @@
       </p:sp>
       <p:sp>
         <p:nvSpPr>
-          <p:cNvPr id="1476909226" name="Date Placeholder 4"/>
+          <p:cNvPr id="282240511" name="Date Placeholder 4"/>
           <p:cNvSpPr>
             <a:spLocks noGrp="1"/>
           </p:cNvSpPr>
@@ -3882,7 +3882,7 @@
       </p:sp>
       <p:sp>
         <p:nvSpPr>
-          <p:cNvPr id="100366141" name="Footer Placeholder 5"/>
+          <p:cNvPr id="282185286" name="Footer Placeholder 5"/>
           <p:cNvSpPr>
             <a:spLocks noGrp="1"/>
           </p:cNvSpPr>
@@ -3904,7 +3904,7 @@
       </p:sp>
       <p:sp>
         <p:nvSpPr>
-          <p:cNvPr id="377432793" name="Slide Number Placeholder 6"/>
+          <p:cNvPr id="1619173677" name="Slide Number Placeholder 6"/>
           <p:cNvSpPr>
             <a:spLocks noGrp="1"/>
           </p:cNvSpPr>
@@ -3955,7 +3955,7 @@
       </p:grpSpPr>
       <p:sp>
         <p:nvSpPr>
-          <p:cNvPr id="551156194" name="Title 1"/>
+          <p:cNvPr id="705604681" name="Title 1"/>
           <p:cNvSpPr>
             <a:spLocks noGrp="1"/>
           </p:cNvSpPr>
@@ -3990,7 +3990,7 @@
       </p:sp>
       <p:sp>
         <p:nvSpPr>
-          <p:cNvPr id="138030227" name="Picture Placeholder 2"/>
+          <p:cNvPr id="829405797" name="Picture Placeholder 2"/>
           <p:cNvSpPr>
             <a:spLocks noChangeAspect="1" noGrp="1"/>
           </p:cNvSpPr>
@@ -4058,7 +4058,7 @@
       </p:sp>
       <p:sp>
         <p:nvSpPr>
-          <p:cNvPr id="914429362" name="Text Placeholder 3"/>
+          <p:cNvPr id="2096363917" name="Text Placeholder 3"/>
           <p:cNvSpPr>
             <a:spLocks noGrp="1"/>
           </p:cNvSpPr>
@@ -4126,7 +4126,7 @@
       </p:sp>
       <p:sp>
         <p:nvSpPr>
-          <p:cNvPr id="1298497268" name="Date Placeholder 4"/>
+          <p:cNvPr id="1940222554" name="Date Placeholder 4"/>
           <p:cNvSpPr>
             <a:spLocks noGrp="1"/>
           </p:cNvSpPr>
@@ -4152,7 +4152,7 @@
       </p:sp>
       <p:sp>
         <p:nvSpPr>
-          <p:cNvPr id="1861265397" name="Footer Placeholder 5"/>
+          <p:cNvPr id="992344267" name="Footer Placeholder 5"/>
           <p:cNvSpPr>
             <a:spLocks noGrp="1"/>
           </p:cNvSpPr>
@@ -4174,7 +4174,7 @@
       </p:sp>
       <p:sp>
         <p:nvSpPr>
-          <p:cNvPr id="446424511" name="Slide Number Placeholder 6"/>
+          <p:cNvPr id="1079004194" name="Slide Number Placeholder 6"/>
           <p:cNvSpPr>
             <a:spLocks noGrp="1"/>
           </p:cNvSpPr>
@@ -4233,7 +4233,7 @@
       </p:grpSpPr>
       <p:sp>
         <p:nvSpPr>
-          <p:cNvPr id="500640220" name="Title Placeholder 1"/>
+          <p:cNvPr id="494850575" name="Title Placeholder 1"/>
           <p:cNvSpPr>
             <a:spLocks noGrp="1"/>
           </p:cNvSpPr>
@@ -4269,7 +4269,7 @@
       </p:sp>
       <p:sp>
         <p:nvSpPr>
-          <p:cNvPr id="980608600" name="Text Placeholder 2"/>
+          <p:cNvPr id="158836969" name="Text Placeholder 2"/>
           <p:cNvSpPr>
             <a:spLocks noGrp="1"/>
           </p:cNvSpPr>
@@ -4345,7 +4345,7 @@
       </p:sp>
       <p:sp>
         <p:nvSpPr>
-          <p:cNvPr id="1566114418" name="Date Placeholder 3"/>
+          <p:cNvPr id="1526702293" name="Date Placeholder 3"/>
           <p:cNvSpPr>
             <a:spLocks noGrp="1"/>
           </p:cNvSpPr>
@@ -4389,7 +4389,7 @@
       </p:sp>
       <p:sp>
         <p:nvSpPr>
-          <p:cNvPr id="590930462" name="Footer Placeholder 4"/>
+          <p:cNvPr id="1727740862" name="Footer Placeholder 4"/>
           <p:cNvSpPr>
             <a:spLocks noGrp="1"/>
           </p:cNvSpPr>
@@ -4429,7 +4429,7 @@
       </p:sp>
       <p:sp>
         <p:nvSpPr>
-          <p:cNvPr id="453604928" name="Slide Number Placeholder 5"/>
+          <p:cNvPr id="2001855367" name="Slide Number Placeholder 5"/>
           <p:cNvSpPr>
             <a:spLocks noGrp="1"/>
           </p:cNvSpPr>
@@ -4789,7 +4789,7 @@
       </p:grpSpPr>
       <p:sp>
         <p:nvSpPr>
-          <p:cNvPr id="1669897345" name="Title 1"/>
+          <p:cNvPr id="1469333195" name="Title 1"/>
           <p:cNvSpPr>
             <a:spLocks noGrp="1"/>
           </p:cNvSpPr>
@@ -4833,7 +4833,7 @@
       </p:sp>
       <p:sp>
         <p:nvSpPr>
-          <p:cNvPr id="715673669" name="Subtitle 2"/>
+          <p:cNvPr id="278420358" name="Subtitle 2"/>
           <p:cNvSpPr>
             <a:spLocks noGrp="1"/>
           </p:cNvSpPr>
@@ -4925,7 +4925,7 @@
       </p:grpSpPr>
       <p:sp>
         <p:nvSpPr>
-          <p:cNvPr id="1043915878" name="Title 1"/>
+          <p:cNvPr id="323288811" name="Title 1"/>
           <p:cNvSpPr>
             <a:spLocks noGrp="1"/>
           </p:cNvSpPr>
@@ -4950,7 +4950,7 @@
                 <a:ea typeface="Ubuntu Sans"/>
                 <a:cs typeface="Ubuntu Sans"/>
               </a:rPr>
-              <a:t>Анализ на живота на батерията</a:t>
+              <a:t>Процес на разработка:</a:t>
             </a:r>
             <a:endParaRPr b="1">
               <a:solidFill>
@@ -4964,7 +4964,7 @@
       </p:sp>
       <p:sp>
         <p:nvSpPr>
-          <p:cNvPr id="713705419" name="Content Placeholder 2"/>
+          <p:cNvPr id="1981684711" name="Content Placeholder 2"/>
           <p:cNvSpPr>
             <a:spLocks noGrp="1"/>
           </p:cNvSpPr>
@@ -4972,16 +4972,23 @@
             <p:ph idx="1"/>
           </p:nvPr>
         </p:nvSpPr>
-        <p:spPr bwMode="auto"/>
-        <p:txBody>
-          <a:bodyPr/>
-          <a:lstStyle/>
-          <a:p>
-            <a:pPr>
-              <a:defRPr/>
-            </a:pPr>
-            <a:r>
-              <a:rPr lang="bg-BG">
+        <p:spPr bwMode="auto">
+          <a:xfrm flipH="0" flipV="0">
+            <a:off x="419099" y="1825624"/>
+            <a:ext cx="2734649" cy="4351338"/>
+          </a:xfrm>
+        </p:spPr>
+        <p:txBody>
+          <a:bodyPr/>
+          <a:lstStyle/>
+          <a:p>
+            <a:pPr marL="0" indent="0" algn="ctr">
+              <a:buFont typeface="Arial"/>
+              <a:buNone/>
+              <a:defRPr/>
+            </a:pPr>
+            <a:r>
+              <a:rPr lang="bg-BG" sz="2600" u="sng">
                 <a:solidFill>
                   <a:schemeClr val="bg1"/>
                 </a:solidFill>
@@ -4989,10 +4996,24 @@
                 <a:ea typeface="Ubuntu Sans"/>
                 <a:cs typeface="Ubuntu Sans"/>
               </a:rPr>
-              <a:t>Капацитет: </a:t>
-            </a:r>
-            <a:r>
-              <a:rPr lang="en-US">
+              <a:t>Сряда</a:t>
+            </a:r>
+            <a:endParaRPr sz="2600">
+              <a:solidFill>
+                <a:schemeClr val="bg1"/>
+              </a:solidFill>
+              <a:latin typeface="Ubuntu Sans"/>
+              <a:cs typeface="Ubuntu Sans"/>
+            </a:endParaRPr>
+          </a:p>
+          <a:p>
+            <a:pPr marL="0" indent="0" algn="ctr">
+              <a:buFont typeface="Arial"/>
+              <a:buNone/>
+              <a:defRPr/>
+            </a:pPr>
+            <a:r>
+              <a:rPr lang="en-US" sz="2600">
                 <a:solidFill>
                   <a:schemeClr val="bg1"/>
                 </a:solidFill>
@@ -5000,9 +5021,20 @@
                 <a:ea typeface="Ubuntu Sans"/>
                 <a:cs typeface="Ubuntu Sans"/>
               </a:rPr>
-              <a:t>600 mAh</a:t>
-            </a:r>
-            <a:endParaRPr lang="en-US">
+              <a:t>Brainstorming </a:t>
+            </a:r>
+            <a:r>
+              <a:rPr lang="bg-BG" sz="2600">
+                <a:solidFill>
+                  <a:schemeClr val="bg1"/>
+                </a:solidFill>
+                <a:latin typeface="Ubuntu Sans"/>
+                <a:ea typeface="Ubuntu Sans"/>
+                <a:cs typeface="Ubuntu Sans"/>
+              </a:rPr>
+              <a:t>за идея</a:t>
+            </a:r>
+            <a:endParaRPr sz="2600">
               <a:solidFill>
                 <a:schemeClr val="bg1"/>
               </a:solidFill>
@@ -5012,11 +5044,13 @@
             </a:endParaRPr>
           </a:p>
           <a:p>
-            <a:pPr>
-              <a:defRPr/>
-            </a:pPr>
-            <a:r>
-              <a:rPr lang="bg-BG">
+            <a:pPr marL="0" indent="0" algn="ctr">
+              <a:buFont typeface="Arial"/>
+              <a:buNone/>
+              <a:defRPr/>
+            </a:pPr>
+            <a:r>
+              <a:rPr lang="bg-BG" sz="2600">
                 <a:solidFill>
                   <a:schemeClr val="bg1"/>
                 </a:solidFill>
@@ -5024,9 +5058,31 @@
                 <a:ea typeface="Ubuntu Sans"/>
                 <a:cs typeface="Ubuntu Sans"/>
               </a:rPr>
-              <a:t>Изчисления – спрямо целодневна работа на проекта</a:t>
-            </a:r>
-            <a:endParaRPr lang="bg-BG">
+              <a:t>3</a:t>
+            </a:r>
+            <a:r>
+              <a:rPr lang="en-US" sz="2600">
+                <a:solidFill>
+                  <a:schemeClr val="bg1"/>
+                </a:solidFill>
+                <a:latin typeface="Ubuntu Sans"/>
+                <a:ea typeface="Ubuntu Sans"/>
+                <a:cs typeface="Ubuntu Sans"/>
+              </a:rPr>
+              <a:t>D </a:t>
+            </a:r>
+            <a:r>
+              <a:rPr lang="bg-BG" sz="2600">
+                <a:solidFill>
+                  <a:schemeClr val="bg1"/>
+                </a:solidFill>
+                <a:latin typeface="Ubuntu Sans"/>
+                <a:ea typeface="Ubuntu Sans"/>
+                <a:cs typeface="Ubuntu Sans"/>
+              </a:rPr>
+              <a:t>модел и принтиране </a:t>
+            </a:r>
+            <a:endParaRPr sz="2600">
               <a:solidFill>
                 <a:schemeClr val="bg1"/>
               </a:solidFill>
@@ -5036,11 +5092,13 @@
             </a:endParaRPr>
           </a:p>
           <a:p>
-            <a:pPr>
-              <a:defRPr/>
-            </a:pPr>
-            <a:r>
-              <a:rPr lang="bg-BG">
+            <a:pPr marL="0" indent="0" algn="ctr">
+              <a:buFont typeface="Arial"/>
+              <a:buNone/>
+              <a:defRPr/>
+            </a:pPr>
+            <a:r>
+              <a:rPr lang="bg-BG" sz="2600">
                 <a:solidFill>
                   <a:schemeClr val="bg1"/>
                 </a:solidFill>
@@ -5048,111 +5106,7 @@
                 <a:ea typeface="Ubuntu Sans"/>
                 <a:cs typeface="Ubuntu Sans"/>
               </a:rPr>
-              <a:t>Консумация на ток:</a:t>
-            </a:r>
-            <a:endParaRPr lang="bg-BG">
-              <a:solidFill>
-                <a:schemeClr val="bg1"/>
-              </a:solidFill>
-              <a:latin typeface="Ubuntu Sans"/>
-              <a:ea typeface="Ubuntu Sans"/>
-              <a:cs typeface="Ubuntu Sans"/>
-            </a:endParaRPr>
-          </a:p>
-          <a:p>
-            <a:pPr marL="457200" lvl="1" indent="0">
-              <a:buFont typeface="Arial"/>
-              <a:buNone/>
-              <a:defRPr/>
-            </a:pPr>
-            <a:r>
-              <a:rPr sz="2800" b="0" i="0" u="none">
-                <a:solidFill>
-                  <a:schemeClr val="bg1"/>
-                </a:solidFill>
-                <a:latin typeface="Ubuntu Sans"/>
-                <a:ea typeface="Ubuntu Sans"/>
-                <a:cs typeface="Ubuntu Sans"/>
-              </a:rPr>
-              <a:t>Arduino Uno R4: 140 mA </a:t>
-            </a:r>
-            <a:endParaRPr sz="2800" b="0" i="0" u="none">
-              <a:solidFill>
-                <a:schemeClr val="bg1"/>
-              </a:solidFill>
-              <a:latin typeface="Ubuntu Sans"/>
-              <a:ea typeface="Ubuntu Sans"/>
-              <a:cs typeface="Ubuntu Sans"/>
-            </a:endParaRPr>
-          </a:p>
-          <a:p>
-            <a:pPr marL="457200" lvl="1" indent="0">
-              <a:buFont typeface="Arial"/>
-              <a:buNone/>
-              <a:defRPr/>
-            </a:pPr>
-            <a:r>
-              <a:rPr sz="2800" b="0" i="0" u="none">
-                <a:solidFill>
-                  <a:schemeClr val="bg1"/>
-                </a:solidFill>
-                <a:latin typeface="Ubuntu Sans"/>
-                <a:ea typeface="Ubuntu Sans"/>
-                <a:cs typeface="Ubuntu Sans"/>
-              </a:rPr>
-              <a:t>2xLEDs и зумери(Средно работят по 1 час на ден): 80 mA</a:t>
-            </a:r>
-            <a:endParaRPr sz="2800" b="0" i="0" u="none">
-              <a:solidFill>
-                <a:schemeClr val="bg1"/>
-              </a:solidFill>
-              <a:latin typeface="Ubuntu Sans"/>
-              <a:ea typeface="Ubuntu Sans"/>
-              <a:cs typeface="Ubuntu Sans"/>
-            </a:endParaRPr>
-          </a:p>
-          <a:p>
-            <a:pPr marL="457200" lvl="1" indent="0">
-              <a:buFont typeface="Arial"/>
-              <a:buNone/>
-              <a:defRPr/>
-            </a:pPr>
-            <a:r>
-              <a:rPr sz="2800" b="0" i="0" u="none">
-                <a:solidFill>
-                  <a:schemeClr val="bg1"/>
-                </a:solidFill>
-                <a:latin typeface="Ubuntu Sans"/>
-                <a:ea typeface="Ubuntu Sans"/>
-                <a:cs typeface="Ubuntu Sans"/>
-              </a:rPr>
-              <a:t>IR Sensor: 25 mA </a:t>
-            </a:r>
-            <a:endParaRPr sz="2800" b="0" i="0" u="none">
-              <a:solidFill>
-                <a:schemeClr val="bg1"/>
-              </a:solidFill>
-              <a:latin typeface="Ubuntu Sans"/>
-              <a:ea typeface="Ubuntu Sans"/>
-              <a:cs typeface="Ubuntu Sans"/>
-            </a:endParaRPr>
-          </a:p>
-          <a:p>
-            <a:pPr marL="457200" lvl="1" indent="0">
-              <a:buFont typeface="Arial"/>
-              <a:buNone/>
-              <a:defRPr/>
-            </a:pPr>
-            <a:r>
-              <a:rPr sz="2800" b="0" i="0" u="none">
-                <a:solidFill>
-                  <a:schemeClr val="bg1"/>
-                </a:solidFill>
-                <a:latin typeface="Ubuntu Sans"/>
-                <a:ea typeface="Ubuntu Sans"/>
-                <a:cs typeface="Ubuntu Sans"/>
-              </a:rPr>
-              <a:t>I        =140+ (80 * 1/24)+25=168.33 mA</a:t>
+              <a:t>Създаване на няколко скици на сайта</a:t>
             </a:r>
             <a:endParaRPr>
               <a:solidFill>
@@ -5166,30 +5120,194 @@
       </p:sp>
       <p:sp>
         <p:nvSpPr>
-          <p:cNvPr id="1640567046" name=""/>
-          <p:cNvSpPr txBox="1"/>
+          <p:cNvPr id="1571454032" name="Content Placeholder 2"/>
+          <p:cNvSpPr>
+            <a:spLocks noGrp="1"/>
+          </p:cNvSpPr>
           <p:nvPr/>
         </p:nvSpPr>
         <p:spPr bwMode="auto">
-          <a:xfrm rot="0" flipH="0" flipV="0">
-            <a:off x="1418062" y="4777379"/>
-            <a:ext cx="1988703" cy="366120"/>
+          <a:xfrm flipH="0" flipV="0">
+            <a:off x="3361350" y="1825624"/>
+            <a:ext cx="2734648" cy="4351338"/>
           </a:xfrm>
-          <a:prstGeom prst="rect">
-            <a:avLst/>
-          </a:prstGeom>
-          <a:noFill/>
         </p:spPr>
         <p:txBody>
-          <a:bodyPr vertOverflow="overflow" horzOverflow="overflow" vert="horz" wrap="square" lIns="91440" tIns="45720" rIns="91440" bIns="45720" numCol="1" spcCol="0" rtlCol="0" fromWordArt="0" anchor="t" anchorCtr="0" forceAA="0" upright="0" compatLnSpc="0">
-            <a:spAutoFit/>
+          <a:bodyPr vert="horz" lIns="91440" tIns="45720" rIns="91440" bIns="45720" rtlCol="0">
+            <a:normAutofit/>
           </a:bodyPr>
-          <a:p>
-            <a:pPr>
-              <a:defRPr/>
-            </a:pPr>
-            <a:r>
-              <a:rPr lang="en-US" sz="1800" b="0" i="0" u="none" strike="noStrike" cap="none" spc="0">
+          <a:lstStyle>
+            <a:lvl1pPr marL="228600" indent="-228600" algn="l" defTabSz="914400" rtl="0">
+              <a:lnSpc>
+                <a:spcPct val="90000"/>
+              </a:lnSpc>
+              <a:spcBef>
+                <a:spcPts val="999"/>
+              </a:spcBef>
+              <a:buFont typeface="Arial"/>
+              <a:buChar char="•"/>
+              <a:defRPr sz="2800">
+                <a:solidFill>
+                  <a:schemeClr val="tx1"/>
+                </a:solidFill>
+                <a:latin typeface="+mn-lt"/>
+                <a:ea typeface="+mn-ea"/>
+                <a:cs typeface="+mn-cs"/>
+              </a:defRPr>
+            </a:lvl1pPr>
+            <a:lvl2pPr marL="685800" indent="-228600" algn="l" defTabSz="914400" rtl="0">
+              <a:lnSpc>
+                <a:spcPct val="90000"/>
+              </a:lnSpc>
+              <a:spcBef>
+                <a:spcPts val="499"/>
+              </a:spcBef>
+              <a:buFont typeface="Arial"/>
+              <a:buChar char="•"/>
+              <a:defRPr sz="2400">
+                <a:solidFill>
+                  <a:schemeClr val="tx1"/>
+                </a:solidFill>
+                <a:latin typeface="+mn-lt"/>
+                <a:ea typeface="+mn-ea"/>
+                <a:cs typeface="+mn-cs"/>
+              </a:defRPr>
+            </a:lvl2pPr>
+            <a:lvl3pPr marL="1143000" indent="-228600" algn="l" defTabSz="914400" rtl="0">
+              <a:lnSpc>
+                <a:spcPct val="90000"/>
+              </a:lnSpc>
+              <a:spcBef>
+                <a:spcPts val="499"/>
+              </a:spcBef>
+              <a:buFont typeface="Arial"/>
+              <a:buChar char="•"/>
+              <a:defRPr sz="2000">
+                <a:solidFill>
+                  <a:schemeClr val="tx1"/>
+                </a:solidFill>
+                <a:latin typeface="+mn-lt"/>
+                <a:ea typeface="+mn-ea"/>
+                <a:cs typeface="+mn-cs"/>
+              </a:defRPr>
+            </a:lvl3pPr>
+            <a:lvl4pPr marL="1600200" indent="-228600" algn="l" defTabSz="914400" rtl="0">
+              <a:lnSpc>
+                <a:spcPct val="90000"/>
+              </a:lnSpc>
+              <a:spcBef>
+                <a:spcPts val="499"/>
+              </a:spcBef>
+              <a:buFont typeface="Arial"/>
+              <a:buChar char="•"/>
+              <a:defRPr sz="1800">
+                <a:solidFill>
+                  <a:schemeClr val="tx1"/>
+                </a:solidFill>
+                <a:latin typeface="+mn-lt"/>
+                <a:ea typeface="+mn-ea"/>
+                <a:cs typeface="+mn-cs"/>
+              </a:defRPr>
+            </a:lvl4pPr>
+            <a:lvl5pPr marL="2057400" indent="-228600" algn="l" defTabSz="914400" rtl="0">
+              <a:lnSpc>
+                <a:spcPct val="90000"/>
+              </a:lnSpc>
+              <a:spcBef>
+                <a:spcPts val="499"/>
+              </a:spcBef>
+              <a:buFont typeface="Arial"/>
+              <a:buChar char="•"/>
+              <a:defRPr sz="1800">
+                <a:solidFill>
+                  <a:schemeClr val="tx1"/>
+                </a:solidFill>
+                <a:latin typeface="+mn-lt"/>
+                <a:ea typeface="+mn-ea"/>
+                <a:cs typeface="+mn-cs"/>
+              </a:defRPr>
+            </a:lvl5pPr>
+            <a:lvl6pPr marL="2514599" indent="-228600" algn="l" defTabSz="914400" rtl="0">
+              <a:lnSpc>
+                <a:spcPct val="90000"/>
+              </a:lnSpc>
+              <a:spcBef>
+                <a:spcPts val="499"/>
+              </a:spcBef>
+              <a:buFont typeface="Arial"/>
+              <a:buChar char="•"/>
+              <a:defRPr sz="1800">
+                <a:solidFill>
+                  <a:schemeClr val="tx1"/>
+                </a:solidFill>
+                <a:latin typeface="+mn-lt"/>
+                <a:ea typeface="+mn-ea"/>
+                <a:cs typeface="+mn-cs"/>
+              </a:defRPr>
+            </a:lvl6pPr>
+            <a:lvl7pPr marL="2971800" indent="-228600" algn="l" defTabSz="914400" rtl="0">
+              <a:lnSpc>
+                <a:spcPct val="90000"/>
+              </a:lnSpc>
+              <a:spcBef>
+                <a:spcPts val="499"/>
+              </a:spcBef>
+              <a:buFont typeface="Arial"/>
+              <a:buChar char="•"/>
+              <a:defRPr sz="1800">
+                <a:solidFill>
+                  <a:schemeClr val="tx1"/>
+                </a:solidFill>
+                <a:latin typeface="+mn-lt"/>
+                <a:ea typeface="+mn-ea"/>
+                <a:cs typeface="+mn-cs"/>
+              </a:defRPr>
+            </a:lvl7pPr>
+            <a:lvl8pPr marL="3429000" indent="-228600" algn="l" defTabSz="914400" rtl="0">
+              <a:lnSpc>
+                <a:spcPct val="90000"/>
+              </a:lnSpc>
+              <a:spcBef>
+                <a:spcPts val="499"/>
+              </a:spcBef>
+              <a:buFont typeface="Arial"/>
+              <a:buChar char="•"/>
+              <a:defRPr sz="1800">
+                <a:solidFill>
+                  <a:schemeClr val="tx1"/>
+                </a:solidFill>
+                <a:latin typeface="+mn-lt"/>
+                <a:ea typeface="+mn-ea"/>
+                <a:cs typeface="+mn-cs"/>
+              </a:defRPr>
+            </a:lvl8pPr>
+            <a:lvl9pPr marL="3886200" indent="-228600" algn="l" defTabSz="914400" rtl="0">
+              <a:lnSpc>
+                <a:spcPct val="90000"/>
+              </a:lnSpc>
+              <a:spcBef>
+                <a:spcPts val="499"/>
+              </a:spcBef>
+              <a:buFont typeface="Arial"/>
+              <a:buChar char="•"/>
+              <a:defRPr sz="1800">
+                <a:solidFill>
+                  <a:schemeClr val="tx1"/>
+                </a:solidFill>
+                <a:latin typeface="+mn-lt"/>
+                <a:ea typeface="+mn-ea"/>
+                <a:cs typeface="+mn-cs"/>
+              </a:defRPr>
+            </a:lvl9pPr>
+          </a:lstStyle>
+          <a:p>
+            <a:pPr marL="0" indent="0" algn="ctr">
+              <a:buFont typeface="Arial"/>
+              <a:buNone/>
+              <a:defRPr/>
+            </a:pPr>
+            <a:r>
+              <a:rPr lang="bg-BG" sz="2600" u="sng">
                 <a:solidFill>
                   <a:schemeClr val="bg1"/>
                 </a:solidFill>
@@ -5197,9 +5315,319 @@
                 <a:ea typeface="Ubuntu Sans"/>
                 <a:cs typeface="Ubuntu Sans"/>
               </a:rPr>
-              <a:t>total</a:t>
-            </a:r>
-            <a:endParaRPr/>
+              <a:t>Четвъртък</a:t>
+            </a:r>
+            <a:endParaRPr sz="2600">
+              <a:solidFill>
+                <a:schemeClr val="bg1"/>
+              </a:solidFill>
+              <a:latin typeface="Ubuntu Sans"/>
+              <a:cs typeface="Ubuntu Sans"/>
+            </a:endParaRPr>
+          </a:p>
+          <a:p>
+            <a:pPr marL="0" indent="0" algn="ctr">
+              <a:buFont typeface="Arial"/>
+              <a:buNone/>
+              <a:defRPr/>
+            </a:pPr>
+            <a:r>
+              <a:rPr lang="bg-BG">
+                <a:solidFill>
+                  <a:schemeClr val="bg1"/>
+                </a:solidFill>
+                <a:latin typeface="Ubuntu Sans"/>
+                <a:cs typeface="Ubuntu Sans"/>
+              </a:rPr>
+              <a:t>Създаване на сайта и правене на основния код</a:t>
+            </a:r>
+            <a:endParaRPr lang="bg-BG">
+              <a:solidFill>
+                <a:schemeClr val="bg1"/>
+              </a:solidFill>
+              <a:latin typeface="Ubuntu Sans"/>
+              <a:cs typeface="Ubuntu Sans"/>
+            </a:endParaRPr>
+          </a:p>
+          <a:p>
+            <a:pPr marL="0" indent="0" algn="ctr">
+              <a:buFont typeface="Arial"/>
+              <a:buNone/>
+              <a:defRPr/>
+            </a:pPr>
+            <a:r>
+              <a:rPr lang="bg-BG">
+                <a:solidFill>
+                  <a:schemeClr val="bg1"/>
+                </a:solidFill>
+                <a:latin typeface="Ubuntu Sans"/>
+                <a:cs typeface="Ubuntu Sans"/>
+              </a:rPr>
+              <a:t>Рисуване на дизайнове и лого</a:t>
+            </a:r>
+            <a:endParaRPr>
+              <a:solidFill>
+                <a:schemeClr val="bg1"/>
+              </a:solidFill>
+              <a:latin typeface="Ubuntu Sans"/>
+              <a:cs typeface="Ubuntu Sans"/>
+            </a:endParaRPr>
+          </a:p>
+        </p:txBody>
+      </p:sp>
+      <p:sp>
+        <p:nvSpPr>
+          <p:cNvPr id="706751710" name="Content Placeholder 2"/>
+          <p:cNvSpPr>
+            <a:spLocks noGrp="1"/>
+          </p:cNvSpPr>
+          <p:nvPr/>
+        </p:nvSpPr>
+        <p:spPr bwMode="auto">
+          <a:xfrm flipH="0" flipV="0">
+            <a:off x="6534149" y="1825624"/>
+            <a:ext cx="2734648" cy="4351338"/>
+          </a:xfrm>
+        </p:spPr>
+        <p:txBody>
+          <a:bodyPr vert="horz" lIns="91440" tIns="45720" rIns="91440" bIns="45720" rtlCol="0">
+            <a:normAutofit/>
+          </a:bodyPr>
+          <a:lstStyle>
+            <a:lvl1pPr marL="228600" indent="-228600" algn="l" defTabSz="914400" rtl="0">
+              <a:lnSpc>
+                <a:spcPct val="90000"/>
+              </a:lnSpc>
+              <a:spcBef>
+                <a:spcPts val="999"/>
+              </a:spcBef>
+              <a:buFont typeface="Arial"/>
+              <a:buChar char="•"/>
+              <a:defRPr sz="2800">
+                <a:solidFill>
+                  <a:schemeClr val="tx1"/>
+                </a:solidFill>
+                <a:latin typeface="+mn-lt"/>
+                <a:ea typeface="+mn-ea"/>
+                <a:cs typeface="+mn-cs"/>
+              </a:defRPr>
+            </a:lvl1pPr>
+            <a:lvl2pPr marL="685800" indent="-228600" algn="l" defTabSz="914400" rtl="0">
+              <a:lnSpc>
+                <a:spcPct val="90000"/>
+              </a:lnSpc>
+              <a:spcBef>
+                <a:spcPts val="499"/>
+              </a:spcBef>
+              <a:buFont typeface="Arial"/>
+              <a:buChar char="•"/>
+              <a:defRPr sz="2400">
+                <a:solidFill>
+                  <a:schemeClr val="tx1"/>
+                </a:solidFill>
+                <a:latin typeface="+mn-lt"/>
+                <a:ea typeface="+mn-ea"/>
+                <a:cs typeface="+mn-cs"/>
+              </a:defRPr>
+            </a:lvl2pPr>
+            <a:lvl3pPr marL="1143000" indent="-228600" algn="l" defTabSz="914400" rtl="0">
+              <a:lnSpc>
+                <a:spcPct val="90000"/>
+              </a:lnSpc>
+              <a:spcBef>
+                <a:spcPts val="499"/>
+              </a:spcBef>
+              <a:buFont typeface="Arial"/>
+              <a:buChar char="•"/>
+              <a:defRPr sz="2000">
+                <a:solidFill>
+                  <a:schemeClr val="tx1"/>
+                </a:solidFill>
+                <a:latin typeface="+mn-lt"/>
+                <a:ea typeface="+mn-ea"/>
+                <a:cs typeface="+mn-cs"/>
+              </a:defRPr>
+            </a:lvl3pPr>
+            <a:lvl4pPr marL="1600200" indent="-228600" algn="l" defTabSz="914400" rtl="0">
+              <a:lnSpc>
+                <a:spcPct val="90000"/>
+              </a:lnSpc>
+              <a:spcBef>
+                <a:spcPts val="499"/>
+              </a:spcBef>
+              <a:buFont typeface="Arial"/>
+              <a:buChar char="•"/>
+              <a:defRPr sz="1800">
+                <a:solidFill>
+                  <a:schemeClr val="tx1"/>
+                </a:solidFill>
+                <a:latin typeface="+mn-lt"/>
+                <a:ea typeface="+mn-ea"/>
+                <a:cs typeface="+mn-cs"/>
+              </a:defRPr>
+            </a:lvl4pPr>
+            <a:lvl5pPr marL="2057400" indent="-228600" algn="l" defTabSz="914400" rtl="0">
+              <a:lnSpc>
+                <a:spcPct val="90000"/>
+              </a:lnSpc>
+              <a:spcBef>
+                <a:spcPts val="499"/>
+              </a:spcBef>
+              <a:buFont typeface="Arial"/>
+              <a:buChar char="•"/>
+              <a:defRPr sz="1800">
+                <a:solidFill>
+                  <a:schemeClr val="tx1"/>
+                </a:solidFill>
+                <a:latin typeface="+mn-lt"/>
+                <a:ea typeface="+mn-ea"/>
+                <a:cs typeface="+mn-cs"/>
+              </a:defRPr>
+            </a:lvl5pPr>
+            <a:lvl6pPr marL="2514599" indent="-228600" algn="l" defTabSz="914400" rtl="0">
+              <a:lnSpc>
+                <a:spcPct val="90000"/>
+              </a:lnSpc>
+              <a:spcBef>
+                <a:spcPts val="499"/>
+              </a:spcBef>
+              <a:buFont typeface="Arial"/>
+              <a:buChar char="•"/>
+              <a:defRPr sz="1800">
+                <a:solidFill>
+                  <a:schemeClr val="tx1"/>
+                </a:solidFill>
+                <a:latin typeface="+mn-lt"/>
+                <a:ea typeface="+mn-ea"/>
+                <a:cs typeface="+mn-cs"/>
+              </a:defRPr>
+            </a:lvl6pPr>
+            <a:lvl7pPr marL="2971800" indent="-228600" algn="l" defTabSz="914400" rtl="0">
+              <a:lnSpc>
+                <a:spcPct val="90000"/>
+              </a:lnSpc>
+              <a:spcBef>
+                <a:spcPts val="499"/>
+              </a:spcBef>
+              <a:buFont typeface="Arial"/>
+              <a:buChar char="•"/>
+              <a:defRPr sz="1800">
+                <a:solidFill>
+                  <a:schemeClr val="tx1"/>
+                </a:solidFill>
+                <a:latin typeface="+mn-lt"/>
+                <a:ea typeface="+mn-ea"/>
+                <a:cs typeface="+mn-cs"/>
+              </a:defRPr>
+            </a:lvl7pPr>
+            <a:lvl8pPr marL="3429000" indent="-228600" algn="l" defTabSz="914400" rtl="0">
+              <a:lnSpc>
+                <a:spcPct val="90000"/>
+              </a:lnSpc>
+              <a:spcBef>
+                <a:spcPts val="499"/>
+              </a:spcBef>
+              <a:buFont typeface="Arial"/>
+              <a:buChar char="•"/>
+              <a:defRPr sz="1800">
+                <a:solidFill>
+                  <a:schemeClr val="tx1"/>
+                </a:solidFill>
+                <a:latin typeface="+mn-lt"/>
+                <a:ea typeface="+mn-ea"/>
+                <a:cs typeface="+mn-cs"/>
+              </a:defRPr>
+            </a:lvl8pPr>
+            <a:lvl9pPr marL="3886200" indent="-228600" algn="l" defTabSz="914400" rtl="0">
+              <a:lnSpc>
+                <a:spcPct val="90000"/>
+              </a:lnSpc>
+              <a:spcBef>
+                <a:spcPts val="499"/>
+              </a:spcBef>
+              <a:buFont typeface="Arial"/>
+              <a:buChar char="•"/>
+              <a:defRPr sz="1800">
+                <a:solidFill>
+                  <a:schemeClr val="tx1"/>
+                </a:solidFill>
+                <a:latin typeface="+mn-lt"/>
+                <a:ea typeface="+mn-ea"/>
+                <a:cs typeface="+mn-cs"/>
+              </a:defRPr>
+            </a:lvl9pPr>
+          </a:lstStyle>
+          <a:p>
+            <a:pPr marL="0" indent="0" algn="ctr">
+              <a:buFont typeface="Arial"/>
+              <a:buNone/>
+              <a:defRPr/>
+            </a:pPr>
+            <a:r>
+              <a:rPr lang="bg-BG" u="sng">
+                <a:solidFill>
+                  <a:schemeClr val="bg1"/>
+                </a:solidFill>
+                <a:latin typeface="Ubuntu Sans"/>
+                <a:cs typeface="Ubuntu Sans"/>
+              </a:rPr>
+              <a:t>Петък</a:t>
+            </a:r>
+            <a:endParaRPr lang="bg-BG">
+              <a:solidFill>
+                <a:schemeClr val="bg1"/>
+              </a:solidFill>
+              <a:latin typeface="Ubuntu Sans"/>
+              <a:cs typeface="Ubuntu Sans"/>
+            </a:endParaRPr>
+          </a:p>
+          <a:p>
+            <a:pPr marL="0" indent="0" algn="ctr">
+              <a:buFont typeface="Arial"/>
+              <a:buNone/>
+              <a:defRPr/>
+            </a:pPr>
+            <a:r>
+              <a:rPr lang="bg-BG">
+                <a:solidFill>
+                  <a:schemeClr val="bg1"/>
+                </a:solidFill>
+                <a:latin typeface="Ubuntu Sans"/>
+                <a:cs typeface="Ubuntu Sans"/>
+              </a:rPr>
+              <a:t>Довършване на проекта</a:t>
+            </a:r>
+            <a:endParaRPr lang="bg-BG">
+              <a:solidFill>
+                <a:schemeClr val="bg1"/>
+              </a:solidFill>
+              <a:latin typeface="Ubuntu Sans"/>
+              <a:cs typeface="Ubuntu Sans"/>
+            </a:endParaRPr>
+          </a:p>
+          <a:p>
+            <a:pPr marL="0" indent="0" algn="ctr">
+              <a:buFont typeface="Arial"/>
+              <a:buNone/>
+              <a:defRPr/>
+            </a:pPr>
+            <a:r>
+              <a:rPr lang="bg-BG">
+                <a:solidFill>
+                  <a:schemeClr val="bg1"/>
+                </a:solidFill>
+                <a:latin typeface="Ubuntu Sans"/>
+                <a:cs typeface="Ubuntu Sans"/>
+              </a:rPr>
+              <a:t>Презентация</a:t>
+            </a:r>
+            <a:endParaRPr>
+              <a:solidFill>
+                <a:schemeClr val="bg1"/>
+              </a:solidFill>
+              <a:latin typeface="Ubuntu Sans"/>
+              <a:cs typeface="Ubuntu Sans"/>
+            </a:endParaRPr>
           </a:p>
         </p:txBody>
       </p:sp>
@@ -5238,7 +5666,7 @@
       </p:grpSpPr>
       <p:sp>
         <p:nvSpPr>
-          <p:cNvPr id="1348875459" name="Title 1"/>
+          <p:cNvPr id="1627065319" name="Title 1"/>
           <p:cNvSpPr>
             <a:spLocks noGrp="1"/>
           </p:cNvSpPr>
@@ -5255,7 +5683,7 @@
               <a:defRPr/>
             </a:pPr>
             <a:r>
-              <a:rPr lang="bg-BG" b="1">
+              <a:rPr b="1">
                 <a:solidFill>
                   <a:schemeClr val="bg1"/>
                 </a:solidFill>
@@ -5263,7 +5691,18 @@
                 <a:ea typeface="Ubuntu Sans"/>
                 <a:cs typeface="Ubuntu Sans"/>
               </a:rPr>
-              <a:t>Процес на разработка:</a:t>
+              <a:t>Medicine Man </a:t>
+            </a:r>
+            <a:r>
+              <a:rPr lang="bg-BG" b="1">
+                <a:solidFill>
+                  <a:schemeClr val="bg1"/>
+                </a:solidFill>
+                <a:latin typeface="Ubuntu Sans"/>
+                <a:ea typeface="Ubuntu Sans"/>
+                <a:cs typeface="Ubuntu Sans"/>
+              </a:rPr>
+              <a:t>в бъдещето:</a:t>
             </a:r>
             <a:endParaRPr b="1">
               <a:solidFill>
@@ -5277,645 +5716,152 @@
       </p:sp>
       <p:sp>
         <p:nvSpPr>
-          <p:cNvPr id="204911831" name="Content Placeholder 2"/>
-          <p:cNvSpPr>
-            <a:spLocks noGrp="1"/>
-          </p:cNvSpPr>
-          <p:nvPr>
-            <p:ph idx="1"/>
-          </p:nvPr>
+          <p:cNvPr id="2069464295" name=""/>
+          <p:cNvSpPr txBox="1"/>
+          <p:nvPr/>
         </p:nvSpPr>
         <p:spPr bwMode="auto">
-          <a:xfrm flipH="0" flipV="0">
-            <a:off x="419099" y="1825624"/>
-            <a:ext cx="2734649" cy="4351338"/>
+          <a:xfrm rot="0" flipH="0" flipV="0">
+            <a:off x="905849" y="1895474"/>
+            <a:ext cx="10439399" cy="366119"/>
           </a:xfrm>
+          <a:prstGeom prst="rect">
+            <a:avLst/>
+          </a:prstGeom>
+          <a:noFill/>
         </p:spPr>
         <p:txBody>
-          <a:bodyPr/>
-          <a:lstStyle/>
-          <a:p>
-            <a:pPr marL="0" indent="0" algn="ctr">
+          <a:bodyPr vertOverflow="overflow" horzOverflow="overflow" vert="horz" wrap="square" lIns="91440" tIns="45720" rIns="91440" bIns="45720" numCol="1" spcCol="0" rtlCol="0" fromWordArt="0" anchor="t" anchorCtr="0" forceAA="0" upright="0" compatLnSpc="0">
+            <a:spAutoFit/>
+          </a:bodyPr>
+          <a:p>
+            <a:pPr>
+              <a:defRPr/>
+            </a:pPr>
+            <a:endParaRPr/>
+          </a:p>
+        </p:txBody>
+      </p:sp>
+      <p:sp>
+        <p:nvSpPr>
+          <p:cNvPr id="709497198" name=""/>
+          <p:cNvSpPr txBox="1"/>
+          <p:nvPr/>
+        </p:nvSpPr>
+        <p:spPr bwMode="auto">
+          <a:xfrm rot="0" flipH="0" flipV="0">
+            <a:off x="905848" y="1615259"/>
+            <a:ext cx="7454518" cy="4480920"/>
+          </a:xfrm>
+          <a:prstGeom prst="rect">
+            <a:avLst/>
+          </a:prstGeom>
+          <a:noFill/>
+        </p:spPr>
+        <p:txBody>
+          <a:bodyPr vertOverflow="overflow" horzOverflow="overflow" vert="horz" wrap="square" lIns="91440" tIns="45720" rIns="91440" bIns="45720" numCol="1" spcCol="0" rtlCol="0" fromWordArt="0" anchor="t" anchorCtr="0" forceAA="0" upright="0" compatLnSpc="0">
+            <a:spAutoFit/>
+          </a:bodyPr>
+          <a:p>
+            <a:pPr marL="283879" indent="-283879">
               <a:buFont typeface="Arial"/>
-              <a:buNone/>
-              <a:defRPr/>
-            </a:pPr>
-            <a:r>
-              <a:rPr lang="bg-BG" sz="2600" u="sng">
+              <a:buChar char="–"/>
+              <a:defRPr/>
+            </a:pPr>
+            <a:r>
+              <a:rPr lang="bg-BG" sz="2800">
                 <a:solidFill>
                   <a:schemeClr val="bg1"/>
                 </a:solidFill>
-                <a:latin typeface="Ubuntu Sans"/>
-                <a:ea typeface="Ubuntu Sans"/>
-                <a:cs typeface="Ubuntu Sans"/>
               </a:rPr>
-              <a:t>Сряда</a:t>
-            </a:r>
-            <a:endParaRPr sz="2600">
+              <a:t>да избереш модел на кутията (и колко раздела има в нея)</a:t>
+            </a:r>
+            <a:endParaRPr sz="2800">
               <a:solidFill>
                 <a:schemeClr val="bg1"/>
               </a:solidFill>
-              <a:latin typeface="Ubuntu Sans"/>
-              <a:cs typeface="Ubuntu Sans"/>
             </a:endParaRPr>
           </a:p>
           <a:p>
-            <a:pPr marL="0" indent="0" algn="ctr">
+            <a:pPr marL="283879" indent="-283879">
               <a:buFont typeface="Arial"/>
-              <a:buNone/>
-              <a:defRPr/>
-            </a:pPr>
-            <a:r>
-              <a:rPr lang="en-US" sz="2600">
+              <a:buChar char="–"/>
+              <a:defRPr/>
+            </a:pPr>
+            <a:r>
+              <a:rPr lang="bg-BG" sz="2800">
                 <a:solidFill>
                   <a:schemeClr val="bg1"/>
                 </a:solidFill>
-                <a:latin typeface="Ubuntu Sans"/>
-                <a:ea typeface="Ubuntu Sans"/>
-                <a:cs typeface="Ubuntu Sans"/>
               </a:rPr>
-              <a:t>Brainstorming </a:t>
-            </a:r>
-            <a:r>
-              <a:rPr lang="bg-BG" sz="2600">
-                <a:solidFill>
-                  <a:schemeClr val="bg1"/>
-                </a:solidFill>
-                <a:latin typeface="Ubuntu Sans"/>
-                <a:ea typeface="Ubuntu Sans"/>
-                <a:cs typeface="Ubuntu Sans"/>
-              </a:rPr>
-              <a:t>за идея</a:t>
-            </a:r>
-            <a:endParaRPr sz="2600">
+              <a:t>при 5 минути без изключване на алармата се звъни на извънреден контакт</a:t>
+            </a:r>
+            <a:endParaRPr sz="2800">
               <a:solidFill>
                 <a:schemeClr val="bg1"/>
               </a:solidFill>
-              <a:latin typeface="Ubuntu Sans"/>
-              <a:ea typeface="Ubuntu Sans"/>
-              <a:cs typeface="Ubuntu Sans"/>
             </a:endParaRPr>
           </a:p>
           <a:p>
-            <a:pPr marL="0" indent="0" algn="ctr">
+            <a:pPr marL="283879" indent="-283879">
               <a:buFont typeface="Arial"/>
-              <a:buNone/>
-              <a:defRPr/>
-            </a:pPr>
-            <a:r>
-              <a:rPr lang="bg-BG" sz="2600">
+              <a:buChar char="–"/>
+              <a:defRPr/>
+            </a:pPr>
+            <a:r>
+              <a:rPr lang="bg-BG" sz="2800">
                 <a:solidFill>
                   <a:schemeClr val="bg1"/>
                 </a:solidFill>
-                <a:latin typeface="Ubuntu Sans"/>
-                <a:ea typeface="Ubuntu Sans"/>
-                <a:cs typeface="Ubuntu Sans"/>
               </a:rPr>
-              <a:t>3</a:t>
-            </a:r>
-            <a:r>
-              <a:rPr lang="en-US" sz="2600">
-                <a:solidFill>
-                  <a:schemeClr val="bg1"/>
-                </a:solidFill>
-                <a:latin typeface="Ubuntu Sans"/>
-                <a:ea typeface="Ubuntu Sans"/>
-                <a:cs typeface="Ubuntu Sans"/>
-              </a:rPr>
-              <a:t>D </a:t>
-            </a:r>
-            <a:r>
-              <a:rPr lang="bg-BG" sz="2600">
-                <a:solidFill>
-                  <a:schemeClr val="bg1"/>
-                </a:solidFill>
-                <a:latin typeface="Ubuntu Sans"/>
-                <a:ea typeface="Ubuntu Sans"/>
-                <a:cs typeface="Ubuntu Sans"/>
-              </a:rPr>
-              <a:t>модел и принтиране </a:t>
-            </a:r>
-            <a:endParaRPr sz="2600">
+              <a:t>да може да се избира всякаква песен за алармата </a:t>
+            </a:r>
+            <a:endParaRPr lang="bg-BG" sz="2800">
               <a:solidFill>
                 <a:schemeClr val="bg1"/>
               </a:solidFill>
-              <a:latin typeface="Ubuntu Sans"/>
-              <a:ea typeface="Ubuntu Sans"/>
-              <a:cs typeface="Ubuntu Sans"/>
             </a:endParaRPr>
           </a:p>
           <a:p>
-            <a:pPr marL="0" indent="0" algn="ctr">
+            <a:pPr marL="283878" indent="-283878">
               <a:buFont typeface="Arial"/>
-              <a:buNone/>
-              <a:defRPr/>
-            </a:pPr>
-            <a:r>
-              <a:rPr lang="bg-BG" sz="2600">
+              <a:buChar char="–"/>
+              <a:defRPr/>
+            </a:pPr>
+            <a:r>
+              <a:rPr lang="bg-BG" sz="2800">
                 <a:solidFill>
                   <a:schemeClr val="bg1"/>
                 </a:solidFill>
-                <a:latin typeface="Ubuntu Sans"/>
-                <a:ea typeface="Ubuntu Sans"/>
-                <a:cs typeface="Ubuntu Sans"/>
               </a:rPr>
-              <a:t>Създаване на няколко скици на сайта</a:t>
-            </a:r>
+              <a:t>сензор за тежест, който разбира дали са взети лекарствата</a:t>
+            </a:r>
+            <a:endParaRPr lang="bg-BG">
+              <a:solidFill>
+                <a:schemeClr val="bg1"/>
+              </a:solidFill>
+            </a:endParaRPr>
+          </a:p>
+          <a:p>
+            <a:pPr marL="283879" indent="-283879">
+              <a:buFont typeface="Arial"/>
+              <a:buChar char="–"/>
+              <a:defRPr/>
+            </a:pPr>
             <a:endParaRPr>
               <a:solidFill>
                 <a:schemeClr val="bg1"/>
               </a:solidFill>
-              <a:latin typeface="Ubuntu Sans"/>
-              <a:cs typeface="Ubuntu Sans"/>
             </a:endParaRPr>
           </a:p>
-        </p:txBody>
-      </p:sp>
-      <p:sp>
-        <p:nvSpPr>
-          <p:cNvPr id="84200880" name="Content Placeholder 2"/>
-          <p:cNvSpPr>
-            <a:spLocks noGrp="1"/>
-          </p:cNvSpPr>
-          <p:nvPr/>
-        </p:nvSpPr>
-        <p:spPr bwMode="auto">
-          <a:xfrm flipH="0" flipV="0">
-            <a:off x="3361350" y="1825624"/>
-            <a:ext cx="2734648" cy="4351338"/>
-          </a:xfrm>
-        </p:spPr>
-        <p:txBody>
-          <a:bodyPr vert="horz" lIns="91440" tIns="45720" rIns="91440" bIns="45720" rtlCol="0">
-            <a:normAutofit/>
-          </a:bodyPr>
-          <a:lstStyle>
-            <a:lvl1pPr marL="228600" indent="-228600" algn="l" defTabSz="914400" rtl="0">
-              <a:lnSpc>
-                <a:spcPct val="90000"/>
-              </a:lnSpc>
-              <a:spcBef>
-                <a:spcPts val="999"/>
-              </a:spcBef>
-              <a:buFont typeface="Arial"/>
-              <a:buChar char="•"/>
-              <a:defRPr sz="2800">
-                <a:solidFill>
-                  <a:schemeClr val="tx1"/>
-                </a:solidFill>
-                <a:latin typeface="+mn-lt"/>
-                <a:ea typeface="+mn-ea"/>
-                <a:cs typeface="+mn-cs"/>
-              </a:defRPr>
-            </a:lvl1pPr>
-            <a:lvl2pPr marL="685800" indent="-228600" algn="l" defTabSz="914400" rtl="0">
-              <a:lnSpc>
-                <a:spcPct val="90000"/>
-              </a:lnSpc>
-              <a:spcBef>
-                <a:spcPts val="499"/>
-              </a:spcBef>
-              <a:buFont typeface="Arial"/>
-              <a:buChar char="•"/>
-              <a:defRPr sz="2400">
-                <a:solidFill>
-                  <a:schemeClr val="tx1"/>
-                </a:solidFill>
-                <a:latin typeface="+mn-lt"/>
-                <a:ea typeface="+mn-ea"/>
-                <a:cs typeface="+mn-cs"/>
-              </a:defRPr>
-            </a:lvl2pPr>
-            <a:lvl3pPr marL="1143000" indent="-228600" algn="l" defTabSz="914400" rtl="0">
-              <a:lnSpc>
-                <a:spcPct val="90000"/>
-              </a:lnSpc>
-              <a:spcBef>
-                <a:spcPts val="499"/>
-              </a:spcBef>
-              <a:buFont typeface="Arial"/>
-              <a:buChar char="•"/>
-              <a:defRPr sz="2000">
-                <a:solidFill>
-                  <a:schemeClr val="tx1"/>
-                </a:solidFill>
-                <a:latin typeface="+mn-lt"/>
-                <a:ea typeface="+mn-ea"/>
-                <a:cs typeface="+mn-cs"/>
-              </a:defRPr>
-            </a:lvl3pPr>
-            <a:lvl4pPr marL="1600200" indent="-228600" algn="l" defTabSz="914400" rtl="0">
-              <a:lnSpc>
-                <a:spcPct val="90000"/>
-              </a:lnSpc>
-              <a:spcBef>
-                <a:spcPts val="499"/>
-              </a:spcBef>
-              <a:buFont typeface="Arial"/>
-              <a:buChar char="•"/>
-              <a:defRPr sz="1800">
-                <a:solidFill>
-                  <a:schemeClr val="tx1"/>
-                </a:solidFill>
-                <a:latin typeface="+mn-lt"/>
-                <a:ea typeface="+mn-ea"/>
-                <a:cs typeface="+mn-cs"/>
-              </a:defRPr>
-            </a:lvl4pPr>
-            <a:lvl5pPr marL="2057400" indent="-228600" algn="l" defTabSz="914400" rtl="0">
-              <a:lnSpc>
-                <a:spcPct val="90000"/>
-              </a:lnSpc>
-              <a:spcBef>
-                <a:spcPts val="499"/>
-              </a:spcBef>
-              <a:buFont typeface="Arial"/>
-              <a:buChar char="•"/>
-              <a:defRPr sz="1800">
-                <a:solidFill>
-                  <a:schemeClr val="tx1"/>
-                </a:solidFill>
-                <a:latin typeface="+mn-lt"/>
-                <a:ea typeface="+mn-ea"/>
-                <a:cs typeface="+mn-cs"/>
-              </a:defRPr>
-            </a:lvl5pPr>
-            <a:lvl6pPr marL="2514599" indent="-228600" algn="l" defTabSz="914400" rtl="0">
-              <a:lnSpc>
-                <a:spcPct val="90000"/>
-              </a:lnSpc>
-              <a:spcBef>
-                <a:spcPts val="499"/>
-              </a:spcBef>
-              <a:buFont typeface="Arial"/>
-              <a:buChar char="•"/>
-              <a:defRPr sz="1800">
-                <a:solidFill>
-                  <a:schemeClr val="tx1"/>
-                </a:solidFill>
-                <a:latin typeface="+mn-lt"/>
-                <a:ea typeface="+mn-ea"/>
-                <a:cs typeface="+mn-cs"/>
-              </a:defRPr>
-            </a:lvl6pPr>
-            <a:lvl7pPr marL="2971800" indent="-228600" algn="l" defTabSz="914400" rtl="0">
-              <a:lnSpc>
-                <a:spcPct val="90000"/>
-              </a:lnSpc>
-              <a:spcBef>
-                <a:spcPts val="499"/>
-              </a:spcBef>
-              <a:buFont typeface="Arial"/>
-              <a:buChar char="•"/>
-              <a:defRPr sz="1800">
-                <a:solidFill>
-                  <a:schemeClr val="tx1"/>
-                </a:solidFill>
-                <a:latin typeface="+mn-lt"/>
-                <a:ea typeface="+mn-ea"/>
-                <a:cs typeface="+mn-cs"/>
-              </a:defRPr>
-            </a:lvl7pPr>
-            <a:lvl8pPr marL="3429000" indent="-228600" algn="l" defTabSz="914400" rtl="0">
-              <a:lnSpc>
-                <a:spcPct val="90000"/>
-              </a:lnSpc>
-              <a:spcBef>
-                <a:spcPts val="499"/>
-              </a:spcBef>
-              <a:buFont typeface="Arial"/>
-              <a:buChar char="•"/>
-              <a:defRPr sz="1800">
-                <a:solidFill>
-                  <a:schemeClr val="tx1"/>
-                </a:solidFill>
-                <a:latin typeface="+mn-lt"/>
-                <a:ea typeface="+mn-ea"/>
-                <a:cs typeface="+mn-cs"/>
-              </a:defRPr>
-            </a:lvl8pPr>
-            <a:lvl9pPr marL="3886200" indent="-228600" algn="l" defTabSz="914400" rtl="0">
-              <a:lnSpc>
-                <a:spcPct val="90000"/>
-              </a:lnSpc>
-              <a:spcBef>
-                <a:spcPts val="499"/>
-              </a:spcBef>
-              <a:buFont typeface="Arial"/>
-              <a:buChar char="•"/>
-              <a:defRPr sz="1800">
-                <a:solidFill>
-                  <a:schemeClr val="tx1"/>
-                </a:solidFill>
-                <a:latin typeface="+mn-lt"/>
-                <a:ea typeface="+mn-ea"/>
-                <a:cs typeface="+mn-cs"/>
-              </a:defRPr>
-            </a:lvl9pPr>
-          </a:lstStyle>
-          <a:p>
-            <a:pPr marL="0" indent="0" algn="ctr">
-              <a:buFont typeface="Arial"/>
-              <a:buNone/>
-              <a:defRPr/>
-            </a:pPr>
-            <a:r>
-              <a:rPr lang="bg-BG" sz="2600" u="sng">
-                <a:solidFill>
-                  <a:schemeClr val="bg1"/>
-                </a:solidFill>
-                <a:latin typeface="Ubuntu Sans"/>
-                <a:ea typeface="Ubuntu Sans"/>
-                <a:cs typeface="Ubuntu Sans"/>
-              </a:rPr>
-              <a:t>Четвъртък</a:t>
-            </a:r>
-            <a:endParaRPr sz="2600">
-              <a:solidFill>
-                <a:schemeClr val="bg1"/>
-              </a:solidFill>
-              <a:latin typeface="Ubuntu Sans"/>
-              <a:cs typeface="Ubuntu Sans"/>
-            </a:endParaRPr>
-          </a:p>
-          <a:p>
-            <a:pPr marL="0" indent="0" algn="ctr">
-              <a:buFont typeface="Arial"/>
-              <a:buNone/>
-              <a:defRPr/>
-            </a:pPr>
-            <a:r>
-              <a:rPr lang="bg-BG">
-                <a:solidFill>
-                  <a:schemeClr val="bg1"/>
-                </a:solidFill>
-                <a:latin typeface="Ubuntu Sans"/>
-                <a:cs typeface="Ubuntu Sans"/>
-              </a:rPr>
-              <a:t>Създаване на сайта и правене на основния код</a:t>
-            </a:r>
-            <a:endParaRPr lang="bg-BG">
-              <a:solidFill>
-                <a:schemeClr val="bg1"/>
-              </a:solidFill>
-              <a:latin typeface="Ubuntu Sans"/>
-              <a:cs typeface="Ubuntu Sans"/>
-            </a:endParaRPr>
-          </a:p>
-          <a:p>
-            <a:pPr marL="0" indent="0" algn="ctr">
-              <a:buFont typeface="Arial"/>
-              <a:buNone/>
-              <a:defRPr/>
-            </a:pPr>
-            <a:r>
-              <a:rPr lang="bg-BG">
-                <a:solidFill>
-                  <a:schemeClr val="bg1"/>
-                </a:solidFill>
-                <a:latin typeface="Ubuntu Sans"/>
-                <a:cs typeface="Ubuntu Sans"/>
-              </a:rPr>
-              <a:t>Рисуване на дизайнове и лого</a:t>
-            </a:r>
+          <a:p>
+            <a:pPr>
+              <a:defRPr/>
+            </a:pPr>
             <a:endParaRPr>
               <a:solidFill>
                 <a:schemeClr val="bg1"/>
               </a:solidFill>
-              <a:latin typeface="Ubuntu Sans"/>
-              <a:cs typeface="Ubuntu Sans"/>
-            </a:endParaRPr>
-          </a:p>
-        </p:txBody>
-      </p:sp>
-      <p:sp>
-        <p:nvSpPr>
-          <p:cNvPr id="111172462" name="Content Placeholder 2"/>
-          <p:cNvSpPr>
-            <a:spLocks noGrp="1"/>
-          </p:cNvSpPr>
-          <p:nvPr/>
-        </p:nvSpPr>
-        <p:spPr bwMode="auto">
-          <a:xfrm flipH="0" flipV="0">
-            <a:off x="6534149" y="1825624"/>
-            <a:ext cx="2734648" cy="4351338"/>
-          </a:xfrm>
-        </p:spPr>
-        <p:txBody>
-          <a:bodyPr vert="horz" lIns="91440" tIns="45720" rIns="91440" bIns="45720" rtlCol="0">
-            <a:normAutofit/>
-          </a:bodyPr>
-          <a:lstStyle>
-            <a:lvl1pPr marL="228600" indent="-228600" algn="l" defTabSz="914400" rtl="0">
-              <a:lnSpc>
-                <a:spcPct val="90000"/>
-              </a:lnSpc>
-              <a:spcBef>
-                <a:spcPts val="999"/>
-              </a:spcBef>
-              <a:buFont typeface="Arial"/>
-              <a:buChar char="•"/>
-              <a:defRPr sz="2800">
-                <a:solidFill>
-                  <a:schemeClr val="tx1"/>
-                </a:solidFill>
-                <a:latin typeface="+mn-lt"/>
-                <a:ea typeface="+mn-ea"/>
-                <a:cs typeface="+mn-cs"/>
-              </a:defRPr>
-            </a:lvl1pPr>
-            <a:lvl2pPr marL="685800" indent="-228600" algn="l" defTabSz="914400" rtl="0">
-              <a:lnSpc>
-                <a:spcPct val="90000"/>
-              </a:lnSpc>
-              <a:spcBef>
-                <a:spcPts val="499"/>
-              </a:spcBef>
-              <a:buFont typeface="Arial"/>
-              <a:buChar char="•"/>
-              <a:defRPr sz="2400">
-                <a:solidFill>
-                  <a:schemeClr val="tx1"/>
-                </a:solidFill>
-                <a:latin typeface="+mn-lt"/>
-                <a:ea typeface="+mn-ea"/>
-                <a:cs typeface="+mn-cs"/>
-              </a:defRPr>
-            </a:lvl2pPr>
-            <a:lvl3pPr marL="1143000" indent="-228600" algn="l" defTabSz="914400" rtl="0">
-              <a:lnSpc>
-                <a:spcPct val="90000"/>
-              </a:lnSpc>
-              <a:spcBef>
-                <a:spcPts val="499"/>
-              </a:spcBef>
-              <a:buFont typeface="Arial"/>
-              <a:buChar char="•"/>
-              <a:defRPr sz="2000">
-                <a:solidFill>
-                  <a:schemeClr val="tx1"/>
-                </a:solidFill>
-                <a:latin typeface="+mn-lt"/>
-                <a:ea typeface="+mn-ea"/>
-                <a:cs typeface="+mn-cs"/>
-              </a:defRPr>
-            </a:lvl3pPr>
-            <a:lvl4pPr marL="1600200" indent="-228600" algn="l" defTabSz="914400" rtl="0">
-              <a:lnSpc>
-                <a:spcPct val="90000"/>
-              </a:lnSpc>
-              <a:spcBef>
-                <a:spcPts val="499"/>
-              </a:spcBef>
-              <a:buFont typeface="Arial"/>
-              <a:buChar char="•"/>
-              <a:defRPr sz="1800">
-                <a:solidFill>
-                  <a:schemeClr val="tx1"/>
-                </a:solidFill>
-                <a:latin typeface="+mn-lt"/>
-                <a:ea typeface="+mn-ea"/>
-                <a:cs typeface="+mn-cs"/>
-              </a:defRPr>
-            </a:lvl4pPr>
-            <a:lvl5pPr marL="2057400" indent="-228600" algn="l" defTabSz="914400" rtl="0">
-              <a:lnSpc>
-                <a:spcPct val="90000"/>
-              </a:lnSpc>
-              <a:spcBef>
-                <a:spcPts val="499"/>
-              </a:spcBef>
-              <a:buFont typeface="Arial"/>
-              <a:buChar char="•"/>
-              <a:defRPr sz="1800">
-                <a:solidFill>
-                  <a:schemeClr val="tx1"/>
-                </a:solidFill>
-                <a:latin typeface="+mn-lt"/>
-                <a:ea typeface="+mn-ea"/>
-                <a:cs typeface="+mn-cs"/>
-              </a:defRPr>
-            </a:lvl5pPr>
-            <a:lvl6pPr marL="2514599" indent="-228600" algn="l" defTabSz="914400" rtl="0">
-              <a:lnSpc>
-                <a:spcPct val="90000"/>
-              </a:lnSpc>
-              <a:spcBef>
-                <a:spcPts val="499"/>
-              </a:spcBef>
-              <a:buFont typeface="Arial"/>
-              <a:buChar char="•"/>
-              <a:defRPr sz="1800">
-                <a:solidFill>
-                  <a:schemeClr val="tx1"/>
-                </a:solidFill>
-                <a:latin typeface="+mn-lt"/>
-                <a:ea typeface="+mn-ea"/>
-                <a:cs typeface="+mn-cs"/>
-              </a:defRPr>
-            </a:lvl6pPr>
-            <a:lvl7pPr marL="2971800" indent="-228600" algn="l" defTabSz="914400" rtl="0">
-              <a:lnSpc>
-                <a:spcPct val="90000"/>
-              </a:lnSpc>
-              <a:spcBef>
-                <a:spcPts val="499"/>
-              </a:spcBef>
-              <a:buFont typeface="Arial"/>
-              <a:buChar char="•"/>
-              <a:defRPr sz="1800">
-                <a:solidFill>
-                  <a:schemeClr val="tx1"/>
-                </a:solidFill>
-                <a:latin typeface="+mn-lt"/>
-                <a:ea typeface="+mn-ea"/>
-                <a:cs typeface="+mn-cs"/>
-              </a:defRPr>
-            </a:lvl7pPr>
-            <a:lvl8pPr marL="3429000" indent="-228600" algn="l" defTabSz="914400" rtl="0">
-              <a:lnSpc>
-                <a:spcPct val="90000"/>
-              </a:lnSpc>
-              <a:spcBef>
-                <a:spcPts val="499"/>
-              </a:spcBef>
-              <a:buFont typeface="Arial"/>
-              <a:buChar char="•"/>
-              <a:defRPr sz="1800">
-                <a:solidFill>
-                  <a:schemeClr val="tx1"/>
-                </a:solidFill>
-                <a:latin typeface="+mn-lt"/>
-                <a:ea typeface="+mn-ea"/>
-                <a:cs typeface="+mn-cs"/>
-              </a:defRPr>
-            </a:lvl8pPr>
-            <a:lvl9pPr marL="3886200" indent="-228600" algn="l" defTabSz="914400" rtl="0">
-              <a:lnSpc>
-                <a:spcPct val="90000"/>
-              </a:lnSpc>
-              <a:spcBef>
-                <a:spcPts val="499"/>
-              </a:spcBef>
-              <a:buFont typeface="Arial"/>
-              <a:buChar char="•"/>
-              <a:defRPr sz="1800">
-                <a:solidFill>
-                  <a:schemeClr val="tx1"/>
-                </a:solidFill>
-                <a:latin typeface="+mn-lt"/>
-                <a:ea typeface="+mn-ea"/>
-                <a:cs typeface="+mn-cs"/>
-              </a:defRPr>
-            </a:lvl9pPr>
-          </a:lstStyle>
-          <a:p>
-            <a:pPr marL="0" indent="0" algn="ctr">
-              <a:buFont typeface="Arial"/>
-              <a:buNone/>
-              <a:defRPr/>
-            </a:pPr>
-            <a:r>
-              <a:rPr lang="bg-BG" u="sng">
-                <a:solidFill>
-                  <a:schemeClr val="bg1"/>
-                </a:solidFill>
-                <a:latin typeface="Ubuntu Sans"/>
-                <a:cs typeface="Ubuntu Sans"/>
-              </a:rPr>
-              <a:t>Петък</a:t>
-            </a:r>
-            <a:endParaRPr lang="bg-BG">
-              <a:solidFill>
-                <a:schemeClr val="bg1"/>
-              </a:solidFill>
-              <a:latin typeface="Ubuntu Sans"/>
-              <a:cs typeface="Ubuntu Sans"/>
-            </a:endParaRPr>
-          </a:p>
-          <a:p>
-            <a:pPr marL="0" indent="0" algn="ctr">
-              <a:buFont typeface="Arial"/>
-              <a:buNone/>
-              <a:defRPr/>
-            </a:pPr>
-            <a:r>
-              <a:rPr lang="bg-BG">
-                <a:solidFill>
-                  <a:schemeClr val="bg1"/>
-                </a:solidFill>
-                <a:latin typeface="Ubuntu Sans"/>
-                <a:cs typeface="Ubuntu Sans"/>
-              </a:rPr>
-              <a:t>Довършване на проекта</a:t>
-            </a:r>
-            <a:endParaRPr>
-              <a:solidFill>
-                <a:schemeClr val="bg1"/>
-              </a:solidFill>
-              <a:latin typeface="Ubuntu Sans"/>
-              <a:cs typeface="Ubuntu Sans"/>
             </a:endParaRPr>
           </a:p>
         </p:txBody>
@@ -5955,7 +5901,7 @@
       </p:grpSpPr>
       <p:sp>
         <p:nvSpPr>
-          <p:cNvPr id="1372582822" name="Title 1"/>
+          <p:cNvPr id="1704329715" name="Title 1"/>
           <p:cNvSpPr>
             <a:spLocks noGrp="1"/>
           </p:cNvSpPr>
@@ -5988,7 +5934,7 @@
       </p:sp>
       <p:sp>
         <p:nvSpPr>
-          <p:cNvPr id="722693665" name=""/>
+          <p:cNvPr id="417137689" name=""/>
           <p:cNvSpPr txBox="1"/>
           <p:nvPr/>
         </p:nvSpPr>
@@ -6254,7 +6200,7 @@
       </p:grpSpPr>
       <p:sp>
         <p:nvSpPr>
-          <p:cNvPr id="233471347" name="Title 1"/>
+          <p:cNvPr id="338200200" name="Title 1"/>
           <p:cNvSpPr>
             <a:spLocks noGrp="1"/>
           </p:cNvSpPr>
@@ -6291,7 +6237,7 @@
       </p:sp>
       <p:sp>
         <p:nvSpPr>
-          <p:cNvPr id="1244464403" name=""/>
+          <p:cNvPr id="552880449" name=""/>
           <p:cNvSpPr txBox="1"/>
           <p:nvPr/>
         </p:nvSpPr>
@@ -6471,7 +6417,7 @@
       </p:grpSpPr>
       <p:sp>
         <p:nvSpPr>
-          <p:cNvPr id="641146105" name=""/>
+          <p:cNvPr id="2102016768" name=""/>
           <p:cNvSpPr txBox="1"/>
           <p:nvPr/>
         </p:nvSpPr>
@@ -6511,7 +6457,7 @@
       </p:sp>
       <p:pic>
         <p:nvPicPr>
-          <p:cNvPr id="1855213847" name=""/>
+          <p:cNvPr id="1912857810" name=""/>
           <p:cNvPicPr>
             <a:picLocks noChangeAspect="1"/>
           </p:cNvPicPr>
@@ -6566,7 +6512,7 @@
       </p:grpSpPr>
       <p:sp>
         <p:nvSpPr>
-          <p:cNvPr id="1545885661" name="Title 1"/>
+          <p:cNvPr id="1848301581" name="Title 1"/>
           <p:cNvSpPr>
             <a:spLocks noGrp="1"/>
           </p:cNvSpPr>
@@ -7147,15 +7093,20 @@
       </p:grpSpPr>
       <p:sp>
         <p:nvSpPr>
-          <p:cNvPr id="1149853687" name="Title 1"/>
-          <p:cNvSpPr>
-            <a:spLocks noGrp="1"/>
-          </p:cNvSpPr>
-          <p:nvPr>
-            <p:ph type="title"/>
-          </p:nvPr>
-        </p:nvSpPr>
-        <p:spPr bwMode="auto"/>
+          <p:cNvPr id="200007601" name="Title 1"/>
+          <p:cNvSpPr>
+            <a:spLocks noGrp="1"/>
+          </p:cNvSpPr>
+          <p:nvPr>
+            <p:ph type="ctrTitle"/>
+          </p:nvPr>
+        </p:nvSpPr>
+        <p:spPr bwMode="auto">
+          <a:xfrm flipH="0" flipV="0">
+            <a:off x="721176" y="251504"/>
+            <a:ext cx="6886608" cy="1381351"/>
+          </a:xfrm>
+        </p:spPr>
         <p:txBody>
           <a:bodyPr/>
           <a:lstStyle/>
@@ -7169,10 +7120,9 @@
                   <a:schemeClr val="bg1"/>
                 </a:solidFill>
                 <a:latin typeface="Ubuntu Sans"/>
-                <a:ea typeface="Ubuntu Sans"/>
                 <a:cs typeface="Ubuntu Sans"/>
               </a:rPr>
-              <a:t>Технологии</a:t>
+              <a:t>Идеята – от къде и защо?</a:t>
             </a:r>
             <a:endParaRPr b="1">
               <a:solidFill>
@@ -7184,51 +7134,163 @@
           </a:p>
         </p:txBody>
       </p:sp>
-      <p:pic>
-        <p:nvPicPr>
-          <p:cNvPr id="917229266" name=""/>
-          <p:cNvPicPr>
-            <a:picLocks noChangeAspect="1"/>
-          </p:cNvPicPr>
+      <p:sp>
+        <p:nvSpPr>
+          <p:cNvPr id="1265942445" name=""/>
+          <p:cNvSpPr txBox="1"/>
           <p:nvPr/>
-        </p:nvPicPr>
-        <p:blipFill rotWithShape="1">
-          <a:blip r:embed="rId3"/>
-          <a:stretch/>
-        </p:blipFill>
+        </p:nvSpPr>
         <p:spPr bwMode="auto">
-          <a:xfrm flipH="0" flipV="0">
-            <a:off x="2624137" y="1959000"/>
-            <a:ext cx="2038349" cy="2038349"/>
+          <a:xfrm rot="0" flipH="0" flipV="0">
+            <a:off x="559283" y="1690004"/>
+            <a:ext cx="7418523" cy="3353159"/>
           </a:xfrm>
           <a:prstGeom prst="rect">
             <a:avLst/>
           </a:prstGeom>
+          <a:noFill/>
         </p:spPr>
-      </p:pic>
-      <p:pic>
-        <p:nvPicPr>
-          <p:cNvPr id="1596485865" name=""/>
-          <p:cNvPicPr>
-            <a:picLocks noChangeAspect="1"/>
-          </p:cNvPicPr>
-          <p:nvPr/>
-        </p:nvPicPr>
-        <p:blipFill rotWithShape="1">
-          <a:blip r:embed="rId4"/>
-          <a:srcRect l="37680" t="21864" r="36802" b="22186"/>
-          <a:stretch/>
-        </p:blipFill>
-        <p:spPr bwMode="auto">
-          <a:xfrm flipH="0" flipV="0">
-            <a:off x="6299624" y="1595437"/>
-            <a:ext cx="1835040" cy="2574975"/>
-          </a:xfrm>
-          <a:prstGeom prst="rect">
-            <a:avLst/>
-          </a:prstGeom>
-        </p:spPr>
-      </p:pic>
+        <p:txBody>
+          <a:bodyPr vertOverflow="overflow" horzOverflow="overflow" vert="horz" wrap="square" lIns="91440" tIns="45720" rIns="91440" bIns="45720" numCol="1" spcCol="0" rtlCol="0" fromWordArt="0" anchor="t" anchorCtr="0" forceAA="0" upright="0" compatLnSpc="0">
+            <a:spAutoFit/>
+          </a:bodyPr>
+          <a:p>
+            <a:pPr>
+              <a:defRPr/>
+            </a:pPr>
+            <a:r>
+              <a:rPr lang="bg-BG" sz="2800">
+                <a:solidFill>
+                  <a:schemeClr val="bg1"/>
+                </a:solidFill>
+              </a:rPr>
+              <a:t>Проблемите на хората с деменция:</a:t>
+            </a:r>
+            <a:endParaRPr sz="2800">
+              <a:solidFill>
+                <a:schemeClr val="bg1"/>
+              </a:solidFill>
+            </a:endParaRPr>
+          </a:p>
+          <a:p>
+            <a:pPr marL="283879" indent="-283879">
+              <a:buFont typeface="Arial"/>
+              <a:buChar char="•"/>
+              <a:defRPr/>
+            </a:pPr>
+            <a:r>
+              <a:rPr lang="bg-BG" sz="2800">
+                <a:solidFill>
+                  <a:schemeClr val="bg1"/>
+                </a:solidFill>
+              </a:rPr>
+              <a:t>забравят</a:t>
+            </a:r>
+            <a:r>
+              <a:rPr lang="en-US" sz="2800">
+                <a:solidFill>
+                  <a:schemeClr val="bg1"/>
+                </a:solidFill>
+              </a:rPr>
+              <a:t> </a:t>
+            </a:r>
+            <a:r>
+              <a:rPr lang="bg-BG" sz="2800" b="0" i="0" u="none" strike="noStrike" cap="none" spc="0">
+                <a:solidFill>
+                  <a:schemeClr val="bg1"/>
+                </a:solidFill>
+                <a:latin typeface="+mn-lt"/>
+                <a:ea typeface="+mn-ea"/>
+                <a:cs typeface="+mn-cs"/>
+              </a:rPr>
+              <a:t>да си вземат лекарствата</a:t>
+            </a:r>
+            <a:endParaRPr sz="2800">
+              <a:solidFill>
+                <a:schemeClr val="bg1"/>
+              </a:solidFill>
+            </a:endParaRPr>
+          </a:p>
+          <a:p>
+            <a:pPr marL="683929" lvl="1" indent="-283879">
+              <a:buFont typeface="Arial"/>
+              <a:buChar char="–"/>
+              <a:defRPr/>
+            </a:pPr>
+            <a:r>
+              <a:rPr lang="bg-BG" sz="2800">
+                <a:solidFill>
+                  <a:schemeClr val="bg1"/>
+                </a:solidFill>
+              </a:rPr>
+              <a:t>с</a:t>
+            </a:r>
+            <a:r>
+              <a:rPr lang="bg-BG" sz="2800">
+                <a:solidFill>
+                  <a:schemeClr val="bg1"/>
+                </a:solidFill>
+              </a:rPr>
+              <a:t>ъс звук се целим да им помогнем да си вземат лекарствата</a:t>
+            </a:r>
+            <a:endParaRPr sz="2800">
+              <a:solidFill>
+                <a:schemeClr val="bg1"/>
+              </a:solidFill>
+            </a:endParaRPr>
+          </a:p>
+          <a:p>
+            <a:pPr marL="283879" lvl="0" indent="-283879">
+              <a:buFont typeface="Arial"/>
+              <a:buChar char="•"/>
+              <a:defRPr/>
+            </a:pPr>
+            <a:r>
+              <a:rPr lang="bg-BG" sz="2800">
+                <a:solidFill>
+                  <a:schemeClr val="bg1"/>
+                </a:solidFill>
+              </a:rPr>
+              <a:t>вземат грешните лекарства</a:t>
+            </a:r>
+            <a:endParaRPr lang="bg-BG" sz="2800">
+              <a:solidFill>
+                <a:schemeClr val="bg1"/>
+              </a:solidFill>
+            </a:endParaRPr>
+          </a:p>
+          <a:p>
+            <a:pPr marL="794073" lvl="1" indent="-394023">
+              <a:buFont typeface="Arial"/>
+              <a:buChar char="–"/>
+              <a:defRPr/>
+            </a:pPr>
+            <a:r>
+              <a:rPr lang="bg-BG" sz="2800">
+                <a:solidFill>
+                  <a:schemeClr val="bg1"/>
+                </a:solidFill>
+              </a:rPr>
+              <a:t>с лампички се показва правилното лекарство в съответния раздел</a:t>
+            </a:r>
+            <a:endParaRPr lang="bg-BG">
+              <a:solidFill>
+                <a:schemeClr val="bg1"/>
+              </a:solidFill>
+            </a:endParaRPr>
+          </a:p>
+          <a:p>
+            <a:pPr lvl="0">
+              <a:defRPr/>
+            </a:pPr>
+            <a:endParaRPr lang="bg-BG">
+              <a:solidFill>
+                <a:schemeClr val="bg1"/>
+              </a:solidFill>
+            </a:endParaRPr>
+          </a:p>
+        </p:txBody>
+      </p:sp>
     </p:spTree>
   </p:cSld>
   <p:clrMapOvr>
@@ -7264,20 +7326,15 @@
       </p:grpSpPr>
       <p:sp>
         <p:nvSpPr>
-          <p:cNvPr id="448557838" name="Title 1"/>
-          <p:cNvSpPr>
-            <a:spLocks noGrp="1"/>
-          </p:cNvSpPr>
-          <p:nvPr>
-            <p:ph type="ctrTitle"/>
-          </p:nvPr>
-        </p:nvSpPr>
-        <p:spPr bwMode="auto">
-          <a:xfrm flipH="0" flipV="0">
-            <a:off x="721176" y="251504"/>
-            <a:ext cx="6886608" cy="1381351"/>
-          </a:xfrm>
-        </p:spPr>
+          <p:cNvPr id="1835088990" name="Title 1"/>
+          <p:cNvSpPr>
+            <a:spLocks noGrp="1"/>
+          </p:cNvSpPr>
+          <p:nvPr>
+            <p:ph type="title"/>
+          </p:nvPr>
+        </p:nvSpPr>
+        <p:spPr bwMode="auto"/>
         <p:txBody>
           <a:bodyPr/>
           <a:lstStyle/>
@@ -7291,9 +7348,10 @@
                   <a:schemeClr val="bg1"/>
                 </a:solidFill>
                 <a:latin typeface="Ubuntu Sans"/>
+                <a:ea typeface="Ubuntu Sans"/>
                 <a:cs typeface="Ubuntu Sans"/>
               </a:rPr>
-              <a:t>Идеята – от къде и защо?</a:t>
+              <a:t>Актуализация</a:t>
             </a:r>
             <a:endParaRPr b="1">
               <a:solidFill>
@@ -7307,130 +7365,123 @@
       </p:sp>
       <p:sp>
         <p:nvSpPr>
-          <p:cNvPr id="1336206221" name=""/>
-          <p:cNvSpPr txBox="1"/>
-          <p:nvPr/>
+          <p:cNvPr id="1891568958" name="Content Placeholder 2"/>
+          <p:cNvSpPr>
+            <a:spLocks noGrp="1"/>
+          </p:cNvSpPr>
+          <p:nvPr>
+            <p:ph idx="1"/>
+          </p:nvPr>
         </p:nvSpPr>
         <p:spPr bwMode="auto">
-          <a:xfrm rot="0" flipH="0" flipV="0">
-            <a:off x="559283" y="1690004"/>
-            <a:ext cx="7359123" cy="2926440"/>
+          <a:xfrm flipH="0" flipV="0">
+            <a:off x="838198" y="1825624"/>
+            <a:ext cx="9392625" cy="4351338"/>
           </a:xfrm>
-          <a:prstGeom prst="rect">
-            <a:avLst/>
-          </a:prstGeom>
-          <a:noFill/>
         </p:spPr>
         <p:txBody>
-          <a:bodyPr vertOverflow="overflow" horzOverflow="overflow" vert="horz" wrap="square" lIns="91440" tIns="45720" rIns="91440" bIns="45720" numCol="1" spcCol="0" rtlCol="0" fromWordArt="0" anchor="t" anchorCtr="0" forceAA="0" upright="0" compatLnSpc="0">
-            <a:spAutoFit/>
-          </a:bodyPr>
-          <a:p>
-            <a:pPr>
-              <a:defRPr/>
-            </a:pPr>
-            <a:r>
-              <a:rPr lang="bg-BG" sz="2800">
+          <a:bodyPr/>
+          <a:lstStyle/>
+          <a:p>
+            <a:pPr>
+              <a:defRPr/>
+            </a:pPr>
+            <a:r>
+              <a:rPr lang="bg-BG">
                 <a:solidFill>
                   <a:schemeClr val="bg1"/>
                 </a:solidFill>
+                <a:latin typeface="Ubuntu Sans"/>
+                <a:ea typeface="Ubuntu Sans"/>
+                <a:cs typeface="Ubuntu Sans"/>
               </a:rPr>
-              <a:t>Проблемите на хората с деменция:</a:t>
-            </a:r>
-            <a:endParaRPr sz="2800">
-              <a:solidFill>
-                <a:schemeClr val="bg1"/>
-              </a:solidFill>
-            </a:endParaRPr>
-          </a:p>
-          <a:p>
-            <a:pPr marL="283879" indent="-283879">
-              <a:buFont typeface="Arial"/>
-              <a:buChar char="•"/>
-              <a:defRPr/>
-            </a:pPr>
-            <a:r>
-              <a:rPr lang="bg-BG" sz="2800">
+              <a:t>Успяхме да направим прототип на кутията, които има </a:t>
+            </a:r>
+            <a:r>
+              <a:rPr lang="bg-BG">
                 <a:solidFill>
                   <a:schemeClr val="bg1"/>
                 </a:solidFill>
+                <a:latin typeface="Ubuntu Sans"/>
+                <a:ea typeface="Ubuntu Sans"/>
+                <a:cs typeface="Ubuntu Sans"/>
               </a:rPr>
-              <a:t>забравят</a:t>
-            </a:r>
-            <a:endParaRPr sz="2800">
-              <a:solidFill>
-                <a:schemeClr val="bg1"/>
-              </a:solidFill>
-            </a:endParaRPr>
-          </a:p>
-          <a:p>
-            <a:pPr marL="283879" indent="-283879">
-              <a:buFont typeface="Arial"/>
-              <a:buChar char="•"/>
-              <a:defRPr/>
-            </a:pPr>
-            <a:r>
-              <a:rPr lang="bg-BG" sz="2800">
+              <a:t>нагласящи се периоди на взимане</a:t>
+            </a:r>
+            <a:r>
+              <a:rPr lang="bg-BG">
                 <a:solidFill>
                   <a:schemeClr val="bg1"/>
                 </a:solidFill>
+                <a:latin typeface="Ubuntu Sans"/>
+                <a:cs typeface="Ubuntu Sans"/>
               </a:rPr>
-              <a:t>не искат да си вземат лекарствата</a:t>
-            </a:r>
-            <a:endParaRPr sz="2800">
-              <a:solidFill>
-                <a:schemeClr val="bg1"/>
-              </a:solidFill>
-            </a:endParaRPr>
-          </a:p>
-          <a:p>
-            <a:pPr marL="683929" lvl="1" indent="-283879">
-              <a:buFont typeface="Arial"/>
-              <a:buChar char="–"/>
-              <a:defRPr/>
-            </a:pPr>
-            <a:r>
-              <a:rPr lang="bg-BG" sz="2800">
-                <a:solidFill>
-                  <a:schemeClr val="bg1"/>
-                </a:solidFill>
-              </a:rPr>
-              <a:t>с музиката се целим подсъзнателно да им въздействаме</a:t>
-            </a:r>
-            <a:endParaRPr sz="2800">
-              <a:solidFill>
-                <a:schemeClr val="bg1"/>
-              </a:solidFill>
-            </a:endParaRPr>
-          </a:p>
-          <a:p>
-            <a:pPr marL="283879" lvl="0" indent="-283879">
-              <a:buFont typeface="Arial"/>
-              <a:buChar char="•"/>
-              <a:defRPr/>
-            </a:pPr>
-            <a:r>
-              <a:rPr lang="bg-BG" sz="2800">
-                <a:solidFill>
-                  <a:schemeClr val="bg1"/>
-                </a:solidFill>
-              </a:rPr>
-              <a:t>вземат грешните лекарства</a:t>
+              <a:t> и показва кое лекарство трябва да се вземе.</a:t>
             </a:r>
             <a:endParaRPr lang="bg-BG">
               <a:solidFill>
                 <a:schemeClr val="bg1"/>
               </a:solidFill>
+              <a:latin typeface="Ubuntu Sans"/>
+              <a:ea typeface="Ubuntu Sans"/>
+              <a:cs typeface="Ubuntu Sans"/>
             </a:endParaRPr>
           </a:p>
           <a:p>
-            <a:pPr lvl="0">
-              <a:defRPr/>
-            </a:pPr>
+            <a:pPr>
+              <a:defRPr/>
+            </a:pPr>
+            <a:r>
+              <a:rPr lang="bg-BG" sz="2800" b="0" i="0" u="none" strike="noStrike" cap="none" spc="0">
+                <a:solidFill>
+                  <a:schemeClr val="bg1"/>
+                </a:solidFill>
+                <a:latin typeface="Ubuntu Sans"/>
+                <a:ea typeface="Ubuntu Sans"/>
+                <a:cs typeface="Ubuntu Sans"/>
+              </a:rPr>
+              <a:t>Направихме</a:t>
+            </a:r>
+            <a:r>
+              <a:rPr lang="bg-BG">
+                <a:solidFill>
+                  <a:schemeClr val="bg1"/>
+                </a:solidFill>
+                <a:latin typeface="Ubuntu Sans"/>
+                <a:cs typeface="Ubuntu Sans"/>
+              </a:rPr>
+              <a:t> и сайт, който да се свърже с кутията и да нагласи</a:t>
+            </a:r>
+            <a:r>
+              <a:rPr lang="bg-BG">
+                <a:solidFill>
+                  <a:schemeClr val="bg1"/>
+                </a:solidFill>
+                <a:latin typeface="Ubuntu Sans"/>
+                <a:cs typeface="Ubuntu Sans"/>
+              </a:rPr>
+              <a:t> всички специфики.</a:t>
+            </a:r>
             <a:endParaRPr lang="bg-BG">
               <a:solidFill>
                 <a:schemeClr val="bg1"/>
               </a:solidFill>
+              <a:latin typeface="Ubuntu Sans"/>
+              <a:cs typeface="Ubuntu Sans"/>
+            </a:endParaRPr>
+          </a:p>
+          <a:p>
+            <a:pPr marL="0" indent="0">
+              <a:buFont typeface="Arial"/>
+              <a:buNone/>
+              <a:defRPr/>
+            </a:pPr>
+            <a:endParaRPr lang="bg-BG">
+              <a:solidFill>
+                <a:schemeClr val="bg1"/>
+              </a:solidFill>
+              <a:latin typeface="Ubuntu Sans"/>
+              <a:cs typeface="Ubuntu Sans"/>
             </a:endParaRPr>
           </a:p>
         </p:txBody>
@@ -7470,7 +7521,7 @@
       </p:grpSpPr>
       <p:sp>
         <p:nvSpPr>
-          <p:cNvPr id="1772636609" name="Title 1"/>
+          <p:cNvPr id="987115882" name="Title 1"/>
           <p:cNvSpPr>
             <a:spLocks noGrp="1"/>
           </p:cNvSpPr>
@@ -7495,7 +7546,7 @@
                 <a:ea typeface="Ubuntu Sans"/>
                 <a:cs typeface="Ubuntu Sans"/>
               </a:rPr>
-              <a:t>Актуализация</a:t>
+              <a:t>Технологии</a:t>
             </a:r>
             <a:endParaRPr b="1">
               <a:solidFill>
@@ -7507,129 +7558,95 @@
           </a:p>
         </p:txBody>
       </p:sp>
-      <p:sp>
-        <p:nvSpPr>
-          <p:cNvPr id="573831500" name="Content Placeholder 2"/>
-          <p:cNvSpPr>
-            <a:spLocks noGrp="1"/>
-          </p:cNvSpPr>
-          <p:nvPr>
-            <p:ph idx="1"/>
-          </p:nvPr>
-        </p:nvSpPr>
+      <p:pic>
+        <p:nvPicPr>
+          <p:cNvPr id="917229266" name=""/>
+          <p:cNvPicPr>
+            <a:picLocks noChangeAspect="1"/>
+          </p:cNvPicPr>
+          <p:nvPr/>
+        </p:nvPicPr>
+        <p:blipFill rotWithShape="1">
+          <a:blip r:embed="rId3"/>
+          <a:stretch/>
+        </p:blipFill>
         <p:spPr bwMode="auto">
           <a:xfrm flipH="0" flipV="0">
-            <a:off x="838198" y="1825624"/>
-            <a:ext cx="9392625" cy="4351338"/>
+            <a:off x="897730" y="1959000"/>
+            <a:ext cx="2038349" cy="2038349"/>
           </a:xfrm>
+          <a:prstGeom prst="rect">
+            <a:avLst/>
+          </a:prstGeom>
         </p:spPr>
-        <p:txBody>
-          <a:bodyPr/>
-          <a:lstStyle/>
-          <a:p>
-            <a:pPr>
-              <a:defRPr/>
-            </a:pPr>
-            <a:r>
-              <a:rPr lang="bg-BG">
-                <a:solidFill>
-                  <a:schemeClr val="bg1"/>
-                </a:solidFill>
-                <a:latin typeface="Ubuntu Sans"/>
-                <a:ea typeface="Ubuntu Sans"/>
-                <a:cs typeface="Ubuntu Sans"/>
-              </a:rPr>
-              <a:t>Успяхме да направим прототип на кутията, които има </a:t>
-            </a:r>
-            <a:r>
-              <a:rPr lang="bg-BG">
-                <a:solidFill>
-                  <a:schemeClr val="bg1"/>
-                </a:solidFill>
-                <a:latin typeface="Ubuntu Sans"/>
-                <a:ea typeface="Ubuntu Sans"/>
-                <a:cs typeface="Ubuntu Sans"/>
-              </a:rPr>
-              <a:t>нагласящи се периоди на взимане</a:t>
-            </a:r>
-            <a:r>
-              <a:rPr lang="bg-BG">
-                <a:solidFill>
-                  <a:schemeClr val="bg1"/>
-                </a:solidFill>
-                <a:latin typeface="Ubuntu Sans"/>
-                <a:cs typeface="Ubuntu Sans"/>
-              </a:rPr>
-              <a:t> и показва кое лекарство трябва да се вземе.</a:t>
-            </a:r>
-            <a:endParaRPr lang="bg-BG">
-              <a:solidFill>
-                <a:schemeClr val="bg1"/>
-              </a:solidFill>
-              <a:latin typeface="Ubuntu Sans"/>
-              <a:ea typeface="Ubuntu Sans"/>
-              <a:cs typeface="Ubuntu Sans"/>
-            </a:endParaRPr>
-          </a:p>
-          <a:p>
-            <a:pPr>
-              <a:defRPr/>
-            </a:pPr>
-            <a:r>
-              <a:rPr lang="bg-BG" sz="2800" b="0" i="0" u="none" strike="noStrike" cap="none" spc="0">
-                <a:solidFill>
-                  <a:schemeClr val="bg1"/>
-                </a:solidFill>
-                <a:latin typeface="Ubuntu Sans"/>
-                <a:ea typeface="Ubuntu Sans"/>
-                <a:cs typeface="Ubuntu Sans"/>
-              </a:rPr>
-              <a:t>Направихме</a:t>
-            </a:r>
-            <a:r>
-              <a:rPr lang="bg-BG">
-                <a:solidFill>
-                  <a:schemeClr val="bg1"/>
-                </a:solidFill>
-                <a:latin typeface="Ubuntu Sans"/>
-                <a:cs typeface="Ubuntu Sans"/>
-              </a:rPr>
-              <a:t> и сайт, който да се свърже с кутията и да нагласи</a:t>
-            </a:r>
-            <a:r>
-              <a:rPr lang="bg-BG">
-                <a:solidFill>
-                  <a:schemeClr val="bg1"/>
-                </a:solidFill>
-                <a:latin typeface="Ubuntu Sans"/>
-                <a:cs typeface="Ubuntu Sans"/>
-              </a:rPr>
-              <a:t> всички специфики.</a:t>
-            </a:r>
-            <a:endParaRPr lang="bg-BG">
-              <a:solidFill>
-                <a:schemeClr val="bg1"/>
-              </a:solidFill>
-              <a:latin typeface="Ubuntu Sans"/>
-              <a:cs typeface="Ubuntu Sans"/>
-            </a:endParaRPr>
-          </a:p>
-          <a:p>
-            <a:pPr marL="0" indent="0">
-              <a:buFont typeface="Arial"/>
-              <a:buNone/>
-              <a:defRPr/>
-            </a:pPr>
-            <a:endParaRPr lang="bg-BG">
-              <a:solidFill>
-                <a:schemeClr val="bg1"/>
-              </a:solidFill>
-              <a:latin typeface="Ubuntu Sans"/>
-              <a:cs typeface="Ubuntu Sans"/>
-            </a:endParaRPr>
-          </a:p>
-        </p:txBody>
-      </p:sp>
+      </p:pic>
+      <p:pic>
+        <p:nvPicPr>
+          <p:cNvPr id="1596485865" name=""/>
+          <p:cNvPicPr>
+            <a:picLocks noChangeAspect="1"/>
+          </p:cNvPicPr>
+          <p:nvPr/>
+        </p:nvPicPr>
+        <p:blipFill rotWithShape="1">
+          <a:blip r:embed="rId4"/>
+          <a:srcRect l="37680" t="21864" r="36802" b="22186"/>
+          <a:stretch/>
+        </p:blipFill>
+        <p:spPr bwMode="auto">
+          <a:xfrm flipH="0" flipV="0">
+            <a:off x="3311156" y="1595437"/>
+            <a:ext cx="1835040" cy="2574975"/>
+          </a:xfrm>
+          <a:prstGeom prst="rect">
+            <a:avLst/>
+          </a:prstGeom>
+        </p:spPr>
+      </p:pic>
+      <p:pic>
+        <p:nvPicPr>
+          <p:cNvPr id="1502131874" name=""/>
+          <p:cNvPicPr>
+            <a:picLocks noChangeAspect="1"/>
+          </p:cNvPicPr>
+          <p:nvPr/>
+        </p:nvPicPr>
+        <p:blipFill rotWithShape="1">
+          <a:blip r:embed="rId5"/>
+          <a:stretch/>
+        </p:blipFill>
+        <p:spPr bwMode="auto">
+          <a:xfrm flipH="0" flipV="0">
+            <a:off x="4952999" y="1959000"/>
+            <a:ext cx="2362967" cy="2362967"/>
+          </a:xfrm>
+          <a:prstGeom prst="rect">
+            <a:avLst/>
+          </a:prstGeom>
+        </p:spPr>
+      </p:pic>
+      <p:pic>
+        <p:nvPicPr>
+          <p:cNvPr id="1879026733" name=""/>
+          <p:cNvPicPr>
+            <a:picLocks noChangeAspect="1"/>
+          </p:cNvPicPr>
+          <p:nvPr/>
+        </p:nvPicPr>
+        <p:blipFill rotWithShape="1">
+          <a:blip r:embed="rId6"/>
+          <a:stretch/>
+        </p:blipFill>
+        <p:spPr bwMode="auto">
+          <a:xfrm flipH="0" flipV="0">
+            <a:off x="6182108" y="1729594"/>
+            <a:ext cx="4075376" cy="2306662"/>
+          </a:xfrm>
+          <a:prstGeom prst="rect">
+            <a:avLst/>
+          </a:prstGeom>
+        </p:spPr>
+      </p:pic>
     </p:spTree>
   </p:cSld>
   <p:clrMapOvr>
@@ -7665,7 +7682,7 @@
       </p:grpSpPr>
       <p:sp>
         <p:nvSpPr>
-          <p:cNvPr id="569148689" name="Title 1"/>
+          <p:cNvPr id="29157479" name="Title 1"/>
           <p:cNvSpPr>
             <a:spLocks noGrp="1"/>
           </p:cNvSpPr>
@@ -7673,16 +7690,21 @@
             <p:ph type="title"/>
           </p:nvPr>
         </p:nvSpPr>
-        <p:spPr bwMode="auto"/>
-        <p:txBody>
-          <a:bodyPr/>
-          <a:lstStyle/>
-          <a:p>
-            <a:pPr>
-              <a:defRPr/>
-            </a:pPr>
-            <a:r>
-              <a:rPr b="1">
+        <p:spPr bwMode="auto">
+          <a:xfrm>
+            <a:off x="528637" y="365124"/>
+            <a:ext cx="10515600" cy="1325562"/>
+          </a:xfrm>
+        </p:spPr>
+        <p:txBody>
+          <a:bodyPr/>
+          <a:lstStyle/>
+          <a:p>
+            <a:pPr>
+              <a:defRPr/>
+            </a:pPr>
+            <a:r>
+              <a:rPr lang="bg-BG" b="1">
                 <a:solidFill>
                   <a:schemeClr val="bg1"/>
                 </a:solidFill>
@@ -7690,18 +7712,7 @@
                 <a:ea typeface="Ubuntu Sans"/>
                 <a:cs typeface="Ubuntu Sans"/>
               </a:rPr>
-              <a:t>Medicine Man </a:t>
-            </a:r>
-            <a:r>
-              <a:rPr lang="bg-BG" b="1">
-                <a:solidFill>
-                  <a:schemeClr val="bg1"/>
-                </a:solidFill>
-                <a:latin typeface="Ubuntu Sans"/>
-                <a:ea typeface="Ubuntu Sans"/>
-                <a:cs typeface="Ubuntu Sans"/>
-              </a:rPr>
-              <a:t>в бъдещето:</a:t>
+              <a:t>Блокова схема</a:t>
             </a:r>
             <a:endParaRPr b="1">
               <a:solidFill>
@@ -7713,138 +7724,34 @@
           </a:p>
         </p:txBody>
       </p:sp>
-      <p:sp>
-        <p:nvSpPr>
-          <p:cNvPr id="1227581339" name=""/>
-          <p:cNvSpPr txBox="1"/>
+      <p:pic>
+        <p:nvPicPr>
+          <p:cNvPr id="1698191021" name=""/>
+          <p:cNvPicPr>
+            <a:picLocks noChangeAspect="1"/>
+          </p:cNvPicPr>
           <p:nvPr/>
-        </p:nvSpPr>
+        </p:nvPicPr>
+        <p:blipFill rotWithShape="1">
+          <a:blip r:embed="rId3"/>
+          <a:stretch/>
+        </p:blipFill>
         <p:spPr bwMode="auto">
-          <a:xfrm rot="0" flipH="0" flipV="0">
-            <a:off x="905849" y="1895474"/>
-            <a:ext cx="10439399" cy="366119"/>
+          <a:xfrm flipH="0" flipV="0">
+            <a:off x="1937963" y="1476375"/>
+            <a:ext cx="8316073" cy="4818809"/>
           </a:xfrm>
           <a:prstGeom prst="rect">
             <a:avLst/>
           </a:prstGeom>
-          <a:noFill/>
+          <a:ln w="12700">
+            <a:solidFill>
+              <a:schemeClr val="tx1"/>
+            </a:solidFill>
+            <a:prstDash val="solid"/>
+          </a:ln>
         </p:spPr>
-        <p:txBody>
-          <a:bodyPr vertOverflow="overflow" horzOverflow="overflow" vert="horz" wrap="square" lIns="91440" tIns="45720" rIns="91440" bIns="45720" numCol="1" spcCol="0" rtlCol="0" fromWordArt="0" anchor="t" anchorCtr="0" forceAA="0" upright="0" compatLnSpc="0">
-            <a:spAutoFit/>
-          </a:bodyPr>
-          <a:p>
-            <a:pPr>
-              <a:defRPr/>
-            </a:pPr>
-            <a:endParaRPr/>
-          </a:p>
-        </p:txBody>
-      </p:sp>
-      <p:sp>
-        <p:nvSpPr>
-          <p:cNvPr id="1880552459" name=""/>
-          <p:cNvSpPr txBox="1"/>
-          <p:nvPr/>
-        </p:nvSpPr>
-        <p:spPr bwMode="auto">
-          <a:xfrm rot="0" flipH="0" flipV="0">
-            <a:off x="905848" y="1790698"/>
-            <a:ext cx="7430758" cy="3627479"/>
-          </a:xfrm>
-          <a:prstGeom prst="rect">
-            <a:avLst/>
-          </a:prstGeom>
-          <a:noFill/>
-        </p:spPr>
-        <p:txBody>
-          <a:bodyPr vertOverflow="overflow" horzOverflow="overflow" vert="horz" wrap="square" lIns="91440" tIns="45720" rIns="91440" bIns="45720" numCol="1" spcCol="0" rtlCol="0" fromWordArt="0" anchor="t" anchorCtr="0" forceAA="0" upright="0" compatLnSpc="0">
-            <a:spAutoFit/>
-          </a:bodyPr>
-          <a:p>
-            <a:pPr marL="283879" indent="-283879">
-              <a:buFont typeface="Arial"/>
-              <a:buChar char="–"/>
-              <a:defRPr/>
-            </a:pPr>
-            <a:r>
-              <a:rPr lang="bg-BG" sz="2800">
-                <a:solidFill>
-                  <a:schemeClr val="bg1"/>
-                </a:solidFill>
-              </a:rPr>
-              <a:t>да избереш модел на кутията (и колко раздела има в нея)</a:t>
-            </a:r>
-            <a:endParaRPr sz="2800">
-              <a:solidFill>
-                <a:schemeClr val="bg1"/>
-              </a:solidFill>
-            </a:endParaRPr>
-          </a:p>
-          <a:p>
-            <a:pPr marL="283879" indent="-283879">
-              <a:buFont typeface="Arial"/>
-              <a:buChar char="–"/>
-              <a:defRPr/>
-            </a:pPr>
-            <a:r>
-              <a:rPr lang="bg-BG" sz="2800">
-                <a:solidFill>
-                  <a:schemeClr val="bg1"/>
-                </a:solidFill>
-              </a:rPr>
-              <a:t>при 5 минути без изключване на алармата се звъни на извънреден контакт</a:t>
-            </a:r>
-            <a:endParaRPr sz="2800">
-              <a:solidFill>
-                <a:schemeClr val="bg1"/>
-              </a:solidFill>
-            </a:endParaRPr>
-          </a:p>
-          <a:p>
-            <a:pPr marL="283879" indent="-283879">
-              <a:buFont typeface="Arial"/>
-              <a:buChar char="–"/>
-              <a:defRPr/>
-            </a:pPr>
-            <a:r>
-              <a:rPr lang="bg-BG" sz="2800">
-                <a:solidFill>
-                  <a:schemeClr val="bg1"/>
-                </a:solidFill>
-              </a:rPr>
-              <a:t>да може да се избира всякаква песен за алармата </a:t>
-            </a:r>
-            <a:endParaRPr lang="bg-BG">
-              <a:solidFill>
-                <a:schemeClr val="bg1"/>
-              </a:solidFill>
-            </a:endParaRPr>
-          </a:p>
-          <a:p>
-            <a:pPr marL="283879" indent="-283879">
-              <a:buFont typeface="Arial"/>
-              <a:buChar char="–"/>
-              <a:defRPr/>
-            </a:pPr>
-            <a:endParaRPr>
-              <a:solidFill>
-                <a:schemeClr val="bg1"/>
-              </a:solidFill>
-            </a:endParaRPr>
-          </a:p>
-          <a:p>
-            <a:pPr>
-              <a:defRPr/>
-            </a:pPr>
-            <a:endParaRPr>
-              <a:solidFill>
-                <a:schemeClr val="bg1"/>
-              </a:solidFill>
-            </a:endParaRPr>
-          </a:p>
-        </p:txBody>
-      </p:sp>
+      </p:pic>
     </p:spTree>
   </p:cSld>
   <p:clrMapOvr>
@@ -7917,6 +7824,34 @@
           </a:p>
         </p:txBody>
       </p:sp>
+      <p:pic>
+        <p:nvPicPr>
+          <p:cNvPr id="1277749863" name=""/>
+          <p:cNvPicPr>
+            <a:picLocks noChangeAspect="1"/>
+          </p:cNvPicPr>
+          <p:nvPr/>
+        </p:nvPicPr>
+        <p:blipFill rotWithShape="1">
+          <a:blip r:embed="rId3"/>
+          <a:stretch/>
+        </p:blipFill>
+        <p:spPr bwMode="auto">
+          <a:xfrm flipH="0" flipV="0">
+            <a:off x="1991258" y="1690687"/>
+            <a:ext cx="8209483" cy="4762499"/>
+          </a:xfrm>
+          <a:prstGeom prst="rect">
+            <a:avLst/>
+          </a:prstGeom>
+          <a:ln w="12700">
+            <a:solidFill>
+              <a:schemeClr val="tx1"/>
+            </a:solidFill>
+            <a:prstDash val="solid"/>
+          </a:ln>
+        </p:spPr>
+      </p:pic>
     </p:spTree>
   </p:cSld>
   <p:clrMapOvr>
@@ -7952,24 +7887,30 @@
       </p:grpSpPr>
       <p:sp>
         <p:nvSpPr>
-          <p:cNvPr id="29157479" name="Title 1"/>
-          <p:cNvSpPr>
-            <a:spLocks noGrp="1"/>
-          </p:cNvSpPr>
-          <p:nvPr>
-            <p:ph type="title"/>
-          </p:nvPr>
-        </p:nvSpPr>
-        <p:spPr bwMode="auto"/>
-        <p:txBody>
-          <a:bodyPr/>
-          <a:lstStyle/>
-          <a:p>
-            <a:pPr>
-              <a:defRPr/>
-            </a:pPr>
-            <a:r>
-              <a:rPr lang="bg-BG" b="1">
+          <p:cNvPr id="2118172442" name=""/>
+          <p:cNvSpPr txBox="1"/>
+          <p:nvPr/>
+        </p:nvSpPr>
+        <p:spPr bwMode="auto">
+          <a:xfrm rot="0" flipH="0" flipV="0">
+            <a:off x="2239349" y="2074905"/>
+            <a:ext cx="7420694" cy="1189080"/>
+          </a:xfrm>
+          <a:prstGeom prst="rect">
+            <a:avLst/>
+          </a:prstGeom>
+          <a:noFill/>
+        </p:spPr>
+        <p:txBody>
+          <a:bodyPr vertOverflow="overflow" horzOverflow="overflow" vert="horz" wrap="square" lIns="91440" tIns="45720" rIns="91440" bIns="45720" numCol="1" spcCol="0" rtlCol="0" fromWordArt="0" anchor="t" anchorCtr="0" forceAA="0" upright="0" compatLnSpc="0">
+            <a:spAutoFit/>
+          </a:bodyPr>
+          <a:p>
+            <a:pPr>
+              <a:defRPr/>
+            </a:pPr>
+            <a:r>
+              <a:rPr lang="bg-BG" sz="7200" b="1">
                 <a:solidFill>
                   <a:schemeClr val="bg1"/>
                 </a:solidFill>
@@ -7977,9 +7918,9 @@
                 <a:ea typeface="Ubuntu Sans"/>
                 <a:cs typeface="Ubuntu Sans"/>
               </a:rPr>
-              <a:t>Блокова схема</a:t>
-            </a:r>
-            <a:endParaRPr b="1">
+              <a:t>Демонстрация</a:t>
+            </a:r>
+            <a:endParaRPr sz="7200" b="1">
               <a:solidFill>
                 <a:schemeClr val="bg1"/>
               </a:solidFill>
@@ -8024,14 +7965,260 @@
       </p:grpSpPr>
       <p:sp>
         <p:nvSpPr>
-          <p:cNvPr id="1778332139" name=""/>
+          <p:cNvPr id="1043915878" name="Title 1"/>
+          <p:cNvSpPr>
+            <a:spLocks noGrp="1"/>
+          </p:cNvSpPr>
+          <p:nvPr>
+            <p:ph type="title"/>
+          </p:nvPr>
+        </p:nvSpPr>
+        <p:spPr bwMode="auto"/>
+        <p:txBody>
+          <a:bodyPr/>
+          <a:lstStyle/>
+          <a:p>
+            <a:pPr>
+              <a:defRPr/>
+            </a:pPr>
+            <a:r>
+              <a:rPr lang="bg-BG" b="1">
+                <a:solidFill>
+                  <a:schemeClr val="bg1"/>
+                </a:solidFill>
+                <a:latin typeface="Ubuntu Sans"/>
+                <a:ea typeface="Ubuntu Sans"/>
+                <a:cs typeface="Ubuntu Sans"/>
+              </a:rPr>
+              <a:t>Анализ на живота на батерията</a:t>
+            </a:r>
+            <a:endParaRPr b="1">
+              <a:solidFill>
+                <a:schemeClr val="bg1"/>
+              </a:solidFill>
+              <a:latin typeface="Ubuntu Sans"/>
+              <a:cs typeface="Ubuntu Sans"/>
+            </a:endParaRPr>
+          </a:p>
+        </p:txBody>
+      </p:sp>
+      <p:sp>
+        <p:nvSpPr>
+          <p:cNvPr id="713705419" name="Content Placeholder 2"/>
+          <p:cNvSpPr>
+            <a:spLocks noGrp="1"/>
+          </p:cNvSpPr>
+          <p:nvPr>
+            <p:ph idx="1"/>
+          </p:nvPr>
+        </p:nvSpPr>
+        <p:spPr bwMode="auto">
+          <a:xfrm>
+            <a:off x="445293" y="1575593"/>
+            <a:ext cx="10515600" cy="4351338"/>
+          </a:xfrm>
+        </p:spPr>
+        <p:txBody>
+          <a:bodyPr/>
+          <a:lstStyle/>
+          <a:p>
+            <a:pPr>
+              <a:defRPr/>
+            </a:pPr>
+            <a:r>
+              <a:rPr lang="bg-BG">
+                <a:solidFill>
+                  <a:schemeClr val="bg1"/>
+                </a:solidFill>
+                <a:latin typeface="Ubuntu Sans"/>
+                <a:ea typeface="Ubuntu Sans"/>
+                <a:cs typeface="Ubuntu Sans"/>
+              </a:rPr>
+              <a:t>Капацитет: </a:t>
+            </a:r>
+            <a:r>
+              <a:rPr lang="en-US">
+                <a:solidFill>
+                  <a:schemeClr val="bg1"/>
+                </a:solidFill>
+                <a:latin typeface="Ubuntu Sans"/>
+                <a:ea typeface="Ubuntu Sans"/>
+                <a:cs typeface="Ubuntu Sans"/>
+              </a:rPr>
+              <a:t>600 mAh</a:t>
+            </a:r>
+            <a:endParaRPr lang="en-US">
+              <a:solidFill>
+                <a:schemeClr val="bg1"/>
+              </a:solidFill>
+              <a:latin typeface="Ubuntu Sans"/>
+              <a:ea typeface="Ubuntu Sans"/>
+              <a:cs typeface="Ubuntu Sans"/>
+            </a:endParaRPr>
+          </a:p>
+          <a:p>
+            <a:pPr>
+              <a:defRPr/>
+            </a:pPr>
+            <a:r>
+              <a:rPr lang="bg-BG">
+                <a:solidFill>
+                  <a:schemeClr val="bg1"/>
+                </a:solidFill>
+                <a:latin typeface="Ubuntu Sans"/>
+                <a:ea typeface="Ubuntu Sans"/>
+                <a:cs typeface="Ubuntu Sans"/>
+              </a:rPr>
+              <a:t>Изчисления – спрямо целодневна работа на проекта</a:t>
+            </a:r>
+            <a:endParaRPr lang="bg-BG">
+              <a:solidFill>
+                <a:schemeClr val="bg1"/>
+              </a:solidFill>
+              <a:latin typeface="Ubuntu Sans"/>
+              <a:ea typeface="Ubuntu Sans"/>
+              <a:cs typeface="Ubuntu Sans"/>
+            </a:endParaRPr>
+          </a:p>
+          <a:p>
+            <a:pPr>
+              <a:defRPr/>
+            </a:pPr>
+            <a:r>
+              <a:rPr lang="bg-BG">
+                <a:solidFill>
+                  <a:schemeClr val="bg1"/>
+                </a:solidFill>
+                <a:latin typeface="Ubuntu Sans"/>
+                <a:ea typeface="Ubuntu Sans"/>
+                <a:cs typeface="Ubuntu Sans"/>
+              </a:rPr>
+              <a:t>Консумация на ток:</a:t>
+            </a:r>
+            <a:endParaRPr lang="bg-BG">
+              <a:solidFill>
+                <a:schemeClr val="bg1"/>
+              </a:solidFill>
+              <a:latin typeface="Ubuntu Sans"/>
+              <a:ea typeface="Ubuntu Sans"/>
+              <a:cs typeface="Ubuntu Sans"/>
+            </a:endParaRPr>
+          </a:p>
+          <a:p>
+            <a:pPr marL="457200" lvl="1" indent="0">
+              <a:buFont typeface="Arial"/>
+              <a:buNone/>
+              <a:defRPr/>
+            </a:pPr>
+            <a:r>
+              <a:rPr sz="2800" b="0" i="0" u="none">
+                <a:solidFill>
+                  <a:schemeClr val="bg1"/>
+                </a:solidFill>
+                <a:latin typeface="Ubuntu Sans"/>
+                <a:ea typeface="Ubuntu Sans"/>
+                <a:cs typeface="Ubuntu Sans"/>
+              </a:rPr>
+              <a:t>Arduino Uno R4: 140 mA </a:t>
+            </a:r>
+            <a:endParaRPr sz="2800" b="0" i="0" u="none">
+              <a:solidFill>
+                <a:schemeClr val="bg1"/>
+              </a:solidFill>
+              <a:latin typeface="Ubuntu Sans"/>
+              <a:ea typeface="Ubuntu Sans"/>
+              <a:cs typeface="Ubuntu Sans"/>
+            </a:endParaRPr>
+          </a:p>
+          <a:p>
+            <a:pPr marL="457200" lvl="1" indent="0">
+              <a:buFont typeface="Arial"/>
+              <a:buNone/>
+              <a:defRPr/>
+            </a:pPr>
+            <a:r>
+              <a:rPr sz="2800" b="0" i="0" u="none">
+                <a:solidFill>
+                  <a:schemeClr val="bg1"/>
+                </a:solidFill>
+                <a:latin typeface="Ubuntu Sans"/>
+                <a:ea typeface="Ubuntu Sans"/>
+                <a:cs typeface="Ubuntu Sans"/>
+              </a:rPr>
+              <a:t>2xLEDs и зумери(Средно работят по 1 час на ден): 80 mA</a:t>
+            </a:r>
+            <a:endParaRPr sz="2800" b="0" i="0" u="none">
+              <a:solidFill>
+                <a:schemeClr val="bg1"/>
+              </a:solidFill>
+              <a:latin typeface="Ubuntu Sans"/>
+              <a:ea typeface="Ubuntu Sans"/>
+              <a:cs typeface="Ubuntu Sans"/>
+            </a:endParaRPr>
+          </a:p>
+          <a:p>
+            <a:pPr marL="457200" lvl="1" indent="0">
+              <a:buFont typeface="Arial"/>
+              <a:buNone/>
+              <a:defRPr/>
+            </a:pPr>
+            <a:r>
+              <a:rPr sz="2800" b="0" i="0" u="none">
+                <a:solidFill>
+                  <a:schemeClr val="bg1"/>
+                </a:solidFill>
+                <a:latin typeface="Ubuntu Sans"/>
+                <a:ea typeface="Ubuntu Sans"/>
+                <a:cs typeface="Ubuntu Sans"/>
+              </a:rPr>
+              <a:t>IR Sensor: 25 mA </a:t>
+            </a:r>
+            <a:endParaRPr sz="2800" b="0" i="0" u="none">
+              <a:solidFill>
+                <a:schemeClr val="bg1"/>
+              </a:solidFill>
+              <a:latin typeface="Ubuntu Sans"/>
+              <a:ea typeface="Ubuntu Sans"/>
+              <a:cs typeface="Ubuntu Sans"/>
+            </a:endParaRPr>
+          </a:p>
+          <a:p>
+            <a:pPr marL="457200" lvl="1" indent="0">
+              <a:buFont typeface="Arial"/>
+              <a:buNone/>
+              <a:defRPr/>
+            </a:pPr>
+            <a:r>
+              <a:rPr sz="2800" b="0" i="0" u="none">
+                <a:solidFill>
+                  <a:schemeClr val="bg1"/>
+                </a:solidFill>
+                <a:latin typeface="Ubuntu Sans"/>
+                <a:ea typeface="Ubuntu Sans"/>
+                <a:cs typeface="Ubuntu Sans"/>
+              </a:rPr>
+              <a:t>I        =140+ (80 * 1/24)+25=168.33 mA</a:t>
+            </a:r>
+            <a:endParaRPr>
+              <a:solidFill>
+                <a:schemeClr val="bg1"/>
+              </a:solidFill>
+              <a:latin typeface="Ubuntu Sans"/>
+              <a:cs typeface="Ubuntu Sans"/>
+            </a:endParaRPr>
+          </a:p>
+        </p:txBody>
+      </p:sp>
+      <p:sp>
+        <p:nvSpPr>
+          <p:cNvPr id="1640567046" name=""/>
           <p:cNvSpPr txBox="1"/>
           <p:nvPr/>
         </p:nvSpPr>
         <p:spPr bwMode="auto">
           <a:xfrm rot="0" flipH="0" flipV="0">
-            <a:off x="2239349" y="2074905"/>
-            <a:ext cx="7420694" cy="1189080"/>
+            <a:off x="1120406" y="4574973"/>
+            <a:ext cx="1988703" cy="366120"/>
           </a:xfrm>
           <a:prstGeom prst="rect">
             <a:avLst/>
@@ -8047,7 +8234,7 @@
               <a:defRPr/>
             </a:pPr>
             <a:r>
-              <a:rPr lang="bg-BG" sz="7200" b="1">
+              <a:rPr lang="en-US" sz="1800" b="0" i="0" u="none" strike="noStrike" cap="none" spc="0">
                 <a:solidFill>
                   <a:schemeClr val="bg1"/>
                 </a:solidFill>
@@ -8055,15 +8242,9 @@
                 <a:ea typeface="Ubuntu Sans"/>
                 <a:cs typeface="Ubuntu Sans"/>
               </a:rPr>
-              <a:t>Демонстрация</a:t>
-            </a:r>
-            <a:endParaRPr sz="7200" b="1">
-              <a:solidFill>
-                <a:schemeClr val="bg1"/>
-              </a:solidFill>
-              <a:latin typeface="Ubuntu Sans"/>
-              <a:cs typeface="Ubuntu Sans"/>
-            </a:endParaRPr>
+              <a:t>total</a:t>
+            </a:r>
+            <a:endParaRPr/>
           </a:p>
         </p:txBody>
       </p:sp>

--- a/Prezentaciq.pptx
+++ b/Prezentaciq.pptx
@@ -147,7 +147,7 @@
       </p:grpSpPr>
       <p:sp>
         <p:nvSpPr>
-          <p:cNvPr id="58436473" name="Header Placeholder 1"/>
+          <p:cNvPr id="2050368456" name="Header Placeholder 1"/>
           <p:cNvSpPr>
             <a:spLocks noGrp="1"/>
           </p:cNvSpPr>
@@ -181,7 +181,7 @@
       </p:sp>
       <p:sp>
         <p:nvSpPr>
-          <p:cNvPr id="533549276" name="Date Placeholder 2"/>
+          <p:cNvPr id="192034362" name="Date Placeholder 2"/>
           <p:cNvSpPr>
             <a:spLocks noGrp="1"/>
           </p:cNvSpPr>
@@ -219,7 +219,7 @@
       </p:sp>
       <p:sp>
         <p:nvSpPr>
-          <p:cNvPr id="718225031" name="Slide Image Placeholder 3"/>
+          <p:cNvPr id="361398548" name="Slide Image Placeholder 3"/>
           <p:cNvSpPr>
             <a:spLocks noChangeAspect="1" noGrp="1" noRot="1"/>
           </p:cNvSpPr>
@@ -255,7 +255,7 @@
       </p:sp>
       <p:sp>
         <p:nvSpPr>
-          <p:cNvPr id="286838563" name="Notes Placeholder 4"/>
+          <p:cNvPr id="1910018261" name="Notes Placeholder 4"/>
           <p:cNvSpPr>
             <a:spLocks noGrp="1"/>
           </p:cNvSpPr>
@@ -329,7 +329,7 @@
       </p:sp>
       <p:sp>
         <p:nvSpPr>
-          <p:cNvPr id="531845967" name="Footer Placeholder 5"/>
+          <p:cNvPr id="1208110132" name="Footer Placeholder 5"/>
           <p:cNvSpPr>
             <a:spLocks noGrp="1"/>
           </p:cNvSpPr>
@@ -363,7 +363,7 @@
       </p:sp>
       <p:sp>
         <p:nvSpPr>
-          <p:cNvPr id="1746309567" name="Slide Number Placeholder 6"/>
+          <p:cNvPr id="943943494" name="Slide Number Placeholder 6"/>
           <p:cNvSpPr>
             <a:spLocks noGrp="1"/>
           </p:cNvSpPr>
@@ -516,7 +516,7 @@
       </p:grpSpPr>
       <p:sp>
         <p:nvSpPr>
-          <p:cNvPr id="1306486001" name="Slide Image Placeholder 1"/>
+          <p:cNvPr id="1565249380" name="Slide Image Placeholder 1"/>
           <p:cNvSpPr>
             <a:spLocks noChangeAspect="1" noGrp="1" noRot="1"/>
           </p:cNvSpPr>
@@ -533,7 +533,7 @@
       </p:sp>
       <p:sp>
         <p:nvSpPr>
-          <p:cNvPr id="334811234" name="Notes Placeholder 2"/>
+          <p:cNvPr id="898492015" name="Notes Placeholder 2"/>
           <p:cNvSpPr>
             <a:spLocks noGrp="1"/>
           </p:cNvSpPr>
@@ -558,7 +558,7 @@
       </p:sp>
       <p:sp>
         <p:nvSpPr>
-          <p:cNvPr id="114077903" name="Slide Number Placeholder 3"/>
+          <p:cNvPr id="1436740331" name="Slide Number Placeholder 3"/>
           <p:cNvSpPr>
             <a:spLocks noGrp="1"/>
           </p:cNvSpPr>
@@ -609,7 +609,7 @@
       </p:grpSpPr>
       <p:sp>
         <p:nvSpPr>
-          <p:cNvPr id="280794990" name="Slide Image Placeholder 1"/>
+          <p:cNvPr id="1166718140" name="Slide Image Placeholder 1"/>
           <p:cNvSpPr>
             <a:spLocks noChangeAspect="1" noGrp="1" noRot="1"/>
           </p:cNvSpPr>
@@ -621,7 +621,7 @@
       </p:sp>
       <p:sp>
         <p:nvSpPr>
-          <p:cNvPr id="1370732853" name="Notes Placeholder 2"/>
+          <p:cNvPr id="2023877163" name="Notes Placeholder 2"/>
           <p:cNvSpPr>
             <a:spLocks noGrp="1"/>
           </p:cNvSpPr>
@@ -643,7 +643,7 @@
       </p:sp>
       <p:sp>
         <p:nvSpPr>
-          <p:cNvPr id="1046857221" name="Slide Number Placeholder 3"/>
+          <p:cNvPr id="703464308" name="Slide Number Placeholder 3"/>
           <p:cNvSpPr>
             <a:spLocks noGrp="1"/>
           </p:cNvSpPr>
@@ -694,7 +694,7 @@
       </p:grpSpPr>
       <p:sp>
         <p:nvSpPr>
-          <p:cNvPr id="513255465" name="Slide Image Placeholder 1"/>
+          <p:cNvPr id="410184070" name="Slide Image Placeholder 1"/>
           <p:cNvSpPr>
             <a:spLocks noChangeAspect="1" noGrp="1" noRot="1"/>
           </p:cNvSpPr>
@@ -706,7 +706,7 @@
       </p:sp>
       <p:sp>
         <p:nvSpPr>
-          <p:cNvPr id="201265743" name="Notes Placeholder 2"/>
+          <p:cNvPr id="226296137" name="Notes Placeholder 2"/>
           <p:cNvSpPr>
             <a:spLocks noGrp="1"/>
           </p:cNvSpPr>
@@ -728,7 +728,7 @@
       </p:sp>
       <p:sp>
         <p:nvSpPr>
-          <p:cNvPr id="706094252" name="Slide Number Placeholder 3"/>
+          <p:cNvPr id="1753647276" name="Slide Number Placeholder 3"/>
           <p:cNvSpPr>
             <a:spLocks noGrp="1"/>
           </p:cNvSpPr>
@@ -779,7 +779,7 @@
       </p:grpSpPr>
       <p:sp>
         <p:nvSpPr>
-          <p:cNvPr id="726774625" name="Slide Image Placeholder 1"/>
+          <p:cNvPr id="1363638184" name="Slide Image Placeholder 1"/>
           <p:cNvSpPr>
             <a:spLocks noChangeAspect="1" noGrp="1" noRot="1"/>
           </p:cNvSpPr>
@@ -791,7 +791,7 @@
       </p:sp>
       <p:sp>
         <p:nvSpPr>
-          <p:cNvPr id="1398756412" name="Notes Placeholder 2"/>
+          <p:cNvPr id="822912470" name="Notes Placeholder 2"/>
           <p:cNvSpPr>
             <a:spLocks noGrp="1"/>
           </p:cNvSpPr>
@@ -813,7 +813,7 @@
       </p:sp>
       <p:sp>
         <p:nvSpPr>
-          <p:cNvPr id="804975547" name="Slide Number Placeholder 3"/>
+          <p:cNvPr id="450607563" name="Slide Number Placeholder 3"/>
           <p:cNvSpPr>
             <a:spLocks noGrp="1"/>
           </p:cNvSpPr>
@@ -864,7 +864,7 @@
       </p:grpSpPr>
       <p:sp>
         <p:nvSpPr>
-          <p:cNvPr id="928911077" name="Slide Image Placeholder 1"/>
+          <p:cNvPr id="71504776" name="Slide Image Placeholder 1"/>
           <p:cNvSpPr>
             <a:spLocks noChangeAspect="1" noGrp="1" noRot="1"/>
           </p:cNvSpPr>
@@ -876,7 +876,7 @@
       </p:sp>
       <p:sp>
         <p:nvSpPr>
-          <p:cNvPr id="18493334" name="Notes Placeholder 2"/>
+          <p:cNvPr id="90241644" name="Notes Placeholder 2"/>
           <p:cNvSpPr>
             <a:spLocks noGrp="1"/>
           </p:cNvSpPr>
@@ -898,7 +898,7 @@
       </p:sp>
       <p:sp>
         <p:nvSpPr>
-          <p:cNvPr id="633197055" name="Slide Number Placeholder 3"/>
+          <p:cNvPr id="1866224512" name="Slide Number Placeholder 3"/>
           <p:cNvSpPr>
             <a:spLocks noGrp="1"/>
           </p:cNvSpPr>
@@ -949,7 +949,7 @@
       </p:grpSpPr>
       <p:sp>
         <p:nvSpPr>
-          <p:cNvPr id="1904860296" name="Slide Image Placeholder 1"/>
+          <p:cNvPr id="1897500666" name="Slide Image Placeholder 1"/>
           <p:cNvSpPr>
             <a:spLocks noChangeAspect="1" noGrp="1" noRot="1"/>
           </p:cNvSpPr>
@@ -961,7 +961,7 @@
       </p:sp>
       <p:sp>
         <p:nvSpPr>
-          <p:cNvPr id="256931860" name="Notes Placeholder 2"/>
+          <p:cNvPr id="1811296558" name="Notes Placeholder 2"/>
           <p:cNvSpPr>
             <a:spLocks noGrp="1"/>
           </p:cNvSpPr>
@@ -983,7 +983,7 @@
       </p:sp>
       <p:sp>
         <p:nvSpPr>
-          <p:cNvPr id="262495085" name="Slide Number Placeholder 3"/>
+          <p:cNvPr id="1449314117" name="Slide Number Placeholder 3"/>
           <p:cNvSpPr>
             <a:spLocks noGrp="1"/>
           </p:cNvSpPr>
@@ -1034,7 +1034,7 @@
       </p:grpSpPr>
       <p:sp>
         <p:nvSpPr>
-          <p:cNvPr id="1306180675" name="Slide Image Placeholder 1"/>
+          <p:cNvPr id="792608559" name="Slide Image Placeholder 1"/>
           <p:cNvSpPr>
             <a:spLocks noChangeAspect="1" noGrp="1" noRot="1"/>
           </p:cNvSpPr>
@@ -1046,7 +1046,7 @@
       </p:sp>
       <p:sp>
         <p:nvSpPr>
-          <p:cNvPr id="1843498073" name="Notes Placeholder 2"/>
+          <p:cNvPr id="167588895" name="Notes Placeholder 2"/>
           <p:cNvSpPr>
             <a:spLocks noGrp="1"/>
           </p:cNvSpPr>
@@ -1068,7 +1068,7 @@
       </p:sp>
       <p:sp>
         <p:nvSpPr>
-          <p:cNvPr id="1170130912" name="Slide Number Placeholder 3"/>
+          <p:cNvPr id="993591660" name="Slide Number Placeholder 3"/>
           <p:cNvSpPr>
             <a:spLocks noGrp="1"/>
           </p:cNvSpPr>
@@ -1119,7 +1119,7 @@
       </p:grpSpPr>
       <p:sp>
         <p:nvSpPr>
-          <p:cNvPr id="2037917213" name="Slide Image Placeholder 1"/>
+          <p:cNvPr id="1301283873" name="Slide Image Placeholder 1"/>
           <p:cNvSpPr>
             <a:spLocks noChangeAspect="1" noGrp="1" noRot="1"/>
           </p:cNvSpPr>
@@ -1131,7 +1131,7 @@
       </p:sp>
       <p:sp>
         <p:nvSpPr>
-          <p:cNvPr id="1956270095" name="Notes Placeholder 2"/>
+          <p:cNvPr id="229722821" name="Notes Placeholder 2"/>
           <p:cNvSpPr>
             <a:spLocks noGrp="1"/>
           </p:cNvSpPr>
@@ -1153,7 +1153,7 @@
       </p:sp>
       <p:sp>
         <p:nvSpPr>
-          <p:cNvPr id="1813001798" name="Slide Number Placeholder 3"/>
+          <p:cNvPr id="545772084" name="Slide Number Placeholder 3"/>
           <p:cNvSpPr>
             <a:spLocks noGrp="1"/>
           </p:cNvSpPr>
@@ -1204,7 +1204,7 @@
       </p:grpSpPr>
       <p:sp>
         <p:nvSpPr>
-          <p:cNvPr id="1257408769" name="Slide Image Placeholder 1"/>
+          <p:cNvPr id="166850935" name="Slide Image Placeholder 1"/>
           <p:cNvSpPr>
             <a:spLocks noChangeAspect="1" noGrp="1" noRot="1"/>
           </p:cNvSpPr>
@@ -1216,7 +1216,7 @@
       </p:sp>
       <p:sp>
         <p:nvSpPr>
-          <p:cNvPr id="1453484464" name="Notes Placeholder 2"/>
+          <p:cNvPr id="2122383909" name="Notes Placeholder 2"/>
           <p:cNvSpPr>
             <a:spLocks noGrp="1"/>
           </p:cNvSpPr>
@@ -1238,7 +1238,7 @@
       </p:sp>
       <p:sp>
         <p:nvSpPr>
-          <p:cNvPr id="1330786355" name="Slide Number Placeholder 3"/>
+          <p:cNvPr id="305991745" name="Slide Number Placeholder 3"/>
           <p:cNvSpPr>
             <a:spLocks noGrp="1"/>
           </p:cNvSpPr>
@@ -1289,7 +1289,7 @@
       </p:grpSpPr>
       <p:sp>
         <p:nvSpPr>
-          <p:cNvPr id="1523799460" name="Slide Image Placeholder 1"/>
+          <p:cNvPr id="1294111014" name="Slide Image Placeholder 1"/>
           <p:cNvSpPr>
             <a:spLocks noChangeAspect="1" noGrp="1" noRot="1"/>
           </p:cNvSpPr>
@@ -1301,7 +1301,7 @@
       </p:sp>
       <p:sp>
         <p:nvSpPr>
-          <p:cNvPr id="958540731" name="Notes Placeholder 2"/>
+          <p:cNvPr id="1729696408" name="Notes Placeholder 2"/>
           <p:cNvSpPr>
             <a:spLocks noGrp="1"/>
           </p:cNvSpPr>
@@ -1323,7 +1323,7 @@
       </p:sp>
       <p:sp>
         <p:nvSpPr>
-          <p:cNvPr id="71238620" name="Slide Number Placeholder 3"/>
+          <p:cNvPr id="1721391838" name="Slide Number Placeholder 3"/>
           <p:cNvSpPr>
             <a:spLocks noGrp="1"/>
           </p:cNvSpPr>
@@ -1544,7 +1544,7 @@
       </p:grpSpPr>
       <p:sp>
         <p:nvSpPr>
-          <p:cNvPr id="2061537826" name="Slide Image Placeholder 1"/>
+          <p:cNvPr id="2000243518" name="Slide Image Placeholder 1"/>
           <p:cNvSpPr>
             <a:spLocks noChangeAspect="1" noGrp="1" noRot="1"/>
           </p:cNvSpPr>
@@ -1556,7 +1556,7 @@
       </p:sp>
       <p:sp>
         <p:nvSpPr>
-          <p:cNvPr id="1698493071" name="Notes Placeholder 2"/>
+          <p:cNvPr id="680134826" name="Notes Placeholder 2"/>
           <p:cNvSpPr>
             <a:spLocks noGrp="1"/>
           </p:cNvSpPr>
@@ -1578,7 +1578,7 @@
       </p:sp>
       <p:sp>
         <p:nvSpPr>
-          <p:cNvPr id="1792982272" name="Slide Number Placeholder 3"/>
+          <p:cNvPr id="419717649" name="Slide Number Placeholder 3"/>
           <p:cNvSpPr>
             <a:spLocks noGrp="1"/>
           </p:cNvSpPr>
@@ -1714,7 +1714,7 @@
       </p:grpSpPr>
       <p:sp>
         <p:nvSpPr>
-          <p:cNvPr id="2028843225" name="Title 1"/>
+          <p:cNvPr id="1448717769" name="Title 1"/>
           <p:cNvSpPr>
             <a:spLocks noGrp="1"/>
           </p:cNvSpPr>
@@ -1749,7 +1749,7 @@
       </p:sp>
       <p:sp>
         <p:nvSpPr>
-          <p:cNvPr id="1211600737" name="Subtitle 2"/>
+          <p:cNvPr id="85008547" name="Subtitle 2"/>
           <p:cNvSpPr>
             <a:spLocks noGrp="1"/>
           </p:cNvSpPr>
@@ -1817,7 +1817,7 @@
       </p:sp>
       <p:sp>
         <p:nvSpPr>
-          <p:cNvPr id="898336554" name="Date Placeholder 3"/>
+          <p:cNvPr id="635512052" name="Date Placeholder 3"/>
           <p:cNvSpPr>
             <a:spLocks noGrp="1"/>
           </p:cNvSpPr>
@@ -1843,7 +1843,7 @@
       </p:sp>
       <p:sp>
         <p:nvSpPr>
-          <p:cNvPr id="1499356894" name="Footer Placeholder 4"/>
+          <p:cNvPr id="251749584" name="Footer Placeholder 4"/>
           <p:cNvSpPr>
             <a:spLocks noGrp="1"/>
           </p:cNvSpPr>
@@ -1865,7 +1865,7 @@
       </p:sp>
       <p:sp>
         <p:nvSpPr>
-          <p:cNvPr id="333492766" name="Slide Number Placeholder 5"/>
+          <p:cNvPr id="2005432501" name="Slide Number Placeholder 5"/>
           <p:cNvSpPr>
             <a:spLocks noGrp="1"/>
           </p:cNvSpPr>
@@ -1916,7 +1916,7 @@
       </p:grpSpPr>
       <p:sp>
         <p:nvSpPr>
-          <p:cNvPr id="971245133" name="Title 1"/>
+          <p:cNvPr id="1487501295" name="Title 1"/>
           <p:cNvSpPr>
             <a:spLocks noGrp="1"/>
           </p:cNvSpPr>
@@ -1942,7 +1942,7 @@
       </p:sp>
       <p:sp>
         <p:nvSpPr>
-          <p:cNvPr id="824475277" name="Vertical Text Placeholder 2"/>
+          <p:cNvPr id="981967108" name="Vertical Text Placeholder 2"/>
           <p:cNvSpPr>
             <a:spLocks noGrp="1"/>
           </p:cNvSpPr>
@@ -2008,7 +2008,7 @@
       </p:sp>
       <p:sp>
         <p:nvSpPr>
-          <p:cNvPr id="1108581748" name="Date Placeholder 3"/>
+          <p:cNvPr id="2046440852" name="Date Placeholder 3"/>
           <p:cNvSpPr>
             <a:spLocks noGrp="1"/>
           </p:cNvSpPr>
@@ -2034,7 +2034,7 @@
       </p:sp>
       <p:sp>
         <p:nvSpPr>
-          <p:cNvPr id="1387668411" name="Footer Placeholder 4"/>
+          <p:cNvPr id="1468484678" name="Footer Placeholder 4"/>
           <p:cNvSpPr>
             <a:spLocks noGrp="1"/>
           </p:cNvSpPr>
@@ -2056,7 +2056,7 @@
       </p:sp>
       <p:sp>
         <p:nvSpPr>
-          <p:cNvPr id="1849048940" name="Slide Number Placeholder 5"/>
+          <p:cNvPr id="1134318994" name="Slide Number Placeholder 5"/>
           <p:cNvSpPr>
             <a:spLocks noGrp="1"/>
           </p:cNvSpPr>
@@ -2107,7 +2107,7 @@
       </p:grpSpPr>
       <p:sp>
         <p:nvSpPr>
-          <p:cNvPr id="1978342587" name="Vertical Title 1"/>
+          <p:cNvPr id="1788007632" name="Vertical Title 1"/>
           <p:cNvSpPr>
             <a:spLocks noGrp="1"/>
           </p:cNvSpPr>
@@ -2138,7 +2138,7 @@
       </p:sp>
       <p:sp>
         <p:nvSpPr>
-          <p:cNvPr id="451121903" name="Vertical Text Placeholder 2"/>
+          <p:cNvPr id="1748035462" name="Vertical Text Placeholder 2"/>
           <p:cNvSpPr>
             <a:spLocks noGrp="1"/>
           </p:cNvSpPr>
@@ -2209,7 +2209,7 @@
       </p:sp>
       <p:sp>
         <p:nvSpPr>
-          <p:cNvPr id="349333578" name="Date Placeholder 3"/>
+          <p:cNvPr id="1203994418" name="Date Placeholder 3"/>
           <p:cNvSpPr>
             <a:spLocks noGrp="1"/>
           </p:cNvSpPr>
@@ -2235,7 +2235,7 @@
       </p:sp>
       <p:sp>
         <p:nvSpPr>
-          <p:cNvPr id="1098645134" name="Footer Placeholder 4"/>
+          <p:cNvPr id="1076989770" name="Footer Placeholder 4"/>
           <p:cNvSpPr>
             <a:spLocks noGrp="1"/>
           </p:cNvSpPr>
@@ -2257,7 +2257,7 @@
       </p:sp>
       <p:sp>
         <p:nvSpPr>
-          <p:cNvPr id="656122952" name="Slide Number Placeholder 5"/>
+          <p:cNvPr id="453280495" name="Slide Number Placeholder 5"/>
           <p:cNvSpPr>
             <a:spLocks noGrp="1"/>
           </p:cNvSpPr>
@@ -2308,7 +2308,7 @@
       </p:grpSpPr>
       <p:sp>
         <p:nvSpPr>
-          <p:cNvPr id="2059368164" name="Title 1"/>
+          <p:cNvPr id="72671049" name="Title 1"/>
           <p:cNvSpPr>
             <a:spLocks noGrp="1"/>
           </p:cNvSpPr>
@@ -2334,7 +2334,7 @@
       </p:sp>
       <p:sp>
         <p:nvSpPr>
-          <p:cNvPr id="1485020390" name="Content Placeholder 2"/>
+          <p:cNvPr id="1610113547" name="Content Placeholder 2"/>
           <p:cNvSpPr>
             <a:spLocks noGrp="1"/>
           </p:cNvSpPr>
@@ -2400,7 +2400,7 @@
       </p:sp>
       <p:sp>
         <p:nvSpPr>
-          <p:cNvPr id="1766171673" name="Date Placeholder 3"/>
+          <p:cNvPr id="2010036016" name="Date Placeholder 3"/>
           <p:cNvSpPr>
             <a:spLocks noGrp="1"/>
           </p:cNvSpPr>
@@ -2426,7 +2426,7 @@
       </p:sp>
       <p:sp>
         <p:nvSpPr>
-          <p:cNvPr id="2008475335" name="Footer Placeholder 4"/>
+          <p:cNvPr id="460293043" name="Footer Placeholder 4"/>
           <p:cNvSpPr>
             <a:spLocks noGrp="1"/>
           </p:cNvSpPr>
@@ -2448,7 +2448,7 @@
       </p:sp>
       <p:sp>
         <p:nvSpPr>
-          <p:cNvPr id="894036957" name="Slide Number Placeholder 5"/>
+          <p:cNvPr id="1290225201" name="Slide Number Placeholder 5"/>
           <p:cNvSpPr>
             <a:spLocks noGrp="1"/>
           </p:cNvSpPr>
@@ -2499,7 +2499,7 @@
       </p:grpSpPr>
       <p:sp>
         <p:nvSpPr>
-          <p:cNvPr id="4818160" name="Title 1"/>
+          <p:cNvPr id="1571885712" name="Title 1"/>
           <p:cNvSpPr>
             <a:spLocks noGrp="1"/>
           </p:cNvSpPr>
@@ -2534,7 +2534,7 @@
       </p:sp>
       <p:sp>
         <p:nvSpPr>
-          <p:cNvPr id="1079399427" name="Text Placeholder 2"/>
+          <p:cNvPr id="1578894823" name="Text Placeholder 2"/>
           <p:cNvSpPr>
             <a:spLocks noGrp="1"/>
           </p:cNvSpPr>
@@ -2656,7 +2656,7 @@
       </p:sp>
       <p:sp>
         <p:nvSpPr>
-          <p:cNvPr id="698100207" name="Date Placeholder 3"/>
+          <p:cNvPr id="1041408207" name="Date Placeholder 3"/>
           <p:cNvSpPr>
             <a:spLocks noGrp="1"/>
           </p:cNvSpPr>
@@ -2682,7 +2682,7 @@
       </p:sp>
       <p:sp>
         <p:nvSpPr>
-          <p:cNvPr id="1832123180" name="Footer Placeholder 4"/>
+          <p:cNvPr id="128888014" name="Footer Placeholder 4"/>
           <p:cNvSpPr>
             <a:spLocks noGrp="1"/>
           </p:cNvSpPr>
@@ -2704,7 +2704,7 @@
       </p:sp>
       <p:sp>
         <p:nvSpPr>
-          <p:cNvPr id="1062434085" name="Slide Number Placeholder 5"/>
+          <p:cNvPr id="737600839" name="Slide Number Placeholder 5"/>
           <p:cNvSpPr>
             <a:spLocks noGrp="1"/>
           </p:cNvSpPr>
@@ -2755,7 +2755,7 @@
       </p:grpSpPr>
       <p:sp>
         <p:nvSpPr>
-          <p:cNvPr id="1858567658" name="Title 1"/>
+          <p:cNvPr id="1615590515" name="Title 1"/>
           <p:cNvSpPr>
             <a:spLocks noGrp="1"/>
           </p:cNvSpPr>
@@ -2781,7 +2781,7 @@
       </p:sp>
       <p:sp>
         <p:nvSpPr>
-          <p:cNvPr id="272591727" name="Content Placeholder 2"/>
+          <p:cNvPr id="1297519050" name="Content Placeholder 2"/>
           <p:cNvSpPr>
             <a:spLocks noGrp="1"/>
           </p:cNvSpPr>
@@ -2852,7 +2852,7 @@
       </p:sp>
       <p:sp>
         <p:nvSpPr>
-          <p:cNvPr id="777142350" name="Content Placeholder 3"/>
+          <p:cNvPr id="2033232442" name="Content Placeholder 3"/>
           <p:cNvSpPr>
             <a:spLocks noGrp="1"/>
           </p:cNvSpPr>
@@ -2923,7 +2923,7 @@
       </p:sp>
       <p:sp>
         <p:nvSpPr>
-          <p:cNvPr id="1590750364" name="Date Placeholder 4"/>
+          <p:cNvPr id="105172854" name="Date Placeholder 4"/>
           <p:cNvSpPr>
             <a:spLocks noGrp="1"/>
           </p:cNvSpPr>
@@ -2949,7 +2949,7 @@
       </p:sp>
       <p:sp>
         <p:nvSpPr>
-          <p:cNvPr id="420857151" name="Footer Placeholder 5"/>
+          <p:cNvPr id="957060449" name="Footer Placeholder 5"/>
           <p:cNvSpPr>
             <a:spLocks noGrp="1"/>
           </p:cNvSpPr>
@@ -2971,7 +2971,7 @@
       </p:sp>
       <p:sp>
         <p:nvSpPr>
-          <p:cNvPr id="1820612314" name="Slide Number Placeholder 6"/>
+          <p:cNvPr id="664066949" name="Slide Number Placeholder 6"/>
           <p:cNvSpPr>
             <a:spLocks noGrp="1"/>
           </p:cNvSpPr>
@@ -3022,7 +3022,7 @@
       </p:grpSpPr>
       <p:sp>
         <p:nvSpPr>
-          <p:cNvPr id="1862803555" name="Title 1"/>
+          <p:cNvPr id="2069276429" name="Title 1"/>
           <p:cNvSpPr>
             <a:spLocks noGrp="1"/>
           </p:cNvSpPr>
@@ -3053,7 +3053,7 @@
       </p:sp>
       <p:sp>
         <p:nvSpPr>
-          <p:cNvPr id="894038830" name="Text Placeholder 2"/>
+          <p:cNvPr id="1363417848" name="Text Placeholder 2"/>
           <p:cNvSpPr>
             <a:spLocks noGrp="1"/>
           </p:cNvSpPr>
@@ -3121,7 +3121,7 @@
       </p:sp>
       <p:sp>
         <p:nvSpPr>
-          <p:cNvPr id="1666568284" name="Content Placeholder 3"/>
+          <p:cNvPr id="1968855544" name="Content Placeholder 3"/>
           <p:cNvSpPr>
             <a:spLocks noGrp="1"/>
           </p:cNvSpPr>
@@ -3192,7 +3192,7 @@
       </p:sp>
       <p:sp>
         <p:nvSpPr>
-          <p:cNvPr id="218840421" name="Text Placeholder 4"/>
+          <p:cNvPr id="4793527" name="Text Placeholder 4"/>
           <p:cNvSpPr>
             <a:spLocks noGrp="1"/>
           </p:cNvSpPr>
@@ -3260,7 +3260,7 @@
       </p:sp>
       <p:sp>
         <p:nvSpPr>
-          <p:cNvPr id="1094059749" name="Content Placeholder 5"/>
+          <p:cNvPr id="1438947646" name="Content Placeholder 5"/>
           <p:cNvSpPr>
             <a:spLocks noGrp="1"/>
           </p:cNvSpPr>
@@ -3331,7 +3331,7 @@
       </p:sp>
       <p:sp>
         <p:nvSpPr>
-          <p:cNvPr id="678859312" name="Date Placeholder 6"/>
+          <p:cNvPr id="783465911" name="Date Placeholder 6"/>
           <p:cNvSpPr>
             <a:spLocks noGrp="1"/>
           </p:cNvSpPr>
@@ -3357,7 +3357,7 @@
       </p:sp>
       <p:sp>
         <p:nvSpPr>
-          <p:cNvPr id="192487608" name="Footer Placeholder 7"/>
+          <p:cNvPr id="2137210001" name="Footer Placeholder 7"/>
           <p:cNvSpPr>
             <a:spLocks noGrp="1"/>
           </p:cNvSpPr>
@@ -3379,7 +3379,7 @@
       </p:sp>
       <p:sp>
         <p:nvSpPr>
-          <p:cNvPr id="862285833" name="Slide Number Placeholder 8"/>
+          <p:cNvPr id="1736869842" name="Slide Number Placeholder 8"/>
           <p:cNvSpPr>
             <a:spLocks noGrp="1"/>
           </p:cNvSpPr>
@@ -3430,7 +3430,7 @@
       </p:grpSpPr>
       <p:sp>
         <p:nvSpPr>
-          <p:cNvPr id="885235263" name="Title 1"/>
+          <p:cNvPr id="2306764" name="Title 1"/>
           <p:cNvSpPr>
             <a:spLocks noGrp="1"/>
           </p:cNvSpPr>
@@ -3456,7 +3456,7 @@
       </p:sp>
       <p:sp>
         <p:nvSpPr>
-          <p:cNvPr id="1975903737" name="Date Placeholder 2"/>
+          <p:cNvPr id="1422670340" name="Date Placeholder 2"/>
           <p:cNvSpPr>
             <a:spLocks noGrp="1"/>
           </p:cNvSpPr>
@@ -3482,7 +3482,7 @@
       </p:sp>
       <p:sp>
         <p:nvSpPr>
-          <p:cNvPr id="940320898" name="Footer Placeholder 3"/>
+          <p:cNvPr id="756977321" name="Footer Placeholder 3"/>
           <p:cNvSpPr>
             <a:spLocks noGrp="1"/>
           </p:cNvSpPr>
@@ -3504,7 +3504,7 @@
       </p:sp>
       <p:sp>
         <p:nvSpPr>
-          <p:cNvPr id="1277158616" name="Slide Number Placeholder 4"/>
+          <p:cNvPr id="1787681802" name="Slide Number Placeholder 4"/>
           <p:cNvSpPr>
             <a:spLocks noGrp="1"/>
           </p:cNvSpPr>
@@ -3555,7 +3555,7 @@
       </p:grpSpPr>
       <p:sp>
         <p:nvSpPr>
-          <p:cNvPr id="2108010052" name="Date Placeholder 1"/>
+          <p:cNvPr id="1674988954" name="Date Placeholder 1"/>
           <p:cNvSpPr>
             <a:spLocks noGrp="1"/>
           </p:cNvSpPr>
@@ -3581,7 +3581,7 @@
       </p:sp>
       <p:sp>
         <p:nvSpPr>
-          <p:cNvPr id="1263672603" name="Footer Placeholder 2"/>
+          <p:cNvPr id="1952908994" name="Footer Placeholder 2"/>
           <p:cNvSpPr>
             <a:spLocks noGrp="1"/>
           </p:cNvSpPr>
@@ -3603,7 +3603,7 @@
       </p:sp>
       <p:sp>
         <p:nvSpPr>
-          <p:cNvPr id="528570777" name="Slide Number Placeholder 3"/>
+          <p:cNvPr id="1036921911" name="Slide Number Placeholder 3"/>
           <p:cNvSpPr>
             <a:spLocks noGrp="1"/>
           </p:cNvSpPr>
@@ -3654,7 +3654,7 @@
       </p:grpSpPr>
       <p:sp>
         <p:nvSpPr>
-          <p:cNvPr id="180930692" name="Title 1"/>
+          <p:cNvPr id="1720024534" name="Title 1"/>
           <p:cNvSpPr>
             <a:spLocks noGrp="1"/>
           </p:cNvSpPr>
@@ -3689,7 +3689,7 @@
       </p:sp>
       <p:sp>
         <p:nvSpPr>
-          <p:cNvPr id="332707166" name="Content Placeholder 2"/>
+          <p:cNvPr id="14319709" name="Content Placeholder 2"/>
           <p:cNvSpPr>
             <a:spLocks noGrp="1"/>
           </p:cNvSpPr>
@@ -3788,7 +3788,7 @@
       </p:sp>
       <p:sp>
         <p:nvSpPr>
-          <p:cNvPr id="215945361" name="Text Placeholder 3"/>
+          <p:cNvPr id="230325581" name="Text Placeholder 3"/>
           <p:cNvSpPr>
             <a:spLocks noGrp="1"/>
           </p:cNvSpPr>
@@ -3856,7 +3856,7 @@
       </p:sp>
       <p:sp>
         <p:nvSpPr>
-          <p:cNvPr id="282240511" name="Date Placeholder 4"/>
+          <p:cNvPr id="1867042307" name="Date Placeholder 4"/>
           <p:cNvSpPr>
             <a:spLocks noGrp="1"/>
           </p:cNvSpPr>
@@ -3882,7 +3882,7 @@
       </p:sp>
       <p:sp>
         <p:nvSpPr>
-          <p:cNvPr id="282185286" name="Footer Placeholder 5"/>
+          <p:cNvPr id="618672261" name="Footer Placeholder 5"/>
           <p:cNvSpPr>
             <a:spLocks noGrp="1"/>
           </p:cNvSpPr>
@@ -3904,7 +3904,7 @@
       </p:sp>
       <p:sp>
         <p:nvSpPr>
-          <p:cNvPr id="1619173677" name="Slide Number Placeholder 6"/>
+          <p:cNvPr id="241213954" name="Slide Number Placeholder 6"/>
           <p:cNvSpPr>
             <a:spLocks noGrp="1"/>
           </p:cNvSpPr>
@@ -3955,7 +3955,7 @@
       </p:grpSpPr>
       <p:sp>
         <p:nvSpPr>
-          <p:cNvPr id="705604681" name="Title 1"/>
+          <p:cNvPr id="153701313" name="Title 1"/>
           <p:cNvSpPr>
             <a:spLocks noGrp="1"/>
           </p:cNvSpPr>
@@ -3990,7 +3990,7 @@
       </p:sp>
       <p:sp>
         <p:nvSpPr>
-          <p:cNvPr id="829405797" name="Picture Placeholder 2"/>
+          <p:cNvPr id="1691216338" name="Picture Placeholder 2"/>
           <p:cNvSpPr>
             <a:spLocks noChangeAspect="1" noGrp="1"/>
           </p:cNvSpPr>
@@ -4058,7 +4058,7 @@
       </p:sp>
       <p:sp>
         <p:nvSpPr>
-          <p:cNvPr id="2096363917" name="Text Placeholder 3"/>
+          <p:cNvPr id="1125557012" name="Text Placeholder 3"/>
           <p:cNvSpPr>
             <a:spLocks noGrp="1"/>
           </p:cNvSpPr>
@@ -4126,7 +4126,7 @@
       </p:sp>
       <p:sp>
         <p:nvSpPr>
-          <p:cNvPr id="1940222554" name="Date Placeholder 4"/>
+          <p:cNvPr id="629394206" name="Date Placeholder 4"/>
           <p:cNvSpPr>
             <a:spLocks noGrp="1"/>
           </p:cNvSpPr>
@@ -4152,7 +4152,7 @@
       </p:sp>
       <p:sp>
         <p:nvSpPr>
-          <p:cNvPr id="992344267" name="Footer Placeholder 5"/>
+          <p:cNvPr id="576655728" name="Footer Placeholder 5"/>
           <p:cNvSpPr>
             <a:spLocks noGrp="1"/>
           </p:cNvSpPr>
@@ -4174,7 +4174,7 @@
       </p:sp>
       <p:sp>
         <p:nvSpPr>
-          <p:cNvPr id="1079004194" name="Slide Number Placeholder 6"/>
+          <p:cNvPr id="1582324246" name="Slide Number Placeholder 6"/>
           <p:cNvSpPr>
             <a:spLocks noGrp="1"/>
           </p:cNvSpPr>
@@ -4233,7 +4233,7 @@
       </p:grpSpPr>
       <p:sp>
         <p:nvSpPr>
-          <p:cNvPr id="494850575" name="Title Placeholder 1"/>
+          <p:cNvPr id="1880531464" name="Title Placeholder 1"/>
           <p:cNvSpPr>
             <a:spLocks noGrp="1"/>
           </p:cNvSpPr>
@@ -4269,7 +4269,7 @@
       </p:sp>
       <p:sp>
         <p:nvSpPr>
-          <p:cNvPr id="158836969" name="Text Placeholder 2"/>
+          <p:cNvPr id="524328490" name="Text Placeholder 2"/>
           <p:cNvSpPr>
             <a:spLocks noGrp="1"/>
           </p:cNvSpPr>
@@ -4345,7 +4345,7 @@
       </p:sp>
       <p:sp>
         <p:nvSpPr>
-          <p:cNvPr id="1526702293" name="Date Placeholder 3"/>
+          <p:cNvPr id="1689026469" name="Date Placeholder 3"/>
           <p:cNvSpPr>
             <a:spLocks noGrp="1"/>
           </p:cNvSpPr>
@@ -4389,7 +4389,7 @@
       </p:sp>
       <p:sp>
         <p:nvSpPr>
-          <p:cNvPr id="1727740862" name="Footer Placeholder 4"/>
+          <p:cNvPr id="768962525" name="Footer Placeholder 4"/>
           <p:cNvSpPr>
             <a:spLocks noGrp="1"/>
           </p:cNvSpPr>
@@ -4429,7 +4429,7 @@
       </p:sp>
       <p:sp>
         <p:nvSpPr>
-          <p:cNvPr id="2001855367" name="Slide Number Placeholder 5"/>
+          <p:cNvPr id="396728629" name="Slide Number Placeholder 5"/>
           <p:cNvSpPr>
             <a:spLocks noGrp="1"/>
           </p:cNvSpPr>
@@ -4789,7 +4789,7 @@
       </p:grpSpPr>
       <p:sp>
         <p:nvSpPr>
-          <p:cNvPr id="1469333195" name="Title 1"/>
+          <p:cNvPr id="1570881495" name="Title 1"/>
           <p:cNvSpPr>
             <a:spLocks noGrp="1"/>
           </p:cNvSpPr>
@@ -4833,7 +4833,7 @@
       </p:sp>
       <p:sp>
         <p:nvSpPr>
-          <p:cNvPr id="278420358" name="Subtitle 2"/>
+          <p:cNvPr id="1479465249" name="Subtitle 2"/>
           <p:cNvSpPr>
             <a:spLocks noGrp="1"/>
           </p:cNvSpPr>
@@ -4925,7 +4925,7 @@
       </p:grpSpPr>
       <p:sp>
         <p:nvSpPr>
-          <p:cNvPr id="323288811" name="Title 1"/>
+          <p:cNvPr id="414271399" name="Title 1"/>
           <p:cNvSpPr>
             <a:spLocks noGrp="1"/>
           </p:cNvSpPr>
@@ -4964,7 +4964,7 @@
       </p:sp>
       <p:sp>
         <p:nvSpPr>
-          <p:cNvPr id="1981684711" name="Content Placeholder 2"/>
+          <p:cNvPr id="978778887" name="Content Placeholder 2"/>
           <p:cNvSpPr>
             <a:spLocks noGrp="1"/>
           </p:cNvSpPr>
@@ -5120,7 +5120,7 @@
       </p:sp>
       <p:sp>
         <p:nvSpPr>
-          <p:cNvPr id="1571454032" name="Content Placeholder 2"/>
+          <p:cNvPr id="39772373" name="Content Placeholder 2"/>
           <p:cNvSpPr>
             <a:spLocks noGrp="1"/>
           </p:cNvSpPr>
@@ -5377,7 +5377,7 @@
       </p:sp>
       <p:sp>
         <p:nvSpPr>
-          <p:cNvPr id="706751710" name="Content Placeholder 2"/>
+          <p:cNvPr id="1959674507" name="Content Placeholder 2"/>
           <p:cNvSpPr>
             <a:spLocks noGrp="1"/>
           </p:cNvSpPr>
@@ -5595,7 +5595,31 @@
                 <a:latin typeface="Ubuntu Sans"/>
                 <a:cs typeface="Ubuntu Sans"/>
               </a:rPr>
-              <a:t>Довършване на проекта</a:t>
+              <a:t>Направихме проекта да функционира </a:t>
+            </a:r>
+            <a:endParaRPr lang="bg-BG">
+              <a:solidFill>
+                <a:schemeClr val="bg1"/>
+              </a:solidFill>
+              <a:latin typeface="Ubuntu Sans"/>
+              <a:cs typeface="Ubuntu Sans"/>
+            </a:endParaRPr>
+          </a:p>
+          <a:p>
+            <a:pPr marL="0" indent="0" algn="ctr">
+              <a:buFont typeface="Arial"/>
+              <a:buNone/>
+              <a:defRPr/>
+            </a:pPr>
+            <a:r>
+              <a:rPr lang="en-US">
+                <a:solidFill>
+                  <a:schemeClr val="bg1"/>
+                </a:solidFill>
+                <a:latin typeface="Ubuntu Sans"/>
+                <a:cs typeface="Ubuntu Sans"/>
+              </a:rPr>
+              <a:t>Live demo</a:t>
             </a:r>
             <a:endParaRPr lang="bg-BG">
               <a:solidFill>
@@ -5666,7 +5690,7 @@
       </p:grpSpPr>
       <p:sp>
         <p:nvSpPr>
-          <p:cNvPr id="1627065319" name="Title 1"/>
+          <p:cNvPr id="1658362274" name="Title 1"/>
           <p:cNvSpPr>
             <a:spLocks noGrp="1"/>
           </p:cNvSpPr>
@@ -5716,7 +5740,7 @@
       </p:sp>
       <p:sp>
         <p:nvSpPr>
-          <p:cNvPr id="2069464295" name=""/>
+          <p:cNvPr id="2020181968" name=""/>
           <p:cNvSpPr txBox="1"/>
           <p:nvPr/>
         </p:nvSpPr>
@@ -5744,7 +5768,7 @@
       </p:sp>
       <p:sp>
         <p:nvSpPr>
-          <p:cNvPr id="709497198" name=""/>
+          <p:cNvPr id="1174344096" name=""/>
           <p:cNvSpPr txBox="1"/>
           <p:nvPr/>
         </p:nvSpPr>
@@ -5901,7 +5925,7 @@
       </p:grpSpPr>
       <p:sp>
         <p:nvSpPr>
-          <p:cNvPr id="1704329715" name="Title 1"/>
+          <p:cNvPr id="51537487" name="Title 1"/>
           <p:cNvSpPr>
             <a:spLocks noGrp="1"/>
           </p:cNvSpPr>
@@ -5934,7 +5958,7 @@
       </p:sp>
       <p:sp>
         <p:nvSpPr>
-          <p:cNvPr id="417137689" name=""/>
+          <p:cNvPr id="2098803672" name=""/>
           <p:cNvSpPr txBox="1"/>
           <p:nvPr/>
         </p:nvSpPr>
@@ -6200,7 +6224,7 @@
       </p:grpSpPr>
       <p:sp>
         <p:nvSpPr>
-          <p:cNvPr id="338200200" name="Title 1"/>
+          <p:cNvPr id="15057356" name="Title 1"/>
           <p:cNvSpPr>
             <a:spLocks noGrp="1"/>
           </p:cNvSpPr>
@@ -6237,7 +6261,7 @@
       </p:sp>
       <p:sp>
         <p:nvSpPr>
-          <p:cNvPr id="552880449" name=""/>
+          <p:cNvPr id="888635277" name=""/>
           <p:cNvSpPr txBox="1"/>
           <p:nvPr/>
         </p:nvSpPr>
@@ -6417,7 +6441,7 @@
       </p:grpSpPr>
       <p:sp>
         <p:nvSpPr>
-          <p:cNvPr id="2102016768" name=""/>
+          <p:cNvPr id="1622186683" name=""/>
           <p:cNvSpPr txBox="1"/>
           <p:nvPr/>
         </p:nvSpPr>
@@ -6457,7 +6481,7 @@
       </p:sp>
       <p:pic>
         <p:nvPicPr>
-          <p:cNvPr id="1912857810" name=""/>
+          <p:cNvPr id="601598284" name=""/>
           <p:cNvPicPr>
             <a:picLocks noChangeAspect="1"/>
           </p:cNvPicPr>
@@ -6512,7 +6536,7 @@
       </p:grpSpPr>
       <p:sp>
         <p:nvSpPr>
-          <p:cNvPr id="1848301581" name="Title 1"/>
+          <p:cNvPr id="469450910" name="Title 1"/>
           <p:cNvSpPr>
             <a:spLocks noGrp="1"/>
           </p:cNvSpPr>
@@ -7093,7 +7117,7 @@
       </p:grpSpPr>
       <p:sp>
         <p:nvSpPr>
-          <p:cNvPr id="200007601" name="Title 1"/>
+          <p:cNvPr id="2101919334" name="Title 1"/>
           <p:cNvSpPr>
             <a:spLocks noGrp="1"/>
           </p:cNvSpPr>
@@ -7136,7 +7160,7 @@
       </p:sp>
       <p:sp>
         <p:nvSpPr>
-          <p:cNvPr id="1265942445" name=""/>
+          <p:cNvPr id="916827429" name=""/>
           <p:cNvSpPr txBox="1"/>
           <p:nvPr/>
         </p:nvSpPr>
@@ -7326,7 +7350,7 @@
       </p:grpSpPr>
       <p:sp>
         <p:nvSpPr>
-          <p:cNvPr id="1835088990" name="Title 1"/>
+          <p:cNvPr id="1296131451" name="Title 1"/>
           <p:cNvSpPr>
             <a:spLocks noGrp="1"/>
           </p:cNvSpPr>
@@ -7365,7 +7389,7 @@
       </p:sp>
       <p:sp>
         <p:nvSpPr>
-          <p:cNvPr id="1891568958" name="Content Placeholder 2"/>
+          <p:cNvPr id="2049505453" name="Content Placeholder 2"/>
           <p:cNvSpPr>
             <a:spLocks noGrp="1"/>
           </p:cNvSpPr>
@@ -7521,7 +7545,7 @@
       </p:grpSpPr>
       <p:sp>
         <p:nvSpPr>
-          <p:cNvPr id="987115882" name="Title 1"/>
+          <p:cNvPr id="1891512369" name="Title 1"/>
           <p:cNvSpPr>
             <a:spLocks noGrp="1"/>
           </p:cNvSpPr>
@@ -7887,7 +7911,7 @@
       </p:grpSpPr>
       <p:sp>
         <p:nvSpPr>
-          <p:cNvPr id="2118172442" name=""/>
+          <p:cNvPr id="569801252" name=""/>
           <p:cNvSpPr txBox="1"/>
           <p:nvPr/>
         </p:nvSpPr>
